--- a/docs/Ajibade_DevOps_Project.pptx
+++ b/docs/Ajibade_DevOps_Project.pptx
@@ -7,7 +7,7 @@
   <p:sldIdLst>
     <p:sldId id="256" r:id="rId2"/>
     <p:sldId id="257" r:id="rId3"/>
-    <p:sldId id="258" r:id="rId4"/>
+    <p:sldId id="270" r:id="rId4"/>
     <p:sldId id="267" r:id="rId5"/>
     <p:sldId id="259" r:id="rId6"/>
     <p:sldId id="260" r:id="rId7"/>
@@ -316,7 +316,7 @@
           <a:p>
             <a:fld id="{5BCAD085-E8A6-8845-BD4E-CB4CCA059FC4}" type="datetimeFigureOut">
               <a:rPr lang="en-US" smtClean="0"/>
-              <a:t>29-Jan-26</a:t>
+              <a:t>30-Jan-26</a:t>
             </a:fld>
             <a:endParaRPr lang="en-US"/>
           </a:p>
@@ -498,7 +498,7 @@
           <a:p>
             <a:fld id="{5BCAD085-E8A6-8845-BD4E-CB4CCA059FC4}" type="datetimeFigureOut">
               <a:rPr lang="en-US" smtClean="0"/>
-              <a:t>29-Jan-26</a:t>
+              <a:t>30-Jan-26</a:t>
             </a:fld>
             <a:endParaRPr lang="en-US"/>
           </a:p>
@@ -690,7 +690,7 @@
           <a:p>
             <a:fld id="{5BCAD085-E8A6-8845-BD4E-CB4CCA059FC4}" type="datetimeFigureOut">
               <a:rPr lang="en-US" smtClean="0"/>
-              <a:t>29-Jan-26</a:t>
+              <a:t>30-Jan-26</a:t>
             </a:fld>
             <a:endParaRPr lang="en-US"/>
           </a:p>
@@ -872,7 +872,7 @@
           <a:p>
             <a:fld id="{5BCAD085-E8A6-8845-BD4E-CB4CCA059FC4}" type="datetimeFigureOut">
               <a:rPr lang="en-US" smtClean="0"/>
-              <a:t>29-Jan-26</a:t>
+              <a:t>30-Jan-26</a:t>
             </a:fld>
             <a:endParaRPr lang="en-US"/>
           </a:p>
@@ -1130,7 +1130,7 @@
           <a:p>
             <a:fld id="{5BCAD085-E8A6-8845-BD4E-CB4CCA059FC4}" type="datetimeFigureOut">
               <a:rPr lang="en-US" smtClean="0"/>
-              <a:t>29-Jan-26</a:t>
+              <a:t>30-Jan-26</a:t>
             </a:fld>
             <a:endParaRPr lang="en-US"/>
           </a:p>
@@ -1430,7 +1430,7 @@
           <a:p>
             <a:fld id="{5BCAD085-E8A6-8845-BD4E-CB4CCA059FC4}" type="datetimeFigureOut">
               <a:rPr lang="en-US" smtClean="0"/>
-              <a:t>29-Jan-26</a:t>
+              <a:t>30-Jan-26</a:t>
             </a:fld>
             <a:endParaRPr lang="en-US"/>
           </a:p>
@@ -1864,7 +1864,7 @@
           <a:p>
             <a:fld id="{5BCAD085-E8A6-8845-BD4E-CB4CCA059FC4}" type="datetimeFigureOut">
               <a:rPr lang="en-US" smtClean="0"/>
-              <a:t>29-Jan-26</a:t>
+              <a:t>30-Jan-26</a:t>
             </a:fld>
             <a:endParaRPr lang="en-US"/>
           </a:p>
@@ -1994,7 +1994,7 @@
           <a:p>
             <a:fld id="{5BCAD085-E8A6-8845-BD4E-CB4CCA059FC4}" type="datetimeFigureOut">
               <a:rPr lang="en-US" smtClean="0"/>
-              <a:t>29-Jan-26</a:t>
+              <a:t>30-Jan-26</a:t>
             </a:fld>
             <a:endParaRPr lang="en-US"/>
           </a:p>
@@ -2101,7 +2101,7 @@
           <a:p>
             <a:fld id="{5BCAD085-E8A6-8845-BD4E-CB4CCA059FC4}" type="datetimeFigureOut">
               <a:rPr lang="en-US" smtClean="0"/>
-              <a:t>29-Jan-26</a:t>
+              <a:t>30-Jan-26</a:t>
             </a:fld>
             <a:endParaRPr lang="en-US"/>
           </a:p>
@@ -2390,7 +2390,7 @@
           <a:p>
             <a:fld id="{5BCAD085-E8A6-8845-BD4E-CB4CCA059FC4}" type="datetimeFigureOut">
               <a:rPr lang="en-US" smtClean="0"/>
-              <a:t>29-Jan-26</a:t>
+              <a:t>30-Jan-26</a:t>
             </a:fld>
             <a:endParaRPr lang="en-US"/>
           </a:p>
@@ -2655,7 +2655,7 @@
           <a:p>
             <a:fld id="{5BCAD085-E8A6-8845-BD4E-CB4CCA059FC4}" type="datetimeFigureOut">
               <a:rPr lang="en-US" smtClean="0"/>
-              <a:t>29-Jan-26</a:t>
+              <a:t>30-Jan-26</a:t>
             </a:fld>
             <a:endParaRPr lang="en-US"/>
           </a:p>
@@ -2880,7 +2880,7 @@
           <a:p>
             <a:fld id="{5BCAD085-E8A6-8845-BD4E-CB4CCA059FC4}" type="datetimeFigureOut">
               <a:rPr lang="en-US" smtClean="0"/>
-              <a:t>29-Jan-26</a:t>
+              <a:t>30-Jan-26</a:t>
             </a:fld>
             <a:endParaRPr lang="en-US"/>
           </a:p>
@@ -4829,545 +4829,65 @@
           <a:chExt cx="0" cy="0"/>
         </a:xfrm>
       </p:grpSpPr>
-      <p:sp>
-        <p:nvSpPr>
-          <p:cNvPr id="2" name="Title 1"/>
-          <p:cNvSpPr>
-            <a:spLocks noGrp="1"/>
-          </p:cNvSpPr>
-          <p:nvPr>
-            <p:ph type="title"/>
-          </p:nvPr>
-        </p:nvSpPr>
-        <p:spPr/>
-        <p:txBody>
-          <a:bodyPr/>
-          <a:lstStyle/>
-          <a:p>
-            <a:r>
-              <a:rPr b="1" dirty="0">
-                <a:solidFill>
-                  <a:schemeClr val="tx2">
-                    <a:lumMod val="75000"/>
-                  </a:schemeClr>
-                </a:solidFill>
-              </a:rPr>
-              <a:t>High-Level Architecture</a:t>
-            </a:r>
-          </a:p>
-        </p:txBody>
-      </p:sp>
-      <p:sp>
-        <p:nvSpPr>
-          <p:cNvPr id="3" name="Content Placeholder 2"/>
-          <p:cNvSpPr>
-            <a:spLocks noGrp="1"/>
-          </p:cNvSpPr>
+      <p:pic>
+        <p:nvPicPr>
+          <p:cNvPr id="7" name="Content Placeholder 6"/>
+          <p:cNvPicPr>
+            <a:picLocks noGrp="1" noChangeAspect="1"/>
+          </p:cNvPicPr>
           <p:nvPr>
             <p:ph idx="1"/>
           </p:nvPr>
-        </p:nvSpPr>
-        <p:spPr/>
-        <p:txBody>
-          <a:bodyPr/>
-          <a:lstStyle/>
-          <a:p>
-            <a:pPr marL="0" indent="0" algn="just">
-              <a:buNone/>
-            </a:pPr>
-            <a:r>
-              <a:rPr dirty="0">
-                <a:latin typeface="Times New Roman" panose="02020603050405020304" pitchFamily="18" charset="0"/>
-                <a:cs typeface="Times New Roman" panose="02020603050405020304" pitchFamily="18" charset="0"/>
-              </a:rPr>
-              <a:t>From code commit to production deployment with full automation.</a:t>
-            </a:r>
-          </a:p>
-        </p:txBody>
-      </p:sp>
-      <p:sp>
-        <p:nvSpPr>
-          <p:cNvPr id="5" name="Rectangle 4"/>
-          <p:cNvSpPr/>
-          <p:nvPr/>
-        </p:nvSpPr>
-        <p:spPr>
+        </p:nvPicPr>
+        <p:blipFill>
+          <a:blip r:embed="rId2">
+            <a:extLst>
+              <a:ext uri="{28A0092B-C50C-407E-A947-70E740481C1C}">
+                <a14:useLocalDpi xmlns:a14="http://schemas.microsoft.com/office/drawing/2010/main" val="0"/>
+              </a:ext>
+            </a:extLst>
+          </a:blip>
+          <a:stretch>
+            <a:fillRect/>
+          </a:stretch>
+        </p:blipFill>
+        <p:spPr bwMode="auto">
           <a:xfrm>
-            <a:off x="881975" y="3052203"/>
-            <a:ext cx="2081719" cy="622570"/>
+            <a:off x="-321013" y="-350196"/>
+            <a:ext cx="9649839" cy="7665396"/>
           </a:xfrm>
           <a:prstGeom prst="rect">
             <a:avLst/>
           </a:prstGeom>
-          <a:ln>
-            <a:solidFill>
-              <a:schemeClr val="accent3">
-                <a:lumMod val="20000"/>
-                <a:lumOff val="80000"/>
-              </a:schemeClr>
-            </a:solidFill>
-          </a:ln>
+          <a:noFill/>
+          <a:extLst>
+            <a:ext uri="{909E8E84-426E-40DD-AFC4-6F175D3DCCD1}">
+              <a14:hiddenFill xmlns:a14="http://schemas.microsoft.com/office/drawing/2010/main">
+                <a:solidFill>
+                  <a:srgbClr val="FFFFFF"/>
+                </a:solidFill>
+              </a14:hiddenFill>
+            </a:ext>
+          </a:extLst>
         </p:spPr>
-        <p:style>
-          <a:lnRef idx="1">
-            <a:schemeClr val="accent5"/>
-          </a:lnRef>
-          <a:fillRef idx="2">
-            <a:schemeClr val="accent5"/>
-          </a:fillRef>
-          <a:effectRef idx="1">
-            <a:schemeClr val="accent5"/>
-          </a:effectRef>
-          <a:fontRef idx="minor">
-            <a:schemeClr val="dk1"/>
-          </a:fontRef>
-        </p:style>
-        <p:txBody>
-          <a:bodyPr rtlCol="0" anchor="ctr"/>
-          <a:lstStyle/>
-          <a:p>
-            <a:pPr algn="ctr"/>
-            <a:r>
-              <a:rPr lang="en-US" dirty="0" smtClean="0"/>
-              <a:t>Developer </a:t>
-            </a:r>
-          </a:p>
-          <a:p>
-            <a:pPr algn="ctr"/>
-            <a:r>
-              <a:rPr lang="en-US" dirty="0" smtClean="0"/>
-              <a:t>(</a:t>
-            </a:r>
-            <a:r>
-              <a:rPr lang="en-US" dirty="0" err="1" smtClean="0"/>
-              <a:t>Git</a:t>
-            </a:r>
-            <a:r>
-              <a:rPr lang="en-US" dirty="0" smtClean="0"/>
-              <a:t> Push)</a:t>
-            </a:r>
-            <a:endParaRPr lang="en-US" dirty="0"/>
-          </a:p>
-        </p:txBody>
-      </p:sp>
-      <p:cxnSp>
-        <p:nvCxnSpPr>
-          <p:cNvPr id="7" name="Straight Arrow Connector 6"/>
-          <p:cNvCxnSpPr>
-            <a:stCxn id="5" idx="3"/>
-          </p:cNvCxnSpPr>
-          <p:nvPr/>
-        </p:nvCxnSpPr>
-        <p:spPr>
-          <a:xfrm flipV="1">
-            <a:off x="2963694" y="3360240"/>
-            <a:ext cx="466928" cy="3248"/>
-          </a:xfrm>
-          <a:prstGeom prst="straightConnector1">
-            <a:avLst/>
-          </a:prstGeom>
-          <a:ln>
-            <a:tailEnd type="triangle"/>
-          </a:ln>
-        </p:spPr>
-        <p:style>
-          <a:lnRef idx="3">
-            <a:schemeClr val="accent2"/>
-          </a:lnRef>
-          <a:fillRef idx="0">
-            <a:schemeClr val="accent2"/>
-          </a:fillRef>
-          <a:effectRef idx="2">
-            <a:schemeClr val="accent2"/>
-          </a:effectRef>
-          <a:fontRef idx="minor">
-            <a:schemeClr val="tx1"/>
-          </a:fontRef>
-        </p:style>
-      </p:cxnSp>
-      <p:sp>
-        <p:nvSpPr>
-          <p:cNvPr id="6" name="Rectangle 5"/>
-          <p:cNvSpPr/>
-          <p:nvPr/>
-        </p:nvSpPr>
-        <p:spPr>
-          <a:xfrm>
-            <a:off x="3453319" y="3052203"/>
-            <a:ext cx="2081719" cy="622570"/>
-          </a:xfrm>
-          <a:prstGeom prst="rect">
-            <a:avLst/>
-          </a:prstGeom>
-          <a:ln>
-            <a:solidFill>
-              <a:schemeClr val="accent3">
-                <a:lumMod val="20000"/>
-                <a:lumOff val="80000"/>
-              </a:schemeClr>
-            </a:solidFill>
-          </a:ln>
-        </p:spPr>
-        <p:style>
-          <a:lnRef idx="1">
-            <a:schemeClr val="accent5"/>
-          </a:lnRef>
-          <a:fillRef idx="2">
-            <a:schemeClr val="accent5"/>
-          </a:fillRef>
-          <a:effectRef idx="1">
-            <a:schemeClr val="accent5"/>
-          </a:effectRef>
-          <a:fontRef idx="minor">
-            <a:schemeClr val="dk1"/>
-          </a:fontRef>
-        </p:style>
-        <p:txBody>
-          <a:bodyPr rtlCol="0" anchor="ctr"/>
-          <a:lstStyle/>
-          <a:p>
-            <a:pPr algn="ctr"/>
-            <a:r>
-              <a:rPr lang="en-US" dirty="0" err="1" smtClean="0"/>
-              <a:t>GitHub</a:t>
-            </a:r>
-            <a:r>
-              <a:rPr lang="en-US" dirty="0" smtClean="0"/>
-              <a:t> Repo</a:t>
-            </a:r>
-          </a:p>
-        </p:txBody>
-      </p:sp>
-      <p:sp>
-        <p:nvSpPr>
-          <p:cNvPr id="8" name="Rectangle 7"/>
-          <p:cNvSpPr/>
-          <p:nvPr/>
-        </p:nvSpPr>
-        <p:spPr>
-          <a:xfrm>
-            <a:off x="6011692" y="3052203"/>
-            <a:ext cx="2081719" cy="622570"/>
-          </a:xfrm>
-          <a:prstGeom prst="rect">
-            <a:avLst/>
-          </a:prstGeom>
-          <a:ln>
-            <a:solidFill>
-              <a:schemeClr val="accent3">
-                <a:lumMod val="20000"/>
-                <a:lumOff val="80000"/>
-              </a:schemeClr>
-            </a:solidFill>
-          </a:ln>
-        </p:spPr>
-        <p:style>
-          <a:lnRef idx="1">
-            <a:schemeClr val="accent5"/>
-          </a:lnRef>
-          <a:fillRef idx="2">
-            <a:schemeClr val="accent5"/>
-          </a:fillRef>
-          <a:effectRef idx="1">
-            <a:schemeClr val="accent5"/>
-          </a:effectRef>
-          <a:fontRef idx="minor">
-            <a:schemeClr val="dk1"/>
-          </a:fontRef>
-        </p:style>
-        <p:txBody>
-          <a:bodyPr rtlCol="0" anchor="ctr"/>
-          <a:lstStyle/>
-          <a:p>
-            <a:pPr algn="ctr"/>
-            <a:r>
-              <a:rPr lang="en-US" dirty="0" err="1" smtClean="0"/>
-              <a:t>GitHub</a:t>
-            </a:r>
-            <a:r>
-              <a:rPr lang="en-US" dirty="0" smtClean="0"/>
-              <a:t> Actions </a:t>
-            </a:r>
-          </a:p>
-          <a:p>
-            <a:pPr algn="ctr"/>
-            <a:r>
-              <a:rPr lang="en-US" dirty="0" smtClean="0"/>
-              <a:t>(CI)</a:t>
-            </a:r>
-          </a:p>
-        </p:txBody>
-      </p:sp>
-      <p:sp>
-        <p:nvSpPr>
-          <p:cNvPr id="9" name="Rectangle 8"/>
-          <p:cNvSpPr/>
-          <p:nvPr/>
-        </p:nvSpPr>
-        <p:spPr>
-          <a:xfrm>
-            <a:off x="881975" y="4420573"/>
-            <a:ext cx="2081719" cy="622570"/>
-          </a:xfrm>
-          <a:prstGeom prst="rect">
-            <a:avLst/>
-          </a:prstGeom>
-          <a:ln>
-            <a:solidFill>
-              <a:schemeClr val="accent3">
-                <a:lumMod val="20000"/>
-                <a:lumOff val="80000"/>
-              </a:schemeClr>
-            </a:solidFill>
-          </a:ln>
-        </p:spPr>
-        <p:style>
-          <a:lnRef idx="1">
-            <a:schemeClr val="accent5"/>
-          </a:lnRef>
-          <a:fillRef idx="2">
-            <a:schemeClr val="accent5"/>
-          </a:fillRef>
-          <a:effectRef idx="1">
-            <a:schemeClr val="accent5"/>
-          </a:effectRef>
-          <a:fontRef idx="minor">
-            <a:schemeClr val="dk1"/>
-          </a:fontRef>
-        </p:style>
-        <p:txBody>
-          <a:bodyPr rtlCol="0" anchor="ctr"/>
-          <a:lstStyle/>
-          <a:p>
-            <a:pPr algn="ctr"/>
-            <a:r>
-              <a:rPr lang="en-US" dirty="0" smtClean="0"/>
-              <a:t>Azure Container Registry</a:t>
-            </a:r>
-          </a:p>
-        </p:txBody>
-      </p:sp>
-      <p:sp>
-        <p:nvSpPr>
-          <p:cNvPr id="10" name="Rectangle 9"/>
-          <p:cNvSpPr/>
-          <p:nvPr/>
-        </p:nvSpPr>
-        <p:spPr>
-          <a:xfrm>
-            <a:off x="3453319" y="4421705"/>
-            <a:ext cx="2081719" cy="622570"/>
-          </a:xfrm>
-          <a:prstGeom prst="rect">
-            <a:avLst/>
-          </a:prstGeom>
-          <a:ln>
-            <a:solidFill>
-              <a:schemeClr val="accent3">
-                <a:lumMod val="20000"/>
-                <a:lumOff val="80000"/>
-              </a:schemeClr>
-            </a:solidFill>
-          </a:ln>
-        </p:spPr>
-        <p:style>
-          <a:lnRef idx="1">
-            <a:schemeClr val="accent5"/>
-          </a:lnRef>
-          <a:fillRef idx="2">
-            <a:schemeClr val="accent5"/>
-          </a:fillRef>
-          <a:effectRef idx="1">
-            <a:schemeClr val="accent5"/>
-          </a:effectRef>
-          <a:fontRef idx="minor">
-            <a:schemeClr val="dk1"/>
-          </a:fontRef>
-        </p:style>
-        <p:txBody>
-          <a:bodyPr rtlCol="0" anchor="ctr"/>
-          <a:lstStyle/>
-          <a:p>
-            <a:pPr algn="ctr"/>
-            <a:r>
-              <a:rPr lang="en-US" dirty="0" smtClean="0"/>
-              <a:t>AKS</a:t>
-            </a:r>
-          </a:p>
-          <a:p>
-            <a:pPr algn="ctr"/>
-            <a:r>
-              <a:rPr lang="en-US" dirty="0" smtClean="0"/>
-              <a:t>(Argo CD + App)</a:t>
-            </a:r>
-          </a:p>
-        </p:txBody>
-      </p:sp>
-      <p:sp>
-        <p:nvSpPr>
-          <p:cNvPr id="11" name="Rectangle 10"/>
-          <p:cNvSpPr/>
-          <p:nvPr/>
-        </p:nvSpPr>
-        <p:spPr>
-          <a:xfrm>
-            <a:off x="6011692" y="4424953"/>
-            <a:ext cx="2081719" cy="622570"/>
-          </a:xfrm>
-          <a:prstGeom prst="rect">
-            <a:avLst/>
-          </a:prstGeom>
-          <a:ln>
-            <a:solidFill>
-              <a:schemeClr val="accent3">
-                <a:lumMod val="20000"/>
-                <a:lumOff val="80000"/>
-              </a:schemeClr>
-            </a:solidFill>
-          </a:ln>
-        </p:spPr>
-        <p:style>
-          <a:lnRef idx="1">
-            <a:schemeClr val="accent5"/>
-          </a:lnRef>
-          <a:fillRef idx="2">
-            <a:schemeClr val="accent5"/>
-          </a:fillRef>
-          <a:effectRef idx="1">
-            <a:schemeClr val="accent5"/>
-          </a:effectRef>
-          <a:fontRef idx="minor">
-            <a:schemeClr val="dk1"/>
-          </a:fontRef>
-        </p:style>
-        <p:txBody>
-          <a:bodyPr rtlCol="0" anchor="ctr"/>
-          <a:lstStyle/>
-          <a:p>
-            <a:pPr algn="ctr"/>
-            <a:r>
-              <a:rPr lang="en-US" dirty="0" smtClean="0"/>
-              <a:t>Prometheus + </a:t>
-            </a:r>
-            <a:r>
-              <a:rPr lang="en-US" dirty="0" err="1" smtClean="0"/>
-              <a:t>Grafana</a:t>
-            </a:r>
-            <a:endParaRPr lang="en-US" dirty="0" smtClean="0"/>
-          </a:p>
-        </p:txBody>
-      </p:sp>
-      <p:cxnSp>
-        <p:nvCxnSpPr>
-          <p:cNvPr id="12" name="Straight Arrow Connector 11"/>
-          <p:cNvCxnSpPr/>
-          <p:nvPr/>
-        </p:nvCxnSpPr>
-        <p:spPr>
-          <a:xfrm flipV="1">
-            <a:off x="5535038" y="3365752"/>
-            <a:ext cx="466928" cy="3248"/>
-          </a:xfrm>
-          <a:prstGeom prst="straightConnector1">
-            <a:avLst/>
-          </a:prstGeom>
-          <a:ln>
-            <a:tailEnd type="triangle"/>
-          </a:ln>
-        </p:spPr>
-        <p:style>
-          <a:lnRef idx="3">
-            <a:schemeClr val="accent2"/>
-          </a:lnRef>
-          <a:fillRef idx="0">
-            <a:schemeClr val="accent2"/>
-          </a:fillRef>
-          <a:effectRef idx="2">
-            <a:schemeClr val="accent2"/>
-          </a:effectRef>
-          <a:fontRef idx="minor">
-            <a:schemeClr val="tx1"/>
-          </a:fontRef>
-        </p:style>
-      </p:cxnSp>
-      <p:cxnSp>
-        <p:nvCxnSpPr>
-          <p:cNvPr id="13" name="Straight Arrow Connector 12"/>
-          <p:cNvCxnSpPr/>
-          <p:nvPr/>
-        </p:nvCxnSpPr>
-        <p:spPr>
-          <a:xfrm flipV="1">
-            <a:off x="2968559" y="4737862"/>
-            <a:ext cx="466928" cy="3248"/>
-          </a:xfrm>
-          <a:prstGeom prst="straightConnector1">
-            <a:avLst/>
-          </a:prstGeom>
-          <a:ln>
-            <a:tailEnd type="triangle"/>
-          </a:ln>
-        </p:spPr>
-        <p:style>
-          <a:lnRef idx="3">
-            <a:schemeClr val="accent2"/>
-          </a:lnRef>
-          <a:fillRef idx="0">
-            <a:schemeClr val="accent2"/>
-          </a:fillRef>
-          <a:effectRef idx="2">
-            <a:schemeClr val="accent2"/>
-          </a:effectRef>
-          <a:fontRef idx="minor">
-            <a:schemeClr val="tx1"/>
-          </a:fontRef>
-        </p:style>
-      </p:cxnSp>
-      <p:cxnSp>
-        <p:nvCxnSpPr>
-          <p:cNvPr id="14" name="Straight Arrow Connector 13"/>
-          <p:cNvCxnSpPr/>
-          <p:nvPr/>
-        </p:nvCxnSpPr>
-        <p:spPr>
-          <a:xfrm flipV="1">
-            <a:off x="5535038" y="4728610"/>
-            <a:ext cx="466928" cy="3248"/>
-          </a:xfrm>
-          <a:prstGeom prst="straightConnector1">
-            <a:avLst/>
-          </a:prstGeom>
-          <a:ln>
-            <a:tailEnd type="triangle"/>
-          </a:ln>
-        </p:spPr>
-        <p:style>
-          <a:lnRef idx="3">
-            <a:schemeClr val="accent2"/>
-          </a:lnRef>
-          <a:fillRef idx="0">
-            <a:schemeClr val="accent2"/>
-          </a:fillRef>
-          <a:effectRef idx="2">
-            <a:schemeClr val="accent2"/>
-          </a:effectRef>
-          <a:fontRef idx="minor">
-            <a:schemeClr val="tx1"/>
-          </a:fontRef>
-        </p:style>
-      </p:cxnSp>
+      </p:pic>
     </p:spTree>
+    <p:extLst>
+      <p:ext uri="{BB962C8B-B14F-4D97-AF65-F5344CB8AC3E}">
+        <p14:creationId xmlns:p14="http://schemas.microsoft.com/office/powerpoint/2010/main" val="2618205657"/>
+      </p:ext>
+    </p:extLst>
   </p:cSld>
   <p:clrMapOvr>
     <a:masterClrMapping/>
   </p:clrMapOvr>
-  <mc:AlternateContent xmlns:mc="http://schemas.openxmlformats.org/markup-compatibility/2006" xmlns:p14="http://schemas.microsoft.com/office/powerpoint/2010/main">
-    <mc:Choice Requires="p14">
+  <mc:AlternateContent xmlns:mc="http://schemas.openxmlformats.org/markup-compatibility/2006">
+    <mc:Choice xmlns:p14="http://schemas.microsoft.com/office/powerpoint/2010/main" Requires="p14">
       <p:transition spd="slow" advClick="0">
         <p14:reveal/>
       </p:transition>
     </mc:Choice>
-    <mc:Fallback xmlns="">
+    <mc:Fallback>
       <p:transition spd="slow" advClick="0">
         <p:fade/>
       </p:transition>

--- a/docs/Ajibade_DevOps_Project.pptx
+++ b/docs/Ajibade_DevOps_Project.pptx
@@ -4,20 +4,26 @@
   <p:sldMasterIdLst>
     <p:sldMasterId id="2147483648" r:id="rId1"/>
   </p:sldMasterIdLst>
+  <p:notesMasterIdLst>
+    <p:notesMasterId r:id="rId18"/>
+  </p:notesMasterIdLst>
   <p:sldIdLst>
     <p:sldId id="256" r:id="rId2"/>
     <p:sldId id="257" r:id="rId3"/>
     <p:sldId id="270" r:id="rId4"/>
     <p:sldId id="267" r:id="rId5"/>
     <p:sldId id="259" r:id="rId6"/>
-    <p:sldId id="260" r:id="rId7"/>
-    <p:sldId id="261" r:id="rId8"/>
-    <p:sldId id="269" r:id="rId9"/>
-    <p:sldId id="262" r:id="rId10"/>
-    <p:sldId id="263" r:id="rId11"/>
-    <p:sldId id="264" r:id="rId12"/>
-    <p:sldId id="265" r:id="rId13"/>
-    <p:sldId id="268" r:id="rId14"/>
+    <p:sldId id="273" r:id="rId7"/>
+    <p:sldId id="260" r:id="rId8"/>
+    <p:sldId id="261" r:id="rId9"/>
+    <p:sldId id="269" r:id="rId10"/>
+    <p:sldId id="262" r:id="rId11"/>
+    <p:sldId id="263" r:id="rId12"/>
+    <p:sldId id="264" r:id="rId13"/>
+    <p:sldId id="271" r:id="rId14"/>
+    <p:sldId id="272" r:id="rId15"/>
+    <p:sldId id="265" r:id="rId16"/>
+    <p:sldId id="268" r:id="rId17"/>
   </p:sldIdLst>
   <p:sldSz cx="9144000" cy="6858000" type="screen4x3"/>
   <p:notesSz cx="6858000" cy="9144000"/>
@@ -133,6 +139,1885 @@
     </p:ext>
   </p:extLst>
 </p:presentation>
+</file>
+
+<file path=ppt/notesMasters/notesMaster1.xml><?xml version="1.0" encoding="utf-8"?>
+<p:notesMaster xmlns:a="http://schemas.openxmlformats.org/drawingml/2006/main" xmlns:r="http://schemas.openxmlformats.org/officeDocument/2006/relationships" xmlns:p="http://schemas.openxmlformats.org/presentationml/2006/main">
+  <p:cSld>
+    <p:bg>
+      <p:bgRef idx="1001">
+        <a:schemeClr val="bg1"/>
+      </p:bgRef>
+    </p:bg>
+    <p:spTree>
+      <p:nvGrpSpPr>
+        <p:cNvPr id="1" name=""/>
+        <p:cNvGrpSpPr/>
+        <p:nvPr/>
+      </p:nvGrpSpPr>
+      <p:grpSpPr>
+        <a:xfrm>
+          <a:off x="0" y="0"/>
+          <a:ext cx="0" cy="0"/>
+          <a:chOff x="0" y="0"/>
+          <a:chExt cx="0" cy="0"/>
+        </a:xfrm>
+      </p:grpSpPr>
+      <p:sp>
+        <p:nvSpPr>
+          <p:cNvPr id="2" name="Header Placeholder 1"/>
+          <p:cNvSpPr>
+            <a:spLocks noGrp="1"/>
+          </p:cNvSpPr>
+          <p:nvPr>
+            <p:ph type="hdr" sz="quarter"/>
+          </p:nvPr>
+        </p:nvSpPr>
+        <p:spPr>
+          <a:xfrm>
+            <a:off x="0" y="0"/>
+            <a:ext cx="2971800" cy="458788"/>
+          </a:xfrm>
+          <a:prstGeom prst="rect">
+            <a:avLst/>
+          </a:prstGeom>
+        </p:spPr>
+        <p:txBody>
+          <a:bodyPr vert="horz" lIns="91440" tIns="45720" rIns="91440" bIns="45720" rtlCol="0"/>
+          <a:lstStyle>
+            <a:lvl1pPr algn="l">
+              <a:defRPr sz="1200"/>
+            </a:lvl1pPr>
+          </a:lstStyle>
+          <a:p>
+            <a:endParaRPr lang="en-US"/>
+          </a:p>
+        </p:txBody>
+      </p:sp>
+      <p:sp>
+        <p:nvSpPr>
+          <p:cNvPr id="3" name="Date Placeholder 2"/>
+          <p:cNvSpPr>
+            <a:spLocks noGrp="1"/>
+          </p:cNvSpPr>
+          <p:nvPr>
+            <p:ph type="dt" idx="1"/>
+          </p:nvPr>
+        </p:nvSpPr>
+        <p:spPr>
+          <a:xfrm>
+            <a:off x="3884613" y="0"/>
+            <a:ext cx="2971800" cy="458788"/>
+          </a:xfrm>
+          <a:prstGeom prst="rect">
+            <a:avLst/>
+          </a:prstGeom>
+        </p:spPr>
+        <p:txBody>
+          <a:bodyPr vert="horz" lIns="91440" tIns="45720" rIns="91440" bIns="45720" rtlCol="0"/>
+          <a:lstStyle>
+            <a:lvl1pPr algn="r">
+              <a:defRPr sz="1200"/>
+            </a:lvl1pPr>
+          </a:lstStyle>
+          <a:p>
+            <a:fld id="{5F451B4E-638F-4418-ADB5-33E847636117}" type="datetimeFigureOut">
+              <a:rPr lang="en-US" smtClean="0"/>
+              <a:t>30-Jan-26</a:t>
+            </a:fld>
+            <a:endParaRPr lang="en-US"/>
+          </a:p>
+        </p:txBody>
+      </p:sp>
+      <p:sp>
+        <p:nvSpPr>
+          <p:cNvPr id="4" name="Slide Image Placeholder 3"/>
+          <p:cNvSpPr>
+            <a:spLocks noGrp="1" noRot="1" noChangeAspect="1"/>
+          </p:cNvSpPr>
+          <p:nvPr>
+            <p:ph type="sldImg" idx="2"/>
+          </p:nvPr>
+        </p:nvSpPr>
+        <p:spPr>
+          <a:xfrm>
+            <a:off x="1371600" y="1143000"/>
+            <a:ext cx="4114800" cy="3086100"/>
+          </a:xfrm>
+          <a:prstGeom prst="rect">
+            <a:avLst/>
+          </a:prstGeom>
+          <a:noFill/>
+          <a:ln w="12700">
+            <a:solidFill>
+              <a:prstClr val="black"/>
+            </a:solidFill>
+          </a:ln>
+        </p:spPr>
+        <p:txBody>
+          <a:bodyPr vert="horz" lIns="91440" tIns="45720" rIns="91440" bIns="45720" rtlCol="0" anchor="ctr"/>
+          <a:lstStyle/>
+          <a:p>
+            <a:endParaRPr lang="en-US"/>
+          </a:p>
+        </p:txBody>
+      </p:sp>
+      <p:sp>
+        <p:nvSpPr>
+          <p:cNvPr id="5" name="Notes Placeholder 4"/>
+          <p:cNvSpPr>
+            <a:spLocks noGrp="1"/>
+          </p:cNvSpPr>
+          <p:nvPr>
+            <p:ph type="body" sz="quarter" idx="3"/>
+          </p:nvPr>
+        </p:nvSpPr>
+        <p:spPr>
+          <a:xfrm>
+            <a:off x="685800" y="4400550"/>
+            <a:ext cx="5486400" cy="3600450"/>
+          </a:xfrm>
+          <a:prstGeom prst="rect">
+            <a:avLst/>
+          </a:prstGeom>
+        </p:spPr>
+        <p:txBody>
+          <a:bodyPr vert="horz" lIns="91440" tIns="45720" rIns="91440" bIns="45720" rtlCol="0"/>
+          <a:lstStyle/>
+          <a:p>
+            <a:pPr lvl="0"/>
+            <a:r>
+              <a:rPr lang="en-US" smtClean="0"/>
+              <a:t>Click to edit Master text styles</a:t>
+            </a:r>
+          </a:p>
+          <a:p>
+            <a:pPr lvl="1"/>
+            <a:r>
+              <a:rPr lang="en-US" smtClean="0"/>
+              <a:t>Second level</a:t>
+            </a:r>
+          </a:p>
+          <a:p>
+            <a:pPr lvl="2"/>
+            <a:r>
+              <a:rPr lang="en-US" smtClean="0"/>
+              <a:t>Third level</a:t>
+            </a:r>
+          </a:p>
+          <a:p>
+            <a:pPr lvl="3"/>
+            <a:r>
+              <a:rPr lang="en-US" smtClean="0"/>
+              <a:t>Fourth level</a:t>
+            </a:r>
+          </a:p>
+          <a:p>
+            <a:pPr lvl="4"/>
+            <a:r>
+              <a:rPr lang="en-US" smtClean="0"/>
+              <a:t>Fifth level</a:t>
+            </a:r>
+            <a:endParaRPr lang="en-US"/>
+          </a:p>
+        </p:txBody>
+      </p:sp>
+      <p:sp>
+        <p:nvSpPr>
+          <p:cNvPr id="6" name="Footer Placeholder 5"/>
+          <p:cNvSpPr>
+            <a:spLocks noGrp="1"/>
+          </p:cNvSpPr>
+          <p:nvPr>
+            <p:ph type="ftr" sz="quarter" idx="4"/>
+          </p:nvPr>
+        </p:nvSpPr>
+        <p:spPr>
+          <a:xfrm>
+            <a:off x="0" y="8685213"/>
+            <a:ext cx="2971800" cy="458787"/>
+          </a:xfrm>
+          <a:prstGeom prst="rect">
+            <a:avLst/>
+          </a:prstGeom>
+        </p:spPr>
+        <p:txBody>
+          <a:bodyPr vert="horz" lIns="91440" tIns="45720" rIns="91440" bIns="45720" rtlCol="0" anchor="b"/>
+          <a:lstStyle>
+            <a:lvl1pPr algn="l">
+              <a:defRPr sz="1200"/>
+            </a:lvl1pPr>
+          </a:lstStyle>
+          <a:p>
+            <a:endParaRPr lang="en-US"/>
+          </a:p>
+        </p:txBody>
+      </p:sp>
+      <p:sp>
+        <p:nvSpPr>
+          <p:cNvPr id="7" name="Slide Number Placeholder 6"/>
+          <p:cNvSpPr>
+            <a:spLocks noGrp="1"/>
+          </p:cNvSpPr>
+          <p:nvPr>
+            <p:ph type="sldNum" sz="quarter" idx="5"/>
+          </p:nvPr>
+        </p:nvSpPr>
+        <p:spPr>
+          <a:xfrm>
+            <a:off x="3884613" y="8685213"/>
+            <a:ext cx="2971800" cy="458787"/>
+          </a:xfrm>
+          <a:prstGeom prst="rect">
+            <a:avLst/>
+          </a:prstGeom>
+        </p:spPr>
+        <p:txBody>
+          <a:bodyPr vert="horz" lIns="91440" tIns="45720" rIns="91440" bIns="45720" rtlCol="0" anchor="b"/>
+          <a:lstStyle>
+            <a:lvl1pPr algn="r">
+              <a:defRPr sz="1200"/>
+            </a:lvl1pPr>
+          </a:lstStyle>
+          <a:p>
+            <a:fld id="{1E6958E2-2B4A-4C25-BF05-A265C473CB9D}" type="slidenum">
+              <a:rPr lang="en-US" smtClean="0"/>
+              <a:t>‹#›</a:t>
+            </a:fld>
+            <a:endParaRPr lang="en-US"/>
+          </a:p>
+        </p:txBody>
+      </p:sp>
+    </p:spTree>
+    <p:extLst>
+      <p:ext uri="{BB962C8B-B14F-4D97-AF65-F5344CB8AC3E}">
+        <p14:creationId xmlns:p14="http://schemas.microsoft.com/office/powerpoint/2010/main" val="660787245"/>
+      </p:ext>
+    </p:extLst>
+  </p:cSld>
+  <p:clrMap bg1="lt1" tx1="dk1" bg2="lt2" tx2="dk2" accent1="accent1" accent2="accent2" accent3="accent3" accent4="accent4" accent5="accent5" accent6="accent6" hlink="hlink" folHlink="folHlink"/>
+  <p:notesStyle>
+    <a:lvl1pPr marL="0" algn="l" defTabSz="914400" rtl="0" eaLnBrk="1" latinLnBrk="0" hangingPunct="1">
+      <a:defRPr sz="1200" kern="1200">
+        <a:solidFill>
+          <a:schemeClr val="tx1"/>
+        </a:solidFill>
+        <a:latin typeface="+mn-lt"/>
+        <a:ea typeface="+mn-ea"/>
+        <a:cs typeface="+mn-cs"/>
+      </a:defRPr>
+    </a:lvl1pPr>
+    <a:lvl2pPr marL="457200" algn="l" defTabSz="914400" rtl="0" eaLnBrk="1" latinLnBrk="0" hangingPunct="1">
+      <a:defRPr sz="1200" kern="1200">
+        <a:solidFill>
+          <a:schemeClr val="tx1"/>
+        </a:solidFill>
+        <a:latin typeface="+mn-lt"/>
+        <a:ea typeface="+mn-ea"/>
+        <a:cs typeface="+mn-cs"/>
+      </a:defRPr>
+    </a:lvl2pPr>
+    <a:lvl3pPr marL="914400" algn="l" defTabSz="914400" rtl="0" eaLnBrk="1" latinLnBrk="0" hangingPunct="1">
+      <a:defRPr sz="1200" kern="1200">
+        <a:solidFill>
+          <a:schemeClr val="tx1"/>
+        </a:solidFill>
+        <a:latin typeface="+mn-lt"/>
+        <a:ea typeface="+mn-ea"/>
+        <a:cs typeface="+mn-cs"/>
+      </a:defRPr>
+    </a:lvl3pPr>
+    <a:lvl4pPr marL="1371600" algn="l" defTabSz="914400" rtl="0" eaLnBrk="1" latinLnBrk="0" hangingPunct="1">
+      <a:defRPr sz="1200" kern="1200">
+        <a:solidFill>
+          <a:schemeClr val="tx1"/>
+        </a:solidFill>
+        <a:latin typeface="+mn-lt"/>
+        <a:ea typeface="+mn-ea"/>
+        <a:cs typeface="+mn-cs"/>
+      </a:defRPr>
+    </a:lvl4pPr>
+    <a:lvl5pPr marL="1828800" algn="l" defTabSz="914400" rtl="0" eaLnBrk="1" latinLnBrk="0" hangingPunct="1">
+      <a:defRPr sz="1200" kern="1200">
+        <a:solidFill>
+          <a:schemeClr val="tx1"/>
+        </a:solidFill>
+        <a:latin typeface="+mn-lt"/>
+        <a:ea typeface="+mn-ea"/>
+        <a:cs typeface="+mn-cs"/>
+      </a:defRPr>
+    </a:lvl5pPr>
+    <a:lvl6pPr marL="2286000" algn="l" defTabSz="914400" rtl="0" eaLnBrk="1" latinLnBrk="0" hangingPunct="1">
+      <a:defRPr sz="1200" kern="1200">
+        <a:solidFill>
+          <a:schemeClr val="tx1"/>
+        </a:solidFill>
+        <a:latin typeface="+mn-lt"/>
+        <a:ea typeface="+mn-ea"/>
+        <a:cs typeface="+mn-cs"/>
+      </a:defRPr>
+    </a:lvl6pPr>
+    <a:lvl7pPr marL="2743200" algn="l" defTabSz="914400" rtl="0" eaLnBrk="1" latinLnBrk="0" hangingPunct="1">
+      <a:defRPr sz="1200" kern="1200">
+        <a:solidFill>
+          <a:schemeClr val="tx1"/>
+        </a:solidFill>
+        <a:latin typeface="+mn-lt"/>
+        <a:ea typeface="+mn-ea"/>
+        <a:cs typeface="+mn-cs"/>
+      </a:defRPr>
+    </a:lvl7pPr>
+    <a:lvl8pPr marL="3200400" algn="l" defTabSz="914400" rtl="0" eaLnBrk="1" latinLnBrk="0" hangingPunct="1">
+      <a:defRPr sz="1200" kern="1200">
+        <a:solidFill>
+          <a:schemeClr val="tx1"/>
+        </a:solidFill>
+        <a:latin typeface="+mn-lt"/>
+        <a:ea typeface="+mn-ea"/>
+        <a:cs typeface="+mn-cs"/>
+      </a:defRPr>
+    </a:lvl8pPr>
+    <a:lvl9pPr marL="3657600" algn="l" defTabSz="914400" rtl="0" eaLnBrk="1" latinLnBrk="0" hangingPunct="1">
+      <a:defRPr sz="1200" kern="1200">
+        <a:solidFill>
+          <a:schemeClr val="tx1"/>
+        </a:solidFill>
+        <a:latin typeface="+mn-lt"/>
+        <a:ea typeface="+mn-ea"/>
+        <a:cs typeface="+mn-cs"/>
+      </a:defRPr>
+    </a:lvl9pPr>
+  </p:notesStyle>
+</p:notesMaster>
+</file>
+
+<file path=ppt/notesSlides/notesSlide1.xml><?xml version="1.0" encoding="utf-8"?>
+<p:notes xmlns:a="http://schemas.openxmlformats.org/drawingml/2006/main" xmlns:r="http://schemas.openxmlformats.org/officeDocument/2006/relationships" xmlns:p="http://schemas.openxmlformats.org/presentationml/2006/main">
+  <p:cSld>
+    <p:spTree>
+      <p:nvGrpSpPr>
+        <p:cNvPr id="1" name=""/>
+        <p:cNvGrpSpPr/>
+        <p:nvPr/>
+      </p:nvGrpSpPr>
+      <p:grpSpPr>
+        <a:xfrm>
+          <a:off x="0" y="0"/>
+          <a:ext cx="0" cy="0"/>
+          <a:chOff x="0" y="0"/>
+          <a:chExt cx="0" cy="0"/>
+        </a:xfrm>
+      </p:grpSpPr>
+      <p:sp>
+        <p:nvSpPr>
+          <p:cNvPr id="2" name="Slide Image Placeholder 1"/>
+          <p:cNvSpPr>
+            <a:spLocks noGrp="1" noRot="1" noChangeAspect="1"/>
+          </p:cNvSpPr>
+          <p:nvPr>
+            <p:ph type="sldImg"/>
+          </p:nvPr>
+        </p:nvSpPr>
+        <p:spPr/>
+      </p:sp>
+      <p:sp>
+        <p:nvSpPr>
+          <p:cNvPr id="3" name="Notes Placeholder 2"/>
+          <p:cNvSpPr>
+            <a:spLocks noGrp="1"/>
+          </p:cNvSpPr>
+          <p:nvPr>
+            <p:ph type="body" idx="1"/>
+          </p:nvPr>
+        </p:nvSpPr>
+        <p:spPr/>
+        <p:txBody>
+          <a:bodyPr/>
+          <a:lstStyle/>
+          <a:p>
+            <a:r>
+              <a:rPr lang="en-US" sz="1200" b="0" i="0" kern="1200" dirty="0" smtClean="0">
+                <a:solidFill>
+                  <a:schemeClr val="tx1"/>
+                </a:solidFill>
+                <a:effectLst/>
+                <a:latin typeface="+mn-lt"/>
+                <a:ea typeface="+mn-ea"/>
+                <a:cs typeface="+mn-cs"/>
+              </a:rPr>
+              <a:t>A </a:t>
+            </a:r>
+            <a:r>
+              <a:rPr lang="en-US" sz="1200" b="1" i="0" kern="1200" dirty="0" smtClean="0">
+                <a:solidFill>
+                  <a:schemeClr val="tx1"/>
+                </a:solidFill>
+                <a:effectLst/>
+                <a:latin typeface="+mn-lt"/>
+                <a:ea typeface="+mn-ea"/>
+                <a:cs typeface="+mn-cs"/>
+              </a:rPr>
+              <a:t>ASP.NET Core</a:t>
+            </a:r>
+            <a:r>
+              <a:rPr lang="en-US" sz="1200" b="1" i="0" kern="1200" baseline="0" dirty="0" smtClean="0">
+                <a:solidFill>
+                  <a:schemeClr val="tx1"/>
+                </a:solidFill>
+                <a:effectLst/>
+                <a:latin typeface="+mn-lt"/>
+                <a:ea typeface="+mn-ea"/>
+                <a:cs typeface="+mn-cs"/>
+              </a:rPr>
+              <a:t> </a:t>
+            </a:r>
+            <a:r>
+              <a:rPr lang="en-US" sz="1200" b="1" i="0" kern="1200" dirty="0" smtClean="0">
+                <a:solidFill>
+                  <a:schemeClr val="tx1"/>
+                </a:solidFill>
+                <a:effectLst/>
+                <a:latin typeface="+mn-lt"/>
+                <a:ea typeface="+mn-ea"/>
+                <a:cs typeface="+mn-cs"/>
+              </a:rPr>
+              <a:t>Web API (Web Application Programming Interface)</a:t>
+            </a:r>
+            <a:r>
+              <a:rPr lang="en-US" sz="1200" b="0" i="0" kern="1200" dirty="0" smtClean="0">
+                <a:solidFill>
+                  <a:schemeClr val="tx1"/>
+                </a:solidFill>
+                <a:effectLst/>
+                <a:latin typeface="+mn-lt"/>
+                <a:ea typeface="+mn-ea"/>
+                <a:cs typeface="+mn-cs"/>
+              </a:rPr>
+              <a:t> is a </a:t>
+            </a:r>
+            <a:r>
+              <a:rPr lang="en-US" sz="1200" b="1" i="0" kern="1200" dirty="0" smtClean="0">
+                <a:solidFill>
+                  <a:schemeClr val="tx1"/>
+                </a:solidFill>
+                <a:effectLst/>
+                <a:latin typeface="+mn-lt"/>
+                <a:ea typeface="+mn-ea"/>
+                <a:cs typeface="+mn-cs"/>
+              </a:rPr>
+              <a:t>bridge</a:t>
+            </a:r>
+            <a:r>
+              <a:rPr lang="en-US" sz="1200" b="0" i="0" kern="1200" dirty="0" smtClean="0">
+                <a:solidFill>
+                  <a:schemeClr val="tx1"/>
+                </a:solidFill>
+                <a:effectLst/>
+                <a:latin typeface="+mn-lt"/>
+                <a:ea typeface="+mn-ea"/>
+                <a:cs typeface="+mn-cs"/>
+              </a:rPr>
+              <a:t> that enables different software applications to communicate with each other over the internet. It enables developers to create lightweight, scalable, and secure APIs that multiple types of clients can consume. Instead of directly connecting databases or systems.</a:t>
+            </a:r>
+          </a:p>
+          <a:p>
+            <a:r>
+              <a:rPr lang="en-US" sz="1200" b="0" i="0" kern="1200" dirty="0" smtClean="0">
+                <a:solidFill>
+                  <a:schemeClr val="tx1"/>
+                </a:solidFill>
+                <a:effectLst/>
+                <a:latin typeface="+mn-lt"/>
+                <a:ea typeface="+mn-ea"/>
+                <a:cs typeface="+mn-cs"/>
+              </a:rPr>
+              <a:t>Today, businesses can’t rely solely on a website because users access data from </a:t>
+            </a:r>
+            <a:r>
+              <a:rPr lang="en-US" sz="1200" b="1" i="0" kern="1200" dirty="0" smtClean="0">
+                <a:solidFill>
+                  <a:schemeClr val="tx1"/>
+                </a:solidFill>
+                <a:effectLst/>
+                <a:latin typeface="+mn-lt"/>
+                <a:ea typeface="+mn-ea"/>
+                <a:cs typeface="+mn-cs"/>
+              </a:rPr>
+              <a:t>multiple devices,</a:t>
+            </a:r>
+            <a:r>
+              <a:rPr lang="en-US" sz="1200" b="0" i="0" kern="1200" dirty="0" smtClean="0">
+                <a:solidFill>
+                  <a:schemeClr val="tx1"/>
+                </a:solidFill>
+                <a:effectLst/>
+                <a:latin typeface="+mn-lt"/>
+                <a:ea typeface="+mn-ea"/>
+                <a:cs typeface="+mn-cs"/>
+              </a:rPr>
+              <a:t> including </a:t>
+            </a:r>
+            <a:r>
+              <a:rPr lang="en-US" sz="1200" b="1" i="0" kern="1200" dirty="0" smtClean="0">
+                <a:solidFill>
+                  <a:schemeClr val="tx1"/>
+                </a:solidFill>
+                <a:effectLst/>
+                <a:latin typeface="+mn-lt"/>
+                <a:ea typeface="+mn-ea"/>
+                <a:cs typeface="+mn-cs"/>
+              </a:rPr>
+              <a:t>smartphones, tablets, smart TVs, </a:t>
+            </a:r>
+            <a:r>
+              <a:rPr lang="en-US" sz="1200" b="1" i="0" kern="1200" dirty="0" err="1" smtClean="0">
+                <a:solidFill>
+                  <a:schemeClr val="tx1"/>
+                </a:solidFill>
+                <a:effectLst/>
+                <a:latin typeface="+mn-lt"/>
+                <a:ea typeface="+mn-ea"/>
+                <a:cs typeface="+mn-cs"/>
+              </a:rPr>
+              <a:t>IoT</a:t>
+            </a:r>
+            <a:r>
+              <a:rPr lang="en-US" sz="1200" b="1" i="0" kern="1200" dirty="0" smtClean="0">
+                <a:solidFill>
+                  <a:schemeClr val="tx1"/>
+                </a:solidFill>
+                <a:effectLst/>
+                <a:latin typeface="+mn-lt"/>
+                <a:ea typeface="+mn-ea"/>
+                <a:cs typeface="+mn-cs"/>
+              </a:rPr>
+              <a:t> devices, and even voice assistants</a:t>
+            </a:r>
+            <a:r>
+              <a:rPr lang="en-US" sz="1200" b="0" i="0" kern="1200" dirty="0" smtClean="0">
+                <a:solidFill>
+                  <a:schemeClr val="tx1"/>
+                </a:solidFill>
+                <a:effectLst/>
+                <a:latin typeface="+mn-lt"/>
+                <a:ea typeface="+mn-ea"/>
+                <a:cs typeface="+mn-cs"/>
+              </a:rPr>
+              <a:t>. To support this </a:t>
+            </a:r>
+            <a:r>
+              <a:rPr lang="en-US" sz="1200" b="1" i="0" kern="1200" dirty="0" smtClean="0">
+                <a:solidFill>
+                  <a:schemeClr val="tx1"/>
+                </a:solidFill>
+                <a:effectLst/>
+                <a:latin typeface="+mn-lt"/>
+                <a:ea typeface="+mn-ea"/>
+                <a:cs typeface="+mn-cs"/>
+              </a:rPr>
+              <a:t>multi-device ecosystem</a:t>
+            </a:r>
+            <a:r>
+              <a:rPr lang="en-US" sz="1200" b="0" i="0" kern="1200" dirty="0" smtClean="0">
+                <a:solidFill>
+                  <a:schemeClr val="tx1"/>
+                </a:solidFill>
+                <a:effectLst/>
+                <a:latin typeface="+mn-lt"/>
+                <a:ea typeface="+mn-ea"/>
+                <a:cs typeface="+mn-cs"/>
+              </a:rPr>
+              <a:t>, you need a central way of exposing your business data and services. That’s where ASP.NET Core Web API comes in: it acts as a </a:t>
+            </a:r>
+            <a:r>
+              <a:rPr lang="en-US" sz="1200" b="1" i="0" kern="1200" dirty="0" smtClean="0">
+                <a:solidFill>
+                  <a:schemeClr val="tx1"/>
+                </a:solidFill>
+                <a:effectLst/>
+                <a:latin typeface="+mn-lt"/>
+                <a:ea typeface="+mn-ea"/>
+                <a:cs typeface="+mn-cs"/>
+              </a:rPr>
+              <a:t>single interface</a:t>
+            </a:r>
+            <a:r>
+              <a:rPr lang="en-US" sz="1200" b="0" i="0" kern="1200" dirty="0" smtClean="0">
+                <a:solidFill>
+                  <a:schemeClr val="tx1"/>
+                </a:solidFill>
+                <a:effectLst/>
+                <a:latin typeface="+mn-lt"/>
+                <a:ea typeface="+mn-ea"/>
+                <a:cs typeface="+mn-cs"/>
+              </a:rPr>
+              <a:t> between your business data and all the clients. </a:t>
+            </a:r>
+            <a:r>
+              <a:rPr lang="en-US" sz="1200" b="1" i="0" kern="1200" dirty="0" smtClean="0">
+                <a:solidFill>
+                  <a:schemeClr val="tx1"/>
+                </a:solidFill>
+                <a:effectLst/>
+                <a:latin typeface="+mn-lt"/>
+                <a:ea typeface="+mn-ea"/>
+                <a:cs typeface="+mn-cs"/>
+              </a:rPr>
+              <a:t>Reasons We Need It:</a:t>
+            </a:r>
+          </a:p>
+          <a:p>
+            <a:pPr marL="171450" indent="-171450" fontAlgn="base">
+              <a:buFont typeface="Arial" panose="020B0604020202020204" pitchFamily="34" charset="0"/>
+              <a:buChar char="•"/>
+            </a:pPr>
+            <a:r>
+              <a:rPr lang="en-US" sz="1200" b="1" i="0" kern="1200" dirty="0" smtClean="0">
+                <a:solidFill>
+                  <a:schemeClr val="tx1"/>
+                </a:solidFill>
+                <a:effectLst/>
+                <a:latin typeface="+mn-lt"/>
+                <a:ea typeface="+mn-ea"/>
+                <a:cs typeface="+mn-cs"/>
+              </a:rPr>
+              <a:t>Multi-Device Access:</a:t>
+            </a:r>
+            <a:r>
+              <a:rPr lang="en-US" sz="1200" b="0" i="0" kern="1200" dirty="0" smtClean="0">
+                <a:solidFill>
+                  <a:schemeClr val="tx1"/>
+                </a:solidFill>
+                <a:effectLst/>
+                <a:latin typeface="+mn-lt"/>
+                <a:ea typeface="+mn-ea"/>
+                <a:cs typeface="+mn-cs"/>
+              </a:rPr>
+              <a:t> One API can serve browsers, mobile apps, and </a:t>
+            </a:r>
+            <a:r>
+              <a:rPr lang="en-US" sz="1200" b="0" i="0" kern="1200" dirty="0" err="1" smtClean="0">
+                <a:solidFill>
+                  <a:schemeClr val="tx1"/>
+                </a:solidFill>
+                <a:effectLst/>
+                <a:latin typeface="+mn-lt"/>
+                <a:ea typeface="+mn-ea"/>
+                <a:cs typeface="+mn-cs"/>
+              </a:rPr>
+              <a:t>IoT</a:t>
+            </a:r>
+            <a:r>
+              <a:rPr lang="en-US" sz="1200" b="0" i="0" kern="1200" dirty="0" smtClean="0">
+                <a:solidFill>
+                  <a:schemeClr val="tx1"/>
+                </a:solidFill>
+                <a:effectLst/>
+                <a:latin typeface="+mn-lt"/>
+                <a:ea typeface="+mn-ea"/>
+                <a:cs typeface="+mn-cs"/>
+              </a:rPr>
+              <a:t> devices simultaneously.</a:t>
+            </a:r>
+          </a:p>
+          <a:p>
+            <a:pPr marL="171450" indent="-171450" fontAlgn="base">
+              <a:buFont typeface="Arial" panose="020B0604020202020204" pitchFamily="34" charset="0"/>
+              <a:buChar char="•"/>
+            </a:pPr>
+            <a:r>
+              <a:rPr lang="en-US" sz="1200" b="1" i="0" kern="1200" dirty="0" smtClean="0">
+                <a:solidFill>
+                  <a:schemeClr val="tx1"/>
+                </a:solidFill>
+                <a:effectLst/>
+                <a:latin typeface="+mn-lt"/>
+                <a:ea typeface="+mn-ea"/>
+                <a:cs typeface="+mn-cs"/>
+              </a:rPr>
+              <a:t>Separation of Concerns:</a:t>
+            </a:r>
+            <a:r>
+              <a:rPr lang="en-US" sz="1200" b="0" i="0" kern="1200" dirty="0" smtClean="0">
+                <a:solidFill>
+                  <a:schemeClr val="tx1"/>
+                </a:solidFill>
+                <a:effectLst/>
+                <a:latin typeface="+mn-lt"/>
+                <a:ea typeface="+mn-ea"/>
+                <a:cs typeface="+mn-cs"/>
+              </a:rPr>
+              <a:t> Business logic lives in the API, while clients only consume the data.</a:t>
+            </a:r>
+          </a:p>
+          <a:p>
+            <a:pPr marL="171450" indent="-171450" fontAlgn="base">
+              <a:buFont typeface="Arial" panose="020B0604020202020204" pitchFamily="34" charset="0"/>
+              <a:buChar char="•"/>
+            </a:pPr>
+            <a:r>
+              <a:rPr lang="en-US" sz="1200" b="1" i="0" kern="1200" dirty="0" smtClean="0">
+                <a:solidFill>
+                  <a:schemeClr val="tx1"/>
+                </a:solidFill>
+                <a:effectLst/>
+                <a:latin typeface="+mn-lt"/>
+                <a:ea typeface="+mn-ea"/>
+                <a:cs typeface="+mn-cs"/>
+              </a:rPr>
+              <a:t>Scalability:</a:t>
+            </a:r>
+            <a:r>
+              <a:rPr lang="en-US" sz="1200" b="0" i="0" kern="1200" dirty="0" smtClean="0">
+                <a:solidFill>
+                  <a:schemeClr val="tx1"/>
+                </a:solidFill>
+                <a:effectLst/>
+                <a:latin typeface="+mn-lt"/>
+                <a:ea typeface="+mn-ea"/>
+                <a:cs typeface="+mn-cs"/>
+              </a:rPr>
+              <a:t> APIs can handle thousands/millions of requests if built on a high-performance framework like ASP.NET Core.</a:t>
+            </a:r>
+          </a:p>
+          <a:p>
+            <a:r>
+              <a:rPr lang="en-US" sz="1200" b="1" i="0" kern="1200" dirty="0" smtClean="0">
+                <a:solidFill>
+                  <a:schemeClr val="tx1"/>
+                </a:solidFill>
+                <a:effectLst/>
+                <a:latin typeface="+mn-lt"/>
+                <a:ea typeface="+mn-ea"/>
+                <a:cs typeface="+mn-cs"/>
+              </a:rPr>
+              <a:t>In simple terms,</a:t>
+            </a:r>
+            <a:r>
+              <a:rPr lang="en-US" sz="1200" b="0" i="0" kern="1200" dirty="0" smtClean="0">
+                <a:solidFill>
+                  <a:schemeClr val="tx1"/>
+                </a:solidFill>
+                <a:effectLst/>
+                <a:latin typeface="+mn-lt"/>
+                <a:ea typeface="+mn-ea"/>
+                <a:cs typeface="+mn-cs"/>
+              </a:rPr>
+              <a:t> ASP.NET Core Web API is needed because it allows businesses to </a:t>
+            </a:r>
+            <a:r>
+              <a:rPr lang="en-US" sz="1200" b="1" i="0" kern="1200" dirty="0" smtClean="0">
+                <a:solidFill>
+                  <a:schemeClr val="tx1"/>
+                </a:solidFill>
+                <a:effectLst/>
+                <a:latin typeface="+mn-lt"/>
+                <a:ea typeface="+mn-ea"/>
+                <a:cs typeface="+mn-cs"/>
+              </a:rPr>
+              <a:t>expose their data and services securely</a:t>
+            </a:r>
+            <a:r>
+              <a:rPr lang="en-US" sz="1200" b="0" i="0" kern="1200" dirty="0" smtClean="0">
+                <a:solidFill>
+                  <a:schemeClr val="tx1"/>
+                </a:solidFill>
+                <a:effectLst/>
+                <a:latin typeface="+mn-lt"/>
+                <a:ea typeface="+mn-ea"/>
+                <a:cs typeface="+mn-cs"/>
+              </a:rPr>
+              <a:t> to all kinds of devices in a </a:t>
+            </a:r>
+            <a:r>
+              <a:rPr lang="en-US" sz="1200" b="1" i="0" kern="1200" dirty="0" smtClean="0">
+                <a:solidFill>
+                  <a:schemeClr val="tx1"/>
+                </a:solidFill>
+                <a:effectLst/>
+                <a:latin typeface="+mn-lt"/>
+                <a:ea typeface="+mn-ea"/>
+                <a:cs typeface="+mn-cs"/>
+              </a:rPr>
+              <a:t>fast, modern, and scalable</a:t>
+            </a:r>
+            <a:r>
+              <a:rPr lang="en-US" sz="1200" b="0" i="0" kern="1200" dirty="0" smtClean="0">
+                <a:solidFill>
+                  <a:schemeClr val="tx1"/>
+                </a:solidFill>
+                <a:effectLst/>
+                <a:latin typeface="+mn-lt"/>
+                <a:ea typeface="+mn-ea"/>
+                <a:cs typeface="+mn-cs"/>
+              </a:rPr>
+              <a:t> way.</a:t>
+            </a:r>
+          </a:p>
+          <a:p>
+            <a:endParaRPr lang="en-US" sz="1200" b="1" i="0" kern="1200" dirty="0" smtClean="0">
+              <a:solidFill>
+                <a:schemeClr val="tx1"/>
+              </a:solidFill>
+              <a:effectLst/>
+              <a:latin typeface="+mn-lt"/>
+              <a:ea typeface="+mn-ea"/>
+              <a:cs typeface="+mn-cs"/>
+            </a:endParaRPr>
+          </a:p>
+          <a:p>
+            <a:r>
+              <a:rPr lang="en-US" sz="1200" b="1" i="0" kern="1200" dirty="0" smtClean="0">
+                <a:solidFill>
+                  <a:schemeClr val="tx1"/>
+                </a:solidFill>
+                <a:effectLst/>
+                <a:latin typeface="+mn-lt"/>
+                <a:ea typeface="+mn-ea"/>
+                <a:cs typeface="+mn-cs"/>
+              </a:rPr>
+              <a:t>P.S</a:t>
+            </a:r>
+            <a:r>
+              <a:rPr lang="en-US" sz="1200" b="0" i="1" kern="1200" baseline="0" dirty="0" smtClean="0">
+                <a:solidFill>
+                  <a:schemeClr val="tx1"/>
+                </a:solidFill>
+                <a:effectLst/>
+                <a:latin typeface="+mn-lt"/>
+                <a:ea typeface="+mn-ea"/>
+                <a:cs typeface="+mn-cs"/>
+              </a:rPr>
+              <a:t> - </a:t>
+            </a:r>
+            <a:r>
+              <a:rPr lang="en-US" sz="1200" b="0" i="1" kern="1200" dirty="0" smtClean="0">
+                <a:solidFill>
+                  <a:schemeClr val="tx1"/>
+                </a:solidFill>
+                <a:effectLst/>
+                <a:latin typeface="+mn-lt"/>
+                <a:ea typeface="+mn-ea"/>
+                <a:cs typeface="+mn-cs"/>
+              </a:rPr>
+              <a:t>A Web API is like a waiter in a restaurant; it takes your order (request), passes it to the kitchen (server), and brings back the food (response).</a:t>
+            </a:r>
+            <a:endParaRPr lang="en-US" i="1" dirty="0"/>
+          </a:p>
+        </p:txBody>
+      </p:sp>
+      <p:sp>
+        <p:nvSpPr>
+          <p:cNvPr id="4" name="Slide Number Placeholder 3"/>
+          <p:cNvSpPr>
+            <a:spLocks noGrp="1"/>
+          </p:cNvSpPr>
+          <p:nvPr>
+            <p:ph type="sldNum" sz="quarter" idx="10"/>
+          </p:nvPr>
+        </p:nvSpPr>
+        <p:spPr/>
+        <p:txBody>
+          <a:bodyPr/>
+          <a:lstStyle/>
+          <a:p>
+            <a:fld id="{1E6958E2-2B4A-4C25-BF05-A265C473CB9D}" type="slidenum">
+              <a:rPr lang="en-US" smtClean="0"/>
+              <a:t>5</a:t>
+            </a:fld>
+            <a:endParaRPr lang="en-US"/>
+          </a:p>
+        </p:txBody>
+      </p:sp>
+    </p:spTree>
+    <p:extLst>
+      <p:ext uri="{BB962C8B-B14F-4D97-AF65-F5344CB8AC3E}">
+        <p14:creationId xmlns:p14="http://schemas.microsoft.com/office/powerpoint/2010/main" val="3693272394"/>
+      </p:ext>
+    </p:extLst>
+  </p:cSld>
+  <p:clrMapOvr>
+    <a:masterClrMapping/>
+  </p:clrMapOvr>
+</p:notes>
+</file>
+
+<file path=ppt/notesSlides/notesSlide2.xml><?xml version="1.0" encoding="utf-8"?>
+<p:notes xmlns:a="http://schemas.openxmlformats.org/drawingml/2006/main" xmlns:r="http://schemas.openxmlformats.org/officeDocument/2006/relationships" xmlns:p="http://schemas.openxmlformats.org/presentationml/2006/main">
+  <p:cSld>
+    <p:spTree>
+      <p:nvGrpSpPr>
+        <p:cNvPr id="1" name=""/>
+        <p:cNvGrpSpPr/>
+        <p:nvPr/>
+      </p:nvGrpSpPr>
+      <p:grpSpPr>
+        <a:xfrm>
+          <a:off x="0" y="0"/>
+          <a:ext cx="0" cy="0"/>
+          <a:chOff x="0" y="0"/>
+          <a:chExt cx="0" cy="0"/>
+        </a:xfrm>
+      </p:grpSpPr>
+      <p:sp>
+        <p:nvSpPr>
+          <p:cNvPr id="2" name="Slide Image Placeholder 1"/>
+          <p:cNvSpPr>
+            <a:spLocks noGrp="1" noRot="1" noChangeAspect="1"/>
+          </p:cNvSpPr>
+          <p:nvPr>
+            <p:ph type="sldImg"/>
+          </p:nvPr>
+        </p:nvSpPr>
+        <p:spPr/>
+      </p:sp>
+      <p:sp>
+        <p:nvSpPr>
+          <p:cNvPr id="3" name="Notes Placeholder 2"/>
+          <p:cNvSpPr>
+            <a:spLocks noGrp="1"/>
+          </p:cNvSpPr>
+          <p:nvPr>
+            <p:ph type="body" idx="1"/>
+          </p:nvPr>
+        </p:nvSpPr>
+        <p:spPr/>
+        <p:txBody>
+          <a:bodyPr/>
+          <a:lstStyle/>
+          <a:p>
+            <a:r>
+              <a:rPr lang="en-US" sz="1200" b="1" i="0" kern="1200" dirty="0" smtClean="0">
+                <a:solidFill>
+                  <a:schemeClr val="tx1"/>
+                </a:solidFill>
+                <a:effectLst/>
+                <a:latin typeface="+mn-lt"/>
+                <a:ea typeface="+mn-ea"/>
+                <a:cs typeface="+mn-cs"/>
+              </a:rPr>
+              <a:t>Infrastructure as Code (</a:t>
+            </a:r>
+            <a:r>
+              <a:rPr lang="en-US" sz="1200" b="1" i="0" kern="1200" dirty="0" err="1" smtClean="0">
+                <a:solidFill>
+                  <a:schemeClr val="tx1"/>
+                </a:solidFill>
+                <a:effectLst/>
+                <a:latin typeface="+mn-lt"/>
+                <a:ea typeface="+mn-ea"/>
+                <a:cs typeface="+mn-cs"/>
+              </a:rPr>
+              <a:t>IaC</a:t>
+            </a:r>
+            <a:r>
+              <a:rPr lang="en-US" sz="1200" b="1" i="0" kern="1200" dirty="0" smtClean="0">
+                <a:solidFill>
+                  <a:schemeClr val="tx1"/>
+                </a:solidFill>
+                <a:effectLst/>
+                <a:latin typeface="+mn-lt"/>
+                <a:ea typeface="+mn-ea"/>
+                <a:cs typeface="+mn-cs"/>
+              </a:rPr>
+              <a:t>) </a:t>
+            </a:r>
+            <a:r>
+              <a:rPr lang="en-US" sz="1200" b="0" i="0" kern="1200" dirty="0" smtClean="0">
+                <a:solidFill>
+                  <a:schemeClr val="tx1"/>
+                </a:solidFill>
+                <a:effectLst/>
+                <a:latin typeface="+mn-lt"/>
+                <a:ea typeface="+mn-ea"/>
+                <a:cs typeface="+mn-cs"/>
+              </a:rPr>
+              <a:t>tools allow you to manage infrastructure with configuration files rather than through a graphical user interface. </a:t>
+            </a:r>
+            <a:r>
+              <a:rPr lang="en-US" sz="1200" b="0" i="0" kern="1200" dirty="0" err="1" smtClean="0">
+                <a:solidFill>
+                  <a:schemeClr val="tx1"/>
+                </a:solidFill>
+                <a:effectLst/>
+                <a:latin typeface="+mn-lt"/>
+                <a:ea typeface="+mn-ea"/>
+                <a:cs typeface="+mn-cs"/>
+              </a:rPr>
+              <a:t>IaC</a:t>
+            </a:r>
+            <a:r>
+              <a:rPr lang="en-US" sz="1200" b="0" i="0" kern="1200" dirty="0" smtClean="0">
+                <a:solidFill>
+                  <a:schemeClr val="tx1"/>
+                </a:solidFill>
+                <a:effectLst/>
+                <a:latin typeface="+mn-lt"/>
+                <a:ea typeface="+mn-ea"/>
+                <a:cs typeface="+mn-cs"/>
+              </a:rPr>
+              <a:t> allows you to build, change, and manage your infrastructure in a safe, consistent, and repeatable way by defining resource configurations that you can version, reuse, and share.</a:t>
+            </a:r>
+          </a:p>
+          <a:p>
+            <a:pPr marL="0" marR="0" indent="0" algn="l" defTabSz="914400" rtl="0" eaLnBrk="1" fontAlgn="auto" latinLnBrk="0" hangingPunct="1">
+              <a:lnSpc>
+                <a:spcPct val="100000"/>
+              </a:lnSpc>
+              <a:spcBef>
+                <a:spcPts val="0"/>
+              </a:spcBef>
+              <a:spcAft>
+                <a:spcPts val="0"/>
+              </a:spcAft>
+              <a:buClrTx/>
+              <a:buSzTx/>
+              <a:buFontTx/>
+              <a:buNone/>
+              <a:tabLst/>
+              <a:defRPr/>
+            </a:pPr>
+            <a:r>
+              <a:rPr lang="en-US" sz="1200" b="1" i="0" kern="1200" dirty="0" smtClean="0">
+                <a:solidFill>
+                  <a:schemeClr val="tx1"/>
+                </a:solidFill>
+                <a:effectLst/>
+                <a:latin typeface="+mn-lt"/>
+                <a:ea typeface="+mn-ea"/>
+                <a:cs typeface="+mn-cs"/>
+              </a:rPr>
+              <a:t>Terraform</a:t>
+            </a:r>
+            <a:r>
+              <a:rPr lang="en-US" sz="1200" b="0" i="0" kern="1200" dirty="0" smtClean="0">
+                <a:solidFill>
+                  <a:schemeClr val="tx1"/>
+                </a:solidFill>
+                <a:effectLst/>
+                <a:latin typeface="+mn-lt"/>
+                <a:ea typeface="+mn-ea"/>
+                <a:cs typeface="+mn-cs"/>
+              </a:rPr>
+              <a:t> is an open-source Infrastructure as Code (</a:t>
+            </a:r>
+            <a:r>
+              <a:rPr lang="en-US" sz="1200" b="0" i="0" kern="1200" dirty="0" err="1" smtClean="0">
+                <a:solidFill>
+                  <a:schemeClr val="tx1"/>
+                </a:solidFill>
+                <a:effectLst/>
+                <a:latin typeface="+mn-lt"/>
+                <a:ea typeface="+mn-ea"/>
+                <a:cs typeface="+mn-cs"/>
+              </a:rPr>
+              <a:t>IaC</a:t>
+            </a:r>
+            <a:r>
+              <a:rPr lang="en-US" sz="1200" b="0" i="0" kern="1200" dirty="0" smtClean="0">
+                <a:solidFill>
+                  <a:schemeClr val="tx1"/>
+                </a:solidFill>
+                <a:effectLst/>
+                <a:latin typeface="+mn-lt"/>
+                <a:ea typeface="+mn-ea"/>
+                <a:cs typeface="+mn-cs"/>
+              </a:rPr>
+              <a:t>) tool by </a:t>
+            </a:r>
+            <a:r>
+              <a:rPr lang="en-US" sz="1200" b="0" i="0" kern="1200" dirty="0" err="1" smtClean="0">
+                <a:solidFill>
+                  <a:schemeClr val="tx1"/>
+                </a:solidFill>
+                <a:effectLst/>
+                <a:latin typeface="+mn-lt"/>
+                <a:ea typeface="+mn-ea"/>
+                <a:cs typeface="+mn-cs"/>
+              </a:rPr>
+              <a:t>HashiCorp</a:t>
+            </a:r>
+            <a:r>
+              <a:rPr lang="en-US" sz="1200" b="0" i="0" kern="1200" dirty="0" smtClean="0">
+                <a:solidFill>
+                  <a:schemeClr val="tx1"/>
+                </a:solidFill>
+                <a:effectLst/>
+                <a:latin typeface="+mn-lt"/>
+                <a:ea typeface="+mn-ea"/>
+                <a:cs typeface="+mn-cs"/>
+              </a:rPr>
+              <a:t> that </a:t>
+            </a:r>
+            <a:r>
+              <a:rPr lang="en-US" dirty="0" smtClean="0"/>
+              <a:t>allows for safe, efficient, and consistent provisioning of cloud, on-premises, and </a:t>
+            </a:r>
+            <a:r>
+              <a:rPr lang="en-US" dirty="0" err="1" smtClean="0"/>
+              <a:t>SaaS</a:t>
+            </a:r>
+            <a:r>
+              <a:rPr lang="en-US" dirty="0" smtClean="0"/>
+              <a:t> resources using declarative configuration files</a:t>
+            </a:r>
+            <a:r>
+              <a:rPr lang="en-US" sz="1200" b="0" i="0" kern="1200" dirty="0" smtClean="0">
+                <a:solidFill>
+                  <a:schemeClr val="tx1"/>
+                </a:solidFill>
+                <a:effectLst/>
+                <a:latin typeface="+mn-lt"/>
+                <a:ea typeface="+mn-ea"/>
+                <a:cs typeface="+mn-cs"/>
+              </a:rPr>
+              <a:t>. It automates the entire lifecycle—creation, management, and destruction—of infrastructure components (servers, networking, databases) across multiple platforms. </a:t>
+            </a:r>
+          </a:p>
+          <a:p>
+            <a:r>
+              <a:rPr lang="en-US" sz="1200" b="0" i="0" kern="1200" dirty="0" smtClean="0">
+                <a:solidFill>
+                  <a:schemeClr val="tx1"/>
+                </a:solidFill>
+                <a:effectLst/>
+                <a:latin typeface="+mn-lt"/>
+                <a:ea typeface="+mn-ea"/>
+                <a:cs typeface="+mn-cs"/>
+              </a:rPr>
+              <a:t>Using Terraform has several advantages over manually managing your infrastructure:</a:t>
+            </a:r>
+          </a:p>
+          <a:p>
+            <a:pPr marL="171450" indent="-171450">
+              <a:buFont typeface="Arial" panose="020B0604020202020204" pitchFamily="34" charset="0"/>
+              <a:buChar char="•"/>
+            </a:pPr>
+            <a:r>
+              <a:rPr lang="en-US" sz="1200" b="0" i="0" kern="1200" dirty="0" smtClean="0">
+                <a:solidFill>
+                  <a:schemeClr val="tx1"/>
+                </a:solidFill>
+                <a:effectLst/>
+                <a:latin typeface="+mn-lt"/>
+                <a:ea typeface="+mn-ea"/>
+                <a:cs typeface="+mn-cs"/>
+              </a:rPr>
+              <a:t>Terraform can manage infrastructure on multiple cloud platforms.</a:t>
+            </a:r>
+          </a:p>
+          <a:p>
+            <a:pPr marL="171450" indent="-171450">
+              <a:buFont typeface="Arial" panose="020B0604020202020204" pitchFamily="34" charset="0"/>
+              <a:buChar char="•"/>
+            </a:pPr>
+            <a:r>
+              <a:rPr lang="en-US" sz="1200" b="0" i="0" kern="1200" dirty="0" smtClean="0">
+                <a:solidFill>
+                  <a:schemeClr val="tx1"/>
+                </a:solidFill>
+                <a:effectLst/>
+                <a:latin typeface="+mn-lt"/>
+                <a:ea typeface="+mn-ea"/>
+                <a:cs typeface="+mn-cs"/>
+              </a:rPr>
+              <a:t>The human-readable configuration language helps you write infrastructure code quickly.</a:t>
+            </a:r>
+          </a:p>
+          <a:p>
+            <a:pPr marL="171450" indent="-171450">
+              <a:buFont typeface="Arial" panose="020B0604020202020204" pitchFamily="34" charset="0"/>
+              <a:buChar char="•"/>
+            </a:pPr>
+            <a:r>
+              <a:rPr lang="en-US" sz="1200" b="0" i="0" kern="1200" dirty="0" err="1" smtClean="0">
+                <a:solidFill>
+                  <a:schemeClr val="tx1"/>
+                </a:solidFill>
+                <a:effectLst/>
+                <a:latin typeface="+mn-lt"/>
+                <a:ea typeface="+mn-ea"/>
+                <a:cs typeface="+mn-cs"/>
+              </a:rPr>
+              <a:t>Terraform's</a:t>
+            </a:r>
+            <a:r>
+              <a:rPr lang="en-US" sz="1200" b="0" i="0" kern="1200" dirty="0" smtClean="0">
+                <a:solidFill>
+                  <a:schemeClr val="tx1"/>
+                </a:solidFill>
+                <a:effectLst/>
+                <a:latin typeface="+mn-lt"/>
+                <a:ea typeface="+mn-ea"/>
+                <a:cs typeface="+mn-cs"/>
+              </a:rPr>
+              <a:t> state allows you to track resource changes throughout your deployments.</a:t>
+            </a:r>
+          </a:p>
+          <a:p>
+            <a:pPr marL="171450" indent="-171450">
+              <a:buFont typeface="Arial" panose="020B0604020202020204" pitchFamily="34" charset="0"/>
+              <a:buChar char="•"/>
+            </a:pPr>
+            <a:r>
+              <a:rPr lang="en-US" sz="1200" b="0" i="0" kern="1200" dirty="0" smtClean="0">
+                <a:solidFill>
+                  <a:schemeClr val="tx1"/>
+                </a:solidFill>
+                <a:effectLst/>
+                <a:latin typeface="+mn-lt"/>
+                <a:ea typeface="+mn-ea"/>
+                <a:cs typeface="+mn-cs"/>
+              </a:rPr>
+              <a:t>You can commit your configurations to version control to safely collaborate on infrastructure.</a:t>
+            </a:r>
+            <a:endParaRPr lang="en-US" sz="1200" b="0" i="0" kern="1200" dirty="0" smtClean="0">
+              <a:solidFill>
+                <a:schemeClr val="tx1"/>
+              </a:solidFill>
+              <a:effectLst/>
+              <a:latin typeface="+mn-lt"/>
+              <a:ea typeface="+mn-ea"/>
+              <a:cs typeface="+mn-cs"/>
+            </a:endParaRPr>
+          </a:p>
+          <a:p>
+            <a:r>
+              <a:rPr lang="en-US" sz="1200" b="0" i="0" kern="1200" dirty="0" smtClean="0">
+                <a:solidFill>
+                  <a:schemeClr val="tx1"/>
+                </a:solidFill>
+                <a:effectLst/>
+                <a:latin typeface="+mn-lt"/>
+                <a:ea typeface="+mn-ea"/>
+                <a:cs typeface="+mn-cs"/>
+              </a:rPr>
+              <a:t>To deploy infrastructure with Terraform:</a:t>
+            </a:r>
+          </a:p>
+          <a:p>
+            <a:pPr marL="171450" indent="-171450">
+              <a:buFont typeface="Arial" panose="020B0604020202020204" pitchFamily="34" charset="0"/>
+              <a:buChar char="•"/>
+            </a:pPr>
+            <a:r>
+              <a:rPr lang="en-US" sz="1200" b="1" i="0" kern="1200" dirty="0" smtClean="0">
+                <a:solidFill>
+                  <a:schemeClr val="tx1"/>
+                </a:solidFill>
+                <a:effectLst/>
+                <a:latin typeface="+mn-lt"/>
+                <a:ea typeface="+mn-ea"/>
+                <a:cs typeface="+mn-cs"/>
+              </a:rPr>
+              <a:t>Scope</a:t>
+            </a:r>
+            <a:r>
+              <a:rPr lang="en-US" sz="1200" b="0" i="0" kern="1200" dirty="0" smtClean="0">
+                <a:solidFill>
+                  <a:schemeClr val="tx1"/>
+                </a:solidFill>
+                <a:effectLst/>
+                <a:latin typeface="+mn-lt"/>
+                <a:ea typeface="+mn-ea"/>
+                <a:cs typeface="+mn-cs"/>
+              </a:rPr>
+              <a:t> - Identify the infrastructure for your project.</a:t>
+            </a:r>
+          </a:p>
+          <a:p>
+            <a:pPr marL="171450" indent="-171450">
+              <a:buFont typeface="Arial" panose="020B0604020202020204" pitchFamily="34" charset="0"/>
+              <a:buChar char="•"/>
+            </a:pPr>
+            <a:r>
+              <a:rPr lang="en-US" sz="1200" b="1" i="0" kern="1200" dirty="0" smtClean="0">
+                <a:solidFill>
+                  <a:schemeClr val="tx1"/>
+                </a:solidFill>
+                <a:effectLst/>
+                <a:latin typeface="+mn-lt"/>
+                <a:ea typeface="+mn-ea"/>
+                <a:cs typeface="+mn-cs"/>
+              </a:rPr>
+              <a:t>Author</a:t>
+            </a:r>
+            <a:r>
+              <a:rPr lang="en-US" sz="1200" b="0" i="0" kern="1200" dirty="0" smtClean="0">
+                <a:solidFill>
+                  <a:schemeClr val="tx1"/>
+                </a:solidFill>
+                <a:effectLst/>
+                <a:latin typeface="+mn-lt"/>
+                <a:ea typeface="+mn-ea"/>
+                <a:cs typeface="+mn-cs"/>
+              </a:rPr>
+              <a:t> - Write the configuration for your infrastructure.</a:t>
+            </a:r>
+          </a:p>
+          <a:p>
+            <a:pPr marL="171450" indent="-171450">
+              <a:buFont typeface="Arial" panose="020B0604020202020204" pitchFamily="34" charset="0"/>
+              <a:buChar char="•"/>
+            </a:pPr>
+            <a:r>
+              <a:rPr lang="en-US" sz="1200" b="1" i="0" kern="1200" dirty="0" smtClean="0">
+                <a:solidFill>
+                  <a:schemeClr val="tx1"/>
+                </a:solidFill>
+                <a:effectLst/>
+                <a:latin typeface="+mn-lt"/>
+                <a:ea typeface="+mn-ea"/>
+                <a:cs typeface="+mn-cs"/>
+              </a:rPr>
+              <a:t>Initialize</a:t>
+            </a:r>
+            <a:r>
+              <a:rPr lang="en-US" sz="1200" b="0" i="0" kern="1200" dirty="0" smtClean="0">
+                <a:solidFill>
+                  <a:schemeClr val="tx1"/>
+                </a:solidFill>
+                <a:effectLst/>
+                <a:latin typeface="+mn-lt"/>
+                <a:ea typeface="+mn-ea"/>
+                <a:cs typeface="+mn-cs"/>
+              </a:rPr>
+              <a:t> - Install the plugins Terraform needs to manage the infrastructure.</a:t>
+            </a:r>
+          </a:p>
+          <a:p>
+            <a:pPr marL="171450" indent="-171450">
+              <a:buFont typeface="Arial" panose="020B0604020202020204" pitchFamily="34" charset="0"/>
+              <a:buChar char="•"/>
+            </a:pPr>
+            <a:r>
+              <a:rPr lang="en-US" sz="1200" b="1" i="0" kern="1200" dirty="0" smtClean="0">
+                <a:solidFill>
+                  <a:schemeClr val="tx1"/>
+                </a:solidFill>
+                <a:effectLst/>
+                <a:latin typeface="+mn-lt"/>
+                <a:ea typeface="+mn-ea"/>
+                <a:cs typeface="+mn-cs"/>
+              </a:rPr>
+              <a:t>Plan</a:t>
+            </a:r>
+            <a:r>
+              <a:rPr lang="en-US" sz="1200" b="0" i="0" kern="1200" dirty="0" smtClean="0">
+                <a:solidFill>
+                  <a:schemeClr val="tx1"/>
+                </a:solidFill>
+                <a:effectLst/>
+                <a:latin typeface="+mn-lt"/>
+                <a:ea typeface="+mn-ea"/>
+                <a:cs typeface="+mn-cs"/>
+              </a:rPr>
+              <a:t> - Preview the changes Terraform will make to match your configuration.</a:t>
+            </a:r>
+          </a:p>
+          <a:p>
+            <a:pPr marL="171450" indent="-171450">
+              <a:buFont typeface="Arial" panose="020B0604020202020204" pitchFamily="34" charset="0"/>
+              <a:buChar char="•"/>
+            </a:pPr>
+            <a:r>
+              <a:rPr lang="en-US" sz="1200" b="1" i="0" kern="1200" dirty="0" smtClean="0">
+                <a:solidFill>
+                  <a:schemeClr val="tx1"/>
+                </a:solidFill>
+                <a:effectLst/>
+                <a:latin typeface="+mn-lt"/>
+                <a:ea typeface="+mn-ea"/>
+                <a:cs typeface="+mn-cs"/>
+              </a:rPr>
+              <a:t>Apply</a:t>
+            </a:r>
+            <a:r>
+              <a:rPr lang="en-US" sz="1200" b="0" i="0" kern="1200" dirty="0" smtClean="0">
+                <a:solidFill>
+                  <a:schemeClr val="tx1"/>
+                </a:solidFill>
+                <a:effectLst/>
+                <a:latin typeface="+mn-lt"/>
+                <a:ea typeface="+mn-ea"/>
+                <a:cs typeface="+mn-cs"/>
+              </a:rPr>
+              <a:t> - Make the </a:t>
+            </a:r>
+            <a:r>
+              <a:rPr lang="en-US" sz="1200" b="0" i="0" kern="1200" dirty="0" err="1" smtClean="0">
+                <a:solidFill>
+                  <a:schemeClr val="tx1"/>
+                </a:solidFill>
+                <a:effectLst/>
+                <a:latin typeface="+mn-lt"/>
+                <a:ea typeface="+mn-ea"/>
+                <a:cs typeface="+mn-cs"/>
+              </a:rPr>
+              <a:t>plannsed</a:t>
+            </a:r>
+            <a:r>
+              <a:rPr lang="en-US" sz="1200" b="0" i="0" kern="1200" dirty="0" smtClean="0">
+                <a:solidFill>
+                  <a:schemeClr val="tx1"/>
+                </a:solidFill>
+                <a:effectLst/>
+                <a:latin typeface="+mn-lt"/>
+                <a:ea typeface="+mn-ea"/>
+                <a:cs typeface="+mn-cs"/>
+              </a:rPr>
+              <a:t> changes.</a:t>
+            </a:r>
+          </a:p>
+          <a:p>
+            <a:pPr marL="171450" indent="-171450">
+              <a:buFont typeface="Arial" panose="020B0604020202020204" pitchFamily="34" charset="0"/>
+              <a:buChar char="•"/>
+            </a:pPr>
+            <a:endParaRPr lang="en-US" sz="1200" b="0" i="0" kern="1200" dirty="0" smtClean="0">
+              <a:solidFill>
+                <a:schemeClr val="tx1"/>
+              </a:solidFill>
+              <a:effectLst/>
+              <a:latin typeface="+mn-lt"/>
+              <a:ea typeface="+mn-ea"/>
+              <a:cs typeface="+mn-cs"/>
+            </a:endParaRPr>
+          </a:p>
+        </p:txBody>
+      </p:sp>
+      <p:sp>
+        <p:nvSpPr>
+          <p:cNvPr id="4" name="Slide Number Placeholder 3"/>
+          <p:cNvSpPr>
+            <a:spLocks noGrp="1"/>
+          </p:cNvSpPr>
+          <p:nvPr>
+            <p:ph type="sldNum" sz="quarter" idx="10"/>
+          </p:nvPr>
+        </p:nvSpPr>
+        <p:spPr/>
+        <p:txBody>
+          <a:bodyPr/>
+          <a:lstStyle/>
+          <a:p>
+            <a:fld id="{1E6958E2-2B4A-4C25-BF05-A265C473CB9D}" type="slidenum">
+              <a:rPr lang="en-US" smtClean="0"/>
+              <a:t>7</a:t>
+            </a:fld>
+            <a:endParaRPr lang="en-US"/>
+          </a:p>
+        </p:txBody>
+      </p:sp>
+    </p:spTree>
+    <p:extLst>
+      <p:ext uri="{BB962C8B-B14F-4D97-AF65-F5344CB8AC3E}">
+        <p14:creationId xmlns:p14="http://schemas.microsoft.com/office/powerpoint/2010/main" val="909782962"/>
+      </p:ext>
+    </p:extLst>
+  </p:cSld>
+  <p:clrMapOvr>
+    <a:masterClrMapping/>
+  </p:clrMapOvr>
+</p:notes>
+</file>
+
+<file path=ppt/notesSlides/notesSlide3.xml><?xml version="1.0" encoding="utf-8"?>
+<p:notes xmlns:a="http://schemas.openxmlformats.org/drawingml/2006/main" xmlns:r="http://schemas.openxmlformats.org/officeDocument/2006/relationships" xmlns:p="http://schemas.openxmlformats.org/presentationml/2006/main">
+  <p:cSld>
+    <p:spTree>
+      <p:nvGrpSpPr>
+        <p:cNvPr id="1" name=""/>
+        <p:cNvGrpSpPr/>
+        <p:nvPr/>
+      </p:nvGrpSpPr>
+      <p:grpSpPr>
+        <a:xfrm>
+          <a:off x="0" y="0"/>
+          <a:ext cx="0" cy="0"/>
+          <a:chOff x="0" y="0"/>
+          <a:chExt cx="0" cy="0"/>
+        </a:xfrm>
+      </p:grpSpPr>
+      <p:sp>
+        <p:nvSpPr>
+          <p:cNvPr id="2" name="Slide Image Placeholder 1"/>
+          <p:cNvSpPr>
+            <a:spLocks noGrp="1" noRot="1" noChangeAspect="1"/>
+          </p:cNvSpPr>
+          <p:nvPr>
+            <p:ph type="sldImg"/>
+          </p:nvPr>
+        </p:nvSpPr>
+        <p:spPr/>
+      </p:sp>
+      <p:sp>
+        <p:nvSpPr>
+          <p:cNvPr id="3" name="Notes Placeholder 2"/>
+          <p:cNvSpPr>
+            <a:spLocks noGrp="1"/>
+          </p:cNvSpPr>
+          <p:nvPr>
+            <p:ph type="body" idx="1"/>
+          </p:nvPr>
+        </p:nvSpPr>
+        <p:spPr/>
+        <p:txBody>
+          <a:bodyPr/>
+          <a:lstStyle/>
+          <a:p>
+            <a:r>
+              <a:rPr lang="en-US" dirty="0" err="1" smtClean="0"/>
+              <a:t>GitHub</a:t>
+            </a:r>
+            <a:r>
+              <a:rPr lang="en-US" dirty="0" smtClean="0"/>
+              <a:t> Actions is a </a:t>
+            </a:r>
+            <a:r>
+              <a:rPr lang="en-US" b="1" dirty="0" smtClean="0">
+                <a:effectLst/>
+              </a:rPr>
+              <a:t>continuous integration (CI)</a:t>
+            </a:r>
+            <a:r>
+              <a:rPr lang="en-US" dirty="0" smtClean="0"/>
+              <a:t> and continuous delivery (CD) platform that allows you to automate your software development workflows directly within your </a:t>
+            </a:r>
+            <a:r>
+              <a:rPr lang="en-US" dirty="0" err="1" smtClean="0"/>
+              <a:t>GitHub</a:t>
+            </a:r>
+            <a:r>
+              <a:rPr lang="en-US" dirty="0" smtClean="0"/>
+              <a:t> repository</a:t>
+            </a:r>
+            <a:r>
+              <a:rPr lang="en-US" sz="1200" b="0" i="0" kern="1200" dirty="0" smtClean="0">
+                <a:solidFill>
+                  <a:schemeClr val="tx1"/>
+                </a:solidFill>
+                <a:effectLst/>
+                <a:latin typeface="+mn-lt"/>
+                <a:ea typeface="+mn-ea"/>
+                <a:cs typeface="+mn-cs"/>
+              </a:rPr>
+              <a:t>. It provides a built-in, event-driven automation tool that is deeply integrated with the </a:t>
+            </a:r>
+            <a:r>
+              <a:rPr lang="en-US" sz="1200" b="0" i="0" kern="1200" dirty="0" err="1" smtClean="0">
+                <a:solidFill>
+                  <a:schemeClr val="tx1"/>
+                </a:solidFill>
+                <a:effectLst/>
+                <a:latin typeface="+mn-lt"/>
+                <a:ea typeface="+mn-ea"/>
+                <a:cs typeface="+mn-cs"/>
+              </a:rPr>
+              <a:t>GitHub</a:t>
+            </a:r>
+            <a:r>
+              <a:rPr lang="en-US" sz="1200" b="0" i="0" kern="1200" dirty="0" smtClean="0">
+                <a:solidFill>
+                  <a:schemeClr val="tx1"/>
+                </a:solidFill>
+                <a:effectLst/>
+                <a:latin typeface="+mn-lt"/>
+                <a:ea typeface="+mn-ea"/>
+                <a:cs typeface="+mn-cs"/>
+              </a:rPr>
+              <a:t> platform. </a:t>
+            </a:r>
+            <a:endParaRPr lang="en-US" dirty="0"/>
+          </a:p>
+        </p:txBody>
+      </p:sp>
+      <p:sp>
+        <p:nvSpPr>
+          <p:cNvPr id="4" name="Slide Number Placeholder 3"/>
+          <p:cNvSpPr>
+            <a:spLocks noGrp="1"/>
+          </p:cNvSpPr>
+          <p:nvPr>
+            <p:ph type="sldNum" sz="quarter" idx="10"/>
+          </p:nvPr>
+        </p:nvSpPr>
+        <p:spPr/>
+        <p:txBody>
+          <a:bodyPr/>
+          <a:lstStyle/>
+          <a:p>
+            <a:fld id="{1E6958E2-2B4A-4C25-BF05-A265C473CB9D}" type="slidenum">
+              <a:rPr lang="en-US" smtClean="0"/>
+              <a:t>8</a:t>
+            </a:fld>
+            <a:endParaRPr lang="en-US"/>
+          </a:p>
+        </p:txBody>
+      </p:sp>
+    </p:spTree>
+    <p:extLst>
+      <p:ext uri="{BB962C8B-B14F-4D97-AF65-F5344CB8AC3E}">
+        <p14:creationId xmlns:p14="http://schemas.microsoft.com/office/powerpoint/2010/main" val="839933383"/>
+      </p:ext>
+    </p:extLst>
+  </p:cSld>
+  <p:clrMapOvr>
+    <a:masterClrMapping/>
+  </p:clrMapOvr>
+</p:notes>
+</file>
+
+<file path=ppt/notesSlides/notesSlide4.xml><?xml version="1.0" encoding="utf-8"?>
+<p:notes xmlns:a="http://schemas.openxmlformats.org/drawingml/2006/main" xmlns:r="http://schemas.openxmlformats.org/officeDocument/2006/relationships" xmlns:p="http://schemas.openxmlformats.org/presentationml/2006/main">
+  <p:cSld>
+    <p:spTree>
+      <p:nvGrpSpPr>
+        <p:cNvPr id="1" name=""/>
+        <p:cNvGrpSpPr/>
+        <p:nvPr/>
+      </p:nvGrpSpPr>
+      <p:grpSpPr>
+        <a:xfrm>
+          <a:off x="0" y="0"/>
+          <a:ext cx="0" cy="0"/>
+          <a:chOff x="0" y="0"/>
+          <a:chExt cx="0" cy="0"/>
+        </a:xfrm>
+      </p:grpSpPr>
+      <p:sp>
+        <p:nvSpPr>
+          <p:cNvPr id="2" name="Slide Image Placeholder 1"/>
+          <p:cNvSpPr>
+            <a:spLocks noGrp="1" noRot="1" noChangeAspect="1"/>
+          </p:cNvSpPr>
+          <p:nvPr>
+            <p:ph type="sldImg"/>
+          </p:nvPr>
+        </p:nvSpPr>
+        <p:spPr/>
+      </p:sp>
+      <p:sp>
+        <p:nvSpPr>
+          <p:cNvPr id="3" name="Notes Placeholder 2"/>
+          <p:cNvSpPr>
+            <a:spLocks noGrp="1"/>
+          </p:cNvSpPr>
+          <p:nvPr>
+            <p:ph type="body" idx="1"/>
+          </p:nvPr>
+        </p:nvSpPr>
+        <p:spPr/>
+        <p:txBody>
+          <a:bodyPr/>
+          <a:lstStyle/>
+          <a:p>
+            <a:r>
+              <a:rPr lang="en-US" dirty="0" smtClean="0"/>
+              <a:t>Azure Container Registry (ACR) and </a:t>
+            </a:r>
+            <a:r>
+              <a:rPr lang="en-US" dirty="0" err="1" smtClean="0"/>
+              <a:t>Docker</a:t>
+            </a:r>
+            <a:r>
+              <a:rPr lang="en-US" dirty="0" smtClean="0"/>
+              <a:t> Hub are both container registries used to store, manage, and distribute container images. The key difference is that </a:t>
+            </a:r>
+            <a:r>
+              <a:rPr lang="en-US" dirty="0" err="1" smtClean="0"/>
+              <a:t>Docker</a:t>
+            </a:r>
+            <a:r>
+              <a:rPr lang="en-US" dirty="0" smtClean="0"/>
+              <a:t> Hub is a public-facing registry and central library, while ACR is a private, fully managed service that integrates deeply with the Microsoft Azure ecosystem. </a:t>
+            </a:r>
+          </a:p>
+          <a:p>
+            <a:endParaRPr lang="en-US" dirty="0" smtClean="0"/>
+          </a:p>
+        </p:txBody>
+      </p:sp>
+      <p:sp>
+        <p:nvSpPr>
+          <p:cNvPr id="4" name="Slide Number Placeholder 3"/>
+          <p:cNvSpPr>
+            <a:spLocks noGrp="1"/>
+          </p:cNvSpPr>
+          <p:nvPr>
+            <p:ph type="sldNum" sz="quarter" idx="10"/>
+          </p:nvPr>
+        </p:nvSpPr>
+        <p:spPr/>
+        <p:txBody>
+          <a:bodyPr/>
+          <a:lstStyle/>
+          <a:p>
+            <a:fld id="{1E6958E2-2B4A-4C25-BF05-A265C473CB9D}" type="slidenum">
+              <a:rPr lang="en-US" smtClean="0"/>
+              <a:t>9</a:t>
+            </a:fld>
+            <a:endParaRPr lang="en-US"/>
+          </a:p>
+        </p:txBody>
+      </p:sp>
+    </p:spTree>
+    <p:extLst>
+      <p:ext uri="{BB962C8B-B14F-4D97-AF65-F5344CB8AC3E}">
+        <p14:creationId xmlns:p14="http://schemas.microsoft.com/office/powerpoint/2010/main" val="43911317"/>
+      </p:ext>
+    </p:extLst>
+  </p:cSld>
+  <p:clrMapOvr>
+    <a:masterClrMapping/>
+  </p:clrMapOvr>
+</p:notes>
+</file>
+
+<file path=ppt/notesSlides/notesSlide5.xml><?xml version="1.0" encoding="utf-8"?>
+<p:notes xmlns:a="http://schemas.openxmlformats.org/drawingml/2006/main" xmlns:r="http://schemas.openxmlformats.org/officeDocument/2006/relationships" xmlns:p="http://schemas.openxmlformats.org/presentationml/2006/main">
+  <p:cSld>
+    <p:spTree>
+      <p:nvGrpSpPr>
+        <p:cNvPr id="1" name=""/>
+        <p:cNvGrpSpPr/>
+        <p:nvPr/>
+      </p:nvGrpSpPr>
+      <p:grpSpPr>
+        <a:xfrm>
+          <a:off x="0" y="0"/>
+          <a:ext cx="0" cy="0"/>
+          <a:chOff x="0" y="0"/>
+          <a:chExt cx="0" cy="0"/>
+        </a:xfrm>
+      </p:grpSpPr>
+      <p:sp>
+        <p:nvSpPr>
+          <p:cNvPr id="2" name="Slide Image Placeholder 1"/>
+          <p:cNvSpPr>
+            <a:spLocks noGrp="1" noRot="1" noChangeAspect="1"/>
+          </p:cNvSpPr>
+          <p:nvPr>
+            <p:ph type="sldImg"/>
+          </p:nvPr>
+        </p:nvSpPr>
+        <p:spPr/>
+      </p:sp>
+      <p:sp>
+        <p:nvSpPr>
+          <p:cNvPr id="3" name="Notes Placeholder 2"/>
+          <p:cNvSpPr>
+            <a:spLocks noGrp="1"/>
+          </p:cNvSpPr>
+          <p:nvPr>
+            <p:ph type="body" idx="1"/>
+          </p:nvPr>
+        </p:nvSpPr>
+        <p:spPr/>
+        <p:txBody>
+          <a:bodyPr/>
+          <a:lstStyle/>
+          <a:p>
+            <a:r>
+              <a:rPr lang="en-US" dirty="0" smtClean="0"/>
+              <a:t>Argo CD is an open-source, declarative </a:t>
+            </a:r>
+            <a:r>
+              <a:rPr lang="en-US" b="1" dirty="0" smtClean="0">
+                <a:effectLst/>
+              </a:rPr>
+              <a:t>Continuous Delivery (CD) tool for </a:t>
+            </a:r>
+            <a:r>
+              <a:rPr lang="en-US" b="1" dirty="0" err="1" smtClean="0">
+                <a:effectLst/>
+              </a:rPr>
+              <a:t>Kubernetes</a:t>
+            </a:r>
+            <a:r>
+              <a:rPr lang="en-US" dirty="0" smtClean="0"/>
+              <a:t> that implements the principles of </a:t>
+            </a:r>
+            <a:r>
+              <a:rPr lang="en-US" b="1" dirty="0" err="1" smtClean="0">
+                <a:effectLst/>
+              </a:rPr>
+              <a:t>GitOps</a:t>
+            </a:r>
+            <a:r>
+              <a:rPr lang="en-US" sz="1200" b="0" i="0" kern="1200" dirty="0" smtClean="0">
+                <a:solidFill>
+                  <a:schemeClr val="tx1"/>
+                </a:solidFill>
+                <a:effectLst/>
+                <a:latin typeface="+mn-lt"/>
+                <a:ea typeface="+mn-ea"/>
+                <a:cs typeface="+mn-cs"/>
+              </a:rPr>
+              <a:t>. It automates the deployment and lifecycle management of applications by using a </a:t>
+            </a:r>
+            <a:r>
+              <a:rPr lang="en-US" sz="1200" b="0" i="0" kern="1200" dirty="0" err="1" smtClean="0">
+                <a:solidFill>
+                  <a:schemeClr val="tx1"/>
+                </a:solidFill>
+                <a:effectLst/>
+                <a:latin typeface="+mn-lt"/>
+                <a:ea typeface="+mn-ea"/>
+                <a:cs typeface="+mn-cs"/>
+              </a:rPr>
+              <a:t>Git</a:t>
+            </a:r>
+            <a:r>
+              <a:rPr lang="en-US" sz="1200" b="0" i="0" kern="1200" dirty="0" smtClean="0">
+                <a:solidFill>
+                  <a:schemeClr val="tx1"/>
+                </a:solidFill>
+                <a:effectLst/>
+                <a:latin typeface="+mn-lt"/>
+                <a:ea typeface="+mn-ea"/>
+                <a:cs typeface="+mn-cs"/>
+              </a:rPr>
+              <a:t> repository as the single source of truth for the desired application state. </a:t>
+            </a:r>
+            <a:endParaRPr lang="en-US" dirty="0"/>
+          </a:p>
+        </p:txBody>
+      </p:sp>
+      <p:sp>
+        <p:nvSpPr>
+          <p:cNvPr id="4" name="Slide Number Placeholder 3"/>
+          <p:cNvSpPr>
+            <a:spLocks noGrp="1"/>
+          </p:cNvSpPr>
+          <p:nvPr>
+            <p:ph type="sldNum" sz="quarter" idx="10"/>
+          </p:nvPr>
+        </p:nvSpPr>
+        <p:spPr/>
+        <p:txBody>
+          <a:bodyPr/>
+          <a:lstStyle/>
+          <a:p>
+            <a:fld id="{1E6958E2-2B4A-4C25-BF05-A265C473CB9D}" type="slidenum">
+              <a:rPr lang="en-US" smtClean="0"/>
+              <a:t>11</a:t>
+            </a:fld>
+            <a:endParaRPr lang="en-US"/>
+          </a:p>
+        </p:txBody>
+      </p:sp>
+    </p:spTree>
+    <p:extLst>
+      <p:ext uri="{BB962C8B-B14F-4D97-AF65-F5344CB8AC3E}">
+        <p14:creationId xmlns:p14="http://schemas.microsoft.com/office/powerpoint/2010/main" val="423445005"/>
+      </p:ext>
+    </p:extLst>
+  </p:cSld>
+  <p:clrMapOvr>
+    <a:masterClrMapping/>
+  </p:clrMapOvr>
+</p:notes>
 </file>
 
 <file path=ppt/slideLayouts/slideLayout1.xml><?xml version="1.0" encoding="utf-8"?>
@@ -3335,34 +5220,34 @@
               <a:buNone/>
             </a:pPr>
             <a:r>
-              <a:rPr i="1" dirty="0" err="1" smtClean="0">
+              <a:rPr i="1" dirty="0" smtClean="0">
                 <a:solidFill>
                   <a:schemeClr val="accent3">
                     <a:lumMod val="75000"/>
                   </a:schemeClr>
                 </a:solidFill>
               </a:rPr>
-              <a:t>Terraform</a:t>
-            </a:r>
-            <a:r>
-              <a:rPr i="1" dirty="0" smtClean="0">
+              <a:t>Terraform • </a:t>
+            </a:r>
+            <a:r>
+              <a:rPr i="1" dirty="0" err="1" smtClean="0">
                 <a:solidFill>
                   <a:schemeClr val="accent3">
                     <a:lumMod val="75000"/>
                   </a:schemeClr>
                 </a:solidFill>
               </a:rPr>
-              <a:t> • </a:t>
-            </a:r>
-            <a:r>
-              <a:rPr i="1" dirty="0" err="1" smtClean="0">
+              <a:t>GitHub</a:t>
+            </a:r>
+            <a:r>
+              <a:rPr i="1" dirty="0" smtClean="0">
                 <a:solidFill>
                   <a:schemeClr val="accent3">
                     <a:lumMod val="75000"/>
                   </a:schemeClr>
                 </a:solidFill>
               </a:rPr>
-              <a:t>GitHub</a:t>
+              <a:t> </a:t>
             </a:r>
             <a:r>
               <a:rPr i="1" dirty="0" smtClean="0">
@@ -3372,7 +5257,67 @@
                   </a:schemeClr>
                 </a:solidFill>
               </a:rPr>
-              <a:t> Actions • AKS • Argo CD • Prometheus • </a:t>
+              <a:t>Actions </a:t>
+            </a:r>
+            <a:r>
+              <a:rPr lang="en-US" i="1" dirty="0" smtClean="0">
+                <a:solidFill>
+                  <a:schemeClr val="accent3">
+                    <a:lumMod val="75000"/>
+                  </a:schemeClr>
+                </a:solidFill>
+              </a:rPr>
+              <a:t>• </a:t>
+            </a:r>
+            <a:r>
+              <a:rPr lang="en-US" i="1" dirty="0" err="1" smtClean="0">
+                <a:solidFill>
+                  <a:schemeClr val="accent3">
+                    <a:lumMod val="75000"/>
+                  </a:schemeClr>
+                </a:solidFill>
+              </a:rPr>
+              <a:t>DockerHub</a:t>
+            </a:r>
+            <a:r>
+              <a:rPr lang="en-US" i="1" dirty="0" smtClean="0">
+                <a:solidFill>
+                  <a:schemeClr val="accent3">
+                    <a:lumMod val="75000"/>
+                  </a:schemeClr>
+                </a:solidFill>
+              </a:rPr>
+              <a:t>/ACR •</a:t>
+            </a:r>
+            <a:r>
+              <a:rPr lang="en-US" i="1" dirty="0">
+                <a:solidFill>
+                  <a:schemeClr val="accent3">
+                    <a:lumMod val="75000"/>
+                  </a:schemeClr>
+                </a:solidFill>
+              </a:rPr>
+              <a:t> </a:t>
+            </a:r>
+            <a:r>
+              <a:rPr i="1" dirty="0" smtClean="0">
+                <a:solidFill>
+                  <a:schemeClr val="accent3">
+                    <a:lumMod val="75000"/>
+                  </a:schemeClr>
+                </a:solidFill>
+              </a:rPr>
+              <a:t>AKS </a:t>
+            </a:r>
+            <a:r>
+              <a:rPr i="1" dirty="0" smtClean="0">
+                <a:solidFill>
+                  <a:schemeClr val="accent3">
+                    <a:lumMod val="75000"/>
+                  </a:schemeClr>
+                </a:solidFill>
+              </a:rPr>
+              <a:t>• Argo CD • Prometheus • </a:t>
             </a:r>
             <a:r>
               <a:rPr i="1" dirty="0" err="1" smtClean="0">
@@ -3476,8 +5421,8 @@
         </p:nvSpPr>
         <p:spPr>
           <a:xfrm>
-            <a:off x="486382" y="243191"/>
-            <a:ext cx="8200417" cy="1174447"/>
+            <a:off x="428017" y="301556"/>
+            <a:ext cx="8258783" cy="1116081"/>
           </a:xfrm>
         </p:spPr>
         <p:txBody>
@@ -3494,8 +5439,53 @@
                 <a:latin typeface="Arial" panose="020B0604020202020204" pitchFamily="34" charset="0"/>
                 <a:cs typeface="Arial" panose="020B0604020202020204" pitchFamily="34" charset="0"/>
               </a:rPr>
-              <a:t>Automatic Image Updates</a:t>
-            </a:r>
+              <a:t>CD: </a:t>
+            </a:r>
+            <a:r>
+              <a:rPr b="1" dirty="0" err="1">
+                <a:solidFill>
+                  <a:schemeClr val="tx2">
+                    <a:lumMod val="75000"/>
+                  </a:schemeClr>
+                </a:solidFill>
+                <a:latin typeface="Arial" panose="020B0604020202020204" pitchFamily="34" charset="0"/>
+                <a:cs typeface="Arial" panose="020B0604020202020204" pitchFamily="34" charset="0"/>
+              </a:rPr>
+              <a:t>GitOps</a:t>
+            </a:r>
+            <a:r>
+              <a:rPr b="1" dirty="0">
+                <a:solidFill>
+                  <a:schemeClr val="tx2">
+                    <a:lumMod val="75000"/>
+                  </a:schemeClr>
+                </a:solidFill>
+                <a:latin typeface="Arial" panose="020B0604020202020204" pitchFamily="34" charset="0"/>
+                <a:cs typeface="Arial" panose="020B0604020202020204" pitchFamily="34" charset="0"/>
+              </a:rPr>
+              <a:t> with </a:t>
+            </a:r>
+            <a:r>
+              <a:rPr b="1" dirty="0" err="1" smtClean="0">
+                <a:solidFill>
+                  <a:schemeClr val="tx2">
+                    <a:lumMod val="75000"/>
+                  </a:schemeClr>
+                </a:solidFill>
+                <a:latin typeface="Arial" panose="020B0604020202020204" pitchFamily="34" charset="0"/>
+                <a:cs typeface="Arial" panose="020B0604020202020204" pitchFamily="34" charset="0"/>
+              </a:rPr>
+              <a:t>ArgoCD</a:t>
+            </a:r>
+            <a:endParaRPr b="1" dirty="0">
+              <a:solidFill>
+                <a:schemeClr val="tx2">
+                  <a:lumMod val="75000"/>
+                </a:schemeClr>
+              </a:solidFill>
+              <a:latin typeface="Arial" panose="020B0604020202020204" pitchFamily="34" charset="0"/>
+              <a:cs typeface="Arial" panose="020B0604020202020204" pitchFamily="34" charset="0"/>
+            </a:endParaRPr>
           </a:p>
         </p:txBody>
       </p:sp>
@@ -3519,15 +5509,50 @@
           <a:bodyPr/>
           <a:lstStyle/>
           <a:p>
-            <a:pPr marL="0" indent="0">
+            <a:pPr marL="0" indent="0" algn="just">
               <a:buNone/>
             </a:pPr>
+            <a:r>
+              <a:rPr dirty="0" err="1" smtClean="0">
+                <a:latin typeface="Times New Roman" panose="02020603050405020304" pitchFamily="18" charset="0"/>
+                <a:cs typeface="Times New Roman" panose="02020603050405020304" pitchFamily="18" charset="0"/>
+              </a:rPr>
+              <a:t>Git</a:t>
+            </a:r>
+            <a:r>
+              <a:rPr dirty="0" smtClean="0">
+                <a:latin typeface="Times New Roman" panose="02020603050405020304" pitchFamily="18" charset="0"/>
+                <a:cs typeface="Times New Roman" panose="02020603050405020304" pitchFamily="18" charset="0"/>
+              </a:rPr>
+              <a:t> </a:t>
+            </a:r>
+            <a:r>
+              <a:rPr dirty="0">
+                <a:latin typeface="Times New Roman" panose="02020603050405020304" pitchFamily="18" charset="0"/>
+                <a:cs typeface="Times New Roman" panose="02020603050405020304" pitchFamily="18" charset="0"/>
+              </a:rPr>
+              <a:t>as single source of </a:t>
+            </a:r>
+            <a:r>
+              <a:rPr dirty="0" smtClean="0">
+                <a:latin typeface="Times New Roman" panose="02020603050405020304" pitchFamily="18" charset="0"/>
+                <a:cs typeface="Times New Roman" panose="02020603050405020304" pitchFamily="18" charset="0"/>
+              </a:rPr>
+              <a:t>truth</a:t>
+            </a:r>
+            <a:r>
+              <a:rPr lang="en-US" dirty="0">
+                <a:latin typeface="Times New Roman" panose="02020603050405020304" pitchFamily="18" charset="0"/>
+                <a:cs typeface="Times New Roman" panose="02020603050405020304" pitchFamily="18" charset="0"/>
+              </a:rPr>
+              <a:t>.</a:t>
+            </a:r>
             <a:r>
               <a:rPr lang="en-US" dirty="0" smtClean="0">
                 <a:latin typeface="Times New Roman" panose="02020603050405020304" pitchFamily="18" charset="0"/>
                 <a:cs typeface="Times New Roman" panose="02020603050405020304" pitchFamily="18" charset="0"/>
               </a:rPr>
-              <a:t>Manual image tag updates are error prone</a:t>
+              <a:t> It’s declarative, versioned &amp; immutable, pulled automatically and continuously reconciled</a:t>
             </a:r>
           </a:p>
           <a:p>
@@ -3538,75 +5563,62 @@
           </a:p>
           <a:p>
             <a:r>
-              <a:rPr dirty="0" smtClean="0">
-                <a:latin typeface="Times New Roman" panose="02020603050405020304" pitchFamily="18" charset="0"/>
-                <a:cs typeface="Times New Roman" panose="02020603050405020304" pitchFamily="18" charset="0"/>
-              </a:rPr>
-              <a:t>Argo </a:t>
-            </a:r>
-            <a:r>
-              <a:rPr dirty="0">
-                <a:latin typeface="Times New Roman" panose="02020603050405020304" pitchFamily="18" charset="0"/>
-                <a:cs typeface="Times New Roman" panose="02020603050405020304" pitchFamily="18" charset="0"/>
-              </a:rPr>
-              <a:t>CD Image Updater</a:t>
-            </a:r>
-          </a:p>
-          <a:p>
-            <a:r>
-              <a:rPr dirty="0" smtClean="0">
-                <a:latin typeface="Times New Roman" panose="02020603050405020304" pitchFamily="18" charset="0"/>
-                <a:cs typeface="Times New Roman" panose="02020603050405020304" pitchFamily="18" charset="0"/>
-              </a:rPr>
-              <a:t>Detects </a:t>
-            </a:r>
-            <a:r>
-              <a:rPr dirty="0">
-                <a:latin typeface="Times New Roman" panose="02020603050405020304" pitchFamily="18" charset="0"/>
-                <a:cs typeface="Times New Roman" panose="02020603050405020304" pitchFamily="18" charset="0"/>
-              </a:rPr>
-              <a:t>new images in ACR</a:t>
-            </a:r>
-          </a:p>
-          <a:p>
-            <a:r>
-              <a:rPr dirty="0" smtClean="0">
-                <a:latin typeface="Times New Roman" panose="02020603050405020304" pitchFamily="18" charset="0"/>
-                <a:cs typeface="Times New Roman" panose="02020603050405020304" pitchFamily="18" charset="0"/>
-              </a:rPr>
-              <a:t>Updates </a:t>
-            </a:r>
-            <a:r>
-              <a:rPr dirty="0">
-                <a:latin typeface="Times New Roman" panose="02020603050405020304" pitchFamily="18" charset="0"/>
-                <a:cs typeface="Times New Roman" panose="02020603050405020304" pitchFamily="18" charset="0"/>
-              </a:rPr>
-              <a:t>manifests </a:t>
-            </a:r>
-            <a:r>
-              <a:rPr dirty="0" smtClean="0">
-                <a:latin typeface="Times New Roman" panose="02020603050405020304" pitchFamily="18" charset="0"/>
-                <a:cs typeface="Times New Roman" panose="02020603050405020304" pitchFamily="18" charset="0"/>
-              </a:rPr>
-              <a:t>automatically</a:t>
-            </a:r>
-            <a:endParaRPr lang="en-US" dirty="0" smtClean="0">
-              <a:latin typeface="Times New Roman" panose="02020603050405020304" pitchFamily="18" charset="0"/>
-              <a:cs typeface="Times New Roman" panose="02020603050405020304" pitchFamily="18" charset="0"/>
-            </a:endParaRPr>
-          </a:p>
-          <a:p>
-            <a:r>
               <a:rPr lang="en-US" dirty="0" smtClean="0">
                 <a:latin typeface="Times New Roman" panose="02020603050405020304" pitchFamily="18" charset="0"/>
                 <a:cs typeface="Times New Roman" panose="02020603050405020304" pitchFamily="18" charset="0"/>
               </a:rPr>
-              <a:t>Triggers redeployment without manual action</a:t>
+              <a:t>Watches </a:t>
+            </a:r>
+            <a:r>
+              <a:rPr lang="en-US" dirty="0" err="1" smtClean="0">
+                <a:latin typeface="Times New Roman" panose="02020603050405020304" pitchFamily="18" charset="0"/>
+                <a:cs typeface="Times New Roman" panose="02020603050405020304" pitchFamily="18" charset="0"/>
+              </a:rPr>
+              <a:t>GitHub</a:t>
+            </a:r>
+            <a:r>
+              <a:rPr lang="en-US" dirty="0" smtClean="0">
+                <a:latin typeface="Times New Roman" panose="02020603050405020304" pitchFamily="18" charset="0"/>
+                <a:cs typeface="Times New Roman" panose="02020603050405020304" pitchFamily="18" charset="0"/>
+              </a:rPr>
+              <a:t> Repository</a:t>
             </a:r>
             <a:endParaRPr dirty="0">
               <a:latin typeface="Times New Roman" panose="02020603050405020304" pitchFamily="18" charset="0"/>
               <a:cs typeface="Times New Roman" panose="02020603050405020304" pitchFamily="18" charset="0"/>
             </a:endParaRPr>
+          </a:p>
+          <a:p>
+            <a:r>
+              <a:rPr dirty="0" smtClean="0">
+                <a:latin typeface="Times New Roman" panose="02020603050405020304" pitchFamily="18" charset="0"/>
+                <a:cs typeface="Times New Roman" panose="02020603050405020304" pitchFamily="18" charset="0"/>
+              </a:rPr>
+              <a:t>Automated </a:t>
+            </a:r>
+            <a:r>
+              <a:rPr dirty="0">
+                <a:latin typeface="Times New Roman" panose="02020603050405020304" pitchFamily="18" charset="0"/>
+                <a:cs typeface="Times New Roman" panose="02020603050405020304" pitchFamily="18" charset="0"/>
+              </a:rPr>
+              <a:t>sync to AKS</a:t>
+            </a:r>
+          </a:p>
+          <a:p>
+            <a:r>
+              <a:rPr dirty="0" smtClean="0">
+                <a:latin typeface="Times New Roman" panose="02020603050405020304" pitchFamily="18" charset="0"/>
+                <a:cs typeface="Times New Roman" panose="02020603050405020304" pitchFamily="18" charset="0"/>
+              </a:rPr>
+              <a:t>Self-healing </a:t>
+            </a:r>
+            <a:r>
+              <a:rPr dirty="0">
+                <a:latin typeface="Times New Roman" panose="02020603050405020304" pitchFamily="18" charset="0"/>
+                <a:cs typeface="Times New Roman" panose="02020603050405020304" pitchFamily="18" charset="0"/>
+              </a:rPr>
+              <a:t>deployments</a:t>
+            </a:r>
           </a:p>
         </p:txBody>
       </p:sp>
@@ -3664,13 +5676,18 @@
             <p:ph type="title"/>
           </p:nvPr>
         </p:nvSpPr>
-        <p:spPr/>
+        <p:spPr>
+          <a:xfrm>
+            <a:off x="486382" y="54350"/>
+            <a:ext cx="8200417" cy="1174447"/>
+          </a:xfrm>
+        </p:spPr>
         <p:txBody>
           <a:bodyPr/>
           <a:lstStyle/>
           <a:p>
             <a:r>
-              <a:rPr b="1" dirty="0">
+              <a:rPr b="1" dirty="0" err="1" smtClean="0">
                 <a:solidFill>
                   <a:schemeClr val="tx2">
                     <a:lumMod val="75000"/>
@@ -3679,163 +5696,73 @@
                 <a:latin typeface="Arial" panose="020B0604020202020204" pitchFamily="34" charset="0"/>
                 <a:cs typeface="Arial" panose="020B0604020202020204" pitchFamily="34" charset="0"/>
               </a:rPr>
-              <a:t>Observability</a:t>
-            </a:r>
-          </a:p>
-        </p:txBody>
-      </p:sp>
-      <p:sp>
-        <p:nvSpPr>
-          <p:cNvPr id="3" name="Content Placeholder 2"/>
-          <p:cNvSpPr>
-            <a:spLocks noGrp="1"/>
-          </p:cNvSpPr>
+              <a:t>A</a:t>
+            </a:r>
+            <a:r>
+              <a:rPr lang="en-US" b="1" dirty="0" err="1" smtClean="0">
+                <a:solidFill>
+                  <a:schemeClr val="tx2">
+                    <a:lumMod val="75000"/>
+                  </a:schemeClr>
+                </a:solidFill>
+                <a:latin typeface="Arial" panose="020B0604020202020204" pitchFamily="34" charset="0"/>
+                <a:cs typeface="Arial" panose="020B0604020202020204" pitchFamily="34" charset="0"/>
+              </a:rPr>
+              <a:t>rgoCD</a:t>
+            </a:r>
+            <a:r>
+              <a:rPr lang="en-US" b="1" dirty="0" smtClean="0">
+                <a:solidFill>
+                  <a:schemeClr val="tx2">
+                    <a:lumMod val="75000"/>
+                  </a:schemeClr>
+                </a:solidFill>
+                <a:latin typeface="Arial" panose="020B0604020202020204" pitchFamily="34" charset="0"/>
+                <a:cs typeface="Arial" panose="020B0604020202020204" pitchFamily="34" charset="0"/>
+              </a:rPr>
+              <a:t> Workflow</a:t>
+            </a:r>
+            <a:endParaRPr b="1" dirty="0">
+              <a:solidFill>
+                <a:schemeClr val="tx2">
+                  <a:lumMod val="75000"/>
+                </a:schemeClr>
+              </a:solidFill>
+              <a:latin typeface="Arial" panose="020B0604020202020204" pitchFamily="34" charset="0"/>
+              <a:cs typeface="Arial" panose="020B0604020202020204" pitchFamily="34" charset="0"/>
+            </a:endParaRPr>
+          </a:p>
+        </p:txBody>
+      </p:sp>
+      <p:pic>
+        <p:nvPicPr>
+          <p:cNvPr id="4" name="Content Placeholder 3"/>
+          <p:cNvPicPr>
+            <a:picLocks noGrp="1" noChangeAspect="1"/>
+          </p:cNvPicPr>
           <p:nvPr>
             <p:ph idx="1"/>
           </p:nvPr>
-        </p:nvSpPr>
-        <p:spPr/>
-        <p:txBody>
-          <a:bodyPr>
-            <a:normAutofit lnSpcReduction="10000"/>
-          </a:bodyPr>
-          <a:lstStyle/>
-          <a:p>
-            <a:pPr marL="0" indent="0">
-              <a:buNone/>
-            </a:pPr>
-            <a:r>
-              <a:rPr b="1" dirty="0" smtClean="0">
-                <a:latin typeface="Times New Roman" panose="02020603050405020304" pitchFamily="18" charset="0"/>
-                <a:cs typeface="Times New Roman" panose="02020603050405020304" pitchFamily="18" charset="0"/>
-              </a:rPr>
-              <a:t>Prometheus</a:t>
-            </a:r>
-            <a:r>
-              <a:rPr lang="en-US" dirty="0" smtClean="0">
-                <a:latin typeface="Times New Roman" panose="02020603050405020304" pitchFamily="18" charset="0"/>
-                <a:cs typeface="Times New Roman" panose="02020603050405020304" pitchFamily="18" charset="0"/>
-              </a:rPr>
-              <a:t>:</a:t>
-            </a:r>
-          </a:p>
-          <a:p>
-            <a:r>
-              <a:rPr lang="en-US" dirty="0" smtClean="0">
-                <a:latin typeface="Times New Roman" panose="02020603050405020304" pitchFamily="18" charset="0"/>
-                <a:cs typeface="Times New Roman" panose="02020603050405020304" pitchFamily="18" charset="0"/>
-              </a:rPr>
-              <a:t>Scrapes application &amp; cluster</a:t>
-            </a:r>
-            <a:r>
-              <a:rPr dirty="0" smtClean="0">
-                <a:latin typeface="Times New Roman" panose="02020603050405020304" pitchFamily="18" charset="0"/>
-                <a:cs typeface="Times New Roman" panose="02020603050405020304" pitchFamily="18" charset="0"/>
-              </a:rPr>
-              <a:t> </a:t>
-            </a:r>
-            <a:r>
-              <a:rPr dirty="0">
-                <a:latin typeface="Times New Roman" panose="02020603050405020304" pitchFamily="18" charset="0"/>
-                <a:cs typeface="Times New Roman" panose="02020603050405020304" pitchFamily="18" charset="0"/>
-              </a:rPr>
-              <a:t>metrics </a:t>
-            </a:r>
-            <a:endParaRPr lang="en-US" dirty="0" smtClean="0">
-              <a:latin typeface="Times New Roman" panose="02020603050405020304" pitchFamily="18" charset="0"/>
-              <a:cs typeface="Times New Roman" panose="02020603050405020304" pitchFamily="18" charset="0"/>
-            </a:endParaRPr>
-          </a:p>
-          <a:p>
-            <a:r>
-              <a:rPr lang="en-US" dirty="0" smtClean="0">
-                <a:latin typeface="Times New Roman" panose="02020603050405020304" pitchFamily="18" charset="0"/>
-                <a:cs typeface="Times New Roman" panose="02020603050405020304" pitchFamily="18" charset="0"/>
-              </a:rPr>
-              <a:t>Collects CPU, Memory metrics</a:t>
-            </a:r>
-          </a:p>
-          <a:p>
-            <a:pPr marL="0" indent="0">
-              <a:buNone/>
-            </a:pPr>
-            <a:r>
-              <a:rPr b="1" dirty="0" err="1" smtClean="0">
-                <a:latin typeface="Times New Roman" panose="02020603050405020304" pitchFamily="18" charset="0"/>
-                <a:cs typeface="Times New Roman" panose="02020603050405020304" pitchFamily="18" charset="0"/>
-              </a:rPr>
-              <a:t>Grafana</a:t>
-            </a:r>
-            <a:r>
-              <a:rPr lang="en-US" dirty="0">
-                <a:latin typeface="Times New Roman" panose="02020603050405020304" pitchFamily="18" charset="0"/>
-                <a:cs typeface="Times New Roman" panose="02020603050405020304" pitchFamily="18" charset="0"/>
-              </a:rPr>
-              <a:t>:</a:t>
-            </a:r>
-            <a:endParaRPr lang="en-US" dirty="0" smtClean="0">
-              <a:latin typeface="Times New Roman" panose="02020603050405020304" pitchFamily="18" charset="0"/>
-              <a:cs typeface="Times New Roman" panose="02020603050405020304" pitchFamily="18" charset="0"/>
-            </a:endParaRPr>
-          </a:p>
-          <a:p>
-            <a:r>
-              <a:rPr lang="en-US" dirty="0" smtClean="0">
-                <a:latin typeface="Times New Roman" panose="02020603050405020304" pitchFamily="18" charset="0"/>
-                <a:cs typeface="Times New Roman" panose="02020603050405020304" pitchFamily="18" charset="0"/>
-              </a:rPr>
-              <a:t>V</a:t>
-            </a:r>
-            <a:r>
-              <a:rPr dirty="0" smtClean="0">
-                <a:latin typeface="Times New Roman" panose="02020603050405020304" pitchFamily="18" charset="0"/>
-                <a:cs typeface="Times New Roman" panose="02020603050405020304" pitchFamily="18" charset="0"/>
-              </a:rPr>
-              <a:t>isualiz</a:t>
-            </a:r>
-            <a:r>
-              <a:rPr lang="en-US" dirty="0" smtClean="0">
-                <a:latin typeface="Times New Roman" panose="02020603050405020304" pitchFamily="18" charset="0"/>
-                <a:cs typeface="Times New Roman" panose="02020603050405020304" pitchFamily="18" charset="0"/>
-              </a:rPr>
-              <a:t>e metrics</a:t>
-            </a:r>
-          </a:p>
-          <a:p>
-            <a:r>
-              <a:rPr lang="en-US" dirty="0" smtClean="0">
-                <a:latin typeface="Times New Roman" panose="02020603050405020304" pitchFamily="18" charset="0"/>
-                <a:cs typeface="Times New Roman" panose="02020603050405020304" pitchFamily="18" charset="0"/>
-              </a:rPr>
-              <a:t>Dashboard for</a:t>
-            </a:r>
-          </a:p>
-          <a:p>
-            <a:pPr lvl="1"/>
-            <a:r>
-              <a:rPr lang="en-US" dirty="0" smtClean="0">
-                <a:latin typeface="Times New Roman" panose="02020603050405020304" pitchFamily="18" charset="0"/>
-                <a:cs typeface="Times New Roman" panose="02020603050405020304" pitchFamily="18" charset="0"/>
-              </a:rPr>
-              <a:t>Application performance</a:t>
-            </a:r>
-          </a:p>
-          <a:p>
-            <a:pPr lvl="1"/>
-            <a:r>
-              <a:rPr lang="en-US" dirty="0" smtClean="0">
-                <a:latin typeface="Times New Roman" panose="02020603050405020304" pitchFamily="18" charset="0"/>
-                <a:cs typeface="Times New Roman" panose="02020603050405020304" pitchFamily="18" charset="0"/>
-              </a:rPr>
-              <a:t>Pod &amp; node resource usage</a:t>
-            </a:r>
-            <a:endParaRPr dirty="0">
-              <a:latin typeface="Times New Roman" panose="02020603050405020304" pitchFamily="18" charset="0"/>
-              <a:cs typeface="Times New Roman" panose="02020603050405020304" pitchFamily="18" charset="0"/>
-            </a:endParaRPr>
-          </a:p>
-        </p:txBody>
-      </p:sp>
+        </p:nvPicPr>
+        <p:blipFill>
+          <a:blip r:embed="rId3">
+            <a:extLst>
+              <a:ext uri="{28A0092B-C50C-407E-A947-70E740481C1C}">
+                <a14:useLocalDpi xmlns:a14="http://schemas.microsoft.com/office/drawing/2010/main" val="0"/>
+              </a:ext>
+            </a:extLst>
+          </a:blip>
+          <a:stretch>
+            <a:fillRect/>
+          </a:stretch>
+        </p:blipFill>
+        <p:spPr>
+          <a:xfrm>
+            <a:off x="486382" y="1228797"/>
+            <a:ext cx="8200417" cy="5257800"/>
+          </a:xfrm>
+        </p:spPr>
+      </p:pic>
     </p:spTree>
   </p:cSld>
   <p:clrMapOvr>
@@ -3890,12 +5817,7 @@
             <p:ph type="title"/>
           </p:nvPr>
         </p:nvSpPr>
-        <p:spPr>
-          <a:xfrm>
-            <a:off x="466928" y="223736"/>
-            <a:ext cx="8219872" cy="1193902"/>
-          </a:xfrm>
-        </p:spPr>
+        <p:spPr/>
         <p:txBody>
           <a:bodyPr/>
           <a:lstStyle/>
@@ -3910,7 +5832,7 @@
                 <a:latin typeface="Arial" panose="020B0604020202020204" pitchFamily="34" charset="0"/>
                 <a:cs typeface="Arial" panose="020B0604020202020204" pitchFamily="34" charset="0"/>
               </a:rPr>
-              <a:t>Conclusion</a:t>
+              <a:t>Observability</a:t>
             </a:r>
           </a:p>
         </p:txBody>
@@ -3925,94 +5847,52 @@
             <p:ph idx="1"/>
           </p:nvPr>
         </p:nvSpPr>
-        <p:spPr>
-          <a:xfrm>
-            <a:off x="457200" y="1600200"/>
-            <a:ext cx="8229600" cy="4525963"/>
-          </a:xfrm>
-        </p:spPr>
-        <p:txBody>
-          <a:bodyPr/>
+        <p:spPr/>
+        <p:txBody>
+          <a:bodyPr>
+            <a:normAutofit lnSpcReduction="10000"/>
+          </a:bodyPr>
           <a:lstStyle/>
           <a:p>
             <a:pPr marL="0" indent="0">
               <a:buNone/>
             </a:pPr>
             <a:r>
+              <a:rPr b="1" dirty="0" smtClean="0">
+                <a:latin typeface="Times New Roman" panose="02020603050405020304" pitchFamily="18" charset="0"/>
+                <a:cs typeface="Times New Roman" panose="02020603050405020304" pitchFamily="18" charset="0"/>
+              </a:rPr>
+              <a:t>Prometheus</a:t>
+            </a:r>
+            <a:r>
               <a:rPr lang="en-US" dirty="0" smtClean="0">
                 <a:latin typeface="Times New Roman" panose="02020603050405020304" pitchFamily="18" charset="0"/>
                 <a:cs typeface="Times New Roman" panose="02020603050405020304" pitchFamily="18" charset="0"/>
               </a:rPr>
-              <a:t>Project Outcome:</a:t>
-            </a:r>
-          </a:p>
-          <a:p>
+              <a:t>:</a:t>
+            </a:r>
+          </a:p>
+          <a:p>
+            <a:r>
+              <a:rPr lang="en-US" dirty="0" smtClean="0">
+                <a:latin typeface="Times New Roman" panose="02020603050405020304" pitchFamily="18" charset="0"/>
+                <a:cs typeface="Times New Roman" panose="02020603050405020304" pitchFamily="18" charset="0"/>
+              </a:rPr>
+              <a:t>Scrapes application &amp; cluster</a:t>
+            </a:r>
             <a:r>
               <a:rPr dirty="0" smtClean="0">
                 <a:latin typeface="Times New Roman" panose="02020603050405020304" pitchFamily="18" charset="0"/>
                 <a:cs typeface="Times New Roman" panose="02020603050405020304" pitchFamily="18" charset="0"/>
               </a:rPr>
-              <a:t>Fully </a:t>
+              <a:t> </a:t>
             </a:r>
             <a:r>
               <a:rPr dirty="0">
                 <a:latin typeface="Times New Roman" panose="02020603050405020304" pitchFamily="18" charset="0"/>
                 <a:cs typeface="Times New Roman" panose="02020603050405020304" pitchFamily="18" charset="0"/>
               </a:rPr>
-              <a:t>automated </a:t>
-            </a:r>
-            <a:r>
-              <a:rPr dirty="0" err="1">
-                <a:latin typeface="Times New Roman" panose="02020603050405020304" pitchFamily="18" charset="0"/>
-                <a:cs typeface="Times New Roman" panose="02020603050405020304" pitchFamily="18" charset="0"/>
-              </a:rPr>
-              <a:t>DevOps</a:t>
-            </a:r>
-            <a:r>
-              <a:rPr dirty="0">
-                <a:latin typeface="Times New Roman" panose="02020603050405020304" pitchFamily="18" charset="0"/>
-                <a:cs typeface="Times New Roman" panose="02020603050405020304" pitchFamily="18" charset="0"/>
-              </a:rPr>
-              <a:t> pipeline</a:t>
-            </a:r>
-          </a:p>
-          <a:p>
-            <a:r>
-              <a:rPr dirty="0" smtClean="0">
-                <a:latin typeface="Times New Roman" panose="02020603050405020304" pitchFamily="18" charset="0"/>
-                <a:cs typeface="Times New Roman" panose="02020603050405020304" pitchFamily="18" charset="0"/>
-              </a:rPr>
-              <a:t>Production-ready </a:t>
-            </a:r>
-            <a:r>
-              <a:rPr dirty="0">
-                <a:latin typeface="Times New Roman" panose="02020603050405020304" pitchFamily="18" charset="0"/>
-                <a:cs typeface="Times New Roman" panose="02020603050405020304" pitchFamily="18" charset="0"/>
-              </a:rPr>
-              <a:t>deployment</a:t>
-            </a:r>
-          </a:p>
-          <a:p>
-            <a:r>
-              <a:rPr dirty="0" smtClean="0">
-                <a:latin typeface="Times New Roman" panose="02020603050405020304" pitchFamily="18" charset="0"/>
-                <a:cs typeface="Times New Roman" panose="02020603050405020304" pitchFamily="18" charset="0"/>
-              </a:rPr>
-              <a:t>Observable </a:t>
-            </a:r>
-            <a:r>
-              <a:rPr dirty="0">
-                <a:latin typeface="Times New Roman" panose="02020603050405020304" pitchFamily="18" charset="0"/>
-                <a:cs typeface="Times New Roman" panose="02020603050405020304" pitchFamily="18" charset="0"/>
-              </a:rPr>
-              <a:t>and scalable </a:t>
-            </a:r>
-            <a:r>
-              <a:rPr dirty="0" smtClean="0">
-                <a:latin typeface="Times New Roman" panose="02020603050405020304" pitchFamily="18" charset="0"/>
-                <a:cs typeface="Times New Roman" panose="02020603050405020304" pitchFamily="18" charset="0"/>
-              </a:rPr>
-              <a:t>system</a:t>
+              <a:t>metrics </a:t>
             </a:r>
             <a:endParaRPr lang="en-US" dirty="0" smtClean="0">
               <a:latin typeface="Times New Roman" panose="02020603050405020304" pitchFamily="18" charset="0"/>
@@ -4020,53 +5900,88 @@
             </a:endParaRPr>
           </a:p>
           <a:p>
+            <a:r>
+              <a:rPr lang="en-US" dirty="0" smtClean="0">
+                <a:latin typeface="Times New Roman" panose="02020603050405020304" pitchFamily="18" charset="0"/>
+                <a:cs typeface="Times New Roman" panose="02020603050405020304" pitchFamily="18" charset="0"/>
+              </a:rPr>
+              <a:t>Collects CPU, Memory metrics</a:t>
+            </a:r>
+          </a:p>
+          <a:p>
             <a:pPr marL="0" indent="0">
               <a:buNone/>
             </a:pPr>
-            <a:endParaRPr lang="en-US" sz="2400" i="1" dirty="0" smtClean="0">
+            <a:r>
+              <a:rPr b="1" dirty="0" err="1" smtClean="0">
+                <a:latin typeface="Times New Roman" panose="02020603050405020304" pitchFamily="18" charset="0"/>
+                <a:cs typeface="Times New Roman" panose="02020603050405020304" pitchFamily="18" charset="0"/>
+              </a:rPr>
+              <a:t>Grafana</a:t>
+            </a:r>
+            <a:r>
+              <a:rPr lang="en-US" dirty="0">
+                <a:latin typeface="Times New Roman" panose="02020603050405020304" pitchFamily="18" charset="0"/>
+                <a:cs typeface="Times New Roman" panose="02020603050405020304" pitchFamily="18" charset="0"/>
+              </a:rPr>
+              <a:t>:</a:t>
+            </a:r>
+            <a:endParaRPr lang="en-US" dirty="0" smtClean="0">
               <a:latin typeface="Times New Roman" panose="02020603050405020304" pitchFamily="18" charset="0"/>
               <a:cs typeface="Times New Roman" panose="02020603050405020304" pitchFamily="18" charset="0"/>
             </a:endParaRPr>
           </a:p>
           <a:p>
-            <a:pPr marL="0" indent="0">
-              <a:buNone/>
-            </a:pPr>
-            <a:r>
-              <a:rPr lang="en-US" sz="2400" i="1" dirty="0" smtClean="0">
+            <a:r>
+              <a:rPr lang="en-US" dirty="0" smtClean="0">
                 <a:latin typeface="Times New Roman" panose="02020603050405020304" pitchFamily="18" charset="0"/>
                 <a:cs typeface="Times New Roman" panose="02020603050405020304" pitchFamily="18" charset="0"/>
               </a:rPr>
-              <a:t>Key takeaway:</a:t>
-            </a:r>
-          </a:p>
-          <a:p>
-            <a:pPr marL="0" indent="0" algn="just">
-              <a:buNone/>
-            </a:pPr>
-            <a:r>
-              <a:rPr lang="en-US" sz="2800" dirty="0" smtClean="0">
+              <a:t>V</a:t>
+            </a:r>
+            <a:r>
+              <a:rPr dirty="0" smtClean="0">
                 <a:latin typeface="Times New Roman" panose="02020603050405020304" pitchFamily="18" charset="0"/>
                 <a:cs typeface="Times New Roman" panose="02020603050405020304" pitchFamily="18" charset="0"/>
               </a:rPr>
-              <a:t>“Modern </a:t>
-            </a:r>
-            <a:r>
-              <a:rPr lang="en-US" sz="2800" dirty="0" err="1" smtClean="0">
+              <a:t>isualiz</a:t>
+            </a:r>
+            <a:r>
+              <a:rPr lang="en-US" dirty="0" smtClean="0">
                 <a:latin typeface="Times New Roman" panose="02020603050405020304" pitchFamily="18" charset="0"/>
                 <a:cs typeface="Times New Roman" panose="02020603050405020304" pitchFamily="18" charset="0"/>
               </a:rPr>
-              <a:t>DevOps</a:t>
-            </a:r>
-            <a:r>
-              <a:rPr lang="en-US" sz="2800" dirty="0" smtClean="0">
+              <a:t>e metrics</a:t>
+            </a:r>
+          </a:p>
+          <a:p>
+            <a:r>
+              <a:rPr lang="en-US" dirty="0" smtClean="0">
                 <a:latin typeface="Times New Roman" panose="02020603050405020304" pitchFamily="18" charset="0"/>
                 <a:cs typeface="Times New Roman" panose="02020603050405020304" pitchFamily="18" charset="0"/>
               </a:rPr>
-              <a:t> focuses on automation, reliability, and visibility”</a:t>
-            </a:r>
-          </a:p>
-          <a:p>
+              <a:t>Dashboard for</a:t>
+            </a:r>
+          </a:p>
+          <a:p>
+            <a:pPr lvl="1"/>
+            <a:r>
+              <a:rPr lang="en-US" dirty="0" smtClean="0">
+                <a:latin typeface="Times New Roman" panose="02020603050405020304" pitchFamily="18" charset="0"/>
+                <a:cs typeface="Times New Roman" panose="02020603050405020304" pitchFamily="18" charset="0"/>
+              </a:rPr>
+              <a:t>Application performance</a:t>
+            </a:r>
+          </a:p>
+          <a:p>
+            <a:pPr lvl="1"/>
+            <a:r>
+              <a:rPr lang="en-US" dirty="0" smtClean="0">
+                <a:latin typeface="Times New Roman" panose="02020603050405020304" pitchFamily="18" charset="0"/>
+                <a:cs typeface="Times New Roman" panose="02020603050405020304" pitchFamily="18" charset="0"/>
+              </a:rPr>
+              <a:t>Pod &amp; node resource usage</a:t>
+            </a:r>
             <a:endParaRPr dirty="0">
               <a:latin typeface="Times New Roman" panose="02020603050405020304" pitchFamily="18" charset="0"/>
               <a:cs typeface="Times New Roman" panose="02020603050405020304" pitchFamily="18" charset="0"/>
@@ -4102,6 +6017,498 @@
 </file>
 
 <file path=ppt/slides/slide13.xml><?xml version="1.0" encoding="utf-8"?>
+<p:sld xmlns:a="http://schemas.openxmlformats.org/drawingml/2006/main" xmlns:r="http://schemas.openxmlformats.org/officeDocument/2006/relationships" xmlns:p="http://schemas.openxmlformats.org/presentationml/2006/main">
+  <p:cSld>
+    <p:spTree>
+      <p:nvGrpSpPr>
+        <p:cNvPr id="1" name=""/>
+        <p:cNvGrpSpPr/>
+        <p:nvPr/>
+      </p:nvGrpSpPr>
+      <p:grpSpPr>
+        <a:xfrm>
+          <a:off x="0" y="0"/>
+          <a:ext cx="0" cy="0"/>
+          <a:chOff x="0" y="0"/>
+          <a:chExt cx="0" cy="0"/>
+        </a:xfrm>
+      </p:grpSpPr>
+      <p:sp>
+        <p:nvSpPr>
+          <p:cNvPr id="2" name="Title 1"/>
+          <p:cNvSpPr>
+            <a:spLocks noGrp="1"/>
+          </p:cNvSpPr>
+          <p:nvPr>
+            <p:ph type="title"/>
+          </p:nvPr>
+        </p:nvSpPr>
+        <p:spPr/>
+        <p:txBody>
+          <a:bodyPr/>
+          <a:lstStyle/>
+          <a:p>
+            <a:endParaRPr lang="en-US"/>
+          </a:p>
+        </p:txBody>
+      </p:sp>
+      <p:pic>
+        <p:nvPicPr>
+          <p:cNvPr id="8" name="Picture 7"/>
+          <p:cNvPicPr>
+            <a:picLocks noChangeAspect="1"/>
+          </p:cNvPicPr>
+          <p:nvPr/>
+        </p:nvPicPr>
+        <p:blipFill>
+          <a:blip r:embed="rId2">
+            <a:extLst>
+              <a:ext uri="{28A0092B-C50C-407E-A947-70E740481C1C}">
+                <a14:useLocalDpi xmlns:a14="http://schemas.microsoft.com/office/drawing/2010/main" val="0"/>
+              </a:ext>
+            </a:extLst>
+          </a:blip>
+          <a:stretch>
+            <a:fillRect/>
+          </a:stretch>
+        </p:blipFill>
+        <p:spPr>
+          <a:xfrm>
+            <a:off x="0" y="2476982"/>
+            <a:ext cx="9144000" cy="4404166"/>
+          </a:xfrm>
+          <a:prstGeom prst="rect">
+            <a:avLst/>
+          </a:prstGeom>
+        </p:spPr>
+      </p:pic>
+      <p:pic>
+        <p:nvPicPr>
+          <p:cNvPr id="7" name="Content Placeholder 6"/>
+          <p:cNvPicPr>
+            <a:picLocks noGrp="1" noChangeAspect="1"/>
+          </p:cNvPicPr>
+          <p:nvPr>
+            <p:ph idx="1"/>
+          </p:nvPr>
+        </p:nvPicPr>
+        <p:blipFill>
+          <a:blip r:embed="rId3">
+            <a:extLst>
+              <a:ext uri="{28A0092B-C50C-407E-A947-70E740481C1C}">
+                <a14:useLocalDpi xmlns:a14="http://schemas.microsoft.com/office/drawing/2010/main" val="0"/>
+              </a:ext>
+            </a:extLst>
+          </a:blip>
+          <a:stretch>
+            <a:fillRect/>
+          </a:stretch>
+        </p:blipFill>
+        <p:spPr>
+          <a:xfrm>
+            <a:off x="0" y="-57874"/>
+            <a:ext cx="9144000" cy="4085863"/>
+          </a:xfrm>
+        </p:spPr>
+      </p:pic>
+    </p:spTree>
+    <p:extLst>
+      <p:ext uri="{BB962C8B-B14F-4D97-AF65-F5344CB8AC3E}">
+        <p14:creationId xmlns:p14="http://schemas.microsoft.com/office/powerpoint/2010/main" val="2299268472"/>
+      </p:ext>
+    </p:extLst>
+  </p:cSld>
+  <p:clrMapOvr>
+    <a:masterClrMapping/>
+  </p:clrMapOvr>
+  <mc:AlternateContent xmlns:mc="http://schemas.openxmlformats.org/markup-compatibility/2006">
+    <mc:Choice xmlns:p14="http://schemas.microsoft.com/office/powerpoint/2010/main" Requires="p14">
+      <p:transition spd="slow" advClick="0">
+        <p14:reveal/>
+      </p:transition>
+    </mc:Choice>
+    <mc:Fallback>
+      <p:transition spd="slow" advClick="0">
+        <p:fade/>
+      </p:transition>
+    </mc:Fallback>
+  </mc:AlternateContent>
+  <p:timing>
+    <p:tnLst>
+      <p:par>
+        <p:cTn id="1" dur="indefinite" restart="never" nodeType="tmRoot"/>
+      </p:par>
+    </p:tnLst>
+  </p:timing>
+</p:sld>
+</file>
+
+<file path=ppt/slides/slide14.xml><?xml version="1.0" encoding="utf-8"?>
+<p:sld xmlns:a="http://schemas.openxmlformats.org/drawingml/2006/main" xmlns:r="http://schemas.openxmlformats.org/officeDocument/2006/relationships" xmlns:p="http://schemas.openxmlformats.org/presentationml/2006/main">
+  <p:cSld>
+    <p:spTree>
+      <p:nvGrpSpPr>
+        <p:cNvPr id="1" name=""/>
+        <p:cNvGrpSpPr/>
+        <p:nvPr/>
+      </p:nvGrpSpPr>
+      <p:grpSpPr>
+        <a:xfrm>
+          <a:off x="0" y="0"/>
+          <a:ext cx="0" cy="0"/>
+          <a:chOff x="0" y="0"/>
+          <a:chExt cx="0" cy="0"/>
+        </a:xfrm>
+      </p:grpSpPr>
+      <p:sp>
+        <p:nvSpPr>
+          <p:cNvPr id="2" name="Title 1"/>
+          <p:cNvSpPr>
+            <a:spLocks noGrp="1"/>
+          </p:cNvSpPr>
+          <p:nvPr>
+            <p:ph type="title"/>
+          </p:nvPr>
+        </p:nvSpPr>
+        <p:spPr/>
+        <p:txBody>
+          <a:bodyPr/>
+          <a:lstStyle/>
+          <a:p>
+            <a:endParaRPr lang="en-US"/>
+          </a:p>
+        </p:txBody>
+      </p:sp>
+      <p:pic>
+        <p:nvPicPr>
+          <p:cNvPr id="5" name="Picture 4"/>
+          <p:cNvPicPr>
+            <a:picLocks noChangeAspect="1"/>
+          </p:cNvPicPr>
+          <p:nvPr/>
+        </p:nvPicPr>
+        <p:blipFill>
+          <a:blip r:embed="rId2">
+            <a:extLst>
+              <a:ext uri="{28A0092B-C50C-407E-A947-70E740481C1C}">
+                <a14:useLocalDpi xmlns:a14="http://schemas.microsoft.com/office/drawing/2010/main" val="0"/>
+              </a:ext>
+            </a:extLst>
+          </a:blip>
+          <a:stretch>
+            <a:fillRect/>
+          </a:stretch>
+        </p:blipFill>
+        <p:spPr>
+          <a:xfrm>
+            <a:off x="0" y="2676932"/>
+            <a:ext cx="9144000" cy="4181068"/>
+          </a:xfrm>
+          <a:prstGeom prst="rect">
+            <a:avLst/>
+          </a:prstGeom>
+        </p:spPr>
+      </p:pic>
+      <p:pic>
+        <p:nvPicPr>
+          <p:cNvPr id="4" name="Content Placeholder 3"/>
+          <p:cNvPicPr>
+            <a:picLocks noGrp="1" noChangeAspect="1"/>
+          </p:cNvPicPr>
+          <p:nvPr>
+            <p:ph idx="1"/>
+          </p:nvPr>
+        </p:nvPicPr>
+        <p:blipFill>
+          <a:blip r:embed="rId3">
+            <a:extLst>
+              <a:ext uri="{28A0092B-C50C-407E-A947-70E740481C1C}">
+                <a14:useLocalDpi xmlns:a14="http://schemas.microsoft.com/office/drawing/2010/main" val="0"/>
+              </a:ext>
+            </a:extLst>
+          </a:blip>
+          <a:stretch>
+            <a:fillRect/>
+          </a:stretch>
+        </p:blipFill>
+        <p:spPr>
+          <a:xfrm>
+            <a:off x="0" y="-81022"/>
+            <a:ext cx="9144000" cy="4027990"/>
+          </a:xfrm>
+        </p:spPr>
+      </p:pic>
+    </p:spTree>
+    <p:extLst>
+      <p:ext uri="{BB962C8B-B14F-4D97-AF65-F5344CB8AC3E}">
+        <p14:creationId xmlns:p14="http://schemas.microsoft.com/office/powerpoint/2010/main" val="4119224128"/>
+      </p:ext>
+    </p:extLst>
+  </p:cSld>
+  <p:clrMapOvr>
+    <a:masterClrMapping/>
+  </p:clrMapOvr>
+  <mc:AlternateContent xmlns:mc="http://schemas.openxmlformats.org/markup-compatibility/2006">
+    <mc:Choice xmlns:p14="http://schemas.microsoft.com/office/powerpoint/2010/main" Requires="p14">
+      <p:transition spd="slow" advClick="0">
+        <p14:reveal/>
+      </p:transition>
+    </mc:Choice>
+    <mc:Fallback>
+      <p:transition spd="slow" advClick="0">
+        <p:fade/>
+      </p:transition>
+    </mc:Fallback>
+  </mc:AlternateContent>
+  <p:timing>
+    <p:tnLst>
+      <p:par>
+        <p:cTn id="1" dur="indefinite" restart="never" nodeType="tmRoot"/>
+      </p:par>
+    </p:tnLst>
+  </p:timing>
+</p:sld>
+</file>
+
+<file path=ppt/slides/slide15.xml><?xml version="1.0" encoding="utf-8"?>
+<p:sld xmlns:a="http://schemas.openxmlformats.org/drawingml/2006/main" xmlns:r="http://schemas.openxmlformats.org/officeDocument/2006/relationships" xmlns:p="http://schemas.openxmlformats.org/presentationml/2006/main">
+  <p:cSld>
+    <p:spTree>
+      <p:nvGrpSpPr>
+        <p:cNvPr id="1" name=""/>
+        <p:cNvGrpSpPr/>
+        <p:nvPr/>
+      </p:nvGrpSpPr>
+      <p:grpSpPr>
+        <a:xfrm>
+          <a:off x="0" y="0"/>
+          <a:ext cx="0" cy="0"/>
+          <a:chOff x="0" y="0"/>
+          <a:chExt cx="0" cy="0"/>
+        </a:xfrm>
+      </p:grpSpPr>
+      <p:sp>
+        <p:nvSpPr>
+          <p:cNvPr id="2" name="Title 1"/>
+          <p:cNvSpPr>
+            <a:spLocks noGrp="1"/>
+          </p:cNvSpPr>
+          <p:nvPr>
+            <p:ph type="title"/>
+          </p:nvPr>
+        </p:nvSpPr>
+        <p:spPr>
+          <a:xfrm>
+            <a:off x="466928" y="223736"/>
+            <a:ext cx="8219872" cy="1193902"/>
+          </a:xfrm>
+        </p:spPr>
+        <p:txBody>
+          <a:bodyPr/>
+          <a:lstStyle/>
+          <a:p>
+            <a:r>
+              <a:rPr b="1" dirty="0">
+                <a:solidFill>
+                  <a:schemeClr val="tx2">
+                    <a:lumMod val="75000"/>
+                  </a:schemeClr>
+                </a:solidFill>
+                <a:latin typeface="Arial" panose="020B0604020202020204" pitchFamily="34" charset="0"/>
+                <a:cs typeface="Arial" panose="020B0604020202020204" pitchFamily="34" charset="0"/>
+              </a:rPr>
+              <a:t>Conclusion</a:t>
+            </a:r>
+          </a:p>
+        </p:txBody>
+      </p:sp>
+      <p:sp>
+        <p:nvSpPr>
+          <p:cNvPr id="3" name="Content Placeholder 2"/>
+          <p:cNvSpPr>
+            <a:spLocks noGrp="1"/>
+          </p:cNvSpPr>
+          <p:nvPr>
+            <p:ph idx="1"/>
+          </p:nvPr>
+        </p:nvSpPr>
+        <p:spPr>
+          <a:xfrm>
+            <a:off x="457200" y="1600200"/>
+            <a:ext cx="8229600" cy="4525963"/>
+          </a:xfrm>
+        </p:spPr>
+        <p:txBody>
+          <a:bodyPr/>
+          <a:lstStyle/>
+          <a:p>
+            <a:pPr marL="0" indent="0">
+              <a:buNone/>
+            </a:pPr>
+            <a:r>
+              <a:rPr lang="en-US" dirty="0" smtClean="0">
+                <a:latin typeface="Times New Roman" panose="02020603050405020304" pitchFamily="18" charset="0"/>
+                <a:cs typeface="Times New Roman" panose="02020603050405020304" pitchFamily="18" charset="0"/>
+              </a:rPr>
+              <a:t>Project Outcome:</a:t>
+            </a:r>
+          </a:p>
+          <a:p>
+            <a:r>
+              <a:rPr dirty="0" smtClean="0">
+                <a:latin typeface="Times New Roman" panose="02020603050405020304" pitchFamily="18" charset="0"/>
+                <a:cs typeface="Times New Roman" panose="02020603050405020304" pitchFamily="18" charset="0"/>
+              </a:rPr>
+              <a:t>Fully </a:t>
+            </a:r>
+            <a:r>
+              <a:rPr dirty="0">
+                <a:latin typeface="Times New Roman" panose="02020603050405020304" pitchFamily="18" charset="0"/>
+                <a:cs typeface="Times New Roman" panose="02020603050405020304" pitchFamily="18" charset="0"/>
+              </a:rPr>
+              <a:t>automated </a:t>
+            </a:r>
+            <a:r>
+              <a:rPr dirty="0" err="1">
+                <a:latin typeface="Times New Roman" panose="02020603050405020304" pitchFamily="18" charset="0"/>
+                <a:cs typeface="Times New Roman" panose="02020603050405020304" pitchFamily="18" charset="0"/>
+              </a:rPr>
+              <a:t>DevOps</a:t>
+            </a:r>
+            <a:r>
+              <a:rPr dirty="0">
+                <a:latin typeface="Times New Roman" panose="02020603050405020304" pitchFamily="18" charset="0"/>
+                <a:cs typeface="Times New Roman" panose="02020603050405020304" pitchFamily="18" charset="0"/>
+              </a:rPr>
+              <a:t> pipeline</a:t>
+            </a:r>
+          </a:p>
+          <a:p>
+            <a:r>
+              <a:rPr dirty="0" smtClean="0">
+                <a:latin typeface="Times New Roman" panose="02020603050405020304" pitchFamily="18" charset="0"/>
+                <a:cs typeface="Times New Roman" panose="02020603050405020304" pitchFamily="18" charset="0"/>
+              </a:rPr>
+              <a:t>Production-ready </a:t>
+            </a:r>
+            <a:r>
+              <a:rPr dirty="0">
+                <a:latin typeface="Times New Roman" panose="02020603050405020304" pitchFamily="18" charset="0"/>
+                <a:cs typeface="Times New Roman" panose="02020603050405020304" pitchFamily="18" charset="0"/>
+              </a:rPr>
+              <a:t>deployment</a:t>
+            </a:r>
+          </a:p>
+          <a:p>
+            <a:r>
+              <a:rPr dirty="0" smtClean="0">
+                <a:latin typeface="Times New Roman" panose="02020603050405020304" pitchFamily="18" charset="0"/>
+                <a:cs typeface="Times New Roman" panose="02020603050405020304" pitchFamily="18" charset="0"/>
+              </a:rPr>
+              <a:t>Observable </a:t>
+            </a:r>
+            <a:r>
+              <a:rPr dirty="0">
+                <a:latin typeface="Times New Roman" panose="02020603050405020304" pitchFamily="18" charset="0"/>
+                <a:cs typeface="Times New Roman" panose="02020603050405020304" pitchFamily="18" charset="0"/>
+              </a:rPr>
+              <a:t>and scalable </a:t>
+            </a:r>
+            <a:r>
+              <a:rPr dirty="0" smtClean="0">
+                <a:latin typeface="Times New Roman" panose="02020603050405020304" pitchFamily="18" charset="0"/>
+                <a:cs typeface="Times New Roman" panose="02020603050405020304" pitchFamily="18" charset="0"/>
+              </a:rPr>
+              <a:t>system</a:t>
+            </a:r>
+            <a:endParaRPr lang="en-US" dirty="0" smtClean="0">
+              <a:latin typeface="Times New Roman" panose="02020603050405020304" pitchFamily="18" charset="0"/>
+              <a:cs typeface="Times New Roman" panose="02020603050405020304" pitchFamily="18" charset="0"/>
+            </a:endParaRPr>
+          </a:p>
+          <a:p>
+            <a:pPr marL="0" indent="0">
+              <a:buNone/>
+            </a:pPr>
+            <a:endParaRPr lang="en-US" sz="2400" i="1" dirty="0" smtClean="0">
+              <a:latin typeface="Times New Roman" panose="02020603050405020304" pitchFamily="18" charset="0"/>
+              <a:cs typeface="Times New Roman" panose="02020603050405020304" pitchFamily="18" charset="0"/>
+            </a:endParaRPr>
+          </a:p>
+          <a:p>
+            <a:pPr marL="0" indent="0">
+              <a:buNone/>
+            </a:pPr>
+            <a:r>
+              <a:rPr lang="en-US" sz="2400" i="1" dirty="0" smtClean="0">
+                <a:latin typeface="Times New Roman" panose="02020603050405020304" pitchFamily="18" charset="0"/>
+                <a:cs typeface="Times New Roman" panose="02020603050405020304" pitchFamily="18" charset="0"/>
+              </a:rPr>
+              <a:t>Key takeaway:</a:t>
+            </a:r>
+          </a:p>
+          <a:p>
+            <a:pPr marL="0" indent="0" algn="just">
+              <a:buNone/>
+            </a:pPr>
+            <a:r>
+              <a:rPr lang="en-US" sz="2800" dirty="0" smtClean="0">
+                <a:latin typeface="Times New Roman" panose="02020603050405020304" pitchFamily="18" charset="0"/>
+                <a:cs typeface="Times New Roman" panose="02020603050405020304" pitchFamily="18" charset="0"/>
+              </a:rPr>
+              <a:t>“Modern </a:t>
+            </a:r>
+            <a:r>
+              <a:rPr lang="en-US" sz="2800" dirty="0" err="1" smtClean="0">
+                <a:latin typeface="Times New Roman" panose="02020603050405020304" pitchFamily="18" charset="0"/>
+                <a:cs typeface="Times New Roman" panose="02020603050405020304" pitchFamily="18" charset="0"/>
+              </a:rPr>
+              <a:t>DevOps</a:t>
+            </a:r>
+            <a:r>
+              <a:rPr lang="en-US" sz="2800" dirty="0" smtClean="0">
+                <a:latin typeface="Times New Roman" panose="02020603050405020304" pitchFamily="18" charset="0"/>
+                <a:cs typeface="Times New Roman" panose="02020603050405020304" pitchFamily="18" charset="0"/>
+              </a:rPr>
+              <a:t> focuses on automation, reliability, and visibility”</a:t>
+            </a:r>
+          </a:p>
+          <a:p>
+            <a:endParaRPr dirty="0">
+              <a:latin typeface="Times New Roman" panose="02020603050405020304" pitchFamily="18" charset="0"/>
+              <a:cs typeface="Times New Roman" panose="02020603050405020304" pitchFamily="18" charset="0"/>
+            </a:endParaRPr>
+          </a:p>
+        </p:txBody>
+      </p:sp>
+    </p:spTree>
+  </p:cSld>
+  <p:clrMapOvr>
+    <a:masterClrMapping/>
+  </p:clrMapOvr>
+  <mc:AlternateContent xmlns:mc="http://schemas.openxmlformats.org/markup-compatibility/2006" xmlns:p14="http://schemas.microsoft.com/office/powerpoint/2010/main">
+    <mc:Choice Requires="p14">
+      <p:transition spd="slow" advClick="0">
+        <p14:reveal/>
+      </p:transition>
+    </mc:Choice>
+    <mc:Fallback xmlns="">
+      <p:transition spd="slow" advClick="0">
+        <p:fade/>
+      </p:transition>
+    </mc:Fallback>
+  </mc:AlternateContent>
+  <p:timing>
+    <p:tnLst>
+      <p:par>
+        <p:cTn id="1" dur="indefinite" restart="never" nodeType="tmRoot"/>
+      </p:par>
+    </p:tnLst>
+  </p:timing>
+</p:sld>
+</file>
+
+<file path=ppt/slides/slide16.xml><?xml version="1.0" encoding="utf-8"?>
 <p:sld xmlns:a="http://schemas.openxmlformats.org/drawingml/2006/main" xmlns:r="http://schemas.openxmlformats.org/officeDocument/2006/relationships" xmlns:p="http://schemas.openxmlformats.org/presentationml/2006/main">
   <p:cSld>
     <p:spTree>
@@ -4573,8 +6980,8 @@
         </p:nvSpPr>
         <p:spPr>
           <a:xfrm>
-            <a:off x="418289" y="252919"/>
-            <a:ext cx="8268511" cy="1164719"/>
+            <a:off x="407505" y="278296"/>
+            <a:ext cx="8279296" cy="1139342"/>
           </a:xfrm>
         </p:spPr>
         <p:txBody>
@@ -4584,7 +6991,7 @@
           <a:lstStyle/>
           <a:p>
             <a:r>
-              <a:rPr lang="en-US" sz="3200" b="1" dirty="0" smtClean="0">
+              <a:rPr lang="en-US" sz="5200" b="1" dirty="0" smtClean="0">
                 <a:solidFill>
                   <a:schemeClr val="tx2">
                     <a:lumMod val="75000"/>
@@ -4595,7 +7002,7 @@
               </a:rPr>
               <a:t>Project Objective</a:t>
             </a:r>
-            <a:endParaRPr lang="en-US" sz="3200" b="1" dirty="0">
+            <a:endParaRPr lang="en-US" sz="5200" b="1" dirty="0">
               <a:solidFill>
                 <a:schemeClr val="tx2">
                   <a:lumMod val="75000"/>
@@ -4831,7 +7238,7 @@
       </p:grpSpPr>
       <p:pic>
         <p:nvPicPr>
-          <p:cNvPr id="7" name="Content Placeholder 6"/>
+          <p:cNvPr id="3" name="Content Placeholder 2"/>
           <p:cNvPicPr>
             <a:picLocks noGrp="1" noChangeAspect="1"/>
           </p:cNvPicPr>
@@ -4851,26 +7258,114 @@
             <a:fillRect/>
           </a:stretch>
         </p:blipFill>
-        <p:spPr bwMode="auto">
+        <p:spPr>
           <a:xfrm>
-            <a:off x="-321013" y="-350196"/>
-            <a:ext cx="9649839" cy="7665396"/>
+            <a:off x="0" y="1411359"/>
+            <a:ext cx="9144000" cy="5237922"/>
+          </a:xfrm>
+        </p:spPr>
+      </p:pic>
+      <p:sp>
+        <p:nvSpPr>
+          <p:cNvPr id="5" name="Title 1"/>
+          <p:cNvSpPr>
+            <a:spLocks noGrp="1"/>
+          </p:cNvSpPr>
+          <p:nvPr>
+            <p:ph type="title"/>
+          </p:nvPr>
+        </p:nvSpPr>
+        <p:spPr>
+          <a:xfrm>
+            <a:off x="407505" y="278296"/>
+            <a:ext cx="8279296" cy="1139342"/>
+          </a:xfrm>
+        </p:spPr>
+        <p:txBody>
+          <a:bodyPr>
+            <a:normAutofit/>
+          </a:bodyPr>
+          <a:lstStyle/>
+          <a:p>
+            <a:r>
+              <a:rPr lang="en-US" sz="5200" b="1" dirty="0" smtClean="0">
+                <a:solidFill>
+                  <a:schemeClr val="tx2">
+                    <a:lumMod val="75000"/>
+                  </a:schemeClr>
+                </a:solidFill>
+                <a:latin typeface="Arial" panose="020B0604020202020204" pitchFamily="34" charset="0"/>
+                <a:cs typeface="Arial" panose="020B0604020202020204" pitchFamily="34" charset="0"/>
+              </a:rPr>
+              <a:t>Project Architecture</a:t>
+            </a:r>
+            <a:endParaRPr lang="en-US" sz="5200" b="1" dirty="0">
+              <a:solidFill>
+                <a:schemeClr val="tx2">
+                  <a:lumMod val="75000"/>
+                </a:schemeClr>
+              </a:solidFill>
+              <a:latin typeface="Arial" panose="020B0604020202020204" pitchFamily="34" charset="0"/>
+              <a:cs typeface="Arial" panose="020B0604020202020204" pitchFamily="34" charset="0"/>
+            </a:endParaRPr>
+          </a:p>
+        </p:txBody>
+      </p:sp>
+      <p:sp>
+        <p:nvSpPr>
+          <p:cNvPr id="4" name="Rectangle 3"/>
+          <p:cNvSpPr/>
+          <p:nvPr/>
+        </p:nvSpPr>
+        <p:spPr>
+          <a:xfrm>
+            <a:off x="254643" y="5787342"/>
+            <a:ext cx="1551008" cy="567159"/>
           </a:xfrm>
           <a:prstGeom prst="rect">
             <a:avLst/>
           </a:prstGeom>
-          <a:noFill/>
-          <a:extLst>
-            <a:ext uri="{909E8E84-426E-40DD-AFC4-6F175D3DCCD1}">
-              <a14:hiddenFill xmlns:a14="http://schemas.microsoft.com/office/drawing/2010/main">
-                <a:solidFill>
-                  <a:srgbClr val="FFFFFF"/>
-                </a:solidFill>
-              </a14:hiddenFill>
-            </a:ext>
-          </a:extLst>
+          <a:solidFill>
+            <a:schemeClr val="bg1"/>
+          </a:solidFill>
+          <a:ln>
+            <a:solidFill>
+              <a:schemeClr val="bg1"/>
+            </a:solidFill>
+          </a:ln>
         </p:spPr>
-      </p:pic>
+        <p:style>
+          <a:lnRef idx="2">
+            <a:schemeClr val="dk1"/>
+          </a:lnRef>
+          <a:fillRef idx="1">
+            <a:schemeClr val="lt1"/>
+          </a:fillRef>
+          <a:effectRef idx="0">
+            <a:schemeClr val="dk1"/>
+          </a:effectRef>
+          <a:fontRef idx="minor">
+            <a:schemeClr val="dk1"/>
+          </a:fontRef>
+        </p:style>
+        <p:txBody>
+          <a:bodyPr rtlCol="0" anchor="ctr"/>
+          <a:lstStyle/>
+          <a:p>
+            <a:pPr algn="ctr"/>
+            <a:endParaRPr lang="en-US">
+              <a:ln>
+                <a:solidFill>
+                  <a:schemeClr val="bg1"/>
+                </a:solidFill>
+              </a:ln>
+              <a:solidFill>
+                <a:schemeClr val="bg1"/>
+              </a:solidFill>
+            </a:endParaRPr>
+          </a:p>
+        </p:txBody>
+      </p:sp>
     </p:spTree>
     <p:extLst>
       <p:ext uri="{BB962C8B-B14F-4D97-AF65-F5344CB8AC3E}">
@@ -4881,13 +7376,13 @@
   <p:clrMapOvr>
     <a:masterClrMapping/>
   </p:clrMapOvr>
-  <mc:AlternateContent xmlns:mc="http://schemas.openxmlformats.org/markup-compatibility/2006">
-    <mc:Choice xmlns:p14="http://schemas.microsoft.com/office/powerpoint/2010/main" Requires="p14">
+  <mc:AlternateContent xmlns:mc="http://schemas.openxmlformats.org/markup-compatibility/2006" xmlns:p14="http://schemas.microsoft.com/office/powerpoint/2010/main">
+    <mc:Choice Requires="p14">
       <p:transition spd="slow" advClick="0">
         <p14:reveal/>
       </p:transition>
     </mc:Choice>
-    <mc:Fallback>
+    <mc:Fallback xmlns="">
       <p:transition spd="slow" advClick="0">
         <p:fade/>
       </p:transition>
@@ -5275,24 +7770,14 @@
               <a:buChar char="•"/>
             </a:pPr>
             <a:r>
-              <a:rPr lang="en-US" dirty="0" err="1" smtClean="0">
+              <a:rPr lang="en-US" dirty="0" smtClean="0">
                 <a:solidFill>
                   <a:schemeClr val="tx2">
                     <a:lumMod val="75000"/>
                   </a:schemeClr>
                 </a:solidFill>
               </a:rPr>
-              <a:t>Terraform</a:t>
-            </a:r>
-            <a:r>
-              <a:rPr lang="en-US" dirty="0" smtClean="0">
-                <a:solidFill>
-                  <a:schemeClr val="tx2">
-                    <a:lumMod val="75000"/>
-                  </a:schemeClr>
-                </a:solidFill>
-              </a:rPr>
-              <a:t> </a:t>
+              <a:t>Terraform </a:t>
             </a:r>
             <a:r>
               <a:rPr lang="en-US" dirty="0" err="1">
@@ -5600,14 +8085,34 @@
               <a:t>(ACR</a:t>
             </a:r>
             <a:r>
-              <a:rPr lang="en-US" dirty="0">
+              <a:rPr lang="en-US" dirty="0" smtClean="0">
                 <a:solidFill>
                   <a:schemeClr val="accent3">
                     <a:lumMod val="75000"/>
                   </a:schemeClr>
                 </a:solidFill>
               </a:rPr>
-              <a:t>)    </a:t>
+              <a:t>)/</a:t>
+            </a:r>
+            <a:r>
+              <a:rPr lang="en-US" dirty="0" err="1" smtClean="0">
+                <a:solidFill>
+                  <a:schemeClr val="accent3">
+                    <a:lumMod val="75000"/>
+                  </a:schemeClr>
+                </a:solidFill>
+              </a:rPr>
+              <a:t>DockerHub</a:t>
+            </a:r>
+            <a:r>
+              <a:rPr lang="en-US" dirty="0" smtClean="0">
+                <a:solidFill>
+                  <a:schemeClr val="accent3">
+                    <a:lumMod val="75000"/>
+                  </a:schemeClr>
+                </a:solidFill>
+              </a:rPr>
+              <a:t>    </a:t>
             </a:r>
             <a:endParaRPr lang="en-US" dirty="0" smtClean="0">
               <a:solidFill>
@@ -6443,7 +8948,7 @@
         </p:nvSpPr>
         <p:spPr>
           <a:xfrm>
-            <a:off x="428018" y="262648"/>
+            <a:off x="428018" y="-97279"/>
             <a:ext cx="8258782" cy="1154990"/>
           </a:xfrm>
         </p:spPr>
@@ -6481,18 +8986,20 @@
           </a:xfrm>
         </p:spPr>
         <p:txBody>
-          <a:bodyPr/>
+          <a:bodyPr>
+            <a:normAutofit/>
+          </a:bodyPr>
           <a:lstStyle/>
           <a:p>
             <a:r>
-              <a:rPr dirty="0" smtClean="0">
+              <a:rPr sz="2000" dirty="0" smtClean="0">
                 <a:latin typeface="Times New Roman" panose="02020603050405020304" pitchFamily="18" charset="0"/>
                 <a:cs typeface="Times New Roman" panose="02020603050405020304" pitchFamily="18" charset="0"/>
               </a:rPr>
               <a:t>ASP.NET </a:t>
             </a:r>
             <a:r>
-              <a:rPr dirty="0">
+              <a:rPr sz="2000" dirty="0">
                 <a:latin typeface="Times New Roman" panose="02020603050405020304" pitchFamily="18" charset="0"/>
                 <a:cs typeface="Times New Roman" panose="02020603050405020304" pitchFamily="18" charset="0"/>
               </a:rPr>
@@ -6501,21 +9008,21 @@
           </a:p>
           <a:p>
             <a:r>
-              <a:rPr dirty="0" err="1" smtClean="0">
+              <a:rPr sz="2000" dirty="0" err="1" smtClean="0">
                 <a:latin typeface="Times New Roman" panose="02020603050405020304" pitchFamily="18" charset="0"/>
                 <a:cs typeface="Times New Roman" panose="02020603050405020304" pitchFamily="18" charset="0"/>
               </a:rPr>
               <a:t>Dockerized</a:t>
             </a:r>
             <a:r>
-              <a:rPr dirty="0" smtClean="0">
+              <a:rPr sz="2000" dirty="0" smtClean="0">
                 <a:latin typeface="Times New Roman" panose="02020603050405020304" pitchFamily="18" charset="0"/>
                 <a:cs typeface="Times New Roman" panose="02020603050405020304" pitchFamily="18" charset="0"/>
               </a:rPr>
               <a:t> </a:t>
             </a:r>
             <a:r>
-              <a:rPr dirty="0">
+              <a:rPr sz="2000" dirty="0">
                 <a:latin typeface="Times New Roman" panose="02020603050405020304" pitchFamily="18" charset="0"/>
                 <a:cs typeface="Times New Roman" panose="02020603050405020304" pitchFamily="18" charset="0"/>
               </a:rPr>
@@ -6524,98 +9031,126 @@
           </a:p>
           <a:p>
             <a:r>
-              <a:rPr i="1" dirty="0" smtClean="0">
+              <a:rPr sz="2000" i="1" dirty="0" smtClean="0">
                 <a:latin typeface="Times New Roman" panose="02020603050405020304" pitchFamily="18" charset="0"/>
                 <a:cs typeface="Times New Roman" panose="02020603050405020304" pitchFamily="18" charset="0"/>
               </a:rPr>
               <a:t>/</a:t>
             </a:r>
             <a:r>
-              <a:rPr i="1" dirty="0">
+              <a:rPr sz="2000" i="1" dirty="0">
                 <a:latin typeface="Times New Roman" panose="02020603050405020304" pitchFamily="18" charset="0"/>
                 <a:cs typeface="Times New Roman" panose="02020603050405020304" pitchFamily="18" charset="0"/>
               </a:rPr>
               <a:t>health </a:t>
             </a:r>
             <a:r>
-              <a:rPr lang="en-US" dirty="0" smtClean="0">
+              <a:rPr lang="en-US" sz="2000" dirty="0" smtClean="0">
                 <a:latin typeface="Times New Roman" panose="02020603050405020304" pitchFamily="18" charset="0"/>
                 <a:cs typeface="Times New Roman" panose="02020603050405020304" pitchFamily="18" charset="0"/>
               </a:rPr>
               <a:t>endpoints for </a:t>
             </a:r>
             <a:r>
-              <a:rPr lang="en-US" dirty="0" err="1">
+              <a:rPr lang="en-US" sz="2000" dirty="0" err="1">
                 <a:latin typeface="Times New Roman" panose="02020603050405020304" pitchFamily="18" charset="0"/>
                 <a:cs typeface="Times New Roman" panose="02020603050405020304" pitchFamily="18" charset="0"/>
               </a:rPr>
               <a:t>K</a:t>
             </a:r>
             <a:r>
-              <a:rPr lang="en-US" dirty="0" err="1" smtClean="0">
+              <a:rPr lang="en-US" sz="2000" dirty="0" err="1" smtClean="0">
                 <a:latin typeface="Times New Roman" panose="02020603050405020304" pitchFamily="18" charset="0"/>
                 <a:cs typeface="Times New Roman" panose="02020603050405020304" pitchFamily="18" charset="0"/>
               </a:rPr>
               <a:t>ubernetes</a:t>
             </a:r>
             <a:r>
-              <a:rPr lang="en-US" dirty="0" smtClean="0">
+              <a:rPr lang="en-US" sz="2000" dirty="0" smtClean="0">
                 <a:latin typeface="Times New Roman" panose="02020603050405020304" pitchFamily="18" charset="0"/>
                 <a:cs typeface="Times New Roman" panose="02020603050405020304" pitchFamily="18" charset="0"/>
               </a:rPr>
-              <a:t> probes</a:t>
-            </a:r>
-          </a:p>
-          <a:p>
-            <a:r>
-              <a:rPr i="1" dirty="0" smtClean="0">
+              <a:t> </a:t>
+            </a:r>
+            <a:r>
+              <a:rPr lang="en-US" sz="2000" dirty="0" smtClean="0">
                 <a:latin typeface="Times New Roman" panose="02020603050405020304" pitchFamily="18" charset="0"/>
                 <a:cs typeface="Times New Roman" panose="02020603050405020304" pitchFamily="18" charset="0"/>
               </a:rPr>
-              <a:t>/</a:t>
-            </a:r>
-            <a:r>
-              <a:rPr i="1" dirty="0">
+              <a:t>probes, </a:t>
+            </a:r>
+            <a:r>
+              <a:rPr sz="2000" i="1" dirty="0" smtClean="0">
                 <a:latin typeface="Times New Roman" panose="02020603050405020304" pitchFamily="18" charset="0"/>
                 <a:cs typeface="Times New Roman" panose="02020603050405020304" pitchFamily="18" charset="0"/>
               </a:rPr>
-              <a:t>metrics </a:t>
-            </a:r>
-            <a:r>
-              <a:rPr dirty="0" smtClean="0">
+              <a:t>/metrics </a:t>
+            </a:r>
+            <a:r>
+              <a:rPr sz="2000" dirty="0" smtClean="0">
                 <a:latin typeface="Times New Roman" panose="02020603050405020304" pitchFamily="18" charset="0"/>
                 <a:cs typeface="Times New Roman" panose="02020603050405020304" pitchFamily="18" charset="0"/>
               </a:rPr>
               <a:t>endpoints</a:t>
             </a:r>
             <a:r>
-              <a:rPr lang="en-US" dirty="0" smtClean="0">
+              <a:rPr lang="en-US" sz="2000" dirty="0" smtClean="0">
                 <a:latin typeface="Times New Roman" panose="02020603050405020304" pitchFamily="18" charset="0"/>
                 <a:cs typeface="Times New Roman" panose="02020603050405020304" pitchFamily="18" charset="0"/>
               </a:rPr>
               <a:t> for </a:t>
             </a:r>
             <a:r>
-              <a:rPr lang="en-US" dirty="0">
+              <a:rPr lang="en-US" sz="2000" dirty="0">
                 <a:latin typeface="Times New Roman" panose="02020603050405020304" pitchFamily="18" charset="0"/>
                 <a:cs typeface="Times New Roman" panose="02020603050405020304" pitchFamily="18" charset="0"/>
               </a:rPr>
               <a:t>P</a:t>
             </a:r>
             <a:r>
-              <a:rPr lang="en-US" dirty="0" smtClean="0">
+              <a:rPr lang="en-US" sz="2000" dirty="0" smtClean="0">
                 <a:latin typeface="Times New Roman" panose="02020603050405020304" pitchFamily="18" charset="0"/>
                 <a:cs typeface="Times New Roman" panose="02020603050405020304" pitchFamily="18" charset="0"/>
               </a:rPr>
               <a:t>rometheus</a:t>
             </a:r>
-            <a:endParaRPr lang="en-US" dirty="0">
+            <a:endParaRPr lang="en-US" sz="2000" dirty="0">
               <a:latin typeface="Times New Roman" panose="02020603050405020304" pitchFamily="18" charset="0"/>
               <a:cs typeface="Times New Roman" panose="02020603050405020304" pitchFamily="18" charset="0"/>
             </a:endParaRPr>
           </a:p>
         </p:txBody>
       </p:sp>
+      <p:pic>
+        <p:nvPicPr>
+          <p:cNvPr id="4" name="Picture 3"/>
+          <p:cNvPicPr>
+            <a:picLocks noChangeAspect="1"/>
+          </p:cNvPicPr>
+          <p:nvPr/>
+        </p:nvPicPr>
+        <p:blipFill>
+          <a:blip r:embed="rId3">
+            <a:extLst>
+              <a:ext uri="{28A0092B-C50C-407E-A947-70E740481C1C}">
+                <a14:useLocalDpi xmlns:a14="http://schemas.microsoft.com/office/drawing/2010/main" val="0"/>
+              </a:ext>
+            </a:extLst>
+          </a:blip>
+          <a:stretch>
+            <a:fillRect/>
+          </a:stretch>
+        </p:blipFill>
+        <p:spPr>
+          <a:xfrm>
+            <a:off x="428018" y="2811287"/>
+            <a:ext cx="8354591" cy="3891065"/>
+          </a:xfrm>
+          <a:prstGeom prst="rect">
+            <a:avLst/>
+          </a:prstGeom>
+        </p:spPr>
+      </p:pic>
     </p:spTree>
   </p:cSld>
   <p:clrMapOvr>
@@ -6670,197 +9205,151 @@
             <p:ph type="title"/>
           </p:nvPr>
         </p:nvSpPr>
+        <p:spPr/>
+        <p:txBody>
+          <a:bodyPr/>
+          <a:lstStyle/>
+          <a:p>
+            <a:endParaRPr lang="en-US"/>
+          </a:p>
+        </p:txBody>
+      </p:sp>
+      <p:pic>
+        <p:nvPicPr>
+          <p:cNvPr id="4" name="Content Placeholder 3"/>
+          <p:cNvPicPr>
+            <a:picLocks noGrp="1" noChangeAspect="1"/>
+          </p:cNvPicPr>
+          <p:nvPr>
+            <p:ph idx="1"/>
+          </p:nvPr>
+        </p:nvPicPr>
+        <p:blipFill>
+          <a:blip r:embed="rId2">
+            <a:extLst>
+              <a:ext uri="{28A0092B-C50C-407E-A947-70E740481C1C}">
+                <a14:useLocalDpi xmlns:a14="http://schemas.microsoft.com/office/drawing/2010/main" val="0"/>
+              </a:ext>
+            </a:extLst>
+          </a:blip>
+          <a:stretch>
+            <a:fillRect/>
+          </a:stretch>
+        </p:blipFill>
         <p:spPr>
           <a:xfrm>
-            <a:off x="408562" y="291830"/>
-            <a:ext cx="8278238" cy="1125808"/>
+            <a:off x="0" y="216765"/>
+            <a:ext cx="9144000" cy="4216338"/>
           </a:xfrm>
         </p:spPr>
-        <p:txBody>
-          <a:bodyPr>
-            <a:normAutofit/>
-          </a:bodyPr>
-          <a:lstStyle/>
-          <a:p>
-            <a:r>
-              <a:rPr sz="3600" b="1" dirty="0">
-                <a:solidFill>
-                  <a:schemeClr val="tx2">
-                    <a:lumMod val="75000"/>
-                  </a:schemeClr>
-                </a:solidFill>
-                <a:latin typeface="Arial" panose="020B0604020202020204" pitchFamily="34" charset="0"/>
-                <a:cs typeface="Arial" panose="020B0604020202020204" pitchFamily="34" charset="0"/>
-              </a:rPr>
-              <a:t>Infrastructure as Code (</a:t>
-            </a:r>
-            <a:r>
-              <a:rPr sz="3600" b="1" dirty="0" err="1">
-                <a:solidFill>
-                  <a:schemeClr val="tx2">
-                    <a:lumMod val="75000"/>
-                  </a:schemeClr>
-                </a:solidFill>
-                <a:latin typeface="Arial" panose="020B0604020202020204" pitchFamily="34" charset="0"/>
-                <a:cs typeface="Arial" panose="020B0604020202020204" pitchFamily="34" charset="0"/>
-              </a:rPr>
-              <a:t>Terraform</a:t>
-            </a:r>
-            <a:r>
-              <a:rPr sz="3600" b="1" dirty="0">
-                <a:solidFill>
-                  <a:schemeClr val="tx2">
-                    <a:lumMod val="75000"/>
-                  </a:schemeClr>
-                </a:solidFill>
-                <a:latin typeface="Arial" panose="020B0604020202020204" pitchFamily="34" charset="0"/>
-                <a:cs typeface="Arial" panose="020B0604020202020204" pitchFamily="34" charset="0"/>
-              </a:rPr>
-              <a:t>)</a:t>
-            </a:r>
-          </a:p>
-        </p:txBody>
-      </p:sp>
-      <p:sp>
-        <p:nvSpPr>
-          <p:cNvPr id="3" name="Content Placeholder 2"/>
-          <p:cNvSpPr>
-            <a:spLocks noGrp="1"/>
-          </p:cNvSpPr>
-          <p:nvPr>
-            <p:ph idx="1"/>
-          </p:nvPr>
-        </p:nvSpPr>
+      </p:pic>
+      <p:pic>
+        <p:nvPicPr>
+          <p:cNvPr id="5" name="Picture 4"/>
+          <p:cNvPicPr>
+            <a:picLocks noChangeAspect="1"/>
+          </p:cNvPicPr>
+          <p:nvPr/>
+        </p:nvPicPr>
+        <p:blipFill>
+          <a:blip r:embed="rId3">
+            <a:extLst>
+              <a:ext uri="{28A0092B-C50C-407E-A947-70E740481C1C}">
+                <a14:useLocalDpi xmlns:a14="http://schemas.microsoft.com/office/drawing/2010/main" val="0"/>
+              </a:ext>
+            </a:extLst>
+          </a:blip>
+          <a:stretch>
+            <a:fillRect/>
+          </a:stretch>
+        </p:blipFill>
         <p:spPr>
           <a:xfrm>
-            <a:off x="457200" y="1600200"/>
-            <a:ext cx="8229600" cy="4525963"/>
+            <a:off x="0" y="4068463"/>
+            <a:ext cx="9144000" cy="1406402"/>
           </a:xfrm>
+          <a:prstGeom prst="rect">
+            <a:avLst/>
+          </a:prstGeom>
         </p:spPr>
-        <p:txBody>
-          <a:bodyPr/>
-          <a:lstStyle/>
-          <a:p>
-            <a:r>
-              <a:rPr lang="en-US" dirty="0" smtClean="0">
-                <a:latin typeface="Times New Roman" panose="02020603050405020304" pitchFamily="18" charset="0"/>
-                <a:cs typeface="Times New Roman" panose="02020603050405020304" pitchFamily="18" charset="0"/>
-              </a:rPr>
-              <a:t>Creates </a:t>
-            </a:r>
-            <a:r>
-              <a:rPr dirty="0" smtClean="0">
-                <a:latin typeface="Times New Roman" panose="02020603050405020304" pitchFamily="18" charset="0"/>
-                <a:cs typeface="Times New Roman" panose="02020603050405020304" pitchFamily="18" charset="0"/>
-              </a:rPr>
-              <a:t>Azure </a:t>
-            </a:r>
-            <a:r>
-              <a:rPr dirty="0">
-                <a:latin typeface="Times New Roman" panose="02020603050405020304" pitchFamily="18" charset="0"/>
-                <a:cs typeface="Times New Roman" panose="02020603050405020304" pitchFamily="18" charset="0"/>
-              </a:rPr>
-              <a:t>Resource Group</a:t>
-            </a:r>
-          </a:p>
-          <a:p>
-            <a:r>
-              <a:rPr lang="en-US" dirty="0" smtClean="0">
-                <a:latin typeface="Times New Roman" panose="02020603050405020304" pitchFamily="18" charset="0"/>
-                <a:cs typeface="Times New Roman" panose="02020603050405020304" pitchFamily="18" charset="0"/>
-              </a:rPr>
-              <a:t>Provision </a:t>
-            </a:r>
-            <a:r>
-              <a:rPr dirty="0" smtClean="0">
-                <a:latin typeface="Times New Roman" panose="02020603050405020304" pitchFamily="18" charset="0"/>
-                <a:cs typeface="Times New Roman" panose="02020603050405020304" pitchFamily="18" charset="0"/>
-              </a:rPr>
-              <a:t>Azure </a:t>
-            </a:r>
-            <a:r>
-              <a:rPr dirty="0" err="1">
-                <a:latin typeface="Times New Roman" panose="02020603050405020304" pitchFamily="18" charset="0"/>
-                <a:cs typeface="Times New Roman" panose="02020603050405020304" pitchFamily="18" charset="0"/>
-              </a:rPr>
-              <a:t>Kubernetes</a:t>
-            </a:r>
-            <a:r>
-              <a:rPr dirty="0">
-                <a:latin typeface="Times New Roman" panose="02020603050405020304" pitchFamily="18" charset="0"/>
-                <a:cs typeface="Times New Roman" panose="02020603050405020304" pitchFamily="18" charset="0"/>
-              </a:rPr>
-              <a:t> Service (AKS)</a:t>
-            </a:r>
-          </a:p>
-          <a:p>
-            <a:r>
-              <a:rPr lang="en-US" dirty="0" smtClean="0">
-                <a:latin typeface="Times New Roman" panose="02020603050405020304" pitchFamily="18" charset="0"/>
-                <a:cs typeface="Times New Roman" panose="02020603050405020304" pitchFamily="18" charset="0"/>
-              </a:rPr>
-              <a:t>Creates </a:t>
-            </a:r>
-            <a:r>
-              <a:rPr dirty="0" smtClean="0">
-                <a:latin typeface="Times New Roman" panose="02020603050405020304" pitchFamily="18" charset="0"/>
-                <a:cs typeface="Times New Roman" panose="02020603050405020304" pitchFamily="18" charset="0"/>
-              </a:rPr>
-              <a:t>Azure </a:t>
-            </a:r>
-            <a:r>
-              <a:rPr dirty="0">
-                <a:latin typeface="Times New Roman" panose="02020603050405020304" pitchFamily="18" charset="0"/>
-                <a:cs typeface="Times New Roman" panose="02020603050405020304" pitchFamily="18" charset="0"/>
-              </a:rPr>
-              <a:t>Container Registry (ACR)</a:t>
-            </a:r>
-          </a:p>
-          <a:p>
-            <a:r>
-              <a:rPr lang="en-US" dirty="0" smtClean="0">
-                <a:latin typeface="Times New Roman" panose="02020603050405020304" pitchFamily="18" charset="0"/>
-                <a:cs typeface="Times New Roman" panose="02020603050405020304" pitchFamily="18" charset="0"/>
-              </a:rPr>
-              <a:t>Assigns permission for AKS to pull images from ACR</a:t>
-            </a:r>
-          </a:p>
-          <a:p>
-            <a:endParaRPr lang="en-US" dirty="0">
-              <a:latin typeface="Times New Roman" panose="02020603050405020304" pitchFamily="18" charset="0"/>
-              <a:cs typeface="Times New Roman" panose="02020603050405020304" pitchFamily="18" charset="0"/>
-            </a:endParaRPr>
-          </a:p>
-          <a:p>
-            <a:pPr marL="0" indent="0" algn="just">
-              <a:buNone/>
-            </a:pPr>
-            <a:r>
-              <a:rPr lang="en-US" dirty="0" smtClean="0">
-                <a:latin typeface="Times New Roman" panose="02020603050405020304" pitchFamily="18" charset="0"/>
-                <a:cs typeface="Times New Roman" panose="02020603050405020304" pitchFamily="18" charset="0"/>
-              </a:rPr>
-              <a:t>It has a repeatable infrastructure, version-controlled with no manual cloud setup</a:t>
-            </a:r>
-            <a:endParaRPr dirty="0">
-              <a:latin typeface="Times New Roman" panose="02020603050405020304" pitchFamily="18" charset="0"/>
-              <a:cs typeface="Times New Roman" panose="02020603050405020304" pitchFamily="18" charset="0"/>
-            </a:endParaRPr>
-          </a:p>
-        </p:txBody>
-      </p:sp>
+      </p:pic>
+      <p:pic>
+        <p:nvPicPr>
+          <p:cNvPr id="6" name="Picture 5"/>
+          <p:cNvPicPr>
+            <a:picLocks noChangeAspect="1"/>
+          </p:cNvPicPr>
+          <p:nvPr/>
+        </p:nvPicPr>
+        <p:blipFill>
+          <a:blip r:embed="rId3">
+            <a:extLst>
+              <a:ext uri="{28A0092B-C50C-407E-A947-70E740481C1C}">
+                <a14:useLocalDpi xmlns:a14="http://schemas.microsoft.com/office/drawing/2010/main" val="0"/>
+              </a:ext>
+            </a:extLst>
+          </a:blip>
+          <a:stretch>
+            <a:fillRect/>
+          </a:stretch>
+        </p:blipFill>
+        <p:spPr>
+          <a:xfrm>
+            <a:off x="0" y="4924064"/>
+            <a:ext cx="9144000" cy="1406402"/>
+          </a:xfrm>
+          <a:prstGeom prst="rect">
+            <a:avLst/>
+          </a:prstGeom>
+        </p:spPr>
+      </p:pic>
+      <p:pic>
+        <p:nvPicPr>
+          <p:cNvPr id="7" name="Picture 6"/>
+          <p:cNvPicPr>
+            <a:picLocks noChangeAspect="1"/>
+          </p:cNvPicPr>
+          <p:nvPr/>
+        </p:nvPicPr>
+        <p:blipFill>
+          <a:blip r:embed="rId3">
+            <a:extLst>
+              <a:ext uri="{28A0092B-C50C-407E-A947-70E740481C1C}">
+                <a14:useLocalDpi xmlns:a14="http://schemas.microsoft.com/office/drawing/2010/main" val="0"/>
+              </a:ext>
+            </a:extLst>
+          </a:blip>
+          <a:stretch>
+            <a:fillRect/>
+          </a:stretch>
+        </p:blipFill>
+        <p:spPr>
+          <a:xfrm>
+            <a:off x="0" y="5468114"/>
+            <a:ext cx="9144000" cy="1406402"/>
+          </a:xfrm>
+          <a:prstGeom prst="rect">
+            <a:avLst/>
+          </a:prstGeom>
+        </p:spPr>
+      </p:pic>
     </p:spTree>
+    <p:extLst>
+      <p:ext uri="{BB962C8B-B14F-4D97-AF65-F5344CB8AC3E}">
+        <p14:creationId xmlns:p14="http://schemas.microsoft.com/office/powerpoint/2010/main" val="3252280746"/>
+      </p:ext>
+    </p:extLst>
   </p:cSld>
   <p:clrMapOvr>
     <a:masterClrMapping/>
   </p:clrMapOvr>
-  <mc:AlternateContent xmlns:mc="http://schemas.openxmlformats.org/markup-compatibility/2006" xmlns:p14="http://schemas.microsoft.com/office/powerpoint/2010/main">
-    <mc:Choice Requires="p14">
+  <mc:AlternateContent xmlns:mc="http://schemas.openxmlformats.org/markup-compatibility/2006">
+    <mc:Choice xmlns:p14="http://schemas.microsoft.com/office/powerpoint/2010/main" Requires="p14">
       <p:transition spd="slow" advClick="0">
         <p14:reveal/>
       </p:transition>
     </mc:Choice>
-    <mc:Fallback xmlns="">
+    <mc:Fallback>
       <p:transition spd="slow" advClick="0">
         <p:fade/>
       </p:transition>
@@ -6903,13 +9392,20 @@
             <p:ph type="title"/>
           </p:nvPr>
         </p:nvSpPr>
-        <p:spPr/>
-        <p:txBody>
-          <a:bodyPr/>
+        <p:spPr>
+          <a:xfrm>
+            <a:off x="408562" y="291830"/>
+            <a:ext cx="8278238" cy="1125808"/>
+          </a:xfrm>
+        </p:spPr>
+        <p:txBody>
+          <a:bodyPr>
+            <a:normAutofit/>
+          </a:bodyPr>
           <a:lstStyle/>
           <a:p>
             <a:r>
-              <a:rPr b="1" dirty="0">
+              <a:rPr sz="3600" b="1" dirty="0">
                 <a:solidFill>
                   <a:schemeClr val="tx2">
                     <a:lumMod val="75000"/>
@@ -6918,31 +9414,7 @@
                 <a:latin typeface="Arial" panose="020B0604020202020204" pitchFamily="34" charset="0"/>
                 <a:cs typeface="Arial" panose="020B0604020202020204" pitchFamily="34" charset="0"/>
               </a:rPr>
-              <a:t>CI: </a:t>
-            </a:r>
-            <a:r>
-              <a:rPr b="1" dirty="0" err="1">
-                <a:solidFill>
-                  <a:schemeClr val="tx2">
-                    <a:lumMod val="75000"/>
-                  </a:schemeClr>
-                </a:solidFill>
-                <a:latin typeface="Arial" panose="020B0604020202020204" pitchFamily="34" charset="0"/>
-                <a:cs typeface="Arial" panose="020B0604020202020204" pitchFamily="34" charset="0"/>
-              </a:rPr>
-              <a:t>GitHub</a:t>
-            </a:r>
-            <a:r>
-              <a:rPr b="1" dirty="0">
-                <a:solidFill>
-                  <a:schemeClr val="tx2">
-                    <a:lumMod val="75000"/>
-                  </a:schemeClr>
-                </a:solidFill>
-                <a:latin typeface="Arial" panose="020B0604020202020204" pitchFamily="34" charset="0"/>
-                <a:cs typeface="Arial" panose="020B0604020202020204" pitchFamily="34" charset="0"/>
-              </a:rPr>
-              <a:t> Actions</a:t>
+              <a:t>Infrastructure as Code (Terraform)</a:t>
             </a:r>
           </a:p>
         </p:txBody>
@@ -6968,149 +9440,191 @@
           <a:lstStyle/>
           <a:p>
             <a:r>
+              <a:rPr lang="en-US" dirty="0" smtClean="0">
+                <a:latin typeface="Times New Roman" panose="02020603050405020304" pitchFamily="18" charset="0"/>
+                <a:cs typeface="Times New Roman" panose="02020603050405020304" pitchFamily="18" charset="0"/>
+              </a:rPr>
+              <a:t>Creates </a:t>
+            </a:r>
+            <a:r>
               <a:rPr dirty="0" smtClean="0">
                 <a:latin typeface="Times New Roman" panose="02020603050405020304" pitchFamily="18" charset="0"/>
                 <a:cs typeface="Times New Roman" panose="02020603050405020304" pitchFamily="18" charset="0"/>
               </a:rPr>
-              <a:t>Triggered </a:t>
+              <a:t>Azure </a:t>
             </a:r>
             <a:r>
               <a:rPr dirty="0">
                 <a:latin typeface="Times New Roman" panose="02020603050405020304" pitchFamily="18" charset="0"/>
                 <a:cs typeface="Times New Roman" panose="02020603050405020304" pitchFamily="18" charset="0"/>
               </a:rPr>
-              <a:t>on push to </a:t>
+              <a:t>Resource Group</a:t>
+            </a:r>
+          </a:p>
+          <a:p>
+            <a:r>
+              <a:rPr lang="en-US" dirty="0" smtClean="0">
+                <a:latin typeface="Times New Roman" panose="02020603050405020304" pitchFamily="18" charset="0"/>
+                <a:cs typeface="Times New Roman" panose="02020603050405020304" pitchFamily="18" charset="0"/>
+              </a:rPr>
+              <a:t>Provision </a:t>
             </a:r>
             <a:r>
               <a:rPr dirty="0" smtClean="0">
                 <a:latin typeface="Times New Roman" panose="02020603050405020304" pitchFamily="18" charset="0"/>
                 <a:cs typeface="Times New Roman" panose="02020603050405020304" pitchFamily="18" charset="0"/>
               </a:rPr>
-              <a:t>main</a:t>
-            </a:r>
-            <a:endParaRPr lang="en-US" dirty="0" smtClean="0">
+              <a:t>Azure </a:t>
+            </a:r>
+            <a:r>
+              <a:rPr dirty="0" err="1">
+                <a:latin typeface="Times New Roman" panose="02020603050405020304" pitchFamily="18" charset="0"/>
+                <a:cs typeface="Times New Roman" panose="02020603050405020304" pitchFamily="18" charset="0"/>
+              </a:rPr>
+              <a:t>Kubernetes</a:t>
+            </a:r>
+            <a:r>
+              <a:rPr dirty="0">
+                <a:latin typeface="Times New Roman" panose="02020603050405020304" pitchFamily="18" charset="0"/>
+                <a:cs typeface="Times New Roman" panose="02020603050405020304" pitchFamily="18" charset="0"/>
+              </a:rPr>
+              <a:t> Service (AKS)</a:t>
+            </a:r>
+          </a:p>
+          <a:p>
+            <a:r>
+              <a:rPr lang="en-US" dirty="0" smtClean="0">
+                <a:latin typeface="Times New Roman" panose="02020603050405020304" pitchFamily="18" charset="0"/>
+                <a:cs typeface="Times New Roman" panose="02020603050405020304" pitchFamily="18" charset="0"/>
+              </a:rPr>
+              <a:t>Creates </a:t>
+            </a:r>
+            <a:r>
+              <a:rPr dirty="0" smtClean="0">
+                <a:latin typeface="Times New Roman" panose="02020603050405020304" pitchFamily="18" charset="0"/>
+                <a:cs typeface="Times New Roman" panose="02020603050405020304" pitchFamily="18" charset="0"/>
+              </a:rPr>
+              <a:t>Azure </a:t>
+            </a:r>
+            <a:r>
+              <a:rPr dirty="0">
+                <a:latin typeface="Times New Roman" panose="02020603050405020304" pitchFamily="18" charset="0"/>
+                <a:cs typeface="Times New Roman" panose="02020603050405020304" pitchFamily="18" charset="0"/>
+              </a:rPr>
+              <a:t>Container Registry (ACR)</a:t>
+            </a:r>
+          </a:p>
+          <a:p>
+            <a:r>
+              <a:rPr lang="en-US" dirty="0" smtClean="0">
+                <a:latin typeface="Times New Roman" panose="02020603050405020304" pitchFamily="18" charset="0"/>
+                <a:cs typeface="Times New Roman" panose="02020603050405020304" pitchFamily="18" charset="0"/>
+              </a:rPr>
+              <a:t>Assigns permission for AKS to pull images from ACR</a:t>
+            </a:r>
+          </a:p>
+          <a:p>
+            <a:endParaRPr lang="en-US" dirty="0">
               <a:latin typeface="Times New Roman" panose="02020603050405020304" pitchFamily="18" charset="0"/>
               <a:cs typeface="Times New Roman" panose="02020603050405020304" pitchFamily="18" charset="0"/>
             </a:endParaRPr>
           </a:p>
           <a:p>
-            <a:r>
-              <a:rPr dirty="0" smtClean="0">
-                <a:latin typeface="Times New Roman" panose="02020603050405020304" pitchFamily="18" charset="0"/>
-                <a:cs typeface="Times New Roman" panose="02020603050405020304" pitchFamily="18" charset="0"/>
-              </a:rPr>
-              <a:t>Build </a:t>
-            </a:r>
-            <a:r>
-              <a:rPr dirty="0">
-                <a:latin typeface="Times New Roman" panose="02020603050405020304" pitchFamily="18" charset="0"/>
-                <a:cs typeface="Times New Roman" panose="02020603050405020304" pitchFamily="18" charset="0"/>
-              </a:rPr>
-              <a:t>.NET </a:t>
-            </a:r>
-            <a:r>
-              <a:rPr dirty="0" smtClean="0">
-                <a:latin typeface="Times New Roman" panose="02020603050405020304" pitchFamily="18" charset="0"/>
-                <a:cs typeface="Times New Roman" panose="02020603050405020304" pitchFamily="18" charset="0"/>
-              </a:rPr>
-              <a:t>app</a:t>
-            </a:r>
+            <a:pPr marL="0" indent="0" algn="just">
+              <a:buNone/>
+            </a:pPr>
             <a:r>
               <a:rPr lang="en-US" dirty="0" smtClean="0">
                 <a:latin typeface="Times New Roman" panose="02020603050405020304" pitchFamily="18" charset="0"/>
                 <a:cs typeface="Times New Roman" panose="02020603050405020304" pitchFamily="18" charset="0"/>
               </a:rPr>
-              <a:t>lication</a:t>
+              <a:t>It has a repeatable infrastructure, version-controlled with no manual cloud setup</a:t>
             </a:r>
             <a:endParaRPr dirty="0">
               <a:latin typeface="Times New Roman" panose="02020603050405020304" pitchFamily="18" charset="0"/>
               <a:cs typeface="Times New Roman" panose="02020603050405020304" pitchFamily="18" charset="0"/>
             </a:endParaRPr>
           </a:p>
-          <a:p>
-            <a:r>
-              <a:rPr dirty="0" smtClean="0">
-                <a:latin typeface="Times New Roman" panose="02020603050405020304" pitchFamily="18" charset="0"/>
-                <a:cs typeface="Times New Roman" panose="02020603050405020304" pitchFamily="18" charset="0"/>
-              </a:rPr>
-              <a:t>Build </a:t>
-            </a:r>
-            <a:r>
-              <a:rPr dirty="0" err="1">
-                <a:latin typeface="Times New Roman" panose="02020603050405020304" pitchFamily="18" charset="0"/>
-                <a:cs typeface="Times New Roman" panose="02020603050405020304" pitchFamily="18" charset="0"/>
-              </a:rPr>
-              <a:t>Docker</a:t>
-            </a:r>
-            <a:r>
-              <a:rPr dirty="0">
-                <a:latin typeface="Times New Roman" panose="02020603050405020304" pitchFamily="18" charset="0"/>
-                <a:cs typeface="Times New Roman" panose="02020603050405020304" pitchFamily="18" charset="0"/>
-              </a:rPr>
-              <a:t> image</a:t>
-            </a:r>
-          </a:p>
-          <a:p>
-            <a:r>
-              <a:rPr dirty="0" smtClean="0">
-                <a:latin typeface="Times New Roman" panose="02020603050405020304" pitchFamily="18" charset="0"/>
-                <a:cs typeface="Times New Roman" panose="02020603050405020304" pitchFamily="18" charset="0"/>
-              </a:rPr>
-              <a:t>Push </a:t>
-            </a:r>
-            <a:r>
-              <a:rPr dirty="0">
-                <a:latin typeface="Times New Roman" panose="02020603050405020304" pitchFamily="18" charset="0"/>
-                <a:cs typeface="Times New Roman" panose="02020603050405020304" pitchFamily="18" charset="0"/>
-              </a:rPr>
-              <a:t>image to </a:t>
-            </a:r>
-            <a:r>
-              <a:rPr lang="en-US" dirty="0" smtClean="0">
-                <a:latin typeface="Times New Roman" panose="02020603050405020304" pitchFamily="18" charset="0"/>
-                <a:cs typeface="Times New Roman" panose="02020603050405020304" pitchFamily="18" charset="0"/>
-              </a:rPr>
-              <a:t>Azure Container Registry (</a:t>
-            </a:r>
-            <a:r>
-              <a:rPr dirty="0" smtClean="0">
-                <a:latin typeface="Times New Roman" panose="02020603050405020304" pitchFamily="18" charset="0"/>
-                <a:cs typeface="Times New Roman" panose="02020603050405020304" pitchFamily="18" charset="0"/>
-              </a:rPr>
-              <a:t>ACR</a:t>
-            </a:r>
-            <a:r>
-              <a:rPr lang="en-US" dirty="0" smtClean="0">
-                <a:latin typeface="Times New Roman" panose="02020603050405020304" pitchFamily="18" charset="0"/>
-                <a:cs typeface="Times New Roman" panose="02020603050405020304" pitchFamily="18" charset="0"/>
-              </a:rPr>
-              <a:t>)</a:t>
-            </a:r>
-          </a:p>
-          <a:p>
-            <a:endParaRPr lang="en-US" dirty="0" smtClean="0">
-              <a:latin typeface="Times New Roman" panose="02020603050405020304" pitchFamily="18" charset="0"/>
-              <a:cs typeface="Times New Roman" panose="02020603050405020304" pitchFamily="18" charset="0"/>
-            </a:endParaRPr>
-          </a:p>
-          <a:p>
-            <a:pPr marL="0" indent="0" algn="just">
-              <a:buNone/>
-            </a:pPr>
-            <a:r>
-              <a:rPr lang="en-US" dirty="0" smtClean="0">
-                <a:latin typeface="Times New Roman" panose="02020603050405020304" pitchFamily="18" charset="0"/>
-                <a:cs typeface="Times New Roman" panose="02020603050405020304" pitchFamily="18" charset="0"/>
-              </a:rPr>
-              <a:t>Every code change produces a new container image automatically</a:t>
-            </a:r>
-            <a:endParaRPr dirty="0">
-              <a:latin typeface="Times New Roman" panose="02020603050405020304" pitchFamily="18" charset="0"/>
-              <a:cs typeface="Times New Roman" panose="02020603050405020304" pitchFamily="18" charset="0"/>
-            </a:endParaRPr>
-          </a:p>
-        </p:txBody>
-      </p:sp>
+        </p:txBody>
+      </p:sp>
+      <p:pic>
+        <p:nvPicPr>
+          <p:cNvPr id="5" name="Picture 4"/>
+          <p:cNvPicPr>
+            <a:picLocks noChangeAspect="1"/>
+          </p:cNvPicPr>
+          <p:nvPr/>
+        </p:nvPicPr>
+        <p:blipFill>
+          <a:blip r:embed="rId3">
+            <a:extLst>
+              <a:ext uri="{28A0092B-C50C-407E-A947-70E740481C1C}">
+                <a14:useLocalDpi xmlns:a14="http://schemas.microsoft.com/office/drawing/2010/main" val="0"/>
+              </a:ext>
+            </a:extLst>
+          </a:blip>
+          <a:stretch>
+            <a:fillRect/>
+          </a:stretch>
+        </p:blipFill>
+        <p:spPr>
+          <a:xfrm>
+            <a:off x="364787" y="4431745"/>
+            <a:ext cx="8278238" cy="2162477"/>
+          </a:xfrm>
+          <a:prstGeom prst="rect">
+            <a:avLst/>
+          </a:prstGeom>
+        </p:spPr>
+      </p:pic>
+      <p:pic>
+        <p:nvPicPr>
+          <p:cNvPr id="4" name="Picture 3"/>
+          <p:cNvPicPr>
+            <a:picLocks noChangeAspect="1"/>
+          </p:cNvPicPr>
+          <p:nvPr/>
+        </p:nvPicPr>
+        <p:blipFill>
+          <a:blip r:embed="rId4">
+            <a:extLst>
+              <a:ext uri="{28A0092B-C50C-407E-A947-70E740481C1C}">
+                <a14:useLocalDpi xmlns:a14="http://schemas.microsoft.com/office/drawing/2010/main" val="0"/>
+              </a:ext>
+            </a:extLst>
+          </a:blip>
+          <a:stretch>
+            <a:fillRect/>
+          </a:stretch>
+        </p:blipFill>
+        <p:spPr>
+          <a:xfrm>
+            <a:off x="-369651" y="-359922"/>
+            <a:ext cx="9747115" cy="7422204"/>
+          </a:xfrm>
+          <a:prstGeom prst="rect">
+            <a:avLst/>
+          </a:prstGeom>
+          <a:solidFill>
+            <a:schemeClr val="bg1"/>
+          </a:solidFill>
+          <a:ln>
+            <a:noFill/>
+          </a:ln>
+          <a:effectLst/>
+          <a:scene3d>
+            <a:camera prst="orthographicFront">
+              <a:rot lat="0" lon="0" rev="0"/>
+            </a:camera>
+            <a:lightRig rig="chilly" dir="t">
+              <a:rot lat="0" lon="0" rev="18480000"/>
+            </a:lightRig>
+          </a:scene3d>
+          <a:sp3d prstMaterial="clear">
+            <a:bevelT h="63500"/>
+          </a:sp3d>
+        </p:spPr>
+      </p:pic>
     </p:spTree>
   </p:cSld>
   <p:clrMapOvr>
@@ -7167,8 +9681,76 @@
         </p:nvSpPr>
         <p:spPr>
           <a:xfrm>
-            <a:off x="476654" y="282102"/>
-            <a:ext cx="8210145" cy="1135536"/>
+            <a:off x="457200" y="2488"/>
+            <a:ext cx="8229600" cy="1143000"/>
+          </a:xfrm>
+        </p:spPr>
+        <p:txBody>
+          <a:bodyPr/>
+          <a:lstStyle/>
+          <a:p>
+            <a:r>
+              <a:rPr b="1" dirty="0" smtClean="0">
+                <a:solidFill>
+                  <a:schemeClr val="tx2">
+                    <a:lumMod val="75000"/>
+                  </a:schemeClr>
+                </a:solidFill>
+                <a:latin typeface="Arial" panose="020B0604020202020204" pitchFamily="34" charset="0"/>
+                <a:cs typeface="Arial" panose="020B0604020202020204" pitchFamily="34" charset="0"/>
+              </a:rPr>
+              <a:t>CI: </a:t>
+            </a:r>
+            <a:r>
+              <a:rPr b="1" dirty="0" err="1" smtClean="0">
+                <a:solidFill>
+                  <a:schemeClr val="tx2">
+                    <a:lumMod val="75000"/>
+                  </a:schemeClr>
+                </a:solidFill>
+                <a:latin typeface="Arial" panose="020B0604020202020204" pitchFamily="34" charset="0"/>
+                <a:cs typeface="Arial" panose="020B0604020202020204" pitchFamily="34" charset="0"/>
+              </a:rPr>
+              <a:t>GitHub</a:t>
+            </a:r>
+            <a:r>
+              <a:rPr b="1" dirty="0" smtClean="0">
+                <a:solidFill>
+                  <a:schemeClr val="tx2">
+                    <a:lumMod val="75000"/>
+                  </a:schemeClr>
+                </a:solidFill>
+                <a:latin typeface="Arial" panose="020B0604020202020204" pitchFamily="34" charset="0"/>
+                <a:cs typeface="Arial" panose="020B0604020202020204" pitchFamily="34" charset="0"/>
+              </a:rPr>
+              <a:t> Actions</a:t>
+            </a:r>
+            <a:endParaRPr b="1" dirty="0">
+              <a:solidFill>
+                <a:schemeClr val="tx2">
+                  <a:lumMod val="75000"/>
+                </a:schemeClr>
+              </a:solidFill>
+              <a:latin typeface="Arial" panose="020B0604020202020204" pitchFamily="34" charset="0"/>
+              <a:cs typeface="Arial" panose="020B0604020202020204" pitchFamily="34" charset="0"/>
+            </a:endParaRPr>
+          </a:p>
+        </p:txBody>
+      </p:sp>
+      <p:sp>
+        <p:nvSpPr>
+          <p:cNvPr id="3" name="Content Placeholder 2"/>
+          <p:cNvSpPr>
+            <a:spLocks noGrp="1"/>
+          </p:cNvSpPr>
+          <p:nvPr>
+            <p:ph idx="1"/>
+          </p:nvPr>
+        </p:nvSpPr>
+        <p:spPr>
+          <a:xfrm>
+            <a:off x="440871" y="4430490"/>
+            <a:ext cx="8262258" cy="2697164"/>
           </a:xfrm>
         </p:spPr>
         <p:txBody>
@@ -7178,90 +9760,178 @@
           <a:lstStyle/>
           <a:p>
             <a:r>
-              <a:rPr lang="en-US" sz="3600" b="1" dirty="0" smtClean="0">
-                <a:solidFill>
-                  <a:schemeClr val="tx2">
-                    <a:lumMod val="75000"/>
-                  </a:schemeClr>
-                </a:solidFill>
-                <a:latin typeface="Arial" panose="020B0604020202020204" pitchFamily="34" charset="0"/>
-                <a:cs typeface="Arial" panose="020B0604020202020204" pitchFamily="34" charset="0"/>
-              </a:rPr>
-              <a:t>Azure Container </a:t>
-            </a:r>
-            <a:r>
-              <a:rPr lang="en-US" sz="3600" b="1" dirty="0">
-                <a:solidFill>
-                  <a:schemeClr val="tx2">
-                    <a:lumMod val="75000"/>
-                  </a:schemeClr>
-                </a:solidFill>
-                <a:latin typeface="Arial" panose="020B0604020202020204" pitchFamily="34" charset="0"/>
-                <a:cs typeface="Arial" panose="020B0604020202020204" pitchFamily="34" charset="0"/>
-              </a:rPr>
-              <a:t>Registry (ACR)</a:t>
-            </a:r>
-          </a:p>
-        </p:txBody>
-      </p:sp>
-      <p:sp>
-        <p:nvSpPr>
-          <p:cNvPr id="3" name="Content Placeholder 2"/>
-          <p:cNvSpPr>
-            <a:spLocks noGrp="1"/>
-          </p:cNvSpPr>
-          <p:nvPr>
-            <p:ph idx="1"/>
-          </p:nvPr>
-        </p:nvSpPr>
-        <p:spPr/>
-        <p:txBody>
-          <a:bodyPr/>
-          <a:lstStyle/>
-          <a:p>
-            <a:r>
-              <a:rPr lang="en-US" dirty="0" smtClean="0">
+              <a:rPr sz="2000" dirty="0" smtClean="0">
                 <a:latin typeface="Times New Roman" panose="02020603050405020304" pitchFamily="18" charset="0"/>
                 <a:cs typeface="Times New Roman" panose="02020603050405020304" pitchFamily="18" charset="0"/>
               </a:rPr>
-              <a:t>Stores </a:t>
-            </a:r>
-            <a:r>
-              <a:rPr lang="en-US" dirty="0" err="1" smtClean="0">
+              <a:t>Triggered </a:t>
+            </a:r>
+            <a:r>
+              <a:rPr sz="2000" dirty="0">
                 <a:latin typeface="Times New Roman" panose="02020603050405020304" pitchFamily="18" charset="0"/>
                 <a:cs typeface="Times New Roman" panose="02020603050405020304" pitchFamily="18" charset="0"/>
               </a:rPr>
-              <a:t>Docker</a:t>
-            </a:r>
-            <a:r>
-              <a:rPr lang="en-US" dirty="0" smtClean="0">
+              <a:t>on push to </a:t>
+            </a:r>
+            <a:r>
+              <a:rPr sz="2000" dirty="0" smtClean="0">
                 <a:latin typeface="Times New Roman" panose="02020603050405020304" pitchFamily="18" charset="0"/>
                 <a:cs typeface="Times New Roman" panose="02020603050405020304" pitchFamily="18" charset="0"/>
               </a:rPr>
-              <a:t> images securely</a:t>
-            </a:r>
-          </a:p>
-          <a:p>
-            <a:r>
-              <a:rPr lang="en-US" dirty="0" smtClean="0">
-                <a:latin typeface="Times New Roman" panose="02020603050405020304" pitchFamily="18" charset="0"/>
-                <a:cs typeface="Times New Roman" panose="02020603050405020304" pitchFamily="18" charset="0"/>
-              </a:rPr>
-              <a:t>Acts as the source of AKS deployments</a:t>
-            </a:r>
-            <a:endParaRPr lang="en-US" dirty="0">
+              <a:t>main</a:t>
+            </a:r>
+            <a:endParaRPr lang="en-US" sz="2000" dirty="0" smtClean="0">
               <a:latin typeface="Times New Roman" panose="02020603050405020304" pitchFamily="18" charset="0"/>
               <a:cs typeface="Times New Roman" panose="02020603050405020304" pitchFamily="18" charset="0"/>
             </a:endParaRPr>
           </a:p>
-        </p:txBody>
-      </p:sp>
+          <a:p>
+            <a:r>
+              <a:rPr sz="2000" dirty="0" smtClean="0">
+                <a:latin typeface="Times New Roman" panose="02020603050405020304" pitchFamily="18" charset="0"/>
+                <a:cs typeface="Times New Roman" panose="02020603050405020304" pitchFamily="18" charset="0"/>
+              </a:rPr>
+              <a:t>Build </a:t>
+            </a:r>
+            <a:r>
+              <a:rPr sz="2000" dirty="0">
+                <a:latin typeface="Times New Roman" panose="02020603050405020304" pitchFamily="18" charset="0"/>
+                <a:cs typeface="Times New Roman" panose="02020603050405020304" pitchFamily="18" charset="0"/>
+              </a:rPr>
+              <a:t>.NET </a:t>
+            </a:r>
+            <a:r>
+              <a:rPr sz="2000" dirty="0" smtClean="0">
+                <a:latin typeface="Times New Roman" panose="02020603050405020304" pitchFamily="18" charset="0"/>
+                <a:cs typeface="Times New Roman" panose="02020603050405020304" pitchFamily="18" charset="0"/>
+              </a:rPr>
+              <a:t>app</a:t>
+            </a:r>
+            <a:r>
+              <a:rPr lang="en-US" sz="2000" dirty="0" smtClean="0">
+                <a:latin typeface="Times New Roman" panose="02020603050405020304" pitchFamily="18" charset="0"/>
+                <a:cs typeface="Times New Roman" panose="02020603050405020304" pitchFamily="18" charset="0"/>
+              </a:rPr>
+              <a:t>lication</a:t>
+            </a:r>
+            <a:endParaRPr sz="2000" dirty="0">
+              <a:latin typeface="Times New Roman" panose="02020603050405020304" pitchFamily="18" charset="0"/>
+              <a:cs typeface="Times New Roman" panose="02020603050405020304" pitchFamily="18" charset="0"/>
+            </a:endParaRPr>
+          </a:p>
+          <a:p>
+            <a:r>
+              <a:rPr sz="2000" dirty="0" smtClean="0">
+                <a:latin typeface="Times New Roman" panose="02020603050405020304" pitchFamily="18" charset="0"/>
+                <a:cs typeface="Times New Roman" panose="02020603050405020304" pitchFamily="18" charset="0"/>
+              </a:rPr>
+              <a:t>Build </a:t>
+            </a:r>
+            <a:r>
+              <a:rPr sz="2000" dirty="0" err="1">
+                <a:latin typeface="Times New Roman" panose="02020603050405020304" pitchFamily="18" charset="0"/>
+                <a:cs typeface="Times New Roman" panose="02020603050405020304" pitchFamily="18" charset="0"/>
+              </a:rPr>
+              <a:t>Docker</a:t>
+            </a:r>
+            <a:r>
+              <a:rPr sz="2000" dirty="0">
+                <a:latin typeface="Times New Roman" panose="02020603050405020304" pitchFamily="18" charset="0"/>
+                <a:cs typeface="Times New Roman" panose="02020603050405020304" pitchFamily="18" charset="0"/>
+              </a:rPr>
+              <a:t> image</a:t>
+            </a:r>
+          </a:p>
+          <a:p>
+            <a:r>
+              <a:rPr sz="2000" dirty="0" smtClean="0">
+                <a:latin typeface="Times New Roman" panose="02020603050405020304" pitchFamily="18" charset="0"/>
+                <a:cs typeface="Times New Roman" panose="02020603050405020304" pitchFamily="18" charset="0"/>
+              </a:rPr>
+              <a:t>Push </a:t>
+            </a:r>
+            <a:r>
+              <a:rPr sz="2000" dirty="0">
+                <a:latin typeface="Times New Roman" panose="02020603050405020304" pitchFamily="18" charset="0"/>
+                <a:cs typeface="Times New Roman" panose="02020603050405020304" pitchFamily="18" charset="0"/>
+              </a:rPr>
+              <a:t>image to </a:t>
+            </a:r>
+            <a:r>
+              <a:rPr lang="en-US" sz="2000" dirty="0" smtClean="0">
+                <a:latin typeface="Times New Roman" panose="02020603050405020304" pitchFamily="18" charset="0"/>
+                <a:cs typeface="Times New Roman" panose="02020603050405020304" pitchFamily="18" charset="0"/>
+              </a:rPr>
+              <a:t>Azure Container Registry (</a:t>
+            </a:r>
+            <a:r>
+              <a:rPr sz="2000" dirty="0" smtClean="0">
+                <a:latin typeface="Times New Roman" panose="02020603050405020304" pitchFamily="18" charset="0"/>
+                <a:cs typeface="Times New Roman" panose="02020603050405020304" pitchFamily="18" charset="0"/>
+              </a:rPr>
+              <a:t>ACR</a:t>
+            </a:r>
+            <a:r>
+              <a:rPr lang="en-US" sz="2000" dirty="0" smtClean="0">
+                <a:latin typeface="Times New Roman" panose="02020603050405020304" pitchFamily="18" charset="0"/>
+                <a:cs typeface="Times New Roman" panose="02020603050405020304" pitchFamily="18" charset="0"/>
+              </a:rPr>
+              <a:t>)</a:t>
+            </a:r>
+            <a:endParaRPr lang="en-US" sz="2000" dirty="0" smtClean="0">
+              <a:latin typeface="Times New Roman" panose="02020603050405020304" pitchFamily="18" charset="0"/>
+              <a:cs typeface="Times New Roman" panose="02020603050405020304" pitchFamily="18" charset="0"/>
+            </a:endParaRPr>
+          </a:p>
+          <a:p>
+            <a:pPr marL="0" indent="0" algn="just">
+              <a:buNone/>
+            </a:pPr>
+            <a:r>
+              <a:rPr lang="en-US" sz="2000" dirty="0" smtClean="0">
+                <a:latin typeface="Times New Roman" panose="02020603050405020304" pitchFamily="18" charset="0"/>
+                <a:cs typeface="Times New Roman" panose="02020603050405020304" pitchFamily="18" charset="0"/>
+              </a:rPr>
+              <a:t>Every code change produces a new container image automatically</a:t>
+            </a:r>
+            <a:endParaRPr sz="2000" dirty="0">
+              <a:latin typeface="Times New Roman" panose="02020603050405020304" pitchFamily="18" charset="0"/>
+              <a:cs typeface="Times New Roman" panose="02020603050405020304" pitchFamily="18" charset="0"/>
+            </a:endParaRPr>
+          </a:p>
+        </p:txBody>
+      </p:sp>
+      <p:pic>
+        <p:nvPicPr>
+          <p:cNvPr id="4" name="Picture 3"/>
+          <p:cNvPicPr>
+            <a:picLocks noChangeAspect="1"/>
+          </p:cNvPicPr>
+          <p:nvPr/>
+        </p:nvPicPr>
+        <p:blipFill>
+          <a:blip r:embed="rId3">
+            <a:extLst>
+              <a:ext uri="{28A0092B-C50C-407E-A947-70E740481C1C}">
+                <a14:useLocalDpi xmlns:a14="http://schemas.microsoft.com/office/drawing/2010/main" val="0"/>
+              </a:ext>
+            </a:extLst>
+          </a:blip>
+          <a:stretch>
+            <a:fillRect/>
+          </a:stretch>
+        </p:blipFill>
+        <p:spPr>
+          <a:xfrm>
+            <a:off x="457200" y="1090100"/>
+            <a:ext cx="8229600" cy="3187986"/>
+          </a:xfrm>
+          <a:prstGeom prst="rect">
+            <a:avLst/>
+          </a:prstGeom>
+        </p:spPr>
+      </p:pic>
     </p:spTree>
-    <p:extLst>
-      <p:ext uri="{BB962C8B-B14F-4D97-AF65-F5344CB8AC3E}">
-        <p14:creationId xmlns:p14="http://schemas.microsoft.com/office/powerpoint/2010/main" val="3754824711"/>
-      </p:ext>
-    </p:extLst>
   </p:cSld>
   <p:clrMapOvr>
     <a:masterClrMapping/>
@@ -7317,187 +9987,164 @@
         </p:nvSpPr>
         <p:spPr>
           <a:xfrm>
-            <a:off x="428017" y="301556"/>
-            <a:ext cx="8258783" cy="1116081"/>
+            <a:off x="476654" y="282102"/>
+            <a:ext cx="8210145" cy="1135536"/>
           </a:xfrm>
         </p:spPr>
         <p:txBody>
+          <a:bodyPr>
+            <a:normAutofit fontScale="90000"/>
+          </a:bodyPr>
+          <a:lstStyle/>
+          <a:p>
+            <a:r>
+              <a:rPr lang="en-US" sz="3600" b="1" dirty="0" smtClean="0">
+                <a:solidFill>
+                  <a:schemeClr val="tx2">
+                    <a:lumMod val="75000"/>
+                  </a:schemeClr>
+                </a:solidFill>
+                <a:latin typeface="Arial" panose="020B0604020202020204" pitchFamily="34" charset="0"/>
+                <a:cs typeface="Arial" panose="020B0604020202020204" pitchFamily="34" charset="0"/>
+              </a:rPr>
+              <a:t>Azure Container </a:t>
+            </a:r>
+            <a:r>
+              <a:rPr lang="en-US" sz="3600" b="1" dirty="0">
+                <a:solidFill>
+                  <a:schemeClr val="tx2">
+                    <a:lumMod val="75000"/>
+                  </a:schemeClr>
+                </a:solidFill>
+                <a:latin typeface="Arial" panose="020B0604020202020204" pitchFamily="34" charset="0"/>
+                <a:cs typeface="Arial" panose="020B0604020202020204" pitchFamily="34" charset="0"/>
+              </a:rPr>
+              <a:t>Registry (ACR</a:t>
+            </a:r>
+            <a:r>
+              <a:rPr lang="en-US" sz="3600" b="1" dirty="0" smtClean="0">
+                <a:solidFill>
+                  <a:schemeClr val="tx2">
+                    <a:lumMod val="75000"/>
+                  </a:schemeClr>
+                </a:solidFill>
+                <a:latin typeface="Arial" panose="020B0604020202020204" pitchFamily="34" charset="0"/>
+                <a:cs typeface="Arial" panose="020B0604020202020204" pitchFamily="34" charset="0"/>
+              </a:rPr>
+              <a:t>) / </a:t>
+            </a:r>
+            <a:r>
+              <a:rPr lang="en-US" sz="3600" b="1" dirty="0" err="1" smtClean="0">
+                <a:solidFill>
+                  <a:schemeClr val="tx2">
+                    <a:lumMod val="75000"/>
+                  </a:schemeClr>
+                </a:solidFill>
+                <a:latin typeface="Arial" panose="020B0604020202020204" pitchFamily="34" charset="0"/>
+                <a:cs typeface="Arial" panose="020B0604020202020204" pitchFamily="34" charset="0"/>
+              </a:rPr>
+              <a:t>DockerHub</a:t>
+            </a:r>
+            <a:endParaRPr lang="en-US" sz="3600" b="1" dirty="0">
+              <a:solidFill>
+                <a:schemeClr val="tx2">
+                  <a:lumMod val="75000"/>
+                </a:schemeClr>
+              </a:solidFill>
+              <a:latin typeface="Arial" panose="020B0604020202020204" pitchFamily="34" charset="0"/>
+              <a:cs typeface="Arial" panose="020B0604020202020204" pitchFamily="34" charset="0"/>
+            </a:endParaRPr>
+          </a:p>
+        </p:txBody>
+      </p:sp>
+      <p:sp>
+        <p:nvSpPr>
+          <p:cNvPr id="3" name="Content Placeholder 2"/>
+          <p:cNvSpPr>
+            <a:spLocks noGrp="1"/>
+          </p:cNvSpPr>
+          <p:nvPr>
+            <p:ph idx="1"/>
+          </p:nvPr>
+        </p:nvSpPr>
+        <p:spPr/>
+        <p:txBody>
           <a:bodyPr/>
           <a:lstStyle/>
           <a:p>
-            <a:r>
-              <a:rPr b="1" dirty="0">
-                <a:solidFill>
-                  <a:schemeClr val="tx2">
-                    <a:lumMod val="75000"/>
-                  </a:schemeClr>
-                </a:solidFill>
-                <a:latin typeface="Arial" panose="020B0604020202020204" pitchFamily="34" charset="0"/>
-                <a:cs typeface="Arial" panose="020B0604020202020204" pitchFamily="34" charset="0"/>
-              </a:rPr>
-              <a:t>CD: </a:t>
-            </a:r>
-            <a:r>
-              <a:rPr b="1" dirty="0" err="1">
-                <a:solidFill>
-                  <a:schemeClr val="tx2">
-                    <a:lumMod val="75000"/>
-                  </a:schemeClr>
-                </a:solidFill>
-                <a:latin typeface="Arial" panose="020B0604020202020204" pitchFamily="34" charset="0"/>
-                <a:cs typeface="Arial" panose="020B0604020202020204" pitchFamily="34" charset="0"/>
-              </a:rPr>
-              <a:t>GitOps</a:t>
-            </a:r>
-            <a:r>
-              <a:rPr b="1" dirty="0">
-                <a:solidFill>
-                  <a:schemeClr val="tx2">
-                    <a:lumMod val="75000"/>
-                  </a:schemeClr>
-                </a:solidFill>
-                <a:latin typeface="Arial" panose="020B0604020202020204" pitchFamily="34" charset="0"/>
-                <a:cs typeface="Arial" panose="020B0604020202020204" pitchFamily="34" charset="0"/>
-              </a:rPr>
-              <a:t> with Argo CD</a:t>
-            </a:r>
-          </a:p>
-        </p:txBody>
-      </p:sp>
-      <p:sp>
-        <p:nvSpPr>
-          <p:cNvPr id="3" name="Content Placeholder 2"/>
-          <p:cNvSpPr>
-            <a:spLocks noGrp="1"/>
-          </p:cNvSpPr>
-          <p:nvPr>
-            <p:ph idx="1"/>
-          </p:nvPr>
-        </p:nvSpPr>
-        <p:spPr>
-          <a:xfrm>
-            <a:off x="457200" y="1600200"/>
-            <a:ext cx="8229600" cy="4525963"/>
-          </a:xfrm>
-        </p:spPr>
-        <p:txBody>
-          <a:bodyPr/>
-          <a:lstStyle/>
-          <a:p>
-            <a:pPr marL="0" indent="0" algn="just">
-              <a:buNone/>
-            </a:pPr>
-            <a:r>
-              <a:rPr dirty="0" err="1" smtClean="0">
-                <a:latin typeface="Times New Roman" panose="02020603050405020304" pitchFamily="18" charset="0"/>
-                <a:cs typeface="Times New Roman" panose="02020603050405020304" pitchFamily="18" charset="0"/>
-              </a:rPr>
-              <a:t>Git</a:t>
-            </a:r>
-            <a:r>
-              <a:rPr dirty="0" smtClean="0">
-                <a:latin typeface="Times New Roman" panose="02020603050405020304" pitchFamily="18" charset="0"/>
-                <a:cs typeface="Times New Roman" panose="02020603050405020304" pitchFamily="18" charset="0"/>
-              </a:rPr>
-              <a:t> </a:t>
-            </a:r>
-            <a:r>
-              <a:rPr dirty="0">
-                <a:latin typeface="Times New Roman" panose="02020603050405020304" pitchFamily="18" charset="0"/>
-                <a:cs typeface="Times New Roman" panose="02020603050405020304" pitchFamily="18" charset="0"/>
-              </a:rPr>
-              <a:t>as single source of </a:t>
-            </a:r>
-            <a:r>
-              <a:rPr dirty="0" smtClean="0">
-                <a:latin typeface="Times New Roman" panose="02020603050405020304" pitchFamily="18" charset="0"/>
-                <a:cs typeface="Times New Roman" panose="02020603050405020304" pitchFamily="18" charset="0"/>
-              </a:rPr>
-              <a:t>truth</a:t>
-            </a:r>
-            <a:r>
-              <a:rPr lang="en-US" dirty="0">
-                <a:latin typeface="Times New Roman" panose="02020603050405020304" pitchFamily="18" charset="0"/>
-                <a:cs typeface="Times New Roman" panose="02020603050405020304" pitchFamily="18" charset="0"/>
-              </a:rPr>
-              <a:t>.</a:t>
-            </a:r>
             <a:r>
               <a:rPr lang="en-US" dirty="0" smtClean="0">
                 <a:latin typeface="Times New Roman" panose="02020603050405020304" pitchFamily="18" charset="0"/>
                 <a:cs typeface="Times New Roman" panose="02020603050405020304" pitchFamily="18" charset="0"/>
               </a:rPr>
-              <a:t> It’s declarative, versioned &amp; immutable, pulled automatically and continuously reconciled</a:t>
-            </a:r>
-          </a:p>
-          <a:p>
-            <a:endParaRPr lang="en-US" dirty="0" smtClean="0">
+              <a:t>Stores </a:t>
+            </a:r>
+            <a:r>
+              <a:rPr lang="en-US" dirty="0" err="1" smtClean="0">
+                <a:latin typeface="Times New Roman" panose="02020603050405020304" pitchFamily="18" charset="0"/>
+                <a:cs typeface="Times New Roman" panose="02020603050405020304" pitchFamily="18" charset="0"/>
+              </a:rPr>
+              <a:t>Docker</a:t>
+            </a:r>
+            <a:r>
+              <a:rPr lang="en-US" dirty="0" smtClean="0">
+                <a:latin typeface="Times New Roman" panose="02020603050405020304" pitchFamily="18" charset="0"/>
+                <a:cs typeface="Times New Roman" panose="02020603050405020304" pitchFamily="18" charset="0"/>
+              </a:rPr>
+              <a:t> images securely</a:t>
+            </a:r>
+          </a:p>
+          <a:p>
+            <a:r>
+              <a:rPr lang="en-US" dirty="0" smtClean="0">
+                <a:latin typeface="Times New Roman" panose="02020603050405020304" pitchFamily="18" charset="0"/>
+                <a:cs typeface="Times New Roman" panose="02020603050405020304" pitchFamily="18" charset="0"/>
+              </a:rPr>
+              <a:t>Acts as the source of AKS deployments</a:t>
+            </a:r>
+            <a:endParaRPr lang="en-US" dirty="0">
               <a:latin typeface="Times New Roman" panose="02020603050405020304" pitchFamily="18" charset="0"/>
               <a:cs typeface="Times New Roman" panose="02020603050405020304" pitchFamily="18" charset="0"/>
             </a:endParaRPr>
           </a:p>
-          <a:p>
-            <a:r>
-              <a:rPr lang="en-US" dirty="0" smtClean="0">
-                <a:latin typeface="Times New Roman" panose="02020603050405020304" pitchFamily="18" charset="0"/>
-                <a:cs typeface="Times New Roman" panose="02020603050405020304" pitchFamily="18" charset="0"/>
-              </a:rPr>
-              <a:t>Watches </a:t>
-            </a:r>
-            <a:r>
-              <a:rPr lang="en-US" dirty="0" err="1" smtClean="0">
-                <a:latin typeface="Times New Roman" panose="02020603050405020304" pitchFamily="18" charset="0"/>
-                <a:cs typeface="Times New Roman" panose="02020603050405020304" pitchFamily="18" charset="0"/>
-              </a:rPr>
-              <a:t>GitHub</a:t>
-            </a:r>
-            <a:r>
-              <a:rPr lang="en-US" dirty="0" smtClean="0">
-                <a:latin typeface="Times New Roman" panose="02020603050405020304" pitchFamily="18" charset="0"/>
-                <a:cs typeface="Times New Roman" panose="02020603050405020304" pitchFamily="18" charset="0"/>
-              </a:rPr>
-              <a:t> Repository</a:t>
-            </a:r>
-            <a:endParaRPr dirty="0">
-              <a:latin typeface="Times New Roman" panose="02020603050405020304" pitchFamily="18" charset="0"/>
-              <a:cs typeface="Times New Roman" panose="02020603050405020304" pitchFamily="18" charset="0"/>
-            </a:endParaRPr>
-          </a:p>
-          <a:p>
-            <a:r>
-              <a:rPr dirty="0" smtClean="0">
-                <a:latin typeface="Times New Roman" panose="02020603050405020304" pitchFamily="18" charset="0"/>
-                <a:cs typeface="Times New Roman" panose="02020603050405020304" pitchFamily="18" charset="0"/>
-              </a:rPr>
-              <a:t>Automated </a:t>
-            </a:r>
-            <a:r>
-              <a:rPr dirty="0">
-                <a:latin typeface="Times New Roman" panose="02020603050405020304" pitchFamily="18" charset="0"/>
-                <a:cs typeface="Times New Roman" panose="02020603050405020304" pitchFamily="18" charset="0"/>
-              </a:rPr>
-              <a:t>sync to AKS</a:t>
-            </a:r>
-          </a:p>
-          <a:p>
-            <a:r>
-              <a:rPr dirty="0" smtClean="0">
-                <a:latin typeface="Times New Roman" panose="02020603050405020304" pitchFamily="18" charset="0"/>
-                <a:cs typeface="Times New Roman" panose="02020603050405020304" pitchFamily="18" charset="0"/>
-              </a:rPr>
-              <a:t>Self-healing </a:t>
-            </a:r>
-            <a:r>
-              <a:rPr dirty="0">
-                <a:latin typeface="Times New Roman" panose="02020603050405020304" pitchFamily="18" charset="0"/>
-                <a:cs typeface="Times New Roman" panose="02020603050405020304" pitchFamily="18" charset="0"/>
-              </a:rPr>
-              <a:t>deployments</a:t>
-            </a:r>
-          </a:p>
-        </p:txBody>
-      </p:sp>
+        </p:txBody>
+      </p:sp>
+      <p:pic>
+        <p:nvPicPr>
+          <p:cNvPr id="6" name="Picture 5"/>
+          <p:cNvPicPr>
+            <a:picLocks noChangeAspect="1"/>
+          </p:cNvPicPr>
+          <p:nvPr/>
+        </p:nvPicPr>
+        <p:blipFill>
+          <a:blip r:embed="rId3">
+            <a:extLst>
+              <a:ext uri="{28A0092B-C50C-407E-A947-70E740481C1C}">
+                <a14:useLocalDpi xmlns:a14="http://schemas.microsoft.com/office/drawing/2010/main" val="0"/>
+              </a:ext>
+            </a:extLst>
+          </a:blip>
+          <a:stretch>
+            <a:fillRect/>
+          </a:stretch>
+        </p:blipFill>
+        <p:spPr>
+          <a:xfrm>
+            <a:off x="1272208" y="2764507"/>
+            <a:ext cx="6599583" cy="3994100"/>
+          </a:xfrm>
+          <a:prstGeom prst="rect">
+            <a:avLst/>
+          </a:prstGeom>
+        </p:spPr>
+      </p:pic>
     </p:spTree>
+    <p:extLst>
+      <p:ext uri="{BB962C8B-B14F-4D97-AF65-F5344CB8AC3E}">
+        <p14:creationId xmlns:p14="http://schemas.microsoft.com/office/powerpoint/2010/main" val="3754824711"/>
+      </p:ext>
+    </p:extLst>
   </p:cSld>
   <p:clrMapOvr>
     <a:masterClrMapping/>
@@ -7842,4 +10489,265 @@
   </a:objectDefaults>
   <a:extraClrSchemeLst/>
 </a:theme>
+</file>
+
+<file path=ppt/theme/theme2.xml><?xml version="1.0" encoding="utf-8"?>
+<a:theme xmlns:a="http://schemas.openxmlformats.org/drawingml/2006/main" name="Office Theme">
+  <a:themeElements>
+    <a:clrScheme name="Office">
+      <a:dk1>
+        <a:sysClr val="windowText" lastClr="000000"/>
+      </a:dk1>
+      <a:lt1>
+        <a:sysClr val="window" lastClr="FFFFFF"/>
+      </a:lt1>
+      <a:dk2>
+        <a:srgbClr val="44546A"/>
+      </a:dk2>
+      <a:lt2>
+        <a:srgbClr val="E7E6E6"/>
+      </a:lt2>
+      <a:accent1>
+        <a:srgbClr val="5B9BD5"/>
+      </a:accent1>
+      <a:accent2>
+        <a:srgbClr val="ED7D31"/>
+      </a:accent2>
+      <a:accent3>
+        <a:srgbClr val="A5A5A5"/>
+      </a:accent3>
+      <a:accent4>
+        <a:srgbClr val="FFC000"/>
+      </a:accent4>
+      <a:accent5>
+        <a:srgbClr val="4472C4"/>
+      </a:accent5>
+      <a:accent6>
+        <a:srgbClr val="70AD47"/>
+      </a:accent6>
+      <a:hlink>
+        <a:srgbClr val="0563C1"/>
+      </a:hlink>
+      <a:folHlink>
+        <a:srgbClr val="954F72"/>
+      </a:folHlink>
+    </a:clrScheme>
+    <a:fontScheme name="Office">
+      <a:majorFont>
+        <a:latin typeface="Calibri Light" panose="020F0302020204030204"/>
+        <a:ea typeface=""/>
+        <a:cs typeface=""/>
+        <a:font script="Jpan" typeface="ＭＳ Ｐゴシック"/>
+        <a:font script="Hang" typeface="맑은 고딕"/>
+        <a:font script="Hans" typeface="宋体"/>
+        <a:font script="Hant" typeface="新細明體"/>
+        <a:font script="Arab" typeface="Times New Roman"/>
+        <a:font script="Hebr" typeface="Times New Roman"/>
+        <a:font script="Thai" typeface="Angsana New"/>
+        <a:font script="Ethi" typeface="Nyala"/>
+        <a:font script="Beng" typeface="Vrinda"/>
+        <a:font script="Gujr" typeface="Shruti"/>
+        <a:font script="Khmr" typeface="MoolBoran"/>
+        <a:font script="Knda" typeface="Tunga"/>
+        <a:font script="Guru" typeface="Raavi"/>
+        <a:font script="Cans" typeface="Euphemia"/>
+        <a:font script="Cher" typeface="Plantagenet Cherokee"/>
+        <a:font script="Yiii" typeface="Microsoft Yi Baiti"/>
+        <a:font script="Tibt" typeface="Microsoft Himalaya"/>
+        <a:font script="Thaa" typeface="MV Boli"/>
+        <a:font script="Deva" typeface="Mangal"/>
+        <a:font script="Telu" typeface="Gautami"/>
+        <a:font script="Taml" typeface="Latha"/>
+        <a:font script="Syrc" typeface="Estrangelo Edessa"/>
+        <a:font script="Orya" typeface="Kalinga"/>
+        <a:font script="Mlym" typeface="Kartika"/>
+        <a:font script="Laoo" typeface="DokChampa"/>
+        <a:font script="Sinh" typeface="Iskoola Pota"/>
+        <a:font script="Mong" typeface="Mongolian Baiti"/>
+        <a:font script="Viet" typeface="Times New Roman"/>
+        <a:font script="Uigh" typeface="Microsoft Uighur"/>
+        <a:font script="Geor" typeface="Sylfaen"/>
+      </a:majorFont>
+      <a:minorFont>
+        <a:latin typeface="Calibri" panose="020F0502020204030204"/>
+        <a:ea typeface=""/>
+        <a:cs typeface=""/>
+        <a:font script="Jpan" typeface="ＭＳ Ｐゴシック"/>
+        <a:font script="Hang" typeface="맑은 고딕"/>
+        <a:font script="Hans" typeface="宋体"/>
+        <a:font script="Hant" typeface="新細明體"/>
+        <a:font script="Arab" typeface="Arial"/>
+        <a:font script="Hebr" typeface="Arial"/>
+        <a:font script="Thai" typeface="Cordia New"/>
+        <a:font script="Ethi" typeface="Nyala"/>
+        <a:font script="Beng" typeface="Vrinda"/>
+        <a:font script="Gujr" typeface="Shruti"/>
+        <a:font script="Khmr" typeface="DaunPenh"/>
+        <a:font script="Knda" typeface="Tunga"/>
+        <a:font script="Guru" typeface="Raavi"/>
+        <a:font script="Cans" typeface="Euphemia"/>
+        <a:font script="Cher" typeface="Plantagenet Cherokee"/>
+        <a:font script="Yiii" typeface="Microsoft Yi Baiti"/>
+        <a:font script="Tibt" typeface="Microsoft Himalaya"/>
+        <a:font script="Thaa" typeface="MV Boli"/>
+        <a:font script="Deva" typeface="Mangal"/>
+        <a:font script="Telu" typeface="Gautami"/>
+        <a:font script="Taml" typeface="Latha"/>
+        <a:font script="Syrc" typeface="Estrangelo Edessa"/>
+        <a:font script="Orya" typeface="Kalinga"/>
+        <a:font script="Mlym" typeface="Kartika"/>
+        <a:font script="Laoo" typeface="DokChampa"/>
+        <a:font script="Sinh" typeface="Iskoola Pota"/>
+        <a:font script="Mong" typeface="Mongolian Baiti"/>
+        <a:font script="Viet" typeface="Arial"/>
+        <a:font script="Uigh" typeface="Microsoft Uighur"/>
+        <a:font script="Geor" typeface="Sylfaen"/>
+      </a:minorFont>
+    </a:fontScheme>
+    <a:fmtScheme name="Office">
+      <a:fillStyleLst>
+        <a:solidFill>
+          <a:schemeClr val="phClr"/>
+        </a:solidFill>
+        <a:gradFill rotWithShape="1">
+          <a:gsLst>
+            <a:gs pos="0">
+              <a:schemeClr val="phClr">
+                <a:lumMod val="110000"/>
+                <a:satMod val="105000"/>
+                <a:tint val="67000"/>
+              </a:schemeClr>
+            </a:gs>
+            <a:gs pos="50000">
+              <a:schemeClr val="phClr">
+                <a:lumMod val="105000"/>
+                <a:satMod val="103000"/>
+                <a:tint val="73000"/>
+              </a:schemeClr>
+            </a:gs>
+            <a:gs pos="100000">
+              <a:schemeClr val="phClr">
+                <a:lumMod val="105000"/>
+                <a:satMod val="109000"/>
+                <a:tint val="81000"/>
+              </a:schemeClr>
+            </a:gs>
+          </a:gsLst>
+          <a:lin ang="5400000" scaled="0"/>
+        </a:gradFill>
+        <a:gradFill rotWithShape="1">
+          <a:gsLst>
+            <a:gs pos="0">
+              <a:schemeClr val="phClr">
+                <a:satMod val="103000"/>
+                <a:lumMod val="102000"/>
+                <a:tint val="94000"/>
+              </a:schemeClr>
+            </a:gs>
+            <a:gs pos="50000">
+              <a:schemeClr val="phClr">
+                <a:satMod val="110000"/>
+                <a:lumMod val="100000"/>
+                <a:shade val="100000"/>
+              </a:schemeClr>
+            </a:gs>
+            <a:gs pos="100000">
+              <a:schemeClr val="phClr">
+                <a:lumMod val="99000"/>
+                <a:satMod val="120000"/>
+                <a:shade val="78000"/>
+              </a:schemeClr>
+            </a:gs>
+          </a:gsLst>
+          <a:lin ang="5400000" scaled="0"/>
+        </a:gradFill>
+      </a:fillStyleLst>
+      <a:lnStyleLst>
+        <a:ln w="6350" cap="flat" cmpd="sng" algn="ctr">
+          <a:solidFill>
+            <a:schemeClr val="phClr"/>
+          </a:solidFill>
+          <a:prstDash val="solid"/>
+          <a:miter lim="800000"/>
+        </a:ln>
+        <a:ln w="12700" cap="flat" cmpd="sng" algn="ctr">
+          <a:solidFill>
+            <a:schemeClr val="phClr"/>
+          </a:solidFill>
+          <a:prstDash val="solid"/>
+          <a:miter lim="800000"/>
+        </a:ln>
+        <a:ln w="19050" cap="flat" cmpd="sng" algn="ctr">
+          <a:solidFill>
+            <a:schemeClr val="phClr"/>
+          </a:solidFill>
+          <a:prstDash val="solid"/>
+          <a:miter lim="800000"/>
+        </a:ln>
+      </a:lnStyleLst>
+      <a:effectStyleLst>
+        <a:effectStyle>
+          <a:effectLst/>
+        </a:effectStyle>
+        <a:effectStyle>
+          <a:effectLst/>
+        </a:effectStyle>
+        <a:effectStyle>
+          <a:effectLst>
+            <a:outerShdw blurRad="57150" dist="19050" dir="5400000" algn="ctr" rotWithShape="0">
+              <a:srgbClr val="000000">
+                <a:alpha val="63000"/>
+              </a:srgbClr>
+            </a:outerShdw>
+          </a:effectLst>
+        </a:effectStyle>
+      </a:effectStyleLst>
+      <a:bgFillStyleLst>
+        <a:solidFill>
+          <a:schemeClr val="phClr"/>
+        </a:solidFill>
+        <a:solidFill>
+          <a:schemeClr val="phClr">
+            <a:tint val="95000"/>
+            <a:satMod val="170000"/>
+          </a:schemeClr>
+        </a:solidFill>
+        <a:gradFill rotWithShape="1">
+          <a:gsLst>
+            <a:gs pos="0">
+              <a:schemeClr val="phClr">
+                <a:tint val="93000"/>
+                <a:satMod val="150000"/>
+                <a:shade val="98000"/>
+                <a:lumMod val="102000"/>
+              </a:schemeClr>
+            </a:gs>
+            <a:gs pos="50000">
+              <a:schemeClr val="phClr">
+                <a:tint val="98000"/>
+                <a:satMod val="130000"/>
+                <a:shade val="90000"/>
+                <a:lumMod val="103000"/>
+              </a:schemeClr>
+            </a:gs>
+            <a:gs pos="100000">
+              <a:schemeClr val="phClr">
+                <a:shade val="63000"/>
+                <a:satMod val="120000"/>
+              </a:schemeClr>
+            </a:gs>
+          </a:gsLst>
+          <a:lin ang="5400000" scaled="0"/>
+        </a:gradFill>
+      </a:bgFillStyleLst>
+    </a:fmtScheme>
+  </a:themeElements>
+  <a:objectDefaults/>
+  <a:extraClrSchemeLst/>
+  <a:extLst>
+    <a:ext uri="{05A4C25C-085E-4340-85A3-A5531E510DB2}">
+      <thm15:themeFamily xmlns:thm15="http://schemas.microsoft.com/office/thememl/2012/main" name="Office Theme" id="{62F939B6-93AF-4DB8-9C6B-D6C7DFDC589F}" vid="{4A3C46E8-61CC-4603-A589-7422A47A8E4A}"/>
+    </a:ext>
+  </a:extLst>
+</a:theme>
 </file>
--- a/docs/Ajibade_DevOps_Project.pptx
+++ b/docs/Ajibade_DevOps_Project.pptx
@@ -3,27 +3,28 @@
 <p:presentation xmlns:a="http://schemas.openxmlformats.org/drawingml/2006/main" xmlns:r="http://schemas.openxmlformats.org/officeDocument/2006/relationships" xmlns:p="http://schemas.openxmlformats.org/presentationml/2006/main" saveSubsetFonts="1" autoCompressPictures="0">
   <p:sldMasterIdLst>
     <p:sldMasterId id="2147483648" r:id="rId1"/>
+    <p:sldMasterId id="2147483696" r:id="rId2"/>
   </p:sldMasterIdLst>
   <p:notesMasterIdLst>
-    <p:notesMasterId r:id="rId18"/>
+    <p:notesMasterId r:id="rId19"/>
   </p:notesMasterIdLst>
   <p:sldIdLst>
-    <p:sldId id="256" r:id="rId2"/>
-    <p:sldId id="257" r:id="rId3"/>
-    <p:sldId id="270" r:id="rId4"/>
-    <p:sldId id="267" r:id="rId5"/>
-    <p:sldId id="259" r:id="rId6"/>
-    <p:sldId id="273" r:id="rId7"/>
-    <p:sldId id="260" r:id="rId8"/>
-    <p:sldId id="261" r:id="rId9"/>
-    <p:sldId id="269" r:id="rId10"/>
-    <p:sldId id="262" r:id="rId11"/>
-    <p:sldId id="263" r:id="rId12"/>
-    <p:sldId id="264" r:id="rId13"/>
-    <p:sldId id="271" r:id="rId14"/>
-    <p:sldId id="272" r:id="rId15"/>
-    <p:sldId id="265" r:id="rId16"/>
-    <p:sldId id="268" r:id="rId17"/>
+    <p:sldId id="256" r:id="rId3"/>
+    <p:sldId id="257" r:id="rId4"/>
+    <p:sldId id="270" r:id="rId5"/>
+    <p:sldId id="267" r:id="rId6"/>
+    <p:sldId id="259" r:id="rId7"/>
+    <p:sldId id="273" r:id="rId8"/>
+    <p:sldId id="260" r:id="rId9"/>
+    <p:sldId id="261" r:id="rId10"/>
+    <p:sldId id="269" r:id="rId11"/>
+    <p:sldId id="262" r:id="rId12"/>
+    <p:sldId id="263" r:id="rId13"/>
+    <p:sldId id="264" r:id="rId14"/>
+    <p:sldId id="271" r:id="rId15"/>
+    <p:sldId id="272" r:id="rId16"/>
+    <p:sldId id="265" r:id="rId17"/>
+    <p:sldId id="268" r:id="rId18"/>
   </p:sldIdLst>
   <p:sldSz cx="9144000" cy="6858000" type="screen4x3"/>
   <p:notesSz cx="6858000" cy="9144000"/>
@@ -223,7 +224,7 @@
           <a:p>
             <a:fld id="{5F451B4E-638F-4418-ADB5-33E847636117}" type="datetimeFigureOut">
               <a:rPr lang="en-US" smtClean="0"/>
-              <a:t>30-Jan-26</a:t>
+              <a:t>31-Jan-26</a:t>
             </a:fld>
             <a:endParaRPr lang="en-US"/>
           </a:p>
@@ -1371,15 +1372,6 @@
               </a:rPr>
               <a:t>You can commit your configurations to version control to safely collaborate on infrastructure.</a:t>
             </a:r>
-            <a:endParaRPr lang="en-US" sz="1200" b="0" i="0" kern="1200" dirty="0" smtClean="0">
-              <a:solidFill>
-                <a:schemeClr val="tx1"/>
-              </a:solidFill>
-              <a:effectLst/>
-              <a:latin typeface="+mn-lt"/>
-              <a:ea typeface="+mn-ea"/>
-              <a:cs typeface="+mn-cs"/>
-            </a:endParaRPr>
           </a:p>
           <a:p>
             <a:r>
@@ -2201,7 +2193,7 @@
           <a:p>
             <a:fld id="{5BCAD085-E8A6-8845-BD4E-CB4CCA059FC4}" type="datetimeFigureOut">
               <a:rPr lang="en-US" smtClean="0"/>
-              <a:t>30-Jan-26</a:t>
+              <a:t>31-Jan-26</a:t>
             </a:fld>
             <a:endParaRPr lang="en-US"/>
           </a:p>
@@ -2383,7 +2375,7 @@
           <a:p>
             <a:fld id="{5BCAD085-E8A6-8845-BD4E-CB4CCA059FC4}" type="datetimeFigureOut">
               <a:rPr lang="en-US" smtClean="0"/>
-              <a:t>30-Jan-26</a:t>
+              <a:t>31-Jan-26</a:t>
             </a:fld>
             <a:endParaRPr lang="en-US"/>
           </a:p>
@@ -2575,7 +2567,7 @@
           <a:p>
             <a:fld id="{5BCAD085-E8A6-8845-BD4E-CB4CCA059FC4}" type="datetimeFigureOut">
               <a:rPr lang="en-US" smtClean="0"/>
-              <a:t>30-Jan-26</a:t>
+              <a:t>31-Jan-26</a:t>
             </a:fld>
             <a:endParaRPr lang="en-US"/>
           </a:p>
@@ -2648,6 +2640,2639 @@
 </p:sldLayout>
 </file>
 
+<file path=ppt/slideLayouts/slideLayout12.xml><?xml version="1.0" encoding="utf-8"?>
+<p:sldLayout xmlns:a="http://schemas.openxmlformats.org/drawingml/2006/main" xmlns:r="http://schemas.openxmlformats.org/officeDocument/2006/relationships" xmlns:p="http://schemas.openxmlformats.org/presentationml/2006/main" showMasterSp="0" type="title" preserve="1">
+  <p:cSld name="Title Slide">
+    <p:spTree>
+      <p:nvGrpSpPr>
+        <p:cNvPr id="1" name=""/>
+        <p:cNvGrpSpPr/>
+        <p:nvPr/>
+      </p:nvGrpSpPr>
+      <p:grpSpPr>
+        <a:xfrm>
+          <a:off x="0" y="0"/>
+          <a:ext cx="0" cy="0"/>
+          <a:chOff x="0" y="0"/>
+          <a:chExt cx="0" cy="0"/>
+        </a:xfrm>
+      </p:grpSpPr>
+      <p:sp>
+        <p:nvSpPr>
+          <p:cNvPr id="7" name="Rectangle 6"/>
+          <p:cNvSpPr/>
+          <p:nvPr/>
+        </p:nvSpPr>
+        <p:spPr>
+          <a:xfrm>
+            <a:off x="685800" y="1346947"/>
+            <a:ext cx="7772400" cy="80683"/>
+          </a:xfrm>
+          <a:prstGeom prst="rect">
+            <a:avLst/>
+          </a:prstGeom>
+          <a:blipFill dpi="0" rotWithShape="1">
+            <a:blip r:embed="rId2">
+              <a:alphaModFix amt="80000"/>
+              <a:lum bright="70000" contrast="-70000"/>
+              <a:extLst>
+                <a:ext uri="{BEBA8EAE-BF5A-486C-A8C5-ECC9F3942E4B}">
+                  <a14:imgProps xmlns:a14="http://schemas.microsoft.com/office/drawing/2010/main">
+                    <a14:imgLayer r:embed="rId3">
+                      <a14:imgEffect>
+                        <a14:sharpenSoften amount="61000"/>
+                      </a14:imgEffect>
+                    </a14:imgLayer>
+                  </a14:imgProps>
+                </a:ext>
+                <a:ext uri="{28A0092B-C50C-407E-A947-70E740481C1C}">
+                  <a14:useLocalDpi xmlns:a14="http://schemas.microsoft.com/office/drawing/2010/main" val="0"/>
+                </a:ext>
+              </a:extLst>
+            </a:blip>
+            <a:srcRect/>
+            <a:tile tx="0" ty="-762000" sx="92000" sy="89000" flip="xy" algn="ctr"/>
+          </a:blipFill>
+          <a:ln>
+            <a:noFill/>
+          </a:ln>
+        </p:spPr>
+        <p:style>
+          <a:lnRef idx="2">
+            <a:schemeClr val="accent1">
+              <a:shade val="50000"/>
+            </a:schemeClr>
+          </a:lnRef>
+          <a:fillRef idx="1">
+            <a:schemeClr val="accent1"/>
+          </a:fillRef>
+          <a:effectRef idx="0">
+            <a:schemeClr val="accent1"/>
+          </a:effectRef>
+          <a:fontRef idx="minor">
+            <a:schemeClr val="lt1"/>
+          </a:fontRef>
+        </p:style>
+      </p:sp>
+      <p:sp>
+        <p:nvSpPr>
+          <p:cNvPr id="8" name="Rectangle 7"/>
+          <p:cNvSpPr/>
+          <p:nvPr/>
+        </p:nvSpPr>
+        <p:spPr>
+          <a:xfrm>
+            <a:off x="685800" y="4282763"/>
+            <a:ext cx="7772400" cy="80683"/>
+          </a:xfrm>
+          <a:prstGeom prst="rect">
+            <a:avLst/>
+          </a:prstGeom>
+          <a:blipFill dpi="0" rotWithShape="1">
+            <a:blip r:embed="rId2">
+              <a:alphaModFix amt="80000"/>
+              <a:lum bright="70000" contrast="-70000"/>
+              <a:extLst>
+                <a:ext uri="{BEBA8EAE-BF5A-486C-A8C5-ECC9F3942E4B}">
+                  <a14:imgProps xmlns:a14="http://schemas.microsoft.com/office/drawing/2010/main">
+                    <a14:imgLayer r:embed="rId3">
+                      <a14:imgEffect>
+                        <a14:sharpenSoften amount="61000"/>
+                      </a14:imgEffect>
+                    </a14:imgLayer>
+                  </a14:imgProps>
+                </a:ext>
+                <a:ext uri="{28A0092B-C50C-407E-A947-70E740481C1C}">
+                  <a14:useLocalDpi xmlns:a14="http://schemas.microsoft.com/office/drawing/2010/main" val="0"/>
+                </a:ext>
+              </a:extLst>
+            </a:blip>
+            <a:srcRect/>
+            <a:tile tx="0" ty="-717550" sx="92000" sy="89000" flip="xy" algn="ctr"/>
+          </a:blipFill>
+          <a:ln>
+            <a:noFill/>
+          </a:ln>
+        </p:spPr>
+        <p:style>
+          <a:lnRef idx="2">
+            <a:schemeClr val="accent1">
+              <a:shade val="50000"/>
+            </a:schemeClr>
+          </a:lnRef>
+          <a:fillRef idx="1">
+            <a:schemeClr val="accent1"/>
+          </a:fillRef>
+          <a:effectRef idx="0">
+            <a:schemeClr val="accent1"/>
+          </a:effectRef>
+          <a:fontRef idx="minor">
+            <a:schemeClr val="lt1"/>
+          </a:fontRef>
+        </p:style>
+      </p:sp>
+      <p:sp>
+        <p:nvSpPr>
+          <p:cNvPr id="9" name="Rectangle 8"/>
+          <p:cNvSpPr/>
+          <p:nvPr/>
+        </p:nvSpPr>
+        <p:spPr>
+          <a:xfrm>
+            <a:off x="685800" y="1484779"/>
+            <a:ext cx="7772400" cy="2743200"/>
+          </a:xfrm>
+          <a:prstGeom prst="rect">
+            <a:avLst/>
+          </a:prstGeom>
+          <a:blipFill dpi="0" rotWithShape="1">
+            <a:blip r:embed="rId2">
+              <a:alphaModFix amt="80000"/>
+              <a:lum bright="70000" contrast="-70000"/>
+              <a:extLst>
+                <a:ext uri="{BEBA8EAE-BF5A-486C-A8C5-ECC9F3942E4B}">
+                  <a14:imgProps xmlns:a14="http://schemas.microsoft.com/office/drawing/2010/main">
+                    <a14:imgLayer r:embed="rId3">
+                      <a14:imgEffect>
+                        <a14:sharpenSoften amount="61000"/>
+                      </a14:imgEffect>
+                    </a14:imgLayer>
+                  </a14:imgProps>
+                </a:ext>
+                <a:ext uri="{28A0092B-C50C-407E-A947-70E740481C1C}">
+                  <a14:useLocalDpi xmlns:a14="http://schemas.microsoft.com/office/drawing/2010/main" val="0"/>
+                </a:ext>
+              </a:extLst>
+            </a:blip>
+            <a:srcRect/>
+            <a:tile tx="0" ty="-704850" sx="92000" sy="89000" flip="xy" algn="ctr"/>
+          </a:blipFill>
+          <a:ln>
+            <a:noFill/>
+          </a:ln>
+        </p:spPr>
+        <p:style>
+          <a:lnRef idx="2">
+            <a:schemeClr val="accent1">
+              <a:shade val="50000"/>
+            </a:schemeClr>
+          </a:lnRef>
+          <a:fillRef idx="1">
+            <a:schemeClr val="accent1"/>
+          </a:fillRef>
+          <a:effectRef idx="0">
+            <a:schemeClr val="accent1"/>
+          </a:effectRef>
+          <a:fontRef idx="minor">
+            <a:schemeClr val="lt1"/>
+          </a:fontRef>
+        </p:style>
+      </p:sp>
+      <p:grpSp>
+        <p:nvGrpSpPr>
+          <p:cNvPr id="10" name="Group 9"/>
+          <p:cNvGrpSpPr>
+            <a:grpSpLocks noChangeAspect="1"/>
+          </p:cNvGrpSpPr>
+          <p:nvPr/>
+        </p:nvGrpSpPr>
+        <p:grpSpPr>
+          <a:xfrm>
+            <a:off x="7234780" y="4107023"/>
+            <a:ext cx="914400" cy="914400"/>
+            <a:chOff x="9685338" y="4460675"/>
+            <a:chExt cx="1080904" cy="1080902"/>
+          </a:xfrm>
+        </p:grpSpPr>
+        <p:sp>
+          <p:nvSpPr>
+            <p:cNvPr id="11" name="Oval 10"/>
+            <p:cNvSpPr/>
+            <p:nvPr/>
+          </p:nvSpPr>
+          <p:spPr>
+            <a:xfrm>
+              <a:off x="9685338" y="4460675"/>
+              <a:ext cx="1080904" cy="1080902"/>
+            </a:xfrm>
+            <a:prstGeom prst="ellipse">
+              <a:avLst/>
+            </a:prstGeom>
+            <a:blipFill dpi="0" rotWithShape="1">
+              <a:blip r:embed="rId4">
+                <a:duotone>
+                  <a:schemeClr val="accent1">
+                    <a:shade val="45000"/>
+                    <a:satMod val="135000"/>
+                  </a:schemeClr>
+                  <a:prstClr val="white"/>
+                </a:duotone>
+                <a:extLst>
+                  <a:ext uri="{BEBA8EAE-BF5A-486C-A8C5-ECC9F3942E4B}">
+                    <a14:imgProps xmlns:a14="http://schemas.microsoft.com/office/drawing/2010/main">
+                      <a14:imgLayer r:embed="rId5">
+                        <a14:imgEffect>
+                          <a14:saturation sat="95000"/>
+                        </a14:imgEffect>
+                      </a14:imgLayer>
+                    </a14:imgProps>
+                  </a:ext>
+                </a:extLst>
+              </a:blip>
+              <a:srcRect/>
+              <a:tile tx="0" ty="0" sx="85000" sy="85000" flip="none" algn="tl"/>
+            </a:blipFill>
+            <a:ln w="25400" cap="flat" cmpd="sng" algn="ctr">
+              <a:noFill/>
+              <a:prstDash val="solid"/>
+            </a:ln>
+            <a:effectLst/>
+          </p:spPr>
+        </p:sp>
+        <p:sp>
+          <p:nvSpPr>
+            <p:cNvPr id="12" name="Oval 11"/>
+            <p:cNvSpPr/>
+            <p:nvPr/>
+          </p:nvSpPr>
+          <p:spPr>
+            <a:xfrm>
+              <a:off x="9793429" y="4568765"/>
+              <a:ext cx="864723" cy="864722"/>
+            </a:xfrm>
+            <a:prstGeom prst="ellipse">
+              <a:avLst/>
+            </a:prstGeom>
+            <a:noFill/>
+            <a:ln w="25400" cap="flat" cmpd="sng" algn="ctr">
+              <a:solidFill>
+                <a:sysClr val="window" lastClr="FFFFFF"/>
+              </a:solidFill>
+              <a:prstDash val="solid"/>
+            </a:ln>
+            <a:effectLst/>
+          </p:spPr>
+        </p:sp>
+      </p:grpSp>
+      <p:sp>
+        <p:nvSpPr>
+          <p:cNvPr id="2" name="Title 1"/>
+          <p:cNvSpPr>
+            <a:spLocks noGrp="1"/>
+          </p:cNvSpPr>
+          <p:nvPr>
+            <p:ph type="ctrTitle"/>
+          </p:nvPr>
+        </p:nvSpPr>
+        <p:spPr>
+          <a:xfrm>
+            <a:off x="788670" y="1432223"/>
+            <a:ext cx="7593330" cy="3035808"/>
+          </a:xfrm>
+        </p:spPr>
+        <p:txBody>
+          <a:bodyPr anchor="ctr">
+            <a:noAutofit/>
+          </a:bodyPr>
+          <a:lstStyle>
+            <a:lvl1pPr algn="l">
+              <a:lnSpc>
+                <a:spcPct val="80000"/>
+              </a:lnSpc>
+              <a:defRPr sz="6400" b="0" cap="all" baseline="0">
+                <a:blipFill dpi="0" rotWithShape="1">
+                  <a:blip r:embed="rId4"/>
+                  <a:srcRect/>
+                  <a:tile tx="6350" ty="-127000" sx="65000" sy="64000" flip="none" algn="tl"/>
+                </a:blipFill>
+              </a:defRPr>
+            </a:lvl1pPr>
+          </a:lstStyle>
+          <a:p>
+            <a:r>
+              <a:rPr lang="en-US" smtClean="0"/>
+              <a:t>Click to edit Master title style</a:t>
+            </a:r>
+            <a:endParaRPr lang="en-US" dirty="0"/>
+          </a:p>
+        </p:txBody>
+      </p:sp>
+      <p:sp>
+        <p:nvSpPr>
+          <p:cNvPr id="3" name="Subtitle 2"/>
+          <p:cNvSpPr>
+            <a:spLocks noGrp="1"/>
+          </p:cNvSpPr>
+          <p:nvPr>
+            <p:ph type="subTitle" idx="1"/>
+          </p:nvPr>
+        </p:nvSpPr>
+        <p:spPr>
+          <a:xfrm>
+            <a:off x="802386" y="4389120"/>
+            <a:ext cx="5918454" cy="1069848"/>
+          </a:xfrm>
+        </p:spPr>
+        <p:txBody>
+          <a:bodyPr>
+            <a:normAutofit/>
+          </a:bodyPr>
+          <a:lstStyle>
+            <a:lvl1pPr marL="0" indent="0" algn="l">
+              <a:buNone/>
+              <a:defRPr sz="1800" b="0">
+                <a:solidFill>
+                  <a:schemeClr val="tx1"/>
+                </a:solidFill>
+              </a:defRPr>
+            </a:lvl1pPr>
+            <a:lvl2pPr marL="457200" indent="0" algn="ctr">
+              <a:buNone/>
+              <a:defRPr sz="1800"/>
+            </a:lvl2pPr>
+            <a:lvl3pPr marL="914400" indent="0" algn="ctr">
+              <a:buNone/>
+              <a:defRPr sz="1800"/>
+            </a:lvl3pPr>
+            <a:lvl4pPr marL="1371600" indent="0" algn="ctr">
+              <a:buNone/>
+              <a:defRPr sz="1800"/>
+            </a:lvl4pPr>
+            <a:lvl5pPr marL="1828800" indent="0" algn="ctr">
+              <a:buNone/>
+              <a:defRPr sz="1800"/>
+            </a:lvl5pPr>
+            <a:lvl6pPr marL="2286000" indent="0" algn="ctr">
+              <a:buNone/>
+              <a:defRPr sz="1800"/>
+            </a:lvl6pPr>
+            <a:lvl7pPr marL="2743200" indent="0" algn="ctr">
+              <a:buNone/>
+              <a:defRPr sz="1800"/>
+            </a:lvl7pPr>
+            <a:lvl8pPr marL="3200400" indent="0" algn="ctr">
+              <a:buNone/>
+              <a:defRPr sz="1800"/>
+            </a:lvl8pPr>
+            <a:lvl9pPr marL="3657600" indent="0" algn="ctr">
+              <a:buNone/>
+              <a:defRPr sz="1800"/>
+            </a:lvl9pPr>
+          </a:lstStyle>
+          <a:p>
+            <a:r>
+              <a:rPr lang="en-US" smtClean="0"/>
+              <a:t>Click to edit Master subtitle style</a:t>
+            </a:r>
+            <a:endParaRPr lang="en-US" dirty="0"/>
+          </a:p>
+        </p:txBody>
+      </p:sp>
+      <p:sp>
+        <p:nvSpPr>
+          <p:cNvPr id="4" name="Date Placeholder 3"/>
+          <p:cNvSpPr>
+            <a:spLocks noGrp="1"/>
+          </p:cNvSpPr>
+          <p:nvPr>
+            <p:ph type="dt" sz="half" idx="10"/>
+          </p:nvPr>
+        </p:nvSpPr>
+        <p:spPr/>
+        <p:txBody>
+          <a:bodyPr/>
+          <a:lstStyle/>
+          <a:p>
+            <a:fld id="{5BCAD085-E8A6-8845-BD4E-CB4CCA059FC4}" type="datetimeFigureOut">
+              <a:rPr lang="en-US" smtClean="0"/>
+              <a:t>31-Jan-26</a:t>
+            </a:fld>
+            <a:endParaRPr lang="en-US"/>
+          </a:p>
+        </p:txBody>
+      </p:sp>
+      <p:sp>
+        <p:nvSpPr>
+          <p:cNvPr id="5" name="Footer Placeholder 4"/>
+          <p:cNvSpPr>
+            <a:spLocks noGrp="1"/>
+          </p:cNvSpPr>
+          <p:nvPr>
+            <p:ph type="ftr" sz="quarter" idx="11"/>
+          </p:nvPr>
+        </p:nvSpPr>
+        <p:spPr>
+          <a:xfrm>
+            <a:off x="812805" y="6272785"/>
+            <a:ext cx="4745736" cy="365125"/>
+          </a:xfrm>
+        </p:spPr>
+        <p:txBody>
+          <a:bodyPr/>
+          <a:lstStyle/>
+          <a:p>
+            <a:endParaRPr lang="en-US"/>
+          </a:p>
+        </p:txBody>
+      </p:sp>
+      <p:sp>
+        <p:nvSpPr>
+          <p:cNvPr id="6" name="Slide Number Placeholder 5"/>
+          <p:cNvSpPr>
+            <a:spLocks noGrp="1"/>
+          </p:cNvSpPr>
+          <p:nvPr>
+            <p:ph type="sldNum" sz="quarter" idx="12"/>
+          </p:nvPr>
+        </p:nvSpPr>
+        <p:spPr>
+          <a:xfrm>
+            <a:off x="7244280" y="4227195"/>
+            <a:ext cx="895401" cy="640080"/>
+          </a:xfrm>
+        </p:spPr>
+        <p:txBody>
+          <a:bodyPr/>
+          <a:lstStyle>
+            <a:lvl1pPr>
+              <a:defRPr sz="2800" b="1"/>
+            </a:lvl1pPr>
+          </a:lstStyle>
+          <a:p>
+            <a:fld id="{C1FF6DA9-008F-8B48-92A6-B652298478BF}" type="slidenum">
+              <a:rPr lang="en-US" smtClean="0"/>
+              <a:t>‹#›</a:t>
+            </a:fld>
+            <a:endParaRPr lang="en-US"/>
+          </a:p>
+        </p:txBody>
+      </p:sp>
+    </p:spTree>
+    <p:extLst>
+      <p:ext uri="{BB962C8B-B14F-4D97-AF65-F5344CB8AC3E}">
+        <p14:creationId xmlns:p14="http://schemas.microsoft.com/office/powerpoint/2010/main" val="3421980286"/>
+      </p:ext>
+    </p:extLst>
+  </p:cSld>
+  <p:clrMapOvr>
+    <a:masterClrMapping/>
+  </p:clrMapOvr>
+  <mc:AlternateContent xmlns:mc="http://schemas.openxmlformats.org/markup-compatibility/2006" xmlns:p14="http://schemas.microsoft.com/office/powerpoint/2010/main">
+    <mc:Choice Requires="p14">
+      <p:transition spd="slow">
+        <p14:reveal/>
+      </p:transition>
+    </mc:Choice>
+    <mc:Fallback xmlns="">
+      <p:transition spd="slow" advClick="0">
+        <p:fade/>
+      </p:transition>
+    </mc:Fallback>
+  </mc:AlternateContent>
+  <p:timing>
+    <p:tnLst>
+      <p:par>
+        <p:cTn id="1" dur="indefinite" restart="never" nodeType="tmRoot"/>
+      </p:par>
+    </p:tnLst>
+  </p:timing>
+</p:sldLayout>
+</file>
+
+<file path=ppt/slideLayouts/slideLayout13.xml><?xml version="1.0" encoding="utf-8"?>
+<p:sldLayout xmlns:a="http://schemas.openxmlformats.org/drawingml/2006/main" xmlns:r="http://schemas.openxmlformats.org/officeDocument/2006/relationships" xmlns:p="http://schemas.openxmlformats.org/presentationml/2006/main" type="obj" preserve="1">
+  <p:cSld name="Title and Content">
+    <p:spTree>
+      <p:nvGrpSpPr>
+        <p:cNvPr id="1" name=""/>
+        <p:cNvGrpSpPr/>
+        <p:nvPr/>
+      </p:nvGrpSpPr>
+      <p:grpSpPr>
+        <a:xfrm>
+          <a:off x="0" y="0"/>
+          <a:ext cx="0" cy="0"/>
+          <a:chOff x="0" y="0"/>
+          <a:chExt cx="0" cy="0"/>
+        </a:xfrm>
+      </p:grpSpPr>
+      <p:sp>
+        <p:nvSpPr>
+          <p:cNvPr id="2" name="Title 1"/>
+          <p:cNvSpPr>
+            <a:spLocks noGrp="1"/>
+          </p:cNvSpPr>
+          <p:nvPr>
+            <p:ph type="title"/>
+          </p:nvPr>
+        </p:nvSpPr>
+        <p:spPr/>
+        <p:txBody>
+          <a:bodyPr/>
+          <a:lstStyle/>
+          <a:p>
+            <a:r>
+              <a:rPr lang="en-US" smtClean="0"/>
+              <a:t>Click to edit Master title style</a:t>
+            </a:r>
+            <a:endParaRPr lang="en-US" dirty="0"/>
+          </a:p>
+        </p:txBody>
+      </p:sp>
+      <p:sp>
+        <p:nvSpPr>
+          <p:cNvPr id="3" name="Content Placeholder 2"/>
+          <p:cNvSpPr>
+            <a:spLocks noGrp="1"/>
+          </p:cNvSpPr>
+          <p:nvPr>
+            <p:ph idx="1"/>
+          </p:nvPr>
+        </p:nvSpPr>
+        <p:spPr/>
+        <p:txBody>
+          <a:bodyPr/>
+          <a:lstStyle/>
+          <a:p>
+            <a:pPr lvl="0"/>
+            <a:r>
+              <a:rPr lang="en-US" smtClean="0"/>
+              <a:t>Click to edit Master text styles</a:t>
+            </a:r>
+          </a:p>
+          <a:p>
+            <a:pPr lvl="1"/>
+            <a:r>
+              <a:rPr lang="en-US" smtClean="0"/>
+              <a:t>Second level</a:t>
+            </a:r>
+          </a:p>
+          <a:p>
+            <a:pPr lvl="2"/>
+            <a:r>
+              <a:rPr lang="en-US" smtClean="0"/>
+              <a:t>Third level</a:t>
+            </a:r>
+          </a:p>
+          <a:p>
+            <a:pPr lvl="3"/>
+            <a:r>
+              <a:rPr lang="en-US" smtClean="0"/>
+              <a:t>Fourth level</a:t>
+            </a:r>
+          </a:p>
+          <a:p>
+            <a:pPr lvl="4"/>
+            <a:r>
+              <a:rPr lang="en-US" smtClean="0"/>
+              <a:t>Fifth level</a:t>
+            </a:r>
+            <a:endParaRPr lang="en-US" dirty="0"/>
+          </a:p>
+        </p:txBody>
+      </p:sp>
+      <p:sp>
+        <p:nvSpPr>
+          <p:cNvPr id="7" name="Date Placeholder 6"/>
+          <p:cNvSpPr>
+            <a:spLocks noGrp="1"/>
+          </p:cNvSpPr>
+          <p:nvPr>
+            <p:ph type="dt" sz="half" idx="10"/>
+          </p:nvPr>
+        </p:nvSpPr>
+        <p:spPr/>
+        <p:txBody>
+          <a:bodyPr/>
+          <a:lstStyle/>
+          <a:p>
+            <a:fld id="{5BCAD085-E8A6-8845-BD4E-CB4CCA059FC4}" type="datetimeFigureOut">
+              <a:rPr lang="en-US" smtClean="0"/>
+              <a:t>31-Jan-26</a:t>
+            </a:fld>
+            <a:endParaRPr lang="en-US"/>
+          </a:p>
+        </p:txBody>
+      </p:sp>
+      <p:sp>
+        <p:nvSpPr>
+          <p:cNvPr id="8" name="Footer Placeholder 7"/>
+          <p:cNvSpPr>
+            <a:spLocks noGrp="1"/>
+          </p:cNvSpPr>
+          <p:nvPr>
+            <p:ph type="ftr" sz="quarter" idx="11"/>
+          </p:nvPr>
+        </p:nvSpPr>
+        <p:spPr/>
+        <p:txBody>
+          <a:bodyPr/>
+          <a:lstStyle/>
+          <a:p>
+            <a:endParaRPr lang="en-US"/>
+          </a:p>
+        </p:txBody>
+      </p:sp>
+      <p:sp>
+        <p:nvSpPr>
+          <p:cNvPr id="9" name="Slide Number Placeholder 8"/>
+          <p:cNvSpPr>
+            <a:spLocks noGrp="1"/>
+          </p:cNvSpPr>
+          <p:nvPr>
+            <p:ph type="sldNum" sz="quarter" idx="12"/>
+          </p:nvPr>
+        </p:nvSpPr>
+        <p:spPr/>
+        <p:txBody>
+          <a:bodyPr/>
+          <a:lstStyle/>
+          <a:p>
+            <a:fld id="{C1FF6DA9-008F-8B48-92A6-B652298478BF}" type="slidenum">
+              <a:rPr lang="en-US" smtClean="0"/>
+              <a:t>‹#›</a:t>
+            </a:fld>
+            <a:endParaRPr lang="en-US"/>
+          </a:p>
+        </p:txBody>
+      </p:sp>
+    </p:spTree>
+    <p:extLst>
+      <p:ext uri="{BB962C8B-B14F-4D97-AF65-F5344CB8AC3E}">
+        <p14:creationId xmlns:p14="http://schemas.microsoft.com/office/powerpoint/2010/main" val="2006494887"/>
+      </p:ext>
+    </p:extLst>
+  </p:cSld>
+  <p:clrMapOvr>
+    <a:masterClrMapping/>
+  </p:clrMapOvr>
+  <mc:AlternateContent xmlns:mc="http://schemas.openxmlformats.org/markup-compatibility/2006" xmlns:p14="http://schemas.microsoft.com/office/powerpoint/2010/main">
+    <mc:Choice Requires="p14">
+      <p:transition spd="slow">
+        <p14:reveal/>
+      </p:transition>
+    </mc:Choice>
+    <mc:Fallback xmlns="">
+      <p:transition spd="slow" advClick="0">
+        <p:fade/>
+      </p:transition>
+    </mc:Fallback>
+  </mc:AlternateContent>
+  <p:timing>
+    <p:tnLst>
+      <p:par>
+        <p:cTn id="1" dur="indefinite" restart="never" nodeType="tmRoot"/>
+      </p:par>
+    </p:tnLst>
+  </p:timing>
+</p:sldLayout>
+</file>
+
+<file path=ppt/slideLayouts/slideLayout14.xml><?xml version="1.0" encoding="utf-8"?>
+<p:sldLayout xmlns:a="http://schemas.openxmlformats.org/drawingml/2006/main" xmlns:r="http://schemas.openxmlformats.org/officeDocument/2006/relationships" xmlns:p="http://schemas.openxmlformats.org/presentationml/2006/main" showMasterSp="0" type="secHead" preserve="1">
+  <p:cSld name="Section Header">
+    <p:spTree>
+      <p:nvGrpSpPr>
+        <p:cNvPr id="1" name=""/>
+        <p:cNvGrpSpPr/>
+        <p:nvPr/>
+      </p:nvGrpSpPr>
+      <p:grpSpPr>
+        <a:xfrm>
+          <a:off x="0" y="0"/>
+          <a:ext cx="0" cy="0"/>
+          <a:chOff x="0" y="0"/>
+          <a:chExt cx="0" cy="0"/>
+        </a:xfrm>
+      </p:grpSpPr>
+      <p:sp>
+        <p:nvSpPr>
+          <p:cNvPr id="7" name="Rectangle 6"/>
+          <p:cNvSpPr/>
+          <p:nvPr/>
+        </p:nvSpPr>
+        <p:spPr>
+          <a:xfrm>
+            <a:off x="0" y="4917989"/>
+            <a:ext cx="9144000" cy="1940010"/>
+          </a:xfrm>
+          <a:prstGeom prst="rect">
+            <a:avLst/>
+          </a:prstGeom>
+          <a:blipFill dpi="0" rotWithShape="1">
+            <a:blip r:embed="rId2">
+              <a:alphaModFix amt="80000"/>
+              <a:lum bright="70000" contrast="-70000"/>
+              <a:extLst>
+                <a:ext uri="{BEBA8EAE-BF5A-486C-A8C5-ECC9F3942E4B}">
+                  <a14:imgProps xmlns:a14="http://schemas.microsoft.com/office/drawing/2010/main">
+                    <a14:imgLayer r:embed="rId3">
+                      <a14:imgEffect>
+                        <a14:sharpenSoften amount="61000"/>
+                      </a14:imgEffect>
+                    </a14:imgLayer>
+                  </a14:imgProps>
+                </a:ext>
+                <a:ext uri="{28A0092B-C50C-407E-A947-70E740481C1C}">
+                  <a14:useLocalDpi xmlns:a14="http://schemas.microsoft.com/office/drawing/2010/main" val="0"/>
+                </a:ext>
+              </a:extLst>
+            </a:blip>
+            <a:srcRect/>
+            <a:tile tx="0" ty="-704850" sx="92000" sy="89000" flip="xy" algn="ctr"/>
+          </a:blipFill>
+          <a:ln>
+            <a:noFill/>
+          </a:ln>
+        </p:spPr>
+        <p:style>
+          <a:lnRef idx="2">
+            <a:schemeClr val="accent1">
+              <a:shade val="50000"/>
+            </a:schemeClr>
+          </a:lnRef>
+          <a:fillRef idx="1">
+            <a:schemeClr val="accent1"/>
+          </a:fillRef>
+          <a:effectRef idx="0">
+            <a:schemeClr val="accent1"/>
+          </a:effectRef>
+          <a:fontRef idx="minor">
+            <a:schemeClr val="lt1"/>
+          </a:fontRef>
+        </p:style>
+      </p:sp>
+      <p:sp>
+        <p:nvSpPr>
+          <p:cNvPr id="2" name="Title 1"/>
+          <p:cNvSpPr>
+            <a:spLocks noGrp="1"/>
+          </p:cNvSpPr>
+          <p:nvPr>
+            <p:ph type="title"/>
+          </p:nvPr>
+        </p:nvSpPr>
+        <p:spPr>
+          <a:xfrm>
+            <a:off x="1625346" y="1225296"/>
+            <a:ext cx="6960870" cy="3520440"/>
+          </a:xfrm>
+        </p:spPr>
+        <p:txBody>
+          <a:bodyPr anchor="ctr">
+            <a:normAutofit/>
+          </a:bodyPr>
+          <a:lstStyle>
+            <a:lvl1pPr>
+              <a:lnSpc>
+                <a:spcPct val="80000"/>
+              </a:lnSpc>
+              <a:defRPr sz="6400" b="0"/>
+            </a:lvl1pPr>
+          </a:lstStyle>
+          <a:p>
+            <a:r>
+              <a:rPr lang="en-US" smtClean="0"/>
+              <a:t>Click to edit Master title style</a:t>
+            </a:r>
+            <a:endParaRPr lang="en-US" dirty="0"/>
+          </a:p>
+        </p:txBody>
+      </p:sp>
+      <p:sp>
+        <p:nvSpPr>
+          <p:cNvPr id="3" name="Text Placeholder 2"/>
+          <p:cNvSpPr>
+            <a:spLocks noGrp="1"/>
+          </p:cNvSpPr>
+          <p:nvPr>
+            <p:ph type="body" idx="1"/>
+          </p:nvPr>
+        </p:nvSpPr>
+        <p:spPr>
+          <a:xfrm>
+            <a:off x="1624330" y="5020056"/>
+            <a:ext cx="6789420" cy="1066800"/>
+          </a:xfrm>
+        </p:spPr>
+        <p:txBody>
+          <a:bodyPr anchor="t">
+            <a:normAutofit/>
+          </a:bodyPr>
+          <a:lstStyle>
+            <a:lvl1pPr marL="0" indent="0">
+              <a:buNone/>
+              <a:defRPr sz="1800" b="0">
+                <a:solidFill>
+                  <a:schemeClr val="accent1">
+                    <a:lumMod val="50000"/>
+                  </a:schemeClr>
+                </a:solidFill>
+              </a:defRPr>
+            </a:lvl1pPr>
+            <a:lvl2pPr marL="457200" indent="0">
+              <a:buNone/>
+              <a:defRPr sz="1800">
+                <a:solidFill>
+                  <a:schemeClr val="tx1">
+                    <a:tint val="75000"/>
+                  </a:schemeClr>
+                </a:solidFill>
+              </a:defRPr>
+            </a:lvl2pPr>
+            <a:lvl3pPr marL="914400" indent="0">
+              <a:buNone/>
+              <a:defRPr sz="1600">
+                <a:solidFill>
+                  <a:schemeClr val="tx1">
+                    <a:tint val="75000"/>
+                  </a:schemeClr>
+                </a:solidFill>
+              </a:defRPr>
+            </a:lvl3pPr>
+            <a:lvl4pPr marL="1371600" indent="0">
+              <a:buNone/>
+              <a:defRPr sz="1400">
+                <a:solidFill>
+                  <a:schemeClr val="tx1">
+                    <a:tint val="75000"/>
+                  </a:schemeClr>
+                </a:solidFill>
+              </a:defRPr>
+            </a:lvl4pPr>
+            <a:lvl5pPr marL="1828800" indent="0">
+              <a:buNone/>
+              <a:defRPr sz="1400">
+                <a:solidFill>
+                  <a:schemeClr val="tx1">
+                    <a:tint val="75000"/>
+                  </a:schemeClr>
+                </a:solidFill>
+              </a:defRPr>
+            </a:lvl5pPr>
+            <a:lvl6pPr marL="2286000" indent="0">
+              <a:buNone/>
+              <a:defRPr sz="1400">
+                <a:solidFill>
+                  <a:schemeClr val="tx1">
+                    <a:tint val="75000"/>
+                  </a:schemeClr>
+                </a:solidFill>
+              </a:defRPr>
+            </a:lvl6pPr>
+            <a:lvl7pPr marL="2743200" indent="0">
+              <a:buNone/>
+              <a:defRPr sz="1400">
+                <a:solidFill>
+                  <a:schemeClr val="tx1">
+                    <a:tint val="75000"/>
+                  </a:schemeClr>
+                </a:solidFill>
+              </a:defRPr>
+            </a:lvl7pPr>
+            <a:lvl8pPr marL="3200400" indent="0">
+              <a:buNone/>
+              <a:defRPr sz="1400">
+                <a:solidFill>
+                  <a:schemeClr val="tx1">
+                    <a:tint val="75000"/>
+                  </a:schemeClr>
+                </a:solidFill>
+              </a:defRPr>
+            </a:lvl8pPr>
+            <a:lvl9pPr marL="3657600" indent="0">
+              <a:buNone/>
+              <a:defRPr sz="1400">
+                <a:solidFill>
+                  <a:schemeClr val="tx1">
+                    <a:tint val="75000"/>
+                  </a:schemeClr>
+                </a:solidFill>
+              </a:defRPr>
+            </a:lvl9pPr>
+          </a:lstStyle>
+          <a:p>
+            <a:pPr lvl="0"/>
+            <a:r>
+              <a:rPr lang="en-US" smtClean="0"/>
+              <a:t>Click to edit Master text styles</a:t>
+            </a:r>
+          </a:p>
+        </p:txBody>
+      </p:sp>
+      <p:sp>
+        <p:nvSpPr>
+          <p:cNvPr id="4" name="Date Placeholder 3"/>
+          <p:cNvSpPr>
+            <a:spLocks noGrp="1"/>
+          </p:cNvSpPr>
+          <p:nvPr>
+            <p:ph type="dt" sz="half" idx="10"/>
+          </p:nvPr>
+        </p:nvSpPr>
+        <p:spPr>
+          <a:xfrm>
+            <a:off x="6445251" y="6272785"/>
+            <a:ext cx="1983232" cy="365125"/>
+          </a:xfrm>
+        </p:spPr>
+        <p:txBody>
+          <a:bodyPr/>
+          <a:lstStyle>
+            <a:lvl1pPr>
+              <a:defRPr>
+                <a:solidFill>
+                  <a:schemeClr val="accent1">
+                    <a:lumMod val="50000"/>
+                  </a:schemeClr>
+                </a:solidFill>
+              </a:defRPr>
+            </a:lvl1pPr>
+          </a:lstStyle>
+          <a:p>
+            <a:fld id="{5BCAD085-E8A6-8845-BD4E-CB4CCA059FC4}" type="datetimeFigureOut">
+              <a:rPr lang="en-US" smtClean="0"/>
+              <a:t>31-Jan-26</a:t>
+            </a:fld>
+            <a:endParaRPr lang="en-US"/>
+          </a:p>
+        </p:txBody>
+      </p:sp>
+      <p:sp>
+        <p:nvSpPr>
+          <p:cNvPr id="5" name="Footer Placeholder 4"/>
+          <p:cNvSpPr>
+            <a:spLocks noGrp="1"/>
+          </p:cNvSpPr>
+          <p:nvPr>
+            <p:ph type="ftr" sz="quarter" idx="11"/>
+          </p:nvPr>
+        </p:nvSpPr>
+        <p:spPr>
+          <a:xfrm>
+            <a:off x="1636099" y="6272784"/>
+            <a:ext cx="4745736" cy="365125"/>
+          </a:xfrm>
+        </p:spPr>
+        <p:txBody>
+          <a:bodyPr/>
+          <a:lstStyle>
+            <a:lvl1pPr>
+              <a:defRPr>
+                <a:solidFill>
+                  <a:schemeClr val="accent1">
+                    <a:lumMod val="50000"/>
+                  </a:schemeClr>
+                </a:solidFill>
+              </a:defRPr>
+            </a:lvl1pPr>
+          </a:lstStyle>
+          <a:p>
+            <a:endParaRPr lang="en-US"/>
+          </a:p>
+        </p:txBody>
+      </p:sp>
+      <p:grpSp>
+        <p:nvGrpSpPr>
+          <p:cNvPr id="8" name="Group 7"/>
+          <p:cNvGrpSpPr>
+            <a:grpSpLocks noChangeAspect="1"/>
+          </p:cNvGrpSpPr>
+          <p:nvPr/>
+        </p:nvGrpSpPr>
+        <p:grpSpPr>
+          <a:xfrm>
+            <a:off x="633862" y="2430623"/>
+            <a:ext cx="914400" cy="914400"/>
+            <a:chOff x="9685338" y="4460675"/>
+            <a:chExt cx="1080904" cy="1080902"/>
+          </a:xfrm>
+        </p:grpSpPr>
+        <p:sp>
+          <p:nvSpPr>
+            <p:cNvPr id="9" name="Oval 8"/>
+            <p:cNvSpPr/>
+            <p:nvPr/>
+          </p:nvSpPr>
+          <p:spPr>
+            <a:xfrm>
+              <a:off x="9685338" y="4460675"/>
+              <a:ext cx="1080904" cy="1080902"/>
+            </a:xfrm>
+            <a:prstGeom prst="ellipse">
+              <a:avLst/>
+            </a:prstGeom>
+            <a:blipFill dpi="0" rotWithShape="1">
+              <a:blip r:embed="rId4">
+                <a:duotone>
+                  <a:schemeClr val="accent1">
+                    <a:shade val="45000"/>
+                    <a:satMod val="135000"/>
+                  </a:schemeClr>
+                  <a:prstClr val="white"/>
+                </a:duotone>
+                <a:extLst>
+                  <a:ext uri="{BEBA8EAE-BF5A-486C-A8C5-ECC9F3942E4B}">
+                    <a14:imgProps xmlns:a14="http://schemas.microsoft.com/office/drawing/2010/main">
+                      <a14:imgLayer r:embed="rId5">
+                        <a14:imgEffect>
+                          <a14:saturation sat="95000"/>
+                        </a14:imgEffect>
+                      </a14:imgLayer>
+                    </a14:imgProps>
+                  </a:ext>
+                </a:extLst>
+              </a:blip>
+              <a:srcRect/>
+              <a:tile tx="0" ty="0" sx="85000" sy="85000" flip="none" algn="tl"/>
+            </a:blipFill>
+            <a:ln w="25400" cap="flat" cmpd="sng" algn="ctr">
+              <a:noFill/>
+              <a:prstDash val="solid"/>
+            </a:ln>
+            <a:effectLst/>
+          </p:spPr>
+        </p:sp>
+        <p:sp>
+          <p:nvSpPr>
+            <p:cNvPr id="10" name="Oval 9"/>
+            <p:cNvSpPr/>
+            <p:nvPr/>
+          </p:nvSpPr>
+          <p:spPr>
+            <a:xfrm>
+              <a:off x="9793429" y="4568765"/>
+              <a:ext cx="864723" cy="864722"/>
+            </a:xfrm>
+            <a:prstGeom prst="ellipse">
+              <a:avLst/>
+            </a:prstGeom>
+            <a:noFill/>
+            <a:ln w="25400" cap="flat" cmpd="sng" algn="ctr">
+              <a:solidFill>
+                <a:sysClr val="window" lastClr="FFFFFF"/>
+              </a:solidFill>
+              <a:prstDash val="solid"/>
+            </a:ln>
+            <a:effectLst/>
+          </p:spPr>
+        </p:sp>
+      </p:grpSp>
+      <p:sp>
+        <p:nvSpPr>
+          <p:cNvPr id="6" name="Slide Number Placeholder 5"/>
+          <p:cNvSpPr>
+            <a:spLocks noGrp="1"/>
+          </p:cNvSpPr>
+          <p:nvPr>
+            <p:ph type="sldNum" sz="quarter" idx="12"/>
+          </p:nvPr>
+        </p:nvSpPr>
+        <p:spPr>
+          <a:xfrm>
+            <a:off x="645450" y="2508607"/>
+            <a:ext cx="891224" cy="720332"/>
+          </a:xfrm>
+        </p:spPr>
+        <p:txBody>
+          <a:bodyPr/>
+          <a:lstStyle>
+            <a:lvl1pPr>
+              <a:defRPr sz="2800"/>
+            </a:lvl1pPr>
+          </a:lstStyle>
+          <a:p>
+            <a:fld id="{C1FF6DA9-008F-8B48-92A6-B652298478BF}" type="slidenum">
+              <a:rPr lang="en-US" smtClean="0"/>
+              <a:t>‹#›</a:t>
+            </a:fld>
+            <a:endParaRPr lang="en-US"/>
+          </a:p>
+        </p:txBody>
+      </p:sp>
+    </p:spTree>
+    <p:extLst>
+      <p:ext uri="{BB962C8B-B14F-4D97-AF65-F5344CB8AC3E}">
+        <p14:creationId xmlns:p14="http://schemas.microsoft.com/office/powerpoint/2010/main" val="1521278208"/>
+      </p:ext>
+    </p:extLst>
+  </p:cSld>
+  <p:clrMapOvr>
+    <a:masterClrMapping/>
+  </p:clrMapOvr>
+  <mc:AlternateContent xmlns:mc="http://schemas.openxmlformats.org/markup-compatibility/2006" xmlns:p14="http://schemas.microsoft.com/office/powerpoint/2010/main">
+    <mc:Choice Requires="p14">
+      <p:transition spd="slow">
+        <p14:reveal/>
+      </p:transition>
+    </mc:Choice>
+    <mc:Fallback xmlns="">
+      <p:transition spd="slow" advClick="0">
+        <p:fade/>
+      </p:transition>
+    </mc:Fallback>
+  </mc:AlternateContent>
+  <p:timing>
+    <p:tnLst>
+      <p:par>
+        <p:cTn id="1" dur="indefinite" restart="never" nodeType="tmRoot"/>
+      </p:par>
+    </p:tnLst>
+  </p:timing>
+</p:sldLayout>
+</file>
+
+<file path=ppt/slideLayouts/slideLayout15.xml><?xml version="1.0" encoding="utf-8"?>
+<p:sldLayout xmlns:a="http://schemas.openxmlformats.org/drawingml/2006/main" xmlns:r="http://schemas.openxmlformats.org/officeDocument/2006/relationships" xmlns:p="http://schemas.openxmlformats.org/presentationml/2006/main" type="twoObj" preserve="1">
+  <p:cSld name="Two Content">
+    <p:spTree>
+      <p:nvGrpSpPr>
+        <p:cNvPr id="1" name=""/>
+        <p:cNvGrpSpPr/>
+        <p:nvPr/>
+      </p:nvGrpSpPr>
+      <p:grpSpPr>
+        <a:xfrm>
+          <a:off x="0" y="0"/>
+          <a:ext cx="0" cy="0"/>
+          <a:chOff x="0" y="0"/>
+          <a:chExt cx="0" cy="0"/>
+        </a:xfrm>
+      </p:grpSpPr>
+      <p:sp>
+        <p:nvSpPr>
+          <p:cNvPr id="2" name="Title 1"/>
+          <p:cNvSpPr>
+            <a:spLocks noGrp="1"/>
+          </p:cNvSpPr>
+          <p:nvPr>
+            <p:ph type="title"/>
+          </p:nvPr>
+        </p:nvSpPr>
+        <p:spPr/>
+        <p:txBody>
+          <a:bodyPr/>
+          <a:lstStyle/>
+          <a:p>
+            <a:r>
+              <a:rPr lang="en-US" smtClean="0"/>
+              <a:t>Click to edit Master title style</a:t>
+            </a:r>
+            <a:endParaRPr lang="en-US" dirty="0"/>
+          </a:p>
+        </p:txBody>
+      </p:sp>
+      <p:sp>
+        <p:nvSpPr>
+          <p:cNvPr id="3" name="Content Placeholder 2"/>
+          <p:cNvSpPr>
+            <a:spLocks noGrp="1"/>
+          </p:cNvSpPr>
+          <p:nvPr>
+            <p:ph sz="half" idx="1"/>
+          </p:nvPr>
+        </p:nvSpPr>
+        <p:spPr>
+          <a:xfrm>
+            <a:off x="685800" y="2194560"/>
+            <a:ext cx="3657600" cy="3977640"/>
+          </a:xfrm>
+        </p:spPr>
+        <p:txBody>
+          <a:bodyPr/>
+          <a:lstStyle>
+            <a:lvl1pPr>
+              <a:defRPr sz="2000"/>
+            </a:lvl1pPr>
+            <a:lvl2pPr>
+              <a:defRPr sz="1800"/>
+            </a:lvl2pPr>
+            <a:lvl3pPr>
+              <a:defRPr sz="1600"/>
+            </a:lvl3pPr>
+            <a:lvl4pPr>
+              <a:defRPr sz="1600"/>
+            </a:lvl4pPr>
+            <a:lvl5pPr>
+              <a:defRPr sz="1600"/>
+            </a:lvl5pPr>
+            <a:lvl6pPr>
+              <a:defRPr sz="1600"/>
+            </a:lvl6pPr>
+            <a:lvl7pPr>
+              <a:defRPr sz="1600"/>
+            </a:lvl7pPr>
+            <a:lvl8pPr>
+              <a:defRPr sz="1600"/>
+            </a:lvl8pPr>
+            <a:lvl9pPr>
+              <a:defRPr sz="1600"/>
+            </a:lvl9pPr>
+          </a:lstStyle>
+          <a:p>
+            <a:pPr lvl="0"/>
+            <a:r>
+              <a:rPr lang="en-US" smtClean="0"/>
+              <a:t>Click to edit Master text styles</a:t>
+            </a:r>
+          </a:p>
+          <a:p>
+            <a:pPr lvl="1"/>
+            <a:r>
+              <a:rPr lang="en-US" smtClean="0"/>
+              <a:t>Second level</a:t>
+            </a:r>
+          </a:p>
+          <a:p>
+            <a:pPr lvl="2"/>
+            <a:r>
+              <a:rPr lang="en-US" smtClean="0"/>
+              <a:t>Third level</a:t>
+            </a:r>
+          </a:p>
+          <a:p>
+            <a:pPr lvl="3"/>
+            <a:r>
+              <a:rPr lang="en-US" smtClean="0"/>
+              <a:t>Fourth level</a:t>
+            </a:r>
+          </a:p>
+          <a:p>
+            <a:pPr lvl="4"/>
+            <a:r>
+              <a:rPr lang="en-US" smtClean="0"/>
+              <a:t>Fifth level</a:t>
+            </a:r>
+            <a:endParaRPr lang="en-US" dirty="0"/>
+          </a:p>
+        </p:txBody>
+      </p:sp>
+      <p:sp>
+        <p:nvSpPr>
+          <p:cNvPr id="4" name="Content Placeholder 3"/>
+          <p:cNvSpPr>
+            <a:spLocks noGrp="1"/>
+          </p:cNvSpPr>
+          <p:nvPr>
+            <p:ph sz="half" idx="2"/>
+          </p:nvPr>
+        </p:nvSpPr>
+        <p:spPr>
+          <a:xfrm>
+            <a:off x="4792218" y="2194560"/>
+            <a:ext cx="3657600" cy="3977640"/>
+          </a:xfrm>
+        </p:spPr>
+        <p:txBody>
+          <a:bodyPr/>
+          <a:lstStyle>
+            <a:lvl1pPr>
+              <a:defRPr sz="2000"/>
+            </a:lvl1pPr>
+            <a:lvl2pPr>
+              <a:defRPr sz="1800"/>
+            </a:lvl2pPr>
+            <a:lvl3pPr>
+              <a:defRPr sz="1600"/>
+            </a:lvl3pPr>
+            <a:lvl4pPr>
+              <a:defRPr sz="1600"/>
+            </a:lvl4pPr>
+            <a:lvl5pPr>
+              <a:defRPr sz="1600"/>
+            </a:lvl5pPr>
+            <a:lvl6pPr>
+              <a:defRPr sz="1600"/>
+            </a:lvl6pPr>
+            <a:lvl7pPr>
+              <a:defRPr sz="1600"/>
+            </a:lvl7pPr>
+            <a:lvl8pPr>
+              <a:defRPr sz="1600"/>
+            </a:lvl8pPr>
+            <a:lvl9pPr>
+              <a:defRPr sz="1600"/>
+            </a:lvl9pPr>
+          </a:lstStyle>
+          <a:p>
+            <a:pPr lvl="0"/>
+            <a:r>
+              <a:rPr lang="en-US" smtClean="0"/>
+              <a:t>Click to edit Master text styles</a:t>
+            </a:r>
+          </a:p>
+          <a:p>
+            <a:pPr lvl="1"/>
+            <a:r>
+              <a:rPr lang="en-US" smtClean="0"/>
+              <a:t>Second level</a:t>
+            </a:r>
+          </a:p>
+          <a:p>
+            <a:pPr lvl="2"/>
+            <a:r>
+              <a:rPr lang="en-US" smtClean="0"/>
+              <a:t>Third level</a:t>
+            </a:r>
+          </a:p>
+          <a:p>
+            <a:pPr lvl="3"/>
+            <a:r>
+              <a:rPr lang="en-US" smtClean="0"/>
+              <a:t>Fourth level</a:t>
+            </a:r>
+          </a:p>
+          <a:p>
+            <a:pPr lvl="4"/>
+            <a:r>
+              <a:rPr lang="en-US" smtClean="0"/>
+              <a:t>Fifth level</a:t>
+            </a:r>
+            <a:endParaRPr lang="en-US" dirty="0"/>
+          </a:p>
+        </p:txBody>
+      </p:sp>
+      <p:sp>
+        <p:nvSpPr>
+          <p:cNvPr id="5" name="Date Placeholder 4"/>
+          <p:cNvSpPr>
+            <a:spLocks noGrp="1"/>
+          </p:cNvSpPr>
+          <p:nvPr>
+            <p:ph type="dt" sz="half" idx="10"/>
+          </p:nvPr>
+        </p:nvSpPr>
+        <p:spPr/>
+        <p:txBody>
+          <a:bodyPr/>
+          <a:lstStyle/>
+          <a:p>
+            <a:fld id="{5BCAD085-E8A6-8845-BD4E-CB4CCA059FC4}" type="datetimeFigureOut">
+              <a:rPr lang="en-US" smtClean="0"/>
+              <a:t>31-Jan-26</a:t>
+            </a:fld>
+            <a:endParaRPr lang="en-US"/>
+          </a:p>
+        </p:txBody>
+      </p:sp>
+      <p:sp>
+        <p:nvSpPr>
+          <p:cNvPr id="6" name="Footer Placeholder 5"/>
+          <p:cNvSpPr>
+            <a:spLocks noGrp="1"/>
+          </p:cNvSpPr>
+          <p:nvPr>
+            <p:ph type="ftr" sz="quarter" idx="11"/>
+          </p:nvPr>
+        </p:nvSpPr>
+        <p:spPr/>
+        <p:txBody>
+          <a:bodyPr/>
+          <a:lstStyle/>
+          <a:p>
+            <a:endParaRPr lang="en-US"/>
+          </a:p>
+        </p:txBody>
+      </p:sp>
+      <p:sp>
+        <p:nvSpPr>
+          <p:cNvPr id="7" name="Slide Number Placeholder 6"/>
+          <p:cNvSpPr>
+            <a:spLocks noGrp="1"/>
+          </p:cNvSpPr>
+          <p:nvPr>
+            <p:ph type="sldNum" sz="quarter" idx="12"/>
+          </p:nvPr>
+        </p:nvSpPr>
+        <p:spPr/>
+        <p:txBody>
+          <a:bodyPr/>
+          <a:lstStyle/>
+          <a:p>
+            <a:fld id="{C1FF6DA9-008F-8B48-92A6-B652298478BF}" type="slidenum">
+              <a:rPr lang="en-US" smtClean="0"/>
+              <a:t>‹#›</a:t>
+            </a:fld>
+            <a:endParaRPr lang="en-US"/>
+          </a:p>
+        </p:txBody>
+      </p:sp>
+    </p:spTree>
+    <p:extLst>
+      <p:ext uri="{BB962C8B-B14F-4D97-AF65-F5344CB8AC3E}">
+        <p14:creationId xmlns:p14="http://schemas.microsoft.com/office/powerpoint/2010/main" val="1291263135"/>
+      </p:ext>
+    </p:extLst>
+  </p:cSld>
+  <p:clrMapOvr>
+    <a:masterClrMapping/>
+  </p:clrMapOvr>
+  <mc:AlternateContent xmlns:mc="http://schemas.openxmlformats.org/markup-compatibility/2006" xmlns:p14="http://schemas.microsoft.com/office/powerpoint/2010/main">
+    <mc:Choice Requires="p14">
+      <p:transition spd="slow">
+        <p14:reveal/>
+      </p:transition>
+    </mc:Choice>
+    <mc:Fallback xmlns="">
+      <p:transition spd="slow" advClick="0">
+        <p:fade/>
+      </p:transition>
+    </mc:Fallback>
+  </mc:AlternateContent>
+  <p:timing>
+    <p:tnLst>
+      <p:par>
+        <p:cTn id="1" dur="indefinite" restart="never" nodeType="tmRoot"/>
+      </p:par>
+    </p:tnLst>
+  </p:timing>
+</p:sldLayout>
+</file>
+
+<file path=ppt/slideLayouts/slideLayout16.xml><?xml version="1.0" encoding="utf-8"?>
+<p:sldLayout xmlns:a="http://schemas.openxmlformats.org/drawingml/2006/main" xmlns:r="http://schemas.openxmlformats.org/officeDocument/2006/relationships" xmlns:p="http://schemas.openxmlformats.org/presentationml/2006/main" type="twoTxTwoObj" preserve="1">
+  <p:cSld name="Comparison">
+    <p:spTree>
+      <p:nvGrpSpPr>
+        <p:cNvPr id="1" name=""/>
+        <p:cNvGrpSpPr/>
+        <p:nvPr/>
+      </p:nvGrpSpPr>
+      <p:grpSpPr>
+        <a:xfrm>
+          <a:off x="0" y="0"/>
+          <a:ext cx="0" cy="0"/>
+          <a:chOff x="0" y="0"/>
+          <a:chExt cx="0" cy="0"/>
+        </a:xfrm>
+      </p:grpSpPr>
+      <p:sp>
+        <p:nvSpPr>
+          <p:cNvPr id="10" name="Title 9"/>
+          <p:cNvSpPr>
+            <a:spLocks noGrp="1"/>
+          </p:cNvSpPr>
+          <p:nvPr>
+            <p:ph type="title"/>
+          </p:nvPr>
+        </p:nvSpPr>
+        <p:spPr/>
+        <p:txBody>
+          <a:bodyPr/>
+          <a:lstStyle/>
+          <a:p>
+            <a:r>
+              <a:rPr lang="en-US" smtClean="0"/>
+              <a:t>Click to edit Master title style</a:t>
+            </a:r>
+            <a:endParaRPr lang="en-US" dirty="0"/>
+          </a:p>
+        </p:txBody>
+      </p:sp>
+      <p:sp>
+        <p:nvSpPr>
+          <p:cNvPr id="3" name="Text Placeholder 2"/>
+          <p:cNvSpPr>
+            <a:spLocks noGrp="1"/>
+          </p:cNvSpPr>
+          <p:nvPr>
+            <p:ph type="body" idx="1"/>
+          </p:nvPr>
+        </p:nvSpPr>
+        <p:spPr>
+          <a:xfrm>
+            <a:off x="685800" y="2048256"/>
+            <a:ext cx="3657600" cy="640080"/>
+          </a:xfrm>
+        </p:spPr>
+        <p:txBody>
+          <a:bodyPr anchor="ctr">
+            <a:normAutofit/>
+          </a:bodyPr>
+          <a:lstStyle>
+            <a:lvl1pPr marL="0" indent="0">
+              <a:buNone/>
+              <a:defRPr sz="2000" b="1">
+                <a:solidFill>
+                  <a:schemeClr val="accent1">
+                    <a:lumMod val="75000"/>
+                  </a:schemeClr>
+                </a:solidFill>
+              </a:defRPr>
+            </a:lvl1pPr>
+            <a:lvl2pPr marL="457200" indent="0">
+              <a:buNone/>
+              <a:defRPr sz="2000" b="1"/>
+            </a:lvl2pPr>
+            <a:lvl3pPr marL="914400" indent="0">
+              <a:buNone/>
+              <a:defRPr sz="1800" b="1"/>
+            </a:lvl3pPr>
+            <a:lvl4pPr marL="1371600" indent="0">
+              <a:buNone/>
+              <a:defRPr sz="1600" b="1"/>
+            </a:lvl4pPr>
+            <a:lvl5pPr marL="1828800" indent="0">
+              <a:buNone/>
+              <a:defRPr sz="1600" b="1"/>
+            </a:lvl5pPr>
+            <a:lvl6pPr marL="2286000" indent="0">
+              <a:buNone/>
+              <a:defRPr sz="1600" b="1"/>
+            </a:lvl6pPr>
+            <a:lvl7pPr marL="2743200" indent="0">
+              <a:buNone/>
+              <a:defRPr sz="1600" b="1"/>
+            </a:lvl7pPr>
+            <a:lvl8pPr marL="3200400" indent="0">
+              <a:buNone/>
+              <a:defRPr sz="1600" b="1"/>
+            </a:lvl8pPr>
+            <a:lvl9pPr marL="3657600" indent="0">
+              <a:buNone/>
+              <a:defRPr sz="1600" b="1"/>
+            </a:lvl9pPr>
+          </a:lstStyle>
+          <a:p>
+            <a:pPr lvl="0"/>
+            <a:r>
+              <a:rPr lang="en-US" smtClean="0"/>
+              <a:t>Click to edit Master text styles</a:t>
+            </a:r>
+          </a:p>
+        </p:txBody>
+      </p:sp>
+      <p:sp>
+        <p:nvSpPr>
+          <p:cNvPr id="4" name="Content Placeholder 3"/>
+          <p:cNvSpPr>
+            <a:spLocks noGrp="1"/>
+          </p:cNvSpPr>
+          <p:nvPr>
+            <p:ph sz="half" idx="2"/>
+          </p:nvPr>
+        </p:nvSpPr>
+        <p:spPr>
+          <a:xfrm>
+            <a:off x="685800" y="2743200"/>
+            <a:ext cx="3657600" cy="3291840"/>
+          </a:xfrm>
+        </p:spPr>
+        <p:txBody>
+          <a:bodyPr/>
+          <a:lstStyle>
+            <a:lvl1pPr>
+              <a:defRPr sz="2000"/>
+            </a:lvl1pPr>
+            <a:lvl2pPr>
+              <a:defRPr sz="1800"/>
+            </a:lvl2pPr>
+            <a:lvl3pPr>
+              <a:defRPr sz="1600"/>
+            </a:lvl3pPr>
+            <a:lvl4pPr>
+              <a:defRPr sz="1600"/>
+            </a:lvl4pPr>
+            <a:lvl5pPr>
+              <a:defRPr sz="1600"/>
+            </a:lvl5pPr>
+            <a:lvl6pPr>
+              <a:defRPr sz="1600"/>
+            </a:lvl6pPr>
+            <a:lvl7pPr>
+              <a:defRPr sz="1600"/>
+            </a:lvl7pPr>
+            <a:lvl8pPr>
+              <a:defRPr sz="1600"/>
+            </a:lvl8pPr>
+            <a:lvl9pPr>
+              <a:defRPr sz="1600"/>
+            </a:lvl9pPr>
+          </a:lstStyle>
+          <a:p>
+            <a:pPr lvl="0"/>
+            <a:r>
+              <a:rPr lang="en-US" smtClean="0"/>
+              <a:t>Click to edit Master text styles</a:t>
+            </a:r>
+          </a:p>
+          <a:p>
+            <a:pPr lvl="1"/>
+            <a:r>
+              <a:rPr lang="en-US" smtClean="0"/>
+              <a:t>Second level</a:t>
+            </a:r>
+          </a:p>
+          <a:p>
+            <a:pPr lvl="2"/>
+            <a:r>
+              <a:rPr lang="en-US" smtClean="0"/>
+              <a:t>Third level</a:t>
+            </a:r>
+          </a:p>
+          <a:p>
+            <a:pPr lvl="3"/>
+            <a:r>
+              <a:rPr lang="en-US" smtClean="0"/>
+              <a:t>Fourth level</a:t>
+            </a:r>
+          </a:p>
+          <a:p>
+            <a:pPr lvl="4"/>
+            <a:r>
+              <a:rPr lang="en-US" smtClean="0"/>
+              <a:t>Fifth level</a:t>
+            </a:r>
+            <a:endParaRPr lang="en-US" dirty="0"/>
+          </a:p>
+        </p:txBody>
+      </p:sp>
+      <p:sp>
+        <p:nvSpPr>
+          <p:cNvPr id="5" name="Text Placeholder 4"/>
+          <p:cNvSpPr>
+            <a:spLocks noGrp="1"/>
+          </p:cNvSpPr>
+          <p:nvPr>
+            <p:ph type="body" sz="quarter" idx="3"/>
+          </p:nvPr>
+        </p:nvSpPr>
+        <p:spPr>
+          <a:xfrm>
+            <a:off x="4820793" y="2048256"/>
+            <a:ext cx="3657600" cy="640080"/>
+          </a:xfrm>
+        </p:spPr>
+        <p:txBody>
+          <a:bodyPr anchor="ctr">
+            <a:normAutofit/>
+          </a:bodyPr>
+          <a:lstStyle>
+            <a:lvl1pPr marL="0" indent="0">
+              <a:buNone/>
+              <a:defRPr sz="2000" b="1">
+                <a:solidFill>
+                  <a:schemeClr val="accent1">
+                    <a:lumMod val="75000"/>
+                  </a:schemeClr>
+                </a:solidFill>
+              </a:defRPr>
+            </a:lvl1pPr>
+            <a:lvl2pPr marL="457200" indent="0">
+              <a:buNone/>
+              <a:defRPr sz="2000" b="1"/>
+            </a:lvl2pPr>
+            <a:lvl3pPr marL="914400" indent="0">
+              <a:buNone/>
+              <a:defRPr sz="1800" b="1"/>
+            </a:lvl3pPr>
+            <a:lvl4pPr marL="1371600" indent="0">
+              <a:buNone/>
+              <a:defRPr sz="1600" b="1"/>
+            </a:lvl4pPr>
+            <a:lvl5pPr marL="1828800" indent="0">
+              <a:buNone/>
+              <a:defRPr sz="1600" b="1"/>
+            </a:lvl5pPr>
+            <a:lvl6pPr marL="2286000" indent="0">
+              <a:buNone/>
+              <a:defRPr sz="1600" b="1"/>
+            </a:lvl6pPr>
+            <a:lvl7pPr marL="2743200" indent="0">
+              <a:buNone/>
+              <a:defRPr sz="1600" b="1"/>
+            </a:lvl7pPr>
+            <a:lvl8pPr marL="3200400" indent="0">
+              <a:buNone/>
+              <a:defRPr sz="1600" b="1"/>
+            </a:lvl8pPr>
+            <a:lvl9pPr marL="3657600" indent="0">
+              <a:buNone/>
+              <a:defRPr sz="1600" b="1"/>
+            </a:lvl9pPr>
+          </a:lstStyle>
+          <a:p>
+            <a:pPr lvl="0"/>
+            <a:r>
+              <a:rPr lang="en-US" smtClean="0"/>
+              <a:t>Click to edit Master text styles</a:t>
+            </a:r>
+          </a:p>
+        </p:txBody>
+      </p:sp>
+      <p:sp>
+        <p:nvSpPr>
+          <p:cNvPr id="6" name="Content Placeholder 5"/>
+          <p:cNvSpPr>
+            <a:spLocks noGrp="1"/>
+          </p:cNvSpPr>
+          <p:nvPr>
+            <p:ph sz="quarter" idx="4"/>
+          </p:nvPr>
+        </p:nvSpPr>
+        <p:spPr>
+          <a:xfrm>
+            <a:off x="4820793" y="2743200"/>
+            <a:ext cx="3657600" cy="3291840"/>
+          </a:xfrm>
+        </p:spPr>
+        <p:txBody>
+          <a:bodyPr/>
+          <a:lstStyle>
+            <a:lvl1pPr>
+              <a:defRPr sz="2000"/>
+            </a:lvl1pPr>
+            <a:lvl2pPr>
+              <a:defRPr sz="1800"/>
+            </a:lvl2pPr>
+            <a:lvl3pPr>
+              <a:defRPr sz="1600"/>
+            </a:lvl3pPr>
+            <a:lvl4pPr>
+              <a:defRPr sz="1600"/>
+            </a:lvl4pPr>
+            <a:lvl5pPr>
+              <a:defRPr sz="1600"/>
+            </a:lvl5pPr>
+            <a:lvl6pPr>
+              <a:defRPr sz="1600"/>
+            </a:lvl6pPr>
+            <a:lvl7pPr>
+              <a:defRPr sz="1600"/>
+            </a:lvl7pPr>
+            <a:lvl8pPr>
+              <a:defRPr sz="1600"/>
+            </a:lvl8pPr>
+            <a:lvl9pPr>
+              <a:defRPr sz="1600"/>
+            </a:lvl9pPr>
+          </a:lstStyle>
+          <a:p>
+            <a:pPr lvl="0"/>
+            <a:r>
+              <a:rPr lang="en-US" smtClean="0"/>
+              <a:t>Click to edit Master text styles</a:t>
+            </a:r>
+          </a:p>
+          <a:p>
+            <a:pPr lvl="1"/>
+            <a:r>
+              <a:rPr lang="en-US" smtClean="0"/>
+              <a:t>Second level</a:t>
+            </a:r>
+          </a:p>
+          <a:p>
+            <a:pPr lvl="2"/>
+            <a:r>
+              <a:rPr lang="en-US" smtClean="0"/>
+              <a:t>Third level</a:t>
+            </a:r>
+          </a:p>
+          <a:p>
+            <a:pPr lvl="3"/>
+            <a:r>
+              <a:rPr lang="en-US" smtClean="0"/>
+              <a:t>Fourth level</a:t>
+            </a:r>
+          </a:p>
+          <a:p>
+            <a:pPr lvl="4"/>
+            <a:r>
+              <a:rPr lang="en-US" smtClean="0"/>
+              <a:t>Fifth level</a:t>
+            </a:r>
+            <a:endParaRPr lang="en-US" dirty="0"/>
+          </a:p>
+        </p:txBody>
+      </p:sp>
+      <p:sp>
+        <p:nvSpPr>
+          <p:cNvPr id="7" name="Date Placeholder 6"/>
+          <p:cNvSpPr>
+            <a:spLocks noGrp="1"/>
+          </p:cNvSpPr>
+          <p:nvPr>
+            <p:ph type="dt" sz="half" idx="10"/>
+          </p:nvPr>
+        </p:nvSpPr>
+        <p:spPr/>
+        <p:txBody>
+          <a:bodyPr/>
+          <a:lstStyle/>
+          <a:p>
+            <a:fld id="{5BCAD085-E8A6-8845-BD4E-CB4CCA059FC4}" type="datetimeFigureOut">
+              <a:rPr lang="en-US" smtClean="0"/>
+              <a:t>31-Jan-26</a:t>
+            </a:fld>
+            <a:endParaRPr lang="en-US"/>
+          </a:p>
+        </p:txBody>
+      </p:sp>
+      <p:sp>
+        <p:nvSpPr>
+          <p:cNvPr id="8" name="Footer Placeholder 7"/>
+          <p:cNvSpPr>
+            <a:spLocks noGrp="1"/>
+          </p:cNvSpPr>
+          <p:nvPr>
+            <p:ph type="ftr" sz="quarter" idx="11"/>
+          </p:nvPr>
+        </p:nvSpPr>
+        <p:spPr/>
+        <p:txBody>
+          <a:bodyPr/>
+          <a:lstStyle/>
+          <a:p>
+            <a:endParaRPr lang="en-US"/>
+          </a:p>
+        </p:txBody>
+      </p:sp>
+      <p:sp>
+        <p:nvSpPr>
+          <p:cNvPr id="9" name="Slide Number Placeholder 8"/>
+          <p:cNvSpPr>
+            <a:spLocks noGrp="1"/>
+          </p:cNvSpPr>
+          <p:nvPr>
+            <p:ph type="sldNum" sz="quarter" idx="12"/>
+          </p:nvPr>
+        </p:nvSpPr>
+        <p:spPr/>
+        <p:txBody>
+          <a:bodyPr/>
+          <a:lstStyle/>
+          <a:p>
+            <a:fld id="{C1FF6DA9-008F-8B48-92A6-B652298478BF}" type="slidenum">
+              <a:rPr lang="en-US" smtClean="0"/>
+              <a:t>‹#›</a:t>
+            </a:fld>
+            <a:endParaRPr lang="en-US"/>
+          </a:p>
+        </p:txBody>
+      </p:sp>
+    </p:spTree>
+    <p:extLst>
+      <p:ext uri="{BB962C8B-B14F-4D97-AF65-F5344CB8AC3E}">
+        <p14:creationId xmlns:p14="http://schemas.microsoft.com/office/powerpoint/2010/main" val="3085096974"/>
+      </p:ext>
+    </p:extLst>
+  </p:cSld>
+  <p:clrMapOvr>
+    <a:masterClrMapping/>
+  </p:clrMapOvr>
+  <mc:AlternateContent xmlns:mc="http://schemas.openxmlformats.org/markup-compatibility/2006" xmlns:p14="http://schemas.microsoft.com/office/powerpoint/2010/main">
+    <mc:Choice Requires="p14">
+      <p:transition spd="slow">
+        <p14:reveal/>
+      </p:transition>
+    </mc:Choice>
+    <mc:Fallback xmlns="">
+      <p:transition spd="slow" advClick="0">
+        <p:fade/>
+      </p:transition>
+    </mc:Fallback>
+  </mc:AlternateContent>
+  <p:timing>
+    <p:tnLst>
+      <p:par>
+        <p:cTn id="1" dur="indefinite" restart="never" nodeType="tmRoot"/>
+      </p:par>
+    </p:tnLst>
+  </p:timing>
+</p:sldLayout>
+</file>
+
+<file path=ppt/slideLayouts/slideLayout17.xml><?xml version="1.0" encoding="utf-8"?>
+<p:sldLayout xmlns:a="http://schemas.openxmlformats.org/drawingml/2006/main" xmlns:r="http://schemas.openxmlformats.org/officeDocument/2006/relationships" xmlns:p="http://schemas.openxmlformats.org/presentationml/2006/main" type="titleOnly" preserve="1">
+  <p:cSld name="Title Only">
+    <p:spTree>
+      <p:nvGrpSpPr>
+        <p:cNvPr id="1" name=""/>
+        <p:cNvGrpSpPr/>
+        <p:nvPr/>
+      </p:nvGrpSpPr>
+      <p:grpSpPr>
+        <a:xfrm>
+          <a:off x="0" y="0"/>
+          <a:ext cx="0" cy="0"/>
+          <a:chOff x="0" y="0"/>
+          <a:chExt cx="0" cy="0"/>
+        </a:xfrm>
+      </p:grpSpPr>
+      <p:sp>
+        <p:nvSpPr>
+          <p:cNvPr id="6" name="Title 5"/>
+          <p:cNvSpPr>
+            <a:spLocks noGrp="1"/>
+          </p:cNvSpPr>
+          <p:nvPr>
+            <p:ph type="title"/>
+          </p:nvPr>
+        </p:nvSpPr>
+        <p:spPr/>
+        <p:txBody>
+          <a:bodyPr/>
+          <a:lstStyle/>
+          <a:p>
+            <a:r>
+              <a:rPr lang="en-US" smtClean="0"/>
+              <a:t>Click to edit Master title style</a:t>
+            </a:r>
+            <a:endParaRPr lang="en-US" dirty="0"/>
+          </a:p>
+        </p:txBody>
+      </p:sp>
+      <p:sp>
+        <p:nvSpPr>
+          <p:cNvPr id="3" name="Date Placeholder 2"/>
+          <p:cNvSpPr>
+            <a:spLocks noGrp="1"/>
+          </p:cNvSpPr>
+          <p:nvPr>
+            <p:ph type="dt" sz="half" idx="10"/>
+          </p:nvPr>
+        </p:nvSpPr>
+        <p:spPr/>
+        <p:txBody>
+          <a:bodyPr/>
+          <a:lstStyle>
+            <a:lvl1pPr>
+              <a:defRPr>
+                <a:solidFill>
+                  <a:schemeClr val="accent1">
+                    <a:lumMod val="50000"/>
+                  </a:schemeClr>
+                </a:solidFill>
+              </a:defRPr>
+            </a:lvl1pPr>
+          </a:lstStyle>
+          <a:p>
+            <a:fld id="{5BCAD085-E8A6-8845-BD4E-CB4CCA059FC4}" type="datetimeFigureOut">
+              <a:rPr lang="en-US" smtClean="0"/>
+              <a:t>31-Jan-26</a:t>
+            </a:fld>
+            <a:endParaRPr lang="en-US"/>
+          </a:p>
+        </p:txBody>
+      </p:sp>
+      <p:sp>
+        <p:nvSpPr>
+          <p:cNvPr id="4" name="Footer Placeholder 3"/>
+          <p:cNvSpPr>
+            <a:spLocks noGrp="1"/>
+          </p:cNvSpPr>
+          <p:nvPr>
+            <p:ph type="ftr" sz="quarter" idx="11"/>
+          </p:nvPr>
+        </p:nvSpPr>
+        <p:spPr/>
+        <p:txBody>
+          <a:bodyPr/>
+          <a:lstStyle>
+            <a:lvl1pPr>
+              <a:defRPr>
+                <a:solidFill>
+                  <a:schemeClr val="accent1">
+                    <a:lumMod val="50000"/>
+                  </a:schemeClr>
+                </a:solidFill>
+              </a:defRPr>
+            </a:lvl1pPr>
+          </a:lstStyle>
+          <a:p>
+            <a:endParaRPr lang="en-US"/>
+          </a:p>
+        </p:txBody>
+      </p:sp>
+      <p:sp>
+        <p:nvSpPr>
+          <p:cNvPr id="5" name="Slide Number Placeholder 4"/>
+          <p:cNvSpPr>
+            <a:spLocks noGrp="1"/>
+          </p:cNvSpPr>
+          <p:nvPr>
+            <p:ph type="sldNum" sz="quarter" idx="12"/>
+          </p:nvPr>
+        </p:nvSpPr>
+        <p:spPr/>
+        <p:txBody>
+          <a:bodyPr/>
+          <a:lstStyle/>
+          <a:p>
+            <a:fld id="{C1FF6DA9-008F-8B48-92A6-B652298478BF}" type="slidenum">
+              <a:rPr lang="en-US" smtClean="0"/>
+              <a:t>‹#›</a:t>
+            </a:fld>
+            <a:endParaRPr lang="en-US"/>
+          </a:p>
+        </p:txBody>
+      </p:sp>
+    </p:spTree>
+    <p:extLst>
+      <p:ext uri="{BB962C8B-B14F-4D97-AF65-F5344CB8AC3E}">
+        <p14:creationId xmlns:p14="http://schemas.microsoft.com/office/powerpoint/2010/main" val="3491590402"/>
+      </p:ext>
+    </p:extLst>
+  </p:cSld>
+  <p:clrMapOvr>
+    <a:masterClrMapping/>
+  </p:clrMapOvr>
+  <mc:AlternateContent xmlns:mc="http://schemas.openxmlformats.org/markup-compatibility/2006" xmlns:p14="http://schemas.microsoft.com/office/powerpoint/2010/main">
+    <mc:Choice Requires="p14">
+      <p:transition spd="slow">
+        <p14:reveal/>
+      </p:transition>
+    </mc:Choice>
+    <mc:Fallback xmlns="">
+      <p:transition spd="slow" advClick="0">
+        <p:fade/>
+      </p:transition>
+    </mc:Fallback>
+  </mc:AlternateContent>
+  <p:timing>
+    <p:tnLst>
+      <p:par>
+        <p:cTn id="1" dur="indefinite" restart="never" nodeType="tmRoot"/>
+      </p:par>
+    </p:tnLst>
+  </p:timing>
+</p:sldLayout>
+</file>
+
+<file path=ppt/slideLayouts/slideLayout18.xml><?xml version="1.0" encoding="utf-8"?>
+<p:sldLayout xmlns:a="http://schemas.openxmlformats.org/drawingml/2006/main" xmlns:r="http://schemas.openxmlformats.org/officeDocument/2006/relationships" xmlns:p="http://schemas.openxmlformats.org/presentationml/2006/main" type="blank" preserve="1">
+  <p:cSld name="Blank">
+    <p:spTree>
+      <p:nvGrpSpPr>
+        <p:cNvPr id="1" name=""/>
+        <p:cNvGrpSpPr/>
+        <p:nvPr/>
+      </p:nvGrpSpPr>
+      <p:grpSpPr>
+        <a:xfrm>
+          <a:off x="0" y="0"/>
+          <a:ext cx="0" cy="0"/>
+          <a:chOff x="0" y="0"/>
+          <a:chExt cx="0" cy="0"/>
+        </a:xfrm>
+      </p:grpSpPr>
+      <p:sp>
+        <p:nvSpPr>
+          <p:cNvPr id="2" name="Date Placeholder 1"/>
+          <p:cNvSpPr>
+            <a:spLocks noGrp="1"/>
+          </p:cNvSpPr>
+          <p:nvPr>
+            <p:ph type="dt" sz="half" idx="10"/>
+          </p:nvPr>
+        </p:nvSpPr>
+        <p:spPr/>
+        <p:txBody>
+          <a:bodyPr/>
+          <a:lstStyle/>
+          <a:p>
+            <a:fld id="{5BCAD085-E8A6-8845-BD4E-CB4CCA059FC4}" type="datetimeFigureOut">
+              <a:rPr lang="en-US" smtClean="0"/>
+              <a:t>31-Jan-26</a:t>
+            </a:fld>
+            <a:endParaRPr lang="en-US"/>
+          </a:p>
+        </p:txBody>
+      </p:sp>
+      <p:sp>
+        <p:nvSpPr>
+          <p:cNvPr id="3" name="Footer Placeholder 2"/>
+          <p:cNvSpPr>
+            <a:spLocks noGrp="1"/>
+          </p:cNvSpPr>
+          <p:nvPr>
+            <p:ph type="ftr" sz="quarter" idx="11"/>
+          </p:nvPr>
+        </p:nvSpPr>
+        <p:spPr/>
+        <p:txBody>
+          <a:bodyPr/>
+          <a:lstStyle/>
+          <a:p>
+            <a:endParaRPr lang="en-US"/>
+          </a:p>
+        </p:txBody>
+      </p:sp>
+      <p:sp>
+        <p:nvSpPr>
+          <p:cNvPr id="4" name="Slide Number Placeholder 3"/>
+          <p:cNvSpPr>
+            <a:spLocks noGrp="1"/>
+          </p:cNvSpPr>
+          <p:nvPr>
+            <p:ph type="sldNum" sz="quarter" idx="12"/>
+          </p:nvPr>
+        </p:nvSpPr>
+        <p:spPr/>
+        <p:txBody>
+          <a:bodyPr/>
+          <a:lstStyle/>
+          <a:p>
+            <a:fld id="{C1FF6DA9-008F-8B48-92A6-B652298478BF}" type="slidenum">
+              <a:rPr lang="en-US" smtClean="0"/>
+              <a:t>‹#›</a:t>
+            </a:fld>
+            <a:endParaRPr lang="en-US"/>
+          </a:p>
+        </p:txBody>
+      </p:sp>
+    </p:spTree>
+    <p:extLst>
+      <p:ext uri="{BB962C8B-B14F-4D97-AF65-F5344CB8AC3E}">
+        <p14:creationId xmlns:p14="http://schemas.microsoft.com/office/powerpoint/2010/main" val="1270247866"/>
+      </p:ext>
+    </p:extLst>
+  </p:cSld>
+  <p:clrMapOvr>
+    <a:masterClrMapping/>
+  </p:clrMapOvr>
+  <mc:AlternateContent xmlns:mc="http://schemas.openxmlformats.org/markup-compatibility/2006" xmlns:p14="http://schemas.microsoft.com/office/powerpoint/2010/main">
+    <mc:Choice Requires="p14">
+      <p:transition spd="slow">
+        <p14:reveal/>
+      </p:transition>
+    </mc:Choice>
+    <mc:Fallback xmlns="">
+      <p:transition spd="slow" advClick="0">
+        <p:fade/>
+      </p:transition>
+    </mc:Fallback>
+  </mc:AlternateContent>
+  <p:timing>
+    <p:tnLst>
+      <p:par>
+        <p:cTn id="1" dur="indefinite" restart="never" nodeType="tmRoot"/>
+      </p:par>
+    </p:tnLst>
+  </p:timing>
+</p:sldLayout>
+</file>
+
+<file path=ppt/slideLayouts/slideLayout19.xml><?xml version="1.0" encoding="utf-8"?>
+<p:sldLayout xmlns:a="http://schemas.openxmlformats.org/drawingml/2006/main" xmlns:r="http://schemas.openxmlformats.org/officeDocument/2006/relationships" xmlns:p="http://schemas.openxmlformats.org/presentationml/2006/main" showMasterSp="0" type="objTx" preserve="1">
+  <p:cSld name="Content with Caption">
+    <p:spTree>
+      <p:nvGrpSpPr>
+        <p:cNvPr id="1" name=""/>
+        <p:cNvGrpSpPr/>
+        <p:nvPr/>
+      </p:nvGrpSpPr>
+      <p:grpSpPr>
+        <a:xfrm>
+          <a:off x="0" y="0"/>
+          <a:ext cx="0" cy="0"/>
+          <a:chOff x="0" y="0"/>
+          <a:chExt cx="0" cy="0"/>
+        </a:xfrm>
+      </p:grpSpPr>
+      <p:sp>
+        <p:nvSpPr>
+          <p:cNvPr id="8" name="Rectangle 7"/>
+          <p:cNvSpPr/>
+          <p:nvPr/>
+        </p:nvSpPr>
+        <p:spPr>
+          <a:xfrm>
+            <a:off x="6227806" y="1"/>
+            <a:ext cx="2916194" cy="6857999"/>
+          </a:xfrm>
+          <a:prstGeom prst="rect">
+            <a:avLst/>
+          </a:prstGeom>
+          <a:blipFill dpi="0" rotWithShape="1">
+            <a:blip r:embed="rId2">
+              <a:alphaModFix amt="60000"/>
+              <a:lum bright="70000" contrast="-70000"/>
+              <a:extLst>
+                <a:ext uri="{BEBA8EAE-BF5A-486C-A8C5-ECC9F3942E4B}">
+                  <a14:imgProps xmlns:a14="http://schemas.microsoft.com/office/drawing/2010/main">
+                    <a14:imgLayer r:embed="rId3">
+                      <a14:imgEffect>
+                        <a14:sharpenSoften amount="61000"/>
+                      </a14:imgEffect>
+                    </a14:imgLayer>
+                  </a14:imgProps>
+                </a:ext>
+                <a:ext uri="{28A0092B-C50C-407E-A947-70E740481C1C}">
+                  <a14:useLocalDpi xmlns:a14="http://schemas.microsoft.com/office/drawing/2010/main" val="0"/>
+                </a:ext>
+              </a:extLst>
+            </a:blip>
+            <a:srcRect/>
+            <a:tile tx="0" ty="-704850" sx="92000" sy="89000" flip="xy" algn="ctr"/>
+          </a:blipFill>
+          <a:ln>
+            <a:noFill/>
+          </a:ln>
+        </p:spPr>
+        <p:style>
+          <a:lnRef idx="2">
+            <a:schemeClr val="accent1">
+              <a:shade val="50000"/>
+            </a:schemeClr>
+          </a:lnRef>
+          <a:fillRef idx="1">
+            <a:schemeClr val="accent1"/>
+          </a:fillRef>
+          <a:effectRef idx="0">
+            <a:schemeClr val="accent1"/>
+          </a:effectRef>
+          <a:fontRef idx="minor">
+            <a:schemeClr val="lt1"/>
+          </a:fontRef>
+        </p:style>
+      </p:sp>
+      <p:sp>
+        <p:nvSpPr>
+          <p:cNvPr id="2" name="Title 1"/>
+          <p:cNvSpPr>
+            <a:spLocks noGrp="1"/>
+          </p:cNvSpPr>
+          <p:nvPr>
+            <p:ph type="title"/>
+          </p:nvPr>
+        </p:nvSpPr>
+        <p:spPr>
+          <a:xfrm>
+            <a:off x="6412230" y="685800"/>
+            <a:ext cx="2400300" cy="1737360"/>
+          </a:xfrm>
+        </p:spPr>
+        <p:txBody>
+          <a:bodyPr anchor="b">
+            <a:normAutofit/>
+          </a:bodyPr>
+          <a:lstStyle>
+            <a:lvl1pPr>
+              <a:defRPr sz="2800" b="0"/>
+            </a:lvl1pPr>
+          </a:lstStyle>
+          <a:p>
+            <a:r>
+              <a:rPr lang="en-US" smtClean="0"/>
+              <a:t>Click to edit Master title style</a:t>
+            </a:r>
+            <a:endParaRPr lang="en-US" dirty="0"/>
+          </a:p>
+        </p:txBody>
+      </p:sp>
+      <p:sp>
+        <p:nvSpPr>
+          <p:cNvPr id="3" name="Content Placeholder 2"/>
+          <p:cNvSpPr>
+            <a:spLocks noGrp="1"/>
+          </p:cNvSpPr>
+          <p:nvPr>
+            <p:ph idx="1"/>
+          </p:nvPr>
+        </p:nvSpPr>
+        <p:spPr>
+          <a:xfrm>
+            <a:off x="628650" y="685800"/>
+            <a:ext cx="5033772" cy="5020056"/>
+          </a:xfrm>
+        </p:spPr>
+        <p:txBody>
+          <a:bodyPr/>
+          <a:lstStyle>
+            <a:lvl1pPr>
+              <a:defRPr sz="2000"/>
+            </a:lvl1pPr>
+            <a:lvl2pPr>
+              <a:defRPr sz="1800"/>
+            </a:lvl2pPr>
+            <a:lvl3pPr>
+              <a:defRPr sz="1600"/>
+            </a:lvl3pPr>
+            <a:lvl4pPr>
+              <a:defRPr sz="1600"/>
+            </a:lvl4pPr>
+            <a:lvl5pPr>
+              <a:defRPr sz="1600"/>
+            </a:lvl5pPr>
+            <a:lvl6pPr>
+              <a:defRPr sz="1600"/>
+            </a:lvl6pPr>
+            <a:lvl7pPr>
+              <a:defRPr sz="1600"/>
+            </a:lvl7pPr>
+            <a:lvl8pPr>
+              <a:defRPr sz="1600"/>
+            </a:lvl8pPr>
+            <a:lvl9pPr>
+              <a:defRPr sz="1600"/>
+            </a:lvl9pPr>
+          </a:lstStyle>
+          <a:p>
+            <a:pPr lvl="0"/>
+            <a:r>
+              <a:rPr lang="en-US" smtClean="0"/>
+              <a:t>Click to edit Master text styles</a:t>
+            </a:r>
+          </a:p>
+          <a:p>
+            <a:pPr lvl="1"/>
+            <a:r>
+              <a:rPr lang="en-US" smtClean="0"/>
+              <a:t>Second level</a:t>
+            </a:r>
+          </a:p>
+          <a:p>
+            <a:pPr lvl="2"/>
+            <a:r>
+              <a:rPr lang="en-US" smtClean="0"/>
+              <a:t>Third level</a:t>
+            </a:r>
+          </a:p>
+          <a:p>
+            <a:pPr lvl="3"/>
+            <a:r>
+              <a:rPr lang="en-US" smtClean="0"/>
+              <a:t>Fourth level</a:t>
+            </a:r>
+          </a:p>
+          <a:p>
+            <a:pPr lvl="4"/>
+            <a:r>
+              <a:rPr lang="en-US" smtClean="0"/>
+              <a:t>Fifth level</a:t>
+            </a:r>
+            <a:endParaRPr lang="en-US" dirty="0"/>
+          </a:p>
+        </p:txBody>
+      </p:sp>
+      <p:sp>
+        <p:nvSpPr>
+          <p:cNvPr id="4" name="Text Placeholder 3"/>
+          <p:cNvSpPr>
+            <a:spLocks noGrp="1"/>
+          </p:cNvSpPr>
+          <p:nvPr>
+            <p:ph type="body" sz="half" idx="2"/>
+          </p:nvPr>
+        </p:nvSpPr>
+        <p:spPr>
+          <a:xfrm>
+            <a:off x="6412230" y="2423160"/>
+            <a:ext cx="2400300" cy="3291840"/>
+          </a:xfrm>
+        </p:spPr>
+        <p:txBody>
+          <a:bodyPr>
+            <a:normAutofit/>
+          </a:bodyPr>
+          <a:lstStyle>
+            <a:lvl1pPr marL="0" indent="0">
+              <a:lnSpc>
+                <a:spcPct val="100000"/>
+              </a:lnSpc>
+              <a:spcBef>
+                <a:spcPts val="1000"/>
+              </a:spcBef>
+              <a:buNone/>
+              <a:defRPr sz="1350">
+                <a:solidFill>
+                  <a:schemeClr val="accent1">
+                    <a:lumMod val="50000"/>
+                  </a:schemeClr>
+                </a:solidFill>
+              </a:defRPr>
+            </a:lvl1pPr>
+            <a:lvl2pPr marL="457200" indent="0">
+              <a:buNone/>
+              <a:defRPr sz="1200"/>
+            </a:lvl2pPr>
+            <a:lvl3pPr marL="914400" indent="0">
+              <a:buNone/>
+              <a:defRPr sz="1000"/>
+            </a:lvl3pPr>
+            <a:lvl4pPr marL="1371600" indent="0">
+              <a:buNone/>
+              <a:defRPr sz="900"/>
+            </a:lvl4pPr>
+            <a:lvl5pPr marL="1828800" indent="0">
+              <a:buNone/>
+              <a:defRPr sz="900"/>
+            </a:lvl5pPr>
+            <a:lvl6pPr marL="2286000" indent="0">
+              <a:buNone/>
+              <a:defRPr sz="900"/>
+            </a:lvl6pPr>
+            <a:lvl7pPr marL="2743200" indent="0">
+              <a:buNone/>
+              <a:defRPr sz="900"/>
+            </a:lvl7pPr>
+            <a:lvl8pPr marL="3200400" indent="0">
+              <a:buNone/>
+              <a:defRPr sz="900"/>
+            </a:lvl8pPr>
+            <a:lvl9pPr marL="3657600" indent="0">
+              <a:buNone/>
+              <a:defRPr sz="900"/>
+            </a:lvl9pPr>
+          </a:lstStyle>
+          <a:p>
+            <a:pPr lvl="0"/>
+            <a:r>
+              <a:rPr lang="en-US" smtClean="0"/>
+              <a:t>Click to edit Master text styles</a:t>
+            </a:r>
+          </a:p>
+        </p:txBody>
+      </p:sp>
+      <p:grpSp>
+        <p:nvGrpSpPr>
+          <p:cNvPr id="12" name="Group 11"/>
+          <p:cNvGrpSpPr/>
+          <p:nvPr/>
+        </p:nvGrpSpPr>
+        <p:grpSpPr>
+          <a:xfrm>
+            <a:off x="8522664" y="6255258"/>
+            <a:ext cx="393192" cy="393192"/>
+            <a:chOff x="8532189" y="5068824"/>
+            <a:chExt cx="393192" cy="393192"/>
+          </a:xfrm>
+        </p:grpSpPr>
+        <p:sp>
+          <p:nvSpPr>
+            <p:cNvPr id="13" name="Oval 12"/>
+            <p:cNvSpPr>
+              <a:spLocks noChangeAspect="1"/>
+            </p:cNvSpPr>
+            <p:nvPr/>
+          </p:nvSpPr>
+          <p:spPr>
+            <a:xfrm>
+              <a:off x="8532189" y="5068824"/>
+              <a:ext cx="393192" cy="393192"/>
+            </a:xfrm>
+            <a:prstGeom prst="ellipse">
+              <a:avLst/>
+            </a:prstGeom>
+            <a:blipFill dpi="0" rotWithShape="1">
+              <a:blip r:embed="rId4">
+                <a:duotone>
+                  <a:schemeClr val="accent1">
+                    <a:shade val="45000"/>
+                    <a:satMod val="135000"/>
+                  </a:schemeClr>
+                  <a:prstClr val="white"/>
+                </a:duotone>
+                <a:extLst>
+                  <a:ext uri="{BEBA8EAE-BF5A-486C-A8C5-ECC9F3942E4B}">
+                    <a14:imgProps xmlns:a14="http://schemas.microsoft.com/office/drawing/2010/main">
+                      <a14:imgLayer r:embed="rId5">
+                        <a14:imgEffect>
+                          <a14:saturation sat="95000"/>
+                        </a14:imgEffect>
+                        <a14:imgEffect>
+                          <a14:brightnessContrast bright="-40000" contrast="20000"/>
+                        </a14:imgEffect>
+                      </a14:imgLayer>
+                    </a14:imgProps>
+                  </a:ext>
+                </a:extLst>
+              </a:blip>
+              <a:srcRect/>
+              <a:tile tx="50800" ty="0" sx="85000" sy="85000" flip="none" algn="tl"/>
+            </a:blipFill>
+            <a:ln w="25400" cap="flat" cmpd="sng" algn="ctr">
+              <a:noFill/>
+              <a:prstDash val="solid"/>
+            </a:ln>
+            <a:effectLst/>
+          </p:spPr>
+        </p:sp>
+        <p:sp>
+          <p:nvSpPr>
+            <p:cNvPr id="14" name="Oval 13"/>
+            <p:cNvSpPr>
+              <a:spLocks noChangeAspect="1"/>
+            </p:cNvSpPr>
+            <p:nvPr/>
+          </p:nvSpPr>
+          <p:spPr>
+            <a:xfrm>
+              <a:off x="8568766" y="5105400"/>
+              <a:ext cx="320039" cy="320040"/>
+            </a:xfrm>
+            <a:prstGeom prst="ellipse">
+              <a:avLst/>
+            </a:prstGeom>
+            <a:noFill/>
+            <a:ln w="12700" cap="flat" cmpd="sng" algn="ctr">
+              <a:solidFill>
+                <a:srgbClr val="FFFFFF"/>
+              </a:solidFill>
+              <a:prstDash val="solid"/>
+            </a:ln>
+            <a:effectLst/>
+          </p:spPr>
+        </p:sp>
+      </p:grpSp>
+      <p:sp>
+        <p:nvSpPr>
+          <p:cNvPr id="9" name="Date Placeholder 8"/>
+          <p:cNvSpPr>
+            <a:spLocks noGrp="1"/>
+          </p:cNvSpPr>
+          <p:nvPr>
+            <p:ph type="dt" sz="half" idx="10"/>
+          </p:nvPr>
+        </p:nvSpPr>
+        <p:spPr/>
+        <p:txBody>
+          <a:bodyPr/>
+          <a:lstStyle/>
+          <a:p>
+            <a:fld id="{5BCAD085-E8A6-8845-BD4E-CB4CCA059FC4}" type="datetimeFigureOut">
+              <a:rPr lang="en-US" smtClean="0"/>
+              <a:t>31-Jan-26</a:t>
+            </a:fld>
+            <a:endParaRPr lang="en-US"/>
+          </a:p>
+        </p:txBody>
+      </p:sp>
+      <p:sp>
+        <p:nvSpPr>
+          <p:cNvPr id="10" name="Footer Placeholder 9"/>
+          <p:cNvSpPr>
+            <a:spLocks noGrp="1"/>
+          </p:cNvSpPr>
+          <p:nvPr>
+            <p:ph type="ftr" sz="quarter" idx="11"/>
+          </p:nvPr>
+        </p:nvSpPr>
+        <p:spPr/>
+        <p:txBody>
+          <a:bodyPr/>
+          <a:lstStyle/>
+          <a:p>
+            <a:endParaRPr lang="en-US"/>
+          </a:p>
+        </p:txBody>
+      </p:sp>
+      <p:sp>
+        <p:nvSpPr>
+          <p:cNvPr id="11" name="Slide Number Placeholder 10"/>
+          <p:cNvSpPr>
+            <a:spLocks noGrp="1"/>
+          </p:cNvSpPr>
+          <p:nvPr>
+            <p:ph type="sldNum" sz="quarter" idx="12"/>
+          </p:nvPr>
+        </p:nvSpPr>
+        <p:spPr/>
+        <p:txBody>
+          <a:bodyPr/>
+          <a:lstStyle/>
+          <a:p>
+            <a:fld id="{C1FF6DA9-008F-8B48-92A6-B652298478BF}" type="slidenum">
+              <a:rPr lang="en-US" smtClean="0"/>
+              <a:t>‹#›</a:t>
+            </a:fld>
+            <a:endParaRPr lang="en-US"/>
+          </a:p>
+        </p:txBody>
+      </p:sp>
+    </p:spTree>
+    <p:extLst>
+      <p:ext uri="{BB962C8B-B14F-4D97-AF65-F5344CB8AC3E}">
+        <p14:creationId xmlns:p14="http://schemas.microsoft.com/office/powerpoint/2010/main" val="2912282691"/>
+      </p:ext>
+    </p:extLst>
+  </p:cSld>
+  <p:clrMapOvr>
+    <a:masterClrMapping/>
+  </p:clrMapOvr>
+  <mc:AlternateContent xmlns:mc="http://schemas.openxmlformats.org/markup-compatibility/2006" xmlns:p14="http://schemas.microsoft.com/office/powerpoint/2010/main">
+    <mc:Choice Requires="p14">
+      <p:transition spd="slow">
+        <p14:reveal/>
+      </p:transition>
+    </mc:Choice>
+    <mc:Fallback xmlns="">
+      <p:transition spd="slow" advClick="0">
+        <p:fade/>
+      </p:transition>
+    </mc:Fallback>
+  </mc:AlternateContent>
+  <p:timing>
+    <p:tnLst>
+      <p:par>
+        <p:cTn id="1" dur="indefinite" restart="never" nodeType="tmRoot"/>
+      </p:par>
+    </p:tnLst>
+  </p:timing>
+</p:sldLayout>
+</file>
+
 <file path=ppt/slideLayouts/slideLayout2.xml><?xml version="1.0" encoding="utf-8"?>
 <p:sldLayout xmlns:a="http://schemas.openxmlformats.org/drawingml/2006/main" xmlns:r="http://schemas.openxmlformats.org/officeDocument/2006/relationships" xmlns:p="http://schemas.openxmlformats.org/presentationml/2006/main" type="obj" preserve="1">
   <p:cSld name="Title and Content">
@@ -2757,7 +5382,7 @@
           <a:p>
             <a:fld id="{5BCAD085-E8A6-8845-BD4E-CB4CCA059FC4}" type="datetimeFigureOut">
               <a:rPr lang="en-US" smtClean="0"/>
-              <a:t>30-Jan-26</a:t>
+              <a:t>31-Jan-26</a:t>
             </a:fld>
             <a:endParaRPr lang="en-US"/>
           </a:p>
@@ -2830,6 +5455,825 @@
 </p:sldLayout>
 </file>
 
+<file path=ppt/slideLayouts/slideLayout20.xml><?xml version="1.0" encoding="utf-8"?>
+<p:sldLayout xmlns:a="http://schemas.openxmlformats.org/drawingml/2006/main" xmlns:r="http://schemas.openxmlformats.org/officeDocument/2006/relationships" xmlns:p="http://schemas.openxmlformats.org/presentationml/2006/main" showMasterSp="0" type="picTx" preserve="1">
+  <p:cSld name="Picture with Caption">
+    <p:spTree>
+      <p:nvGrpSpPr>
+        <p:cNvPr id="1" name=""/>
+        <p:cNvGrpSpPr/>
+        <p:nvPr/>
+      </p:nvGrpSpPr>
+      <p:grpSpPr>
+        <a:xfrm>
+          <a:off x="0" y="0"/>
+          <a:ext cx="0" cy="0"/>
+          <a:chOff x="0" y="0"/>
+          <a:chExt cx="0" cy="0"/>
+        </a:xfrm>
+      </p:grpSpPr>
+      <p:sp>
+        <p:nvSpPr>
+          <p:cNvPr id="11" name="Rectangle 10"/>
+          <p:cNvSpPr/>
+          <p:nvPr/>
+        </p:nvSpPr>
+        <p:spPr>
+          <a:xfrm>
+            <a:off x="6227806" y="1"/>
+            <a:ext cx="2916194" cy="6857999"/>
+          </a:xfrm>
+          <a:prstGeom prst="rect">
+            <a:avLst/>
+          </a:prstGeom>
+          <a:blipFill dpi="0" rotWithShape="1">
+            <a:blip r:embed="rId2">
+              <a:alphaModFix amt="60000"/>
+              <a:lum bright="70000" contrast="-70000"/>
+              <a:extLst>
+                <a:ext uri="{BEBA8EAE-BF5A-486C-A8C5-ECC9F3942E4B}">
+                  <a14:imgProps xmlns:a14="http://schemas.microsoft.com/office/drawing/2010/main">
+                    <a14:imgLayer r:embed="rId3">
+                      <a14:imgEffect>
+                        <a14:sharpenSoften amount="61000"/>
+                      </a14:imgEffect>
+                    </a14:imgLayer>
+                  </a14:imgProps>
+                </a:ext>
+                <a:ext uri="{28A0092B-C50C-407E-A947-70E740481C1C}">
+                  <a14:useLocalDpi xmlns:a14="http://schemas.microsoft.com/office/drawing/2010/main" val="0"/>
+                </a:ext>
+              </a:extLst>
+            </a:blip>
+            <a:srcRect/>
+            <a:tile tx="0" ty="-704850" sx="92000" sy="89000" flip="xy" algn="ctr"/>
+          </a:blipFill>
+          <a:ln>
+            <a:noFill/>
+          </a:ln>
+        </p:spPr>
+        <p:style>
+          <a:lnRef idx="2">
+            <a:schemeClr val="accent1">
+              <a:shade val="50000"/>
+            </a:schemeClr>
+          </a:lnRef>
+          <a:fillRef idx="1">
+            <a:schemeClr val="accent1"/>
+          </a:fillRef>
+          <a:effectRef idx="0">
+            <a:schemeClr val="accent1"/>
+          </a:effectRef>
+          <a:fontRef idx="minor">
+            <a:schemeClr val="lt1"/>
+          </a:fontRef>
+        </p:style>
+      </p:sp>
+      <p:sp>
+        <p:nvSpPr>
+          <p:cNvPr id="2" name="Title 1"/>
+          <p:cNvSpPr>
+            <a:spLocks noGrp="1"/>
+          </p:cNvSpPr>
+          <p:nvPr>
+            <p:ph type="title"/>
+          </p:nvPr>
+        </p:nvSpPr>
+        <p:spPr>
+          <a:xfrm>
+            <a:off x="6412230" y="685800"/>
+            <a:ext cx="2400300" cy="1737360"/>
+          </a:xfrm>
+        </p:spPr>
+        <p:txBody>
+          <a:bodyPr anchor="b">
+            <a:normAutofit/>
+          </a:bodyPr>
+          <a:lstStyle>
+            <a:lvl1pPr>
+              <a:defRPr sz="2800" b="0"/>
+            </a:lvl1pPr>
+          </a:lstStyle>
+          <a:p>
+            <a:r>
+              <a:rPr lang="en-US" smtClean="0"/>
+              <a:t>Click to edit Master title style</a:t>
+            </a:r>
+            <a:endParaRPr lang="en-US" dirty="0"/>
+          </a:p>
+        </p:txBody>
+      </p:sp>
+      <p:sp>
+        <p:nvSpPr>
+          <p:cNvPr id="3" name="Picture Placeholder 2"/>
+          <p:cNvSpPr>
+            <a:spLocks noGrp="1" noChangeAspect="1"/>
+          </p:cNvSpPr>
+          <p:nvPr>
+            <p:ph type="pic" idx="1"/>
+          </p:nvPr>
+        </p:nvSpPr>
+        <p:spPr>
+          <a:xfrm>
+            <a:off x="0" y="0"/>
+            <a:ext cx="6227805" cy="6858000"/>
+          </a:xfrm>
+          <a:solidFill>
+            <a:schemeClr val="tx2">
+              <a:lumMod val="20000"/>
+              <a:lumOff val="80000"/>
+            </a:schemeClr>
+          </a:solidFill>
+        </p:spPr>
+        <p:txBody>
+          <a:bodyPr anchor="t"/>
+          <a:lstStyle>
+            <a:lvl1pPr marL="0" indent="0">
+              <a:buNone/>
+              <a:defRPr sz="3200"/>
+            </a:lvl1pPr>
+            <a:lvl2pPr marL="457200" indent="0">
+              <a:buNone/>
+              <a:defRPr sz="2800"/>
+            </a:lvl2pPr>
+            <a:lvl3pPr marL="914400" indent="0">
+              <a:buNone/>
+              <a:defRPr sz="2400"/>
+            </a:lvl3pPr>
+            <a:lvl4pPr marL="1371600" indent="0">
+              <a:buNone/>
+              <a:defRPr sz="2000"/>
+            </a:lvl4pPr>
+            <a:lvl5pPr marL="1828800" indent="0">
+              <a:buNone/>
+              <a:defRPr sz="2000"/>
+            </a:lvl5pPr>
+            <a:lvl6pPr marL="2286000" indent="0">
+              <a:buNone/>
+              <a:defRPr sz="2000"/>
+            </a:lvl6pPr>
+            <a:lvl7pPr marL="2743200" indent="0">
+              <a:buNone/>
+              <a:defRPr sz="2000"/>
+            </a:lvl7pPr>
+            <a:lvl8pPr marL="3200400" indent="0">
+              <a:buNone/>
+              <a:defRPr sz="2000"/>
+            </a:lvl8pPr>
+            <a:lvl9pPr marL="3657600" indent="0">
+              <a:buNone/>
+              <a:defRPr sz="2000"/>
+            </a:lvl9pPr>
+          </a:lstStyle>
+          <a:p>
+            <a:r>
+              <a:rPr lang="en-US" smtClean="0"/>
+              <a:t>Click icon to add picture</a:t>
+            </a:r>
+            <a:endParaRPr lang="en-US" dirty="0"/>
+          </a:p>
+        </p:txBody>
+      </p:sp>
+      <p:sp>
+        <p:nvSpPr>
+          <p:cNvPr id="4" name="Text Placeholder 3"/>
+          <p:cNvSpPr>
+            <a:spLocks noGrp="1"/>
+          </p:cNvSpPr>
+          <p:nvPr>
+            <p:ph type="body" sz="half" idx="2"/>
+          </p:nvPr>
+        </p:nvSpPr>
+        <p:spPr>
+          <a:xfrm>
+            <a:off x="6412230" y="2423160"/>
+            <a:ext cx="2400300" cy="3291840"/>
+          </a:xfrm>
+        </p:spPr>
+        <p:txBody>
+          <a:bodyPr>
+            <a:normAutofit/>
+          </a:bodyPr>
+          <a:lstStyle>
+            <a:lvl1pPr marL="0" indent="0">
+              <a:lnSpc>
+                <a:spcPct val="100000"/>
+              </a:lnSpc>
+              <a:spcBef>
+                <a:spcPts val="1000"/>
+              </a:spcBef>
+              <a:buNone/>
+              <a:defRPr sz="1350">
+                <a:solidFill>
+                  <a:schemeClr val="accent1">
+                    <a:lumMod val="50000"/>
+                  </a:schemeClr>
+                </a:solidFill>
+              </a:defRPr>
+            </a:lvl1pPr>
+            <a:lvl2pPr marL="457200" indent="0">
+              <a:buNone/>
+              <a:defRPr sz="1200"/>
+            </a:lvl2pPr>
+            <a:lvl3pPr marL="914400" indent="0">
+              <a:buNone/>
+              <a:defRPr sz="1000"/>
+            </a:lvl3pPr>
+            <a:lvl4pPr marL="1371600" indent="0">
+              <a:buNone/>
+              <a:defRPr sz="900"/>
+            </a:lvl4pPr>
+            <a:lvl5pPr marL="1828800" indent="0">
+              <a:buNone/>
+              <a:defRPr sz="900"/>
+            </a:lvl5pPr>
+            <a:lvl6pPr marL="2286000" indent="0">
+              <a:buNone/>
+              <a:defRPr sz="900"/>
+            </a:lvl6pPr>
+            <a:lvl7pPr marL="2743200" indent="0">
+              <a:buNone/>
+              <a:defRPr sz="900"/>
+            </a:lvl7pPr>
+            <a:lvl8pPr marL="3200400" indent="0">
+              <a:buNone/>
+              <a:defRPr sz="900"/>
+            </a:lvl8pPr>
+            <a:lvl9pPr marL="3657600" indent="0">
+              <a:buNone/>
+              <a:defRPr sz="900"/>
+            </a:lvl9pPr>
+          </a:lstStyle>
+          <a:p>
+            <a:pPr lvl="0"/>
+            <a:r>
+              <a:rPr lang="en-US" smtClean="0"/>
+              <a:t>Click to edit Master text styles</a:t>
+            </a:r>
+          </a:p>
+        </p:txBody>
+      </p:sp>
+      <p:grpSp>
+        <p:nvGrpSpPr>
+          <p:cNvPr id="12" name="Group 11"/>
+          <p:cNvGrpSpPr/>
+          <p:nvPr/>
+        </p:nvGrpSpPr>
+        <p:grpSpPr>
+          <a:xfrm>
+            <a:off x="8522664" y="6255258"/>
+            <a:ext cx="393192" cy="393192"/>
+            <a:chOff x="8532189" y="5068824"/>
+            <a:chExt cx="393192" cy="393192"/>
+          </a:xfrm>
+        </p:grpSpPr>
+        <p:sp>
+          <p:nvSpPr>
+            <p:cNvPr id="13" name="Oval 12"/>
+            <p:cNvSpPr>
+              <a:spLocks noChangeAspect="1"/>
+            </p:cNvSpPr>
+            <p:nvPr/>
+          </p:nvSpPr>
+          <p:spPr>
+            <a:xfrm>
+              <a:off x="8532189" y="5068824"/>
+              <a:ext cx="393192" cy="393192"/>
+            </a:xfrm>
+            <a:prstGeom prst="ellipse">
+              <a:avLst/>
+            </a:prstGeom>
+            <a:blipFill dpi="0" rotWithShape="1">
+              <a:blip r:embed="rId4">
+                <a:duotone>
+                  <a:schemeClr val="accent1">
+                    <a:shade val="45000"/>
+                    <a:satMod val="135000"/>
+                  </a:schemeClr>
+                  <a:prstClr val="white"/>
+                </a:duotone>
+                <a:extLst>
+                  <a:ext uri="{BEBA8EAE-BF5A-486C-A8C5-ECC9F3942E4B}">
+                    <a14:imgProps xmlns:a14="http://schemas.microsoft.com/office/drawing/2010/main">
+                      <a14:imgLayer r:embed="rId5">
+                        <a14:imgEffect>
+                          <a14:saturation sat="95000"/>
+                        </a14:imgEffect>
+                        <a14:imgEffect>
+                          <a14:brightnessContrast bright="-40000" contrast="20000"/>
+                        </a14:imgEffect>
+                      </a14:imgLayer>
+                    </a14:imgProps>
+                  </a:ext>
+                </a:extLst>
+              </a:blip>
+              <a:srcRect/>
+              <a:tile tx="50800" ty="0" sx="85000" sy="85000" flip="none" algn="tl"/>
+            </a:blipFill>
+            <a:ln w="25400" cap="flat" cmpd="sng" algn="ctr">
+              <a:noFill/>
+              <a:prstDash val="solid"/>
+            </a:ln>
+            <a:effectLst/>
+          </p:spPr>
+        </p:sp>
+        <p:sp>
+          <p:nvSpPr>
+            <p:cNvPr id="14" name="Oval 13"/>
+            <p:cNvSpPr>
+              <a:spLocks noChangeAspect="1"/>
+            </p:cNvSpPr>
+            <p:nvPr/>
+          </p:nvSpPr>
+          <p:spPr>
+            <a:xfrm>
+              <a:off x="8568766" y="5105400"/>
+              <a:ext cx="320039" cy="320040"/>
+            </a:xfrm>
+            <a:prstGeom prst="ellipse">
+              <a:avLst/>
+            </a:prstGeom>
+            <a:noFill/>
+            <a:ln w="12700" cap="flat" cmpd="sng" algn="ctr">
+              <a:solidFill>
+                <a:srgbClr val="FFFFFF"/>
+              </a:solidFill>
+              <a:prstDash val="solid"/>
+            </a:ln>
+            <a:effectLst/>
+          </p:spPr>
+        </p:sp>
+      </p:grpSp>
+      <p:sp>
+        <p:nvSpPr>
+          <p:cNvPr id="8" name="Date Placeholder 7"/>
+          <p:cNvSpPr>
+            <a:spLocks noGrp="1"/>
+          </p:cNvSpPr>
+          <p:nvPr>
+            <p:ph type="dt" sz="half" idx="10"/>
+          </p:nvPr>
+        </p:nvSpPr>
+        <p:spPr/>
+        <p:txBody>
+          <a:bodyPr/>
+          <a:lstStyle/>
+          <a:p>
+            <a:fld id="{5BCAD085-E8A6-8845-BD4E-CB4CCA059FC4}" type="datetimeFigureOut">
+              <a:rPr lang="en-US" smtClean="0"/>
+              <a:t>31-Jan-26</a:t>
+            </a:fld>
+            <a:endParaRPr lang="en-US"/>
+          </a:p>
+        </p:txBody>
+      </p:sp>
+      <p:sp>
+        <p:nvSpPr>
+          <p:cNvPr id="10" name="Slide Number Placeholder 9"/>
+          <p:cNvSpPr>
+            <a:spLocks noGrp="1"/>
+          </p:cNvSpPr>
+          <p:nvPr>
+            <p:ph type="sldNum" sz="quarter" idx="12"/>
+          </p:nvPr>
+        </p:nvSpPr>
+        <p:spPr/>
+        <p:txBody>
+          <a:bodyPr/>
+          <a:lstStyle/>
+          <a:p>
+            <a:fld id="{C1FF6DA9-008F-8B48-92A6-B652298478BF}" type="slidenum">
+              <a:rPr lang="en-US" smtClean="0"/>
+              <a:t>‹#›</a:t>
+            </a:fld>
+            <a:endParaRPr lang="en-US"/>
+          </a:p>
+        </p:txBody>
+      </p:sp>
+    </p:spTree>
+    <p:extLst>
+      <p:ext uri="{BB962C8B-B14F-4D97-AF65-F5344CB8AC3E}">
+        <p14:creationId xmlns:p14="http://schemas.microsoft.com/office/powerpoint/2010/main" val="4062855612"/>
+      </p:ext>
+    </p:extLst>
+  </p:cSld>
+  <p:clrMapOvr>
+    <a:masterClrMapping/>
+  </p:clrMapOvr>
+  <mc:AlternateContent xmlns:mc="http://schemas.openxmlformats.org/markup-compatibility/2006" xmlns:p14="http://schemas.microsoft.com/office/powerpoint/2010/main">
+    <mc:Choice Requires="p14">
+      <p:transition spd="slow">
+        <p14:reveal/>
+      </p:transition>
+    </mc:Choice>
+    <mc:Fallback xmlns="">
+      <p:transition spd="slow" advClick="0">
+        <p:fade/>
+      </p:transition>
+    </mc:Fallback>
+  </mc:AlternateContent>
+  <p:timing>
+    <p:tnLst>
+      <p:par>
+        <p:cTn id="1" dur="indefinite" restart="never" nodeType="tmRoot"/>
+      </p:par>
+    </p:tnLst>
+  </p:timing>
+</p:sldLayout>
+</file>
+
+<file path=ppt/slideLayouts/slideLayout21.xml><?xml version="1.0" encoding="utf-8"?>
+<p:sldLayout xmlns:a="http://schemas.openxmlformats.org/drawingml/2006/main" xmlns:r="http://schemas.openxmlformats.org/officeDocument/2006/relationships" xmlns:p="http://schemas.openxmlformats.org/presentationml/2006/main" type="vertTx" preserve="1">
+  <p:cSld name="Title and Vertical Text">
+    <p:spTree>
+      <p:nvGrpSpPr>
+        <p:cNvPr id="1" name=""/>
+        <p:cNvGrpSpPr/>
+        <p:nvPr/>
+      </p:nvGrpSpPr>
+      <p:grpSpPr>
+        <a:xfrm>
+          <a:off x="0" y="0"/>
+          <a:ext cx="0" cy="0"/>
+          <a:chOff x="0" y="0"/>
+          <a:chExt cx="0" cy="0"/>
+        </a:xfrm>
+      </p:grpSpPr>
+      <p:sp>
+        <p:nvSpPr>
+          <p:cNvPr id="2" name="Title 1"/>
+          <p:cNvSpPr>
+            <a:spLocks noGrp="1"/>
+          </p:cNvSpPr>
+          <p:nvPr>
+            <p:ph type="title"/>
+          </p:nvPr>
+        </p:nvSpPr>
+        <p:spPr/>
+        <p:txBody>
+          <a:bodyPr/>
+          <a:lstStyle/>
+          <a:p>
+            <a:r>
+              <a:rPr lang="en-US" smtClean="0"/>
+              <a:t>Click to edit Master title style</a:t>
+            </a:r>
+            <a:endParaRPr lang="en-US" dirty="0"/>
+          </a:p>
+        </p:txBody>
+      </p:sp>
+      <p:sp>
+        <p:nvSpPr>
+          <p:cNvPr id="3" name="Vertical Text Placeholder 2"/>
+          <p:cNvSpPr>
+            <a:spLocks noGrp="1"/>
+          </p:cNvSpPr>
+          <p:nvPr>
+            <p:ph type="body" orient="vert" idx="1"/>
+          </p:nvPr>
+        </p:nvSpPr>
+        <p:spPr/>
+        <p:txBody>
+          <a:bodyPr vert="eaVert"/>
+          <a:lstStyle/>
+          <a:p>
+            <a:pPr lvl="0"/>
+            <a:r>
+              <a:rPr lang="en-US" smtClean="0"/>
+              <a:t>Click to edit Master text styles</a:t>
+            </a:r>
+          </a:p>
+          <a:p>
+            <a:pPr lvl="1"/>
+            <a:r>
+              <a:rPr lang="en-US" smtClean="0"/>
+              <a:t>Second level</a:t>
+            </a:r>
+          </a:p>
+          <a:p>
+            <a:pPr lvl="2"/>
+            <a:r>
+              <a:rPr lang="en-US" smtClean="0"/>
+              <a:t>Third level</a:t>
+            </a:r>
+          </a:p>
+          <a:p>
+            <a:pPr lvl="3"/>
+            <a:r>
+              <a:rPr lang="en-US" smtClean="0"/>
+              <a:t>Fourth level</a:t>
+            </a:r>
+          </a:p>
+          <a:p>
+            <a:pPr lvl="4"/>
+            <a:r>
+              <a:rPr lang="en-US" smtClean="0"/>
+              <a:t>Fifth level</a:t>
+            </a:r>
+            <a:endParaRPr lang="en-US" dirty="0"/>
+          </a:p>
+        </p:txBody>
+      </p:sp>
+      <p:sp>
+        <p:nvSpPr>
+          <p:cNvPr id="7" name="Date Placeholder 6"/>
+          <p:cNvSpPr>
+            <a:spLocks noGrp="1"/>
+          </p:cNvSpPr>
+          <p:nvPr>
+            <p:ph type="dt" sz="half" idx="10"/>
+          </p:nvPr>
+        </p:nvSpPr>
+        <p:spPr/>
+        <p:txBody>
+          <a:bodyPr/>
+          <a:lstStyle/>
+          <a:p>
+            <a:fld id="{5BCAD085-E8A6-8845-BD4E-CB4CCA059FC4}" type="datetimeFigureOut">
+              <a:rPr lang="en-US" smtClean="0"/>
+              <a:t>31-Jan-26</a:t>
+            </a:fld>
+            <a:endParaRPr lang="en-US"/>
+          </a:p>
+        </p:txBody>
+      </p:sp>
+      <p:sp>
+        <p:nvSpPr>
+          <p:cNvPr id="8" name="Footer Placeholder 7"/>
+          <p:cNvSpPr>
+            <a:spLocks noGrp="1"/>
+          </p:cNvSpPr>
+          <p:nvPr>
+            <p:ph type="ftr" sz="quarter" idx="11"/>
+          </p:nvPr>
+        </p:nvSpPr>
+        <p:spPr/>
+        <p:txBody>
+          <a:bodyPr/>
+          <a:lstStyle/>
+          <a:p>
+            <a:endParaRPr lang="en-US"/>
+          </a:p>
+        </p:txBody>
+      </p:sp>
+      <p:sp>
+        <p:nvSpPr>
+          <p:cNvPr id="9" name="Slide Number Placeholder 8"/>
+          <p:cNvSpPr>
+            <a:spLocks noGrp="1"/>
+          </p:cNvSpPr>
+          <p:nvPr>
+            <p:ph type="sldNum" sz="quarter" idx="12"/>
+          </p:nvPr>
+        </p:nvSpPr>
+        <p:spPr/>
+        <p:txBody>
+          <a:bodyPr/>
+          <a:lstStyle/>
+          <a:p>
+            <a:fld id="{C1FF6DA9-008F-8B48-92A6-B652298478BF}" type="slidenum">
+              <a:rPr lang="en-US" smtClean="0"/>
+              <a:t>‹#›</a:t>
+            </a:fld>
+            <a:endParaRPr lang="en-US"/>
+          </a:p>
+        </p:txBody>
+      </p:sp>
+    </p:spTree>
+    <p:extLst>
+      <p:ext uri="{BB962C8B-B14F-4D97-AF65-F5344CB8AC3E}">
+        <p14:creationId xmlns:p14="http://schemas.microsoft.com/office/powerpoint/2010/main" val="976136555"/>
+      </p:ext>
+    </p:extLst>
+  </p:cSld>
+  <p:clrMapOvr>
+    <a:masterClrMapping/>
+  </p:clrMapOvr>
+  <mc:AlternateContent xmlns:mc="http://schemas.openxmlformats.org/markup-compatibility/2006" xmlns:p14="http://schemas.microsoft.com/office/powerpoint/2010/main">
+    <mc:Choice Requires="p14">
+      <p:transition spd="slow">
+        <p14:reveal/>
+      </p:transition>
+    </mc:Choice>
+    <mc:Fallback xmlns="">
+      <p:transition spd="slow" advClick="0">
+        <p:fade/>
+      </p:transition>
+    </mc:Fallback>
+  </mc:AlternateContent>
+  <p:timing>
+    <p:tnLst>
+      <p:par>
+        <p:cTn id="1" dur="indefinite" restart="never" nodeType="tmRoot"/>
+      </p:par>
+    </p:tnLst>
+  </p:timing>
+</p:sldLayout>
+</file>
+
+<file path=ppt/slideLayouts/slideLayout22.xml><?xml version="1.0" encoding="utf-8"?>
+<p:sldLayout xmlns:a="http://schemas.openxmlformats.org/drawingml/2006/main" xmlns:r="http://schemas.openxmlformats.org/officeDocument/2006/relationships" xmlns:p="http://schemas.openxmlformats.org/presentationml/2006/main" type="vertTitleAndTx" preserve="1">
+  <p:cSld name="Vertical Title and Text">
+    <p:spTree>
+      <p:nvGrpSpPr>
+        <p:cNvPr id="1" name=""/>
+        <p:cNvGrpSpPr/>
+        <p:nvPr/>
+      </p:nvGrpSpPr>
+      <p:grpSpPr>
+        <a:xfrm>
+          <a:off x="0" y="0"/>
+          <a:ext cx="0" cy="0"/>
+          <a:chOff x="0" y="0"/>
+          <a:chExt cx="0" cy="0"/>
+        </a:xfrm>
+      </p:grpSpPr>
+      <p:sp>
+        <p:nvSpPr>
+          <p:cNvPr id="2" name="Vertical Title 1"/>
+          <p:cNvSpPr>
+            <a:spLocks noGrp="1"/>
+          </p:cNvSpPr>
+          <p:nvPr>
+            <p:ph type="title" orient="vert"/>
+          </p:nvPr>
+        </p:nvSpPr>
+        <p:spPr>
+          <a:xfrm>
+            <a:off x="6543675" y="533400"/>
+            <a:ext cx="1914525" cy="5638800"/>
+          </a:xfrm>
+        </p:spPr>
+        <p:txBody>
+          <a:bodyPr vert="eaVert"/>
+          <a:lstStyle>
+            <a:lvl1pPr>
+              <a:defRPr b="0"/>
+            </a:lvl1pPr>
+          </a:lstStyle>
+          <a:p>
+            <a:r>
+              <a:rPr lang="en-US" smtClean="0"/>
+              <a:t>Click to edit Master title style</a:t>
+            </a:r>
+            <a:endParaRPr lang="en-US" dirty="0"/>
+          </a:p>
+        </p:txBody>
+      </p:sp>
+      <p:sp>
+        <p:nvSpPr>
+          <p:cNvPr id="3" name="Vertical Text Placeholder 2"/>
+          <p:cNvSpPr>
+            <a:spLocks noGrp="1"/>
+          </p:cNvSpPr>
+          <p:nvPr>
+            <p:ph type="body" orient="vert" idx="1"/>
+          </p:nvPr>
+        </p:nvSpPr>
+        <p:spPr>
+          <a:xfrm>
+            <a:off x="800100" y="533400"/>
+            <a:ext cx="5629275" cy="5638800"/>
+          </a:xfrm>
+        </p:spPr>
+        <p:txBody>
+          <a:bodyPr vert="eaVert"/>
+          <a:lstStyle/>
+          <a:p>
+            <a:pPr lvl="0"/>
+            <a:r>
+              <a:rPr lang="en-US" smtClean="0"/>
+              <a:t>Click to edit Master text styles</a:t>
+            </a:r>
+          </a:p>
+          <a:p>
+            <a:pPr lvl="1"/>
+            <a:r>
+              <a:rPr lang="en-US" smtClean="0"/>
+              <a:t>Second level</a:t>
+            </a:r>
+          </a:p>
+          <a:p>
+            <a:pPr lvl="2"/>
+            <a:r>
+              <a:rPr lang="en-US" smtClean="0"/>
+              <a:t>Third level</a:t>
+            </a:r>
+          </a:p>
+          <a:p>
+            <a:pPr lvl="3"/>
+            <a:r>
+              <a:rPr lang="en-US" smtClean="0"/>
+              <a:t>Fourth level</a:t>
+            </a:r>
+          </a:p>
+          <a:p>
+            <a:pPr lvl="4"/>
+            <a:r>
+              <a:rPr lang="en-US" smtClean="0"/>
+              <a:t>Fifth level</a:t>
+            </a:r>
+            <a:endParaRPr lang="en-US" dirty="0"/>
+          </a:p>
+        </p:txBody>
+      </p:sp>
+      <p:sp>
+        <p:nvSpPr>
+          <p:cNvPr id="7" name="Date Placeholder 6"/>
+          <p:cNvSpPr>
+            <a:spLocks noGrp="1"/>
+          </p:cNvSpPr>
+          <p:nvPr>
+            <p:ph type="dt" sz="half" idx="10"/>
+          </p:nvPr>
+        </p:nvSpPr>
+        <p:spPr/>
+        <p:txBody>
+          <a:bodyPr/>
+          <a:lstStyle/>
+          <a:p>
+            <a:fld id="{5BCAD085-E8A6-8845-BD4E-CB4CCA059FC4}" type="datetimeFigureOut">
+              <a:rPr lang="en-US" smtClean="0"/>
+              <a:t>31-Jan-26</a:t>
+            </a:fld>
+            <a:endParaRPr lang="en-US"/>
+          </a:p>
+        </p:txBody>
+      </p:sp>
+      <p:sp>
+        <p:nvSpPr>
+          <p:cNvPr id="8" name="Footer Placeholder 7"/>
+          <p:cNvSpPr>
+            <a:spLocks noGrp="1"/>
+          </p:cNvSpPr>
+          <p:nvPr>
+            <p:ph type="ftr" sz="quarter" idx="11"/>
+          </p:nvPr>
+        </p:nvSpPr>
+        <p:spPr/>
+        <p:txBody>
+          <a:bodyPr/>
+          <a:lstStyle/>
+          <a:p>
+            <a:endParaRPr lang="en-US"/>
+          </a:p>
+        </p:txBody>
+      </p:sp>
+      <p:sp>
+        <p:nvSpPr>
+          <p:cNvPr id="9" name="Slide Number Placeholder 8"/>
+          <p:cNvSpPr>
+            <a:spLocks noGrp="1"/>
+          </p:cNvSpPr>
+          <p:nvPr>
+            <p:ph type="sldNum" sz="quarter" idx="12"/>
+          </p:nvPr>
+        </p:nvSpPr>
+        <p:spPr/>
+        <p:txBody>
+          <a:bodyPr/>
+          <a:lstStyle/>
+          <a:p>
+            <a:fld id="{C1FF6DA9-008F-8B48-92A6-B652298478BF}" type="slidenum">
+              <a:rPr lang="en-US" smtClean="0"/>
+              <a:t>‹#›</a:t>
+            </a:fld>
+            <a:endParaRPr lang="en-US"/>
+          </a:p>
+        </p:txBody>
+      </p:sp>
+    </p:spTree>
+    <p:extLst>
+      <p:ext uri="{BB962C8B-B14F-4D97-AF65-F5344CB8AC3E}">
+        <p14:creationId xmlns:p14="http://schemas.microsoft.com/office/powerpoint/2010/main" val="1214162936"/>
+      </p:ext>
+    </p:extLst>
+  </p:cSld>
+  <p:clrMapOvr>
+    <a:masterClrMapping/>
+  </p:clrMapOvr>
+  <mc:AlternateContent xmlns:mc="http://schemas.openxmlformats.org/markup-compatibility/2006" xmlns:p14="http://schemas.microsoft.com/office/powerpoint/2010/main">
+    <mc:Choice Requires="p14">
+      <p:transition spd="slow">
+        <p14:reveal/>
+      </p:transition>
+    </mc:Choice>
+    <mc:Fallback xmlns="">
+      <p:transition spd="slow" advClick="0">
+        <p:fade/>
+      </p:transition>
+    </mc:Fallback>
+  </mc:AlternateContent>
+  <p:timing>
+    <p:tnLst>
+      <p:par>
+        <p:cTn id="1" dur="indefinite" restart="never" nodeType="tmRoot"/>
+      </p:par>
+    </p:tnLst>
+  </p:timing>
+</p:sldLayout>
+</file>
+
 <file path=ppt/slideLayouts/slideLayout3.xml><?xml version="1.0" encoding="utf-8"?>
 <p:sldLayout xmlns:a="http://schemas.openxmlformats.org/drawingml/2006/main" xmlns:r="http://schemas.openxmlformats.org/officeDocument/2006/relationships" xmlns:p="http://schemas.openxmlformats.org/presentationml/2006/main" type="secHead" preserve="1">
   <p:cSld name="Section Header">
@@ -3015,7 +6459,7 @@
           <a:p>
             <a:fld id="{5BCAD085-E8A6-8845-BD4E-CB4CCA059FC4}" type="datetimeFigureOut">
               <a:rPr lang="en-US" smtClean="0"/>
-              <a:t>30-Jan-26</a:t>
+              <a:t>31-Jan-26</a:t>
             </a:fld>
             <a:endParaRPr lang="en-US"/>
           </a:p>
@@ -3315,7 +6759,7 @@
           <a:p>
             <a:fld id="{5BCAD085-E8A6-8845-BD4E-CB4CCA059FC4}" type="datetimeFigureOut">
               <a:rPr lang="en-US" smtClean="0"/>
-              <a:t>30-Jan-26</a:t>
+              <a:t>31-Jan-26</a:t>
             </a:fld>
             <a:endParaRPr lang="en-US"/>
           </a:p>
@@ -3749,7 +7193,7 @@
           <a:p>
             <a:fld id="{5BCAD085-E8A6-8845-BD4E-CB4CCA059FC4}" type="datetimeFigureOut">
               <a:rPr lang="en-US" smtClean="0"/>
-              <a:t>30-Jan-26</a:t>
+              <a:t>31-Jan-26</a:t>
             </a:fld>
             <a:endParaRPr lang="en-US"/>
           </a:p>
@@ -3879,7 +7323,7 @@
           <a:p>
             <a:fld id="{5BCAD085-E8A6-8845-BD4E-CB4CCA059FC4}" type="datetimeFigureOut">
               <a:rPr lang="en-US" smtClean="0"/>
-              <a:t>30-Jan-26</a:t>
+              <a:t>31-Jan-26</a:t>
             </a:fld>
             <a:endParaRPr lang="en-US"/>
           </a:p>
@@ -3986,7 +7430,7 @@
           <a:p>
             <a:fld id="{5BCAD085-E8A6-8845-BD4E-CB4CCA059FC4}" type="datetimeFigureOut">
               <a:rPr lang="en-US" smtClean="0"/>
-              <a:t>30-Jan-26</a:t>
+              <a:t>31-Jan-26</a:t>
             </a:fld>
             <a:endParaRPr lang="en-US"/>
           </a:p>
@@ -4275,7 +7719,7 @@
           <a:p>
             <a:fld id="{5BCAD085-E8A6-8845-BD4E-CB4CCA059FC4}" type="datetimeFigureOut">
               <a:rPr lang="en-US" smtClean="0"/>
-              <a:t>30-Jan-26</a:t>
+              <a:t>31-Jan-26</a:t>
             </a:fld>
             <a:endParaRPr lang="en-US"/>
           </a:p>
@@ -4540,7 +7984,7 @@
           <a:p>
             <a:fld id="{5BCAD085-E8A6-8845-BD4E-CB4CCA059FC4}" type="datetimeFigureOut">
               <a:rPr lang="en-US" smtClean="0"/>
-              <a:t>30-Jan-26</a:t>
+              <a:t>31-Jan-26</a:t>
             </a:fld>
             <a:endParaRPr lang="en-US"/>
           </a:p>
@@ -4765,7 +8209,7 @@
           <a:p>
             <a:fld id="{5BCAD085-E8A6-8845-BD4E-CB4CCA059FC4}" type="datetimeFigureOut">
               <a:rPr lang="en-US" smtClean="0"/>
-              <a:t>30-Jan-26</a:t>
+              <a:t>31-Jan-26</a:t>
             </a:fld>
             <a:endParaRPr lang="en-US"/>
           </a:p>
@@ -5135,6 +8579,740 @@
 </p:sldMaster>
 </file>
 
+<file path=ppt/slideMasters/slideMaster2.xml><?xml version="1.0" encoding="utf-8"?>
+<p:sldMaster xmlns:a="http://schemas.openxmlformats.org/drawingml/2006/main" xmlns:r="http://schemas.openxmlformats.org/officeDocument/2006/relationships" xmlns:p="http://schemas.openxmlformats.org/presentationml/2006/main">
+  <p:cSld>
+    <p:bg>
+      <p:bgRef idx="1001">
+        <a:schemeClr val="bg1"/>
+      </p:bgRef>
+    </p:bg>
+    <p:spTree>
+      <p:nvGrpSpPr>
+        <p:cNvPr id="1" name=""/>
+        <p:cNvGrpSpPr/>
+        <p:nvPr/>
+      </p:nvGrpSpPr>
+      <p:grpSpPr>
+        <a:xfrm>
+          <a:off x="0" y="0"/>
+          <a:ext cx="0" cy="0"/>
+          <a:chOff x="0" y="0"/>
+          <a:chExt cx="0" cy="0"/>
+        </a:xfrm>
+      </p:grpSpPr>
+      <p:grpSp>
+        <p:nvGrpSpPr>
+          <p:cNvPr id="12" name="Group 11"/>
+          <p:cNvGrpSpPr/>
+          <p:nvPr/>
+        </p:nvGrpSpPr>
+        <p:grpSpPr>
+          <a:xfrm>
+            <a:off x="8522664" y="6255258"/>
+            <a:ext cx="393192" cy="393192"/>
+            <a:chOff x="8532189" y="5068824"/>
+            <a:chExt cx="393192" cy="393192"/>
+          </a:xfrm>
+        </p:grpSpPr>
+        <p:sp>
+          <p:nvSpPr>
+            <p:cNvPr id="8" name="Oval 7"/>
+            <p:cNvSpPr>
+              <a:spLocks noChangeAspect="1"/>
+            </p:cNvSpPr>
+            <p:nvPr/>
+          </p:nvSpPr>
+          <p:spPr>
+            <a:xfrm>
+              <a:off x="8532189" y="5068824"/>
+              <a:ext cx="393192" cy="393192"/>
+            </a:xfrm>
+            <a:prstGeom prst="ellipse">
+              <a:avLst/>
+            </a:prstGeom>
+            <a:blipFill dpi="0" rotWithShape="1">
+              <a:blip r:embed="rId13">
+                <a:duotone>
+                  <a:schemeClr val="accent1">
+                    <a:shade val="45000"/>
+                    <a:satMod val="135000"/>
+                  </a:schemeClr>
+                  <a:prstClr val="white"/>
+                </a:duotone>
+                <a:extLst>
+                  <a:ext uri="{BEBA8EAE-BF5A-486C-A8C5-ECC9F3942E4B}">
+                    <a14:imgProps xmlns:a14="http://schemas.microsoft.com/office/drawing/2010/main">
+                      <a14:imgLayer r:embed="rId14">
+                        <a14:imgEffect>
+                          <a14:saturation sat="95000"/>
+                        </a14:imgEffect>
+                        <a14:imgEffect>
+                          <a14:brightnessContrast bright="-40000" contrast="20000"/>
+                        </a14:imgEffect>
+                      </a14:imgLayer>
+                    </a14:imgProps>
+                  </a:ext>
+                </a:extLst>
+              </a:blip>
+              <a:srcRect/>
+              <a:tile tx="50800" ty="0" sx="85000" sy="85000" flip="none" algn="tl"/>
+            </a:blipFill>
+            <a:ln w="25400" cap="flat" cmpd="sng" algn="ctr">
+              <a:noFill/>
+              <a:prstDash val="solid"/>
+            </a:ln>
+            <a:effectLst/>
+          </p:spPr>
+        </p:sp>
+        <p:sp>
+          <p:nvSpPr>
+            <p:cNvPr id="9" name="Oval 8"/>
+            <p:cNvSpPr>
+              <a:spLocks noChangeAspect="1"/>
+            </p:cNvSpPr>
+            <p:nvPr/>
+          </p:nvSpPr>
+          <p:spPr>
+            <a:xfrm>
+              <a:off x="8568766" y="5105400"/>
+              <a:ext cx="320039" cy="320040"/>
+            </a:xfrm>
+            <a:prstGeom prst="ellipse">
+              <a:avLst/>
+            </a:prstGeom>
+            <a:noFill/>
+            <a:ln w="12700" cap="flat" cmpd="sng" algn="ctr">
+              <a:solidFill>
+                <a:srgbClr val="FFFFFF"/>
+              </a:solidFill>
+              <a:prstDash val="solid"/>
+            </a:ln>
+            <a:effectLst/>
+          </p:spPr>
+        </p:sp>
+      </p:grpSp>
+      <p:sp>
+        <p:nvSpPr>
+          <p:cNvPr id="2" name="Title Placeholder 1"/>
+          <p:cNvSpPr>
+            <a:spLocks noGrp="1"/>
+          </p:cNvSpPr>
+          <p:nvPr>
+            <p:ph type="title"/>
+          </p:nvPr>
+        </p:nvSpPr>
+        <p:spPr>
+          <a:xfrm>
+            <a:off x="685800" y="484632"/>
+            <a:ext cx="7772400" cy="1609344"/>
+          </a:xfrm>
+          <a:prstGeom prst="rect">
+            <a:avLst/>
+          </a:prstGeom>
+        </p:spPr>
+        <p:txBody>
+          <a:bodyPr vert="horz" lIns="91440" tIns="45720" rIns="91440" bIns="45720" rtlCol="0" anchor="ctr">
+            <a:normAutofit/>
+          </a:bodyPr>
+          <a:lstStyle/>
+          <a:p>
+            <a:r>
+              <a:rPr lang="en-US" smtClean="0"/>
+              <a:t>Click to edit Master title style</a:t>
+            </a:r>
+            <a:endParaRPr lang="en-US" dirty="0"/>
+          </a:p>
+        </p:txBody>
+      </p:sp>
+      <p:sp>
+        <p:nvSpPr>
+          <p:cNvPr id="3" name="Text Placeholder 2"/>
+          <p:cNvSpPr>
+            <a:spLocks noGrp="1"/>
+          </p:cNvSpPr>
+          <p:nvPr>
+            <p:ph type="body" idx="1"/>
+          </p:nvPr>
+        </p:nvSpPr>
+        <p:spPr>
+          <a:xfrm>
+            <a:off x="685800" y="2121408"/>
+            <a:ext cx="7772400" cy="4050792"/>
+          </a:xfrm>
+          <a:prstGeom prst="rect">
+            <a:avLst/>
+          </a:prstGeom>
+        </p:spPr>
+        <p:txBody>
+          <a:bodyPr vert="horz" lIns="91440" tIns="45720" rIns="91440" bIns="45720" rtlCol="0">
+            <a:normAutofit/>
+          </a:bodyPr>
+          <a:lstStyle/>
+          <a:p>
+            <a:pPr lvl="0"/>
+            <a:r>
+              <a:rPr lang="en-US" smtClean="0"/>
+              <a:t>Click to edit Master text styles</a:t>
+            </a:r>
+          </a:p>
+          <a:p>
+            <a:pPr lvl="1"/>
+            <a:r>
+              <a:rPr lang="en-US" smtClean="0"/>
+              <a:t>Second level</a:t>
+            </a:r>
+          </a:p>
+          <a:p>
+            <a:pPr lvl="2"/>
+            <a:r>
+              <a:rPr lang="en-US" smtClean="0"/>
+              <a:t>Third level</a:t>
+            </a:r>
+          </a:p>
+          <a:p>
+            <a:pPr lvl="3"/>
+            <a:r>
+              <a:rPr lang="en-US" smtClean="0"/>
+              <a:t>Fourth level</a:t>
+            </a:r>
+          </a:p>
+          <a:p>
+            <a:pPr lvl="4"/>
+            <a:r>
+              <a:rPr lang="en-US" smtClean="0"/>
+              <a:t>Fifth level</a:t>
+            </a:r>
+            <a:endParaRPr lang="en-US" dirty="0"/>
+          </a:p>
+        </p:txBody>
+      </p:sp>
+      <p:sp>
+        <p:nvSpPr>
+          <p:cNvPr id="4" name="Date Placeholder 3"/>
+          <p:cNvSpPr>
+            <a:spLocks noGrp="1"/>
+          </p:cNvSpPr>
+          <p:nvPr>
+            <p:ph type="dt" sz="half" idx="2"/>
+          </p:nvPr>
+        </p:nvSpPr>
+        <p:spPr>
+          <a:xfrm>
+            <a:off x="5992368" y="6272785"/>
+            <a:ext cx="2455164" cy="365125"/>
+          </a:xfrm>
+          <a:prstGeom prst="rect">
+            <a:avLst/>
+          </a:prstGeom>
+        </p:spPr>
+        <p:txBody>
+          <a:bodyPr vert="horz" lIns="91440" tIns="45720" rIns="91440" bIns="45720" rtlCol="0" anchor="ctr"/>
+          <a:lstStyle>
+            <a:lvl1pPr algn="r">
+              <a:defRPr sz="1000">
+                <a:solidFill>
+                  <a:schemeClr val="accent1">
+                    <a:lumMod val="50000"/>
+                  </a:schemeClr>
+                </a:solidFill>
+              </a:defRPr>
+            </a:lvl1pPr>
+          </a:lstStyle>
+          <a:p>
+            <a:fld id="{5BCAD085-E8A6-8845-BD4E-CB4CCA059FC4}" type="datetimeFigureOut">
+              <a:rPr lang="en-US" smtClean="0"/>
+              <a:t>31-Jan-26</a:t>
+            </a:fld>
+            <a:endParaRPr lang="en-US"/>
+          </a:p>
+        </p:txBody>
+      </p:sp>
+      <p:sp>
+        <p:nvSpPr>
+          <p:cNvPr id="5" name="Footer Placeholder 4"/>
+          <p:cNvSpPr>
+            <a:spLocks noGrp="1"/>
+          </p:cNvSpPr>
+          <p:nvPr>
+            <p:ph type="ftr" sz="quarter" idx="3"/>
+          </p:nvPr>
+        </p:nvSpPr>
+        <p:spPr>
+          <a:xfrm>
+            <a:off x="685800" y="6272785"/>
+            <a:ext cx="4745736" cy="365125"/>
+          </a:xfrm>
+          <a:prstGeom prst="rect">
+            <a:avLst/>
+          </a:prstGeom>
+        </p:spPr>
+        <p:txBody>
+          <a:bodyPr vert="horz" lIns="91440" tIns="45720" rIns="91440" bIns="45720" rtlCol="0" anchor="ctr"/>
+          <a:lstStyle>
+            <a:lvl1pPr algn="l">
+              <a:defRPr sz="1000">
+                <a:solidFill>
+                  <a:schemeClr val="accent1">
+                    <a:lumMod val="50000"/>
+                  </a:schemeClr>
+                </a:solidFill>
+              </a:defRPr>
+            </a:lvl1pPr>
+          </a:lstStyle>
+          <a:p>
+            <a:endParaRPr lang="en-US"/>
+          </a:p>
+        </p:txBody>
+      </p:sp>
+      <p:sp>
+        <p:nvSpPr>
+          <p:cNvPr id="6" name="Slide Number Placeholder 5"/>
+          <p:cNvSpPr>
+            <a:spLocks noGrp="1"/>
+          </p:cNvSpPr>
+          <p:nvPr>
+            <p:ph type="sldNum" sz="quarter" idx="4"/>
+          </p:nvPr>
+        </p:nvSpPr>
+        <p:spPr>
+          <a:xfrm>
+            <a:off x="8483346" y="6272785"/>
+            <a:ext cx="480060" cy="365125"/>
+          </a:xfrm>
+          <a:prstGeom prst="rect">
+            <a:avLst/>
+          </a:prstGeom>
+        </p:spPr>
+        <p:txBody>
+          <a:bodyPr vert="horz" lIns="91440" tIns="45720" rIns="91440" bIns="45720" rtlCol="0" anchor="ctr"/>
+          <a:lstStyle>
+            <a:lvl1pPr algn="ctr">
+              <a:defRPr sz="1100" b="1" spc="-70" baseline="0">
+                <a:solidFill>
+                  <a:srgbClr val="FFFFFF"/>
+                </a:solidFill>
+                <a:latin typeface="+mn-lt"/>
+              </a:defRPr>
+            </a:lvl1pPr>
+          </a:lstStyle>
+          <a:p>
+            <a:fld id="{C1FF6DA9-008F-8B48-92A6-B652298478BF}" type="slidenum">
+              <a:rPr lang="en-US" smtClean="0"/>
+              <a:t>‹#›</a:t>
+            </a:fld>
+            <a:endParaRPr lang="en-US"/>
+          </a:p>
+        </p:txBody>
+      </p:sp>
+    </p:spTree>
+    <p:extLst>
+      <p:ext uri="{BB962C8B-B14F-4D97-AF65-F5344CB8AC3E}">
+        <p14:creationId xmlns:p14="http://schemas.microsoft.com/office/powerpoint/2010/main" val="1392448654"/>
+      </p:ext>
+    </p:extLst>
+  </p:cSld>
+  <p:clrMap bg1="lt1" tx1="dk1" bg2="lt2" tx2="dk2" accent1="accent1" accent2="accent2" accent3="accent3" accent4="accent4" accent5="accent5" accent6="accent6" hlink="hlink" folHlink="folHlink"/>
+  <p:sldLayoutIdLst>
+    <p:sldLayoutId id="2147483697" r:id="rId1"/>
+    <p:sldLayoutId id="2147483698" r:id="rId2"/>
+    <p:sldLayoutId id="2147483699" r:id="rId3"/>
+    <p:sldLayoutId id="2147483700" r:id="rId4"/>
+    <p:sldLayoutId id="2147483701" r:id="rId5"/>
+    <p:sldLayoutId id="2147483702" r:id="rId6"/>
+    <p:sldLayoutId id="2147483703" r:id="rId7"/>
+    <p:sldLayoutId id="2147483704" r:id="rId8"/>
+    <p:sldLayoutId id="2147483705" r:id="rId9"/>
+    <p:sldLayoutId id="2147483706" r:id="rId10"/>
+    <p:sldLayoutId id="2147483707" r:id="rId11"/>
+  </p:sldLayoutIdLst>
+  <mc:AlternateContent xmlns:mc="http://schemas.openxmlformats.org/markup-compatibility/2006" xmlns:p14="http://schemas.microsoft.com/office/powerpoint/2010/main">
+    <mc:Choice Requires="p14">
+      <p:transition spd="slow">
+        <p14:reveal/>
+      </p:transition>
+    </mc:Choice>
+    <mc:Fallback xmlns="">
+      <p:transition spd="slow" advClick="0">
+        <p:fade/>
+      </p:transition>
+    </mc:Fallback>
+  </mc:AlternateContent>
+  <p:timing>
+    <p:tnLst>
+      <p:par>
+        <p:cTn id="1" dur="indefinite" restart="never" nodeType="tmRoot"/>
+      </p:par>
+    </p:tnLst>
+  </p:timing>
+  <p:txStyles>
+    <p:titleStyle>
+      <a:lvl1pPr algn="l" defTabSz="914400" rtl="0" eaLnBrk="1" latinLnBrk="0" hangingPunct="1">
+        <a:lnSpc>
+          <a:spcPct val="90000"/>
+        </a:lnSpc>
+        <a:spcBef>
+          <a:spcPct val="0"/>
+        </a:spcBef>
+        <a:buNone/>
+        <a:defRPr sz="4200" b="0" kern="1200" cap="all" baseline="0">
+          <a:blipFill>
+            <a:blip r:embed="rId15">
+              <a:extLst>
+                <a:ext uri="{28A0092B-C50C-407E-A947-70E740481C1C}">
+                  <a14:useLocalDpi xmlns:a14="http://schemas.microsoft.com/office/drawing/2010/main" val="0"/>
+                </a:ext>
+              </a:extLst>
+            </a:blip>
+            <a:tile tx="6350" ty="-127000" sx="65000" sy="64000" flip="none" algn="tl"/>
+          </a:blipFill>
+          <a:latin typeface="+mj-lt"/>
+          <a:ea typeface="+mj-ea"/>
+          <a:cs typeface="+mj-cs"/>
+        </a:defRPr>
+      </a:lvl1pPr>
+    </p:titleStyle>
+    <p:bodyStyle>
+      <a:lvl1pPr marL="182880" indent="-182880" algn="l" defTabSz="914400" rtl="0" eaLnBrk="1" latinLnBrk="0" hangingPunct="1">
+        <a:lnSpc>
+          <a:spcPct val="90000"/>
+        </a:lnSpc>
+        <a:spcBef>
+          <a:spcPts val="1200"/>
+        </a:spcBef>
+        <a:buClr>
+          <a:schemeClr val="accent1">
+            <a:lumMod val="75000"/>
+          </a:schemeClr>
+        </a:buClr>
+        <a:buSzPct val="85000"/>
+        <a:buFont typeface="Wingdings" pitchFamily="2" charset="2"/>
+        <a:buChar char="§"/>
+        <a:defRPr sz="2000" kern="1200">
+          <a:solidFill>
+            <a:schemeClr val="tx1"/>
+          </a:solidFill>
+          <a:latin typeface="+mn-lt"/>
+          <a:ea typeface="+mn-ea"/>
+          <a:cs typeface="+mn-cs"/>
+        </a:defRPr>
+      </a:lvl1pPr>
+      <a:lvl2pPr marL="457200" indent="-182880" algn="l" defTabSz="914400" rtl="0" eaLnBrk="1" latinLnBrk="0" hangingPunct="1">
+        <a:lnSpc>
+          <a:spcPct val="90000"/>
+        </a:lnSpc>
+        <a:spcBef>
+          <a:spcPts val="400"/>
+        </a:spcBef>
+        <a:spcAft>
+          <a:spcPts val="200"/>
+        </a:spcAft>
+        <a:buClr>
+          <a:schemeClr val="accent1">
+            <a:lumMod val="75000"/>
+          </a:schemeClr>
+        </a:buClr>
+        <a:buSzPct val="85000"/>
+        <a:buFont typeface="Wingdings" pitchFamily="2" charset="2"/>
+        <a:buChar char="§"/>
+        <a:defRPr sz="1800" kern="1200">
+          <a:solidFill>
+            <a:schemeClr val="tx1"/>
+          </a:solidFill>
+          <a:latin typeface="+mn-lt"/>
+          <a:ea typeface="+mn-ea"/>
+          <a:cs typeface="+mn-cs"/>
+        </a:defRPr>
+      </a:lvl2pPr>
+      <a:lvl3pPr marL="731520" indent="-182880" algn="l" defTabSz="914400" rtl="0" eaLnBrk="1" latinLnBrk="0" hangingPunct="1">
+        <a:lnSpc>
+          <a:spcPct val="90000"/>
+        </a:lnSpc>
+        <a:spcBef>
+          <a:spcPts val="400"/>
+        </a:spcBef>
+        <a:spcAft>
+          <a:spcPts val="200"/>
+        </a:spcAft>
+        <a:buClr>
+          <a:schemeClr val="accent1">
+            <a:lumMod val="75000"/>
+          </a:schemeClr>
+        </a:buClr>
+        <a:buSzPct val="85000"/>
+        <a:buFont typeface="Wingdings" pitchFamily="2" charset="2"/>
+        <a:buChar char="§"/>
+        <a:defRPr sz="1600" kern="1200">
+          <a:solidFill>
+            <a:schemeClr val="tx1"/>
+          </a:solidFill>
+          <a:latin typeface="+mn-lt"/>
+          <a:ea typeface="+mn-ea"/>
+          <a:cs typeface="+mn-cs"/>
+        </a:defRPr>
+      </a:lvl3pPr>
+      <a:lvl4pPr marL="1005840" indent="-182880" algn="l" defTabSz="914400" rtl="0" eaLnBrk="1" latinLnBrk="0" hangingPunct="1">
+        <a:lnSpc>
+          <a:spcPct val="90000"/>
+        </a:lnSpc>
+        <a:spcBef>
+          <a:spcPts val="400"/>
+        </a:spcBef>
+        <a:spcAft>
+          <a:spcPts val="200"/>
+        </a:spcAft>
+        <a:buClr>
+          <a:schemeClr val="accent1">
+            <a:lumMod val="75000"/>
+          </a:schemeClr>
+        </a:buClr>
+        <a:buSzPct val="85000"/>
+        <a:buFont typeface="Wingdings" pitchFamily="2" charset="2"/>
+        <a:buChar char="§"/>
+        <a:defRPr sz="1600" kern="1200">
+          <a:solidFill>
+            <a:schemeClr val="tx1"/>
+          </a:solidFill>
+          <a:latin typeface="+mn-lt"/>
+          <a:ea typeface="+mn-ea"/>
+          <a:cs typeface="+mn-cs"/>
+        </a:defRPr>
+      </a:lvl4pPr>
+      <a:lvl5pPr marL="1280160" indent="-182880" algn="l" defTabSz="914400" rtl="0" eaLnBrk="1" latinLnBrk="0" hangingPunct="1">
+        <a:lnSpc>
+          <a:spcPct val="90000"/>
+        </a:lnSpc>
+        <a:spcBef>
+          <a:spcPts val="400"/>
+        </a:spcBef>
+        <a:spcAft>
+          <a:spcPts val="200"/>
+        </a:spcAft>
+        <a:buClr>
+          <a:schemeClr val="accent1">
+            <a:lumMod val="75000"/>
+          </a:schemeClr>
+        </a:buClr>
+        <a:buSzPct val="85000"/>
+        <a:buFont typeface="Wingdings" pitchFamily="2" charset="2"/>
+        <a:buChar char="§"/>
+        <a:defRPr sz="1600" kern="1200">
+          <a:solidFill>
+            <a:schemeClr val="tx1"/>
+          </a:solidFill>
+          <a:latin typeface="+mn-lt"/>
+          <a:ea typeface="+mn-ea"/>
+          <a:cs typeface="+mn-cs"/>
+        </a:defRPr>
+      </a:lvl5pPr>
+      <a:lvl6pPr marL="1600000" indent="-228600" algn="l" defTabSz="914400" rtl="0" eaLnBrk="1" latinLnBrk="0" hangingPunct="1">
+        <a:lnSpc>
+          <a:spcPct val="90000"/>
+        </a:lnSpc>
+        <a:spcBef>
+          <a:spcPts val="400"/>
+        </a:spcBef>
+        <a:spcAft>
+          <a:spcPts val="200"/>
+        </a:spcAft>
+        <a:buClr>
+          <a:schemeClr val="accent1">
+            <a:lumMod val="75000"/>
+          </a:schemeClr>
+        </a:buClr>
+        <a:buSzPct val="85000"/>
+        <a:buFont typeface="Wingdings" pitchFamily="2" charset="2"/>
+        <a:buChar char="§"/>
+        <a:defRPr sz="1600" kern="1200">
+          <a:solidFill>
+            <a:schemeClr val="tx1"/>
+          </a:solidFill>
+          <a:latin typeface="+mn-lt"/>
+          <a:ea typeface="+mn-ea"/>
+          <a:cs typeface="+mn-cs"/>
+        </a:defRPr>
+      </a:lvl6pPr>
+      <a:lvl7pPr marL="1900000" indent="-228600" algn="l" defTabSz="914400" rtl="0" eaLnBrk="1" latinLnBrk="0" hangingPunct="1">
+        <a:lnSpc>
+          <a:spcPct val="90000"/>
+        </a:lnSpc>
+        <a:spcBef>
+          <a:spcPts val="400"/>
+        </a:spcBef>
+        <a:spcAft>
+          <a:spcPts val="200"/>
+        </a:spcAft>
+        <a:buClr>
+          <a:schemeClr val="accent1">
+            <a:lumMod val="75000"/>
+          </a:schemeClr>
+        </a:buClr>
+        <a:buSzPct val="85000"/>
+        <a:buFont typeface="Wingdings" pitchFamily="2" charset="2"/>
+        <a:buChar char="§"/>
+        <a:defRPr sz="1600" kern="1200">
+          <a:solidFill>
+            <a:schemeClr val="tx1"/>
+          </a:solidFill>
+          <a:latin typeface="+mn-lt"/>
+          <a:ea typeface="+mn-ea"/>
+          <a:cs typeface="+mn-cs"/>
+        </a:defRPr>
+      </a:lvl7pPr>
+      <a:lvl8pPr marL="2200000" indent="-228600" algn="l" defTabSz="914400" rtl="0" eaLnBrk="1" latinLnBrk="0" hangingPunct="1">
+        <a:lnSpc>
+          <a:spcPct val="90000"/>
+        </a:lnSpc>
+        <a:spcBef>
+          <a:spcPts val="400"/>
+        </a:spcBef>
+        <a:spcAft>
+          <a:spcPts val="200"/>
+        </a:spcAft>
+        <a:buClr>
+          <a:schemeClr val="accent1">
+            <a:lumMod val="75000"/>
+          </a:schemeClr>
+        </a:buClr>
+        <a:buSzPct val="85000"/>
+        <a:buFont typeface="Wingdings" pitchFamily="2" charset="2"/>
+        <a:buChar char="§"/>
+        <a:defRPr sz="1600" kern="1200">
+          <a:solidFill>
+            <a:schemeClr val="tx1"/>
+          </a:solidFill>
+          <a:latin typeface="+mn-lt"/>
+          <a:ea typeface="+mn-ea"/>
+          <a:cs typeface="+mn-cs"/>
+        </a:defRPr>
+      </a:lvl8pPr>
+      <a:lvl9pPr marL="2500000" indent="-228600" algn="l" defTabSz="914400" rtl="0" eaLnBrk="1" latinLnBrk="0" hangingPunct="1">
+        <a:lnSpc>
+          <a:spcPct val="90000"/>
+        </a:lnSpc>
+        <a:spcBef>
+          <a:spcPts val="400"/>
+        </a:spcBef>
+        <a:spcAft>
+          <a:spcPts val="200"/>
+        </a:spcAft>
+        <a:buClr>
+          <a:schemeClr val="accent1">
+            <a:lumMod val="75000"/>
+          </a:schemeClr>
+        </a:buClr>
+        <a:buSzPct val="85000"/>
+        <a:buFont typeface="Wingdings" pitchFamily="2" charset="2"/>
+        <a:buChar char="§"/>
+        <a:defRPr sz="1600" kern="1200">
+          <a:solidFill>
+            <a:schemeClr val="tx1"/>
+          </a:solidFill>
+          <a:latin typeface="+mn-lt"/>
+          <a:ea typeface="+mn-ea"/>
+          <a:cs typeface="+mn-cs"/>
+        </a:defRPr>
+      </a:lvl9pPr>
+    </p:bodyStyle>
+    <p:otherStyle>
+      <a:defPPr>
+        <a:defRPr lang="en-US"/>
+      </a:defPPr>
+      <a:lvl1pPr marL="0" algn="l" defTabSz="914400" rtl="0" eaLnBrk="1" latinLnBrk="0" hangingPunct="1">
+        <a:defRPr sz="1800" kern="1200">
+          <a:solidFill>
+            <a:schemeClr val="tx1"/>
+          </a:solidFill>
+          <a:latin typeface="+mn-lt"/>
+          <a:ea typeface="+mn-ea"/>
+          <a:cs typeface="+mn-cs"/>
+        </a:defRPr>
+      </a:lvl1pPr>
+      <a:lvl2pPr marL="457200" algn="l" defTabSz="914400" rtl="0" eaLnBrk="1" latinLnBrk="0" hangingPunct="1">
+        <a:defRPr sz="1800" kern="1200">
+          <a:solidFill>
+            <a:schemeClr val="tx1"/>
+          </a:solidFill>
+          <a:latin typeface="+mn-lt"/>
+          <a:ea typeface="+mn-ea"/>
+          <a:cs typeface="+mn-cs"/>
+        </a:defRPr>
+      </a:lvl2pPr>
+      <a:lvl3pPr marL="914400" algn="l" defTabSz="914400" rtl="0" eaLnBrk="1" latinLnBrk="0" hangingPunct="1">
+        <a:defRPr sz="1800" kern="1200">
+          <a:solidFill>
+            <a:schemeClr val="tx1"/>
+          </a:solidFill>
+          <a:latin typeface="+mn-lt"/>
+          <a:ea typeface="+mn-ea"/>
+          <a:cs typeface="+mn-cs"/>
+        </a:defRPr>
+      </a:lvl3pPr>
+      <a:lvl4pPr marL="1371600" algn="l" defTabSz="914400" rtl="0" eaLnBrk="1" latinLnBrk="0" hangingPunct="1">
+        <a:defRPr sz="1800" kern="1200">
+          <a:solidFill>
+            <a:schemeClr val="tx1"/>
+          </a:solidFill>
+          <a:latin typeface="+mn-lt"/>
+          <a:ea typeface="+mn-ea"/>
+          <a:cs typeface="+mn-cs"/>
+        </a:defRPr>
+      </a:lvl4pPr>
+      <a:lvl5pPr marL="1828800" algn="l" defTabSz="914400" rtl="0" eaLnBrk="1" latinLnBrk="0" hangingPunct="1">
+        <a:defRPr sz="1800" kern="1200">
+          <a:solidFill>
+            <a:schemeClr val="tx1"/>
+          </a:solidFill>
+          <a:latin typeface="+mn-lt"/>
+          <a:ea typeface="+mn-ea"/>
+          <a:cs typeface="+mn-cs"/>
+        </a:defRPr>
+      </a:lvl5pPr>
+      <a:lvl6pPr marL="2286000" algn="l" defTabSz="914400" rtl="0" eaLnBrk="1" latinLnBrk="0" hangingPunct="1">
+        <a:defRPr sz="1800" kern="1200">
+          <a:solidFill>
+            <a:schemeClr val="tx1"/>
+          </a:solidFill>
+          <a:latin typeface="+mn-lt"/>
+          <a:ea typeface="+mn-ea"/>
+          <a:cs typeface="+mn-cs"/>
+        </a:defRPr>
+      </a:lvl6pPr>
+      <a:lvl7pPr marL="2743200" algn="l" defTabSz="914400" rtl="0" eaLnBrk="1" latinLnBrk="0" hangingPunct="1">
+        <a:defRPr sz="1800" kern="1200">
+          <a:solidFill>
+            <a:schemeClr val="tx1"/>
+          </a:solidFill>
+          <a:latin typeface="+mn-lt"/>
+          <a:ea typeface="+mn-ea"/>
+          <a:cs typeface="+mn-cs"/>
+        </a:defRPr>
+      </a:lvl7pPr>
+      <a:lvl8pPr marL="3200400" algn="l" defTabSz="914400" rtl="0" eaLnBrk="1" latinLnBrk="0" hangingPunct="1">
+        <a:defRPr sz="1800" kern="1200">
+          <a:solidFill>
+            <a:schemeClr val="tx1"/>
+          </a:solidFill>
+          <a:latin typeface="+mn-lt"/>
+          <a:ea typeface="+mn-ea"/>
+          <a:cs typeface="+mn-cs"/>
+        </a:defRPr>
+      </a:lvl8pPr>
+      <a:lvl9pPr marL="3657600" algn="l" defTabSz="914400" rtl="0" eaLnBrk="1" latinLnBrk="0" hangingPunct="1">
+        <a:defRPr sz="1800" kern="1200">
+          <a:solidFill>
+            <a:schemeClr val="tx1"/>
+          </a:solidFill>
+          <a:latin typeface="+mn-lt"/>
+          <a:ea typeface="+mn-ea"/>
+          <a:cs typeface="+mn-cs"/>
+        </a:defRPr>
+      </a:lvl9pPr>
+    </p:otherStyle>
+  </p:txStyles>
+</p:sldMaster>
+</file>
+
 <file path=ppt/slides/slide1.xml><?xml version="1.0" encoding="utf-8"?>
 <p:sld xmlns:a="http://schemas.openxmlformats.org/drawingml/2006/main" xmlns:r="http://schemas.openxmlformats.org/officeDocument/2006/relationships" xmlns:p="http://schemas.openxmlformats.org/presentationml/2006/main">
   <p:cSld>
@@ -5165,7 +9343,7 @@
         <p:spPr>
           <a:xfrm>
             <a:off x="457200" y="274638"/>
-            <a:ext cx="8229600" cy="2974400"/>
+            <a:ext cx="8229600" cy="1519438"/>
           </a:xfrm>
         </p:spPr>
         <p:txBody>
@@ -5194,6 +9372,65 @@
           </a:p>
         </p:txBody>
       </p:sp>
+      <p:pic>
+        <p:nvPicPr>
+          <p:cNvPr id="1026" name="Picture 2" descr="Walure Capital | Our Courses"/>
+          <p:cNvPicPr>
+            <a:picLocks noChangeAspect="1" noChangeArrowheads="1"/>
+          </p:cNvPicPr>
+          <p:nvPr/>
+        </p:nvPicPr>
+        <p:blipFill>
+          <a:blip r:embed="rId2">
+            <a:lum bright="70000" contrast="-70000"/>
+            <a:extLst>
+              <a:ext uri="{BEBA8EAE-BF5A-486C-A8C5-ECC9F3942E4B}">
+                <a14:imgProps xmlns:a14="http://schemas.microsoft.com/office/drawing/2010/main">
+                  <a14:imgLayer r:embed="rId3">
+                    <a14:imgEffect>
+                      <a14:saturation sat="33000"/>
+                    </a14:imgEffect>
+                  </a14:imgLayer>
+                </a14:imgProps>
+              </a:ext>
+              <a:ext uri="{28A0092B-C50C-407E-A947-70E740481C1C}">
+                <a14:useLocalDpi xmlns:a14="http://schemas.microsoft.com/office/drawing/2010/main" val="0"/>
+              </a:ext>
+            </a:extLst>
+          </a:blip>
+          <a:srcRect/>
+          <a:stretch>
+            <a:fillRect/>
+          </a:stretch>
+        </p:blipFill>
+        <p:spPr bwMode="auto">
+          <a:xfrm>
+            <a:off x="1056195" y="3055129"/>
+            <a:ext cx="7031609" cy="1725125"/>
+          </a:xfrm>
+          <a:prstGeom prst="rect">
+            <a:avLst/>
+          </a:prstGeom>
+          <a:noFill/>
+          <a:ln>
+            <a:solidFill>
+              <a:schemeClr val="bg1"/>
+            </a:solidFill>
+          </a:ln>
+          <a:effectLst>
+            <a:reflection stA="70000" endPos="93000" dist="50800" dir="5400000" sy="-100000" algn="bl" rotWithShape="0"/>
+          </a:effectLst>
+          <a:extLst>
+            <a:ext uri="{909E8E84-426E-40DD-AFC4-6F175D3DCCD1}">
+              <a14:hiddenFill xmlns:a14="http://schemas.microsoft.com/office/drawing/2010/main">
+                <a:solidFill>
+                  <a:srgbClr val="FFFFFF"/>
+                </a:solidFill>
+              </a14:hiddenFill>
+            </a:ext>
+          </a:extLst>
+        </p:spPr>
+      </p:pic>
       <p:sp>
         <p:nvSpPr>
           <p:cNvPr id="3" name="Content Placeholder 2"/>
@@ -5206,13 +9443,13 @@
         </p:nvSpPr>
         <p:spPr>
           <a:xfrm>
-            <a:off x="457200" y="3073940"/>
-            <a:ext cx="8229600" cy="3052223"/>
+            <a:off x="457200" y="2164466"/>
+            <a:ext cx="8229600" cy="3961697"/>
           </a:xfrm>
         </p:spPr>
         <p:txBody>
           <a:bodyPr>
-            <a:normAutofit lnSpcReduction="10000"/>
+            <a:normAutofit/>
           </a:bodyPr>
           <a:lstStyle/>
           <a:p>
@@ -5247,77 +9484,57 @@
                   </a:schemeClr>
                 </a:solidFill>
               </a:rPr>
-              <a:t> </a:t>
-            </a:r>
-            <a:r>
-              <a:rPr i="1" dirty="0" smtClean="0">
+              <a:t> Actions </a:t>
+            </a:r>
+            <a:r>
+              <a:rPr lang="en-US" i="1" dirty="0" smtClean="0">
                 <a:solidFill>
                   <a:schemeClr val="accent3">
                     <a:lumMod val="75000"/>
                   </a:schemeClr>
                 </a:solidFill>
               </a:rPr>
-              <a:t>Actions </a:t>
-            </a:r>
-            <a:r>
-              <a:rPr lang="en-US" i="1" dirty="0" smtClean="0">
+              <a:t>• </a:t>
+            </a:r>
+            <a:r>
+              <a:rPr lang="en-US" i="1" dirty="0" err="1" smtClean="0">
                 <a:solidFill>
                   <a:schemeClr val="accent3">
                     <a:lumMod val="75000"/>
                   </a:schemeClr>
                 </a:solidFill>
               </a:rPr>
-              <a:t>• </a:t>
-            </a:r>
-            <a:r>
-              <a:rPr lang="en-US" i="1" dirty="0" err="1" smtClean="0">
+              <a:t>DockerHub</a:t>
+            </a:r>
+            <a:r>
+              <a:rPr lang="en-US" i="1" dirty="0" smtClean="0">
                 <a:solidFill>
                   <a:schemeClr val="accent3">
                     <a:lumMod val="75000"/>
                   </a:schemeClr>
                 </a:solidFill>
               </a:rPr>
-              <a:t>DockerHub</a:t>
-            </a:r>
-            <a:r>
-              <a:rPr lang="en-US" i="1" dirty="0" smtClean="0">
+              <a:t>/ACR •</a:t>
+            </a:r>
+            <a:r>
+              <a:rPr lang="en-US" i="1" dirty="0">
                 <a:solidFill>
                   <a:schemeClr val="accent3">
                     <a:lumMod val="75000"/>
                   </a:schemeClr>
                 </a:solidFill>
               </a:rPr>
-              <a:t>/ACR •</a:t>
-            </a:r>
-            <a:r>
-              <a:rPr lang="en-US" i="1" dirty="0">
+              <a:t> </a:t>
+            </a:r>
+            <a:r>
+              <a:rPr i="1" dirty="0" smtClean="0">
                 <a:solidFill>
                   <a:schemeClr val="accent3">
                     <a:lumMod val="75000"/>
                   </a:schemeClr>
                 </a:solidFill>
               </a:rPr>
-              <a:t> </a:t>
-            </a:r>
-            <a:r>
-              <a:rPr i="1" dirty="0" smtClean="0">
-                <a:solidFill>
-                  <a:schemeClr val="accent3">
-                    <a:lumMod val="75000"/>
-                  </a:schemeClr>
-                </a:solidFill>
-              </a:rPr>
-              <a:t>AKS </a:t>
-            </a:r>
-            <a:r>
-              <a:rPr i="1" dirty="0" smtClean="0">
-                <a:solidFill>
-                  <a:schemeClr val="accent3">
-                    <a:lumMod val="75000"/>
-                  </a:schemeClr>
-                </a:solidFill>
-              </a:rPr>
-              <a:t>• Argo CD • Prometheus • </a:t>
+              <a:t>AKS • Argo CD • Prometheus • </a:t>
             </a:r>
             <a:r>
               <a:rPr i="1" dirty="0" err="1" smtClean="0">
@@ -5347,37 +9564,110 @@
             <a:pPr marL="0" indent="0" algn="ctr">
               <a:buNone/>
             </a:pPr>
-            <a:r>
-              <a:rPr dirty="0" smtClean="0"/>
-              <a:t>by:</a:t>
-            </a:r>
             <a:endParaRPr lang="en-US" dirty="0" smtClean="0"/>
           </a:p>
           <a:p>
             <a:pPr marL="0" indent="0" algn="ctr">
               <a:buNone/>
             </a:pPr>
+            <a:endParaRPr lang="en-US" dirty="0" smtClean="0"/>
+          </a:p>
+          <a:p>
+            <a:pPr marL="0" indent="0" algn="ctr">
+              <a:buNone/>
+            </a:pPr>
+            <a:r>
+              <a:rPr lang="en-US" dirty="0" smtClean="0"/>
+              <a:t> at</a:t>
+            </a:r>
+            <a:r>
+              <a:rPr lang="en-US" dirty="0" smtClean="0"/>
+              <a:t> </a:t>
+            </a:r>
+            <a:r>
+              <a:rPr lang="en-US" b="1" dirty="0" smtClean="0"/>
+              <a:t>WALURE ACADEMY</a:t>
+            </a:r>
+            <a:endParaRPr lang="en-US" dirty="0" smtClean="0"/>
+          </a:p>
+          <a:p>
+            <a:pPr marL="0" indent="0" algn="ctr">
+              <a:buNone/>
+            </a:pPr>
+            <a:r>
+              <a:rPr dirty="0" smtClean="0"/>
+              <a:t>by:</a:t>
+            </a:r>
+            <a:r>
+              <a:rPr lang="en-US" dirty="0"/>
+              <a:t> </a:t>
+            </a:r>
             <a:r>
               <a:rPr lang="en-US" sz="4800" b="1" dirty="0" smtClean="0"/>
-              <a:t>AJIBADE APATA</a:t>
+              <a:t>AJIBADE </a:t>
+            </a:r>
+            <a:r>
+              <a:rPr lang="en-US" sz="4800" b="1" dirty="0" smtClean="0"/>
+              <a:t>APATA</a:t>
             </a:r>
             <a:endParaRPr lang="en-US" sz="4800" b="1" dirty="0"/>
           </a:p>
         </p:txBody>
       </p:sp>
+      <p:pic>
+        <p:nvPicPr>
+          <p:cNvPr id="1030" name="Picture 6" descr="Walure Capital"/>
+          <p:cNvPicPr>
+            <a:picLocks noChangeAspect="1" noChangeArrowheads="1"/>
+          </p:cNvPicPr>
+          <p:nvPr/>
+        </p:nvPicPr>
+        <p:blipFill>
+          <a:blip r:embed="rId4">
+            <a:extLst>
+              <a:ext uri="{28A0092B-C50C-407E-A947-70E740481C1C}">
+                <a14:useLocalDpi xmlns:a14="http://schemas.microsoft.com/office/drawing/2010/main" val="0"/>
+              </a:ext>
+            </a:extLst>
+          </a:blip>
+          <a:srcRect/>
+          <a:stretch>
+            <a:fillRect/>
+          </a:stretch>
+        </p:blipFill>
+        <p:spPr bwMode="auto">
+          <a:xfrm>
+            <a:off x="7932486" y="5854700"/>
+            <a:ext cx="1307893" cy="1174826"/>
+          </a:xfrm>
+          <a:prstGeom prst="rect">
+            <a:avLst/>
+          </a:prstGeom>
+          <a:noFill/>
+          <a:extLst>
+            <a:ext uri="{909E8E84-426E-40DD-AFC4-6F175D3DCCD1}">
+              <a14:hiddenFill xmlns:a14="http://schemas.microsoft.com/office/drawing/2010/main">
+                <a:solidFill>
+                  <a:srgbClr val="FFFFFF"/>
+                </a:solidFill>
+              </a14:hiddenFill>
+            </a:ext>
+          </a:extLst>
+        </p:spPr>
+      </p:pic>
     </p:spTree>
   </p:cSld>
   <p:clrMapOvr>
     <a:masterClrMapping/>
   </p:clrMapOvr>
-  <mc:AlternateContent xmlns:mc="http://schemas.openxmlformats.org/markup-compatibility/2006" xmlns:p14="http://schemas.microsoft.com/office/powerpoint/2010/main">
-    <mc:Choice Requires="p14">
-      <p:transition spd="slow" advClick="0">
+  <mc:AlternateContent xmlns:mc="http://schemas.openxmlformats.org/markup-compatibility/2006">
+    <mc:Choice xmlns:p14="http://schemas.microsoft.com/office/powerpoint/2010/main" Requires="p14">
+      <p:transition spd="slow">
         <p14:reveal/>
       </p:transition>
     </mc:Choice>
-    <mc:Fallback xmlns="">
-      <p:transition spd="slow" advClick="0">
+    <mc:Fallback>
+      <p:transition spd="slow">
         <p:fade/>
       </p:transition>
     </mc:Fallback>
@@ -6121,13 +10411,13 @@
   <p:clrMapOvr>
     <a:masterClrMapping/>
   </p:clrMapOvr>
-  <mc:AlternateContent xmlns:mc="http://schemas.openxmlformats.org/markup-compatibility/2006">
-    <mc:Choice xmlns:p14="http://schemas.microsoft.com/office/powerpoint/2010/main" Requires="p14">
+  <mc:AlternateContent xmlns:mc="http://schemas.openxmlformats.org/markup-compatibility/2006" xmlns:p14="http://schemas.microsoft.com/office/powerpoint/2010/main">
+    <mc:Choice Requires="p14">
       <p:transition spd="slow" advClick="0">
         <p14:reveal/>
       </p:transition>
     </mc:Choice>
-    <mc:Fallback>
+    <mc:Fallback xmlns="">
       <p:transition spd="slow" advClick="0">
         <p:fade/>
       </p:transition>
@@ -6248,13 +10538,13 @@
   <p:clrMapOvr>
     <a:masterClrMapping/>
   </p:clrMapOvr>
-  <mc:AlternateContent xmlns:mc="http://schemas.openxmlformats.org/markup-compatibility/2006">
-    <mc:Choice xmlns:p14="http://schemas.microsoft.com/office/powerpoint/2010/main" Requires="p14">
+  <mc:AlternateContent xmlns:mc="http://schemas.openxmlformats.org/markup-compatibility/2006" xmlns:p14="http://schemas.microsoft.com/office/powerpoint/2010/main">
+    <mc:Choice Requires="p14">
       <p:transition spd="slow" advClick="0">
         <p14:reveal/>
       </p:transition>
     </mc:Choice>
-    <mc:Fallback>
+    <mc:Fallback xmlns="">
       <p:transition spd="slow" advClick="0">
         <p:fade/>
       </p:transition>
@@ -8082,45 +12372,28 @@
                   </a:schemeClr>
                 </a:solidFill>
               </a:rPr>
-              <a:t>(ACR</a:t>
-            </a:r>
-            <a:r>
-              <a:rPr lang="en-US" dirty="0" smtClean="0">
+              <a:t>(ACR)/</a:t>
+            </a:r>
+            <a:r>
+              <a:rPr lang="en-US" dirty="0" err="1" smtClean="0">
                 <a:solidFill>
                   <a:schemeClr val="accent3">
                     <a:lumMod val="75000"/>
                   </a:schemeClr>
                 </a:solidFill>
               </a:rPr>
-              <a:t>)/</a:t>
-            </a:r>
-            <a:r>
-              <a:rPr lang="en-US" dirty="0" err="1" smtClean="0">
+              <a:t>DockerHub</a:t>
+            </a:r>
+            <a:r>
+              <a:rPr lang="en-US" dirty="0" smtClean="0">
                 <a:solidFill>
                   <a:schemeClr val="accent3">
                     <a:lumMod val="75000"/>
                   </a:schemeClr>
                 </a:solidFill>
               </a:rPr>
-              <a:t>DockerHub</a:t>
-            </a:r>
-            <a:r>
-              <a:rPr lang="en-US" dirty="0" smtClean="0">
-                <a:solidFill>
-                  <a:schemeClr val="accent3">
-                    <a:lumMod val="75000"/>
-                  </a:schemeClr>
-                </a:solidFill>
-              </a:rPr>
               <a:t>    </a:t>
             </a:r>
-            <a:endParaRPr lang="en-US" dirty="0" smtClean="0">
-              <a:solidFill>
-                <a:schemeClr val="accent3">
-                  <a:lumMod val="75000"/>
-                </a:schemeClr>
-              </a:solidFill>
-            </a:endParaRPr>
           </a:p>
           <a:p>
             <a:pPr marL="285750" indent="-285750">
@@ -9070,14 +13343,7 @@
                 <a:latin typeface="Times New Roman" panose="02020603050405020304" pitchFamily="18" charset="0"/>
                 <a:cs typeface="Times New Roman" panose="02020603050405020304" pitchFamily="18" charset="0"/>
               </a:rPr>
-              <a:t> </a:t>
-            </a:r>
-            <a:r>
-              <a:rPr lang="en-US" sz="2000" dirty="0" smtClean="0">
-                <a:latin typeface="Times New Roman" panose="02020603050405020304" pitchFamily="18" charset="0"/>
-                <a:cs typeface="Times New Roman" panose="02020603050405020304" pitchFamily="18" charset="0"/>
-              </a:rPr>
-              <a:t>probes, </a:t>
+              <a:t> probes, </a:t>
             </a:r>
             <a:r>
               <a:rPr sz="2000" i="1" dirty="0" smtClean="0">
@@ -9343,13 +13609,13 @@
   <p:clrMapOvr>
     <a:masterClrMapping/>
   </p:clrMapOvr>
-  <mc:AlternateContent xmlns:mc="http://schemas.openxmlformats.org/markup-compatibility/2006">
-    <mc:Choice xmlns:p14="http://schemas.microsoft.com/office/powerpoint/2010/main" Requires="p14">
+  <mc:AlternateContent xmlns:mc="http://schemas.openxmlformats.org/markup-compatibility/2006" xmlns:p14="http://schemas.microsoft.com/office/powerpoint/2010/main">
+    <mc:Choice Requires="p14">
       <p:transition spd="slow" advClick="0">
         <p14:reveal/>
       </p:transition>
     </mc:Choice>
-    <mc:Fallback>
+    <mc:Fallback xmlns="">
       <p:transition spd="slow" advClick="0">
         <p:fade/>
       </p:transition>
@@ -9878,10 +14144,6 @@
               </a:rPr>
               <a:t>)</a:t>
             </a:r>
-            <a:endParaRPr lang="en-US" sz="2000" dirty="0" smtClean="0">
-              <a:latin typeface="Times New Roman" panose="02020603050405020304" pitchFamily="18" charset="0"/>
-              <a:cs typeface="Times New Roman" panose="02020603050405020304" pitchFamily="18" charset="0"/>
-            </a:endParaRPr>
           </a:p>
           <a:p>
             <a:pPr marL="0" indent="0" algn="just">
@@ -10492,6 +14754,235 @@
 </file>
 
 <file path=ppt/theme/theme2.xml><?xml version="1.0" encoding="utf-8"?>
+<a:theme xmlns:a="http://schemas.openxmlformats.org/drawingml/2006/main" name="Wood Type">
+  <a:themeElements>
+    <a:clrScheme name="Wood Type">
+      <a:dk1>
+        <a:sysClr val="windowText" lastClr="000000"/>
+      </a:dk1>
+      <a:lt1>
+        <a:sysClr val="window" lastClr="FFFFFF"/>
+      </a:lt1>
+      <a:dk2>
+        <a:srgbClr val="696464"/>
+      </a:dk2>
+      <a:lt2>
+        <a:srgbClr val="E9E5DC"/>
+      </a:lt2>
+      <a:accent1>
+        <a:srgbClr val="D34817"/>
+      </a:accent1>
+      <a:accent2>
+        <a:srgbClr val="9B2D1F"/>
+      </a:accent2>
+      <a:accent3>
+        <a:srgbClr val="A28E6A"/>
+      </a:accent3>
+      <a:accent4>
+        <a:srgbClr val="956251"/>
+      </a:accent4>
+      <a:accent5>
+        <a:srgbClr val="918485"/>
+      </a:accent5>
+      <a:accent6>
+        <a:srgbClr val="855D5D"/>
+      </a:accent6>
+      <a:hlink>
+        <a:srgbClr val="CC9900"/>
+      </a:hlink>
+      <a:folHlink>
+        <a:srgbClr val="96A9A9"/>
+      </a:folHlink>
+    </a:clrScheme>
+    <a:fontScheme name="Wood Type">
+      <a:majorFont>
+        <a:latin typeface="Rockwell Condensed" panose="02060603050405020104"/>
+        <a:ea typeface=""/>
+        <a:cs typeface=""/>
+        <a:font script="Grek" typeface="Cambria"/>
+        <a:font script="Cyrl" typeface="Cambria"/>
+        <a:font script="Jpan" typeface="HG明朝B"/>
+        <a:font script="Hang" typeface="바탕"/>
+        <a:font script="Hans" typeface="方正姚体"/>
+        <a:font script="Hant" typeface="微軟正黑體"/>
+        <a:font script="Arab" typeface="Times New Roman"/>
+        <a:font script="Hebr" typeface="David"/>
+        <a:font script="Thai" typeface="JasmineUPC"/>
+        <a:font script="Ethi" typeface="Nyala"/>
+        <a:font script="Beng" typeface="Vrinda"/>
+        <a:font script="Gujr" typeface="Shruti"/>
+        <a:font script="Khmr" typeface="MoolBoran"/>
+        <a:font script="Knda" typeface="Tunga"/>
+        <a:font script="Guru" typeface="Raavi"/>
+        <a:font script="Cans" typeface="Euphemia"/>
+        <a:font script="Cher" typeface="Plantagenet Cherokee"/>
+        <a:font script="Yiii" typeface="Microsoft Yi Baiti"/>
+        <a:font script="Tibt" typeface="Microsoft Himalaya"/>
+        <a:font script="Thaa" typeface="MV Boli"/>
+        <a:font script="Deva" typeface="Mangal"/>
+        <a:font script="Telu" typeface="Gautami"/>
+        <a:font script="Taml" typeface="Latha"/>
+        <a:font script="Syrc" typeface="Estrangelo Edessa"/>
+        <a:font script="Orya" typeface="Kalinga"/>
+        <a:font script="Mlym" typeface="Kartika"/>
+        <a:font script="Laoo" typeface="DokChampa"/>
+        <a:font script="Sinh" typeface="Iskoola Pota"/>
+        <a:font script="Mong" typeface="Mongolian Baiti"/>
+        <a:font script="Viet" typeface="Arial"/>
+        <a:font script="Uigh" typeface="Microsoft Uighur"/>
+      </a:majorFont>
+      <a:minorFont>
+        <a:latin typeface="Rockwell" panose="02060603020205020403"/>
+        <a:ea typeface=""/>
+        <a:cs typeface=""/>
+        <a:font script="Grek" typeface="Cambria"/>
+        <a:font script="Cyrl" typeface="Cambria"/>
+        <a:font script="Jpan" typeface="HG明朝B"/>
+        <a:font script="Hang" typeface="바탕"/>
+        <a:font script="Hans" typeface="方正姚体"/>
+        <a:font script="Hant" typeface="標楷體"/>
+        <a:font script="Arab" typeface="Times New Roman"/>
+        <a:font script="Hebr" typeface="David"/>
+        <a:font script="Thai" typeface="JasmineUPC"/>
+        <a:font script="Ethi" typeface="Nyala"/>
+        <a:font script="Beng" typeface="Vrinda"/>
+        <a:font script="Gujr" typeface="Shruti"/>
+        <a:font script="Khmr" typeface="MoolBoran"/>
+        <a:font script="Knda" typeface="Tunga"/>
+        <a:font script="Guru" typeface="Raavi"/>
+        <a:font script="Cans" typeface="Euphemia"/>
+        <a:font script="Cher" typeface="Plantagenet Cherokee"/>
+        <a:font script="Yiii" typeface="Microsoft Yi Baiti"/>
+        <a:font script="Tibt" typeface="Microsoft Himalaya"/>
+        <a:font script="Thaa" typeface="MV Boli"/>
+        <a:font script="Deva" typeface="Mangal"/>
+        <a:font script="Telu" typeface="Gautami"/>
+        <a:font script="Taml" typeface="Latha"/>
+        <a:font script="Syrc" typeface="Estrangelo Edessa"/>
+        <a:font script="Orya" typeface="Kalinga"/>
+        <a:font script="Mlym" typeface="Kartika"/>
+        <a:font script="Laoo" typeface="DokChampa"/>
+        <a:font script="Sinh" typeface="Iskoola Pota"/>
+        <a:font script="Mong" typeface="Mongolian Baiti"/>
+        <a:font script="Viet" typeface="Times New Roman"/>
+        <a:font script="Uigh" typeface="Microsoft Uighur"/>
+      </a:minorFont>
+    </a:fontScheme>
+    <a:fmtScheme name="Wood Type">
+      <a:fillStyleLst>
+        <a:solidFill>
+          <a:schemeClr val="phClr"/>
+        </a:solidFill>
+        <a:blipFill rotWithShape="1">
+          <a:blip xmlns:r="http://schemas.openxmlformats.org/officeDocument/2006/relationships" r:embed="rId1">
+            <a:duotone>
+              <a:schemeClr val="phClr">
+                <a:tint val="70000"/>
+                <a:shade val="63000"/>
+              </a:schemeClr>
+              <a:schemeClr val="phClr">
+                <a:tint val="10000"/>
+                <a:satMod val="150000"/>
+              </a:schemeClr>
+            </a:duotone>
+          </a:blip>
+          <a:tile tx="0" ty="0" sx="60000" sy="59000" flip="none" algn="tl"/>
+        </a:blipFill>
+        <a:blipFill rotWithShape="1">
+          <a:blip xmlns:r="http://schemas.openxmlformats.org/officeDocument/2006/relationships" r:embed="rId1">
+            <a:duotone>
+              <a:schemeClr val="phClr">
+                <a:shade val="36000"/>
+                <a:satMod val="120000"/>
+              </a:schemeClr>
+              <a:schemeClr val="phClr">
+                <a:tint val="40000"/>
+              </a:schemeClr>
+            </a:duotone>
+          </a:blip>
+          <a:tile tx="0" ty="0" sx="60000" sy="59000" flip="none" algn="tl"/>
+        </a:blipFill>
+      </a:fillStyleLst>
+      <a:lnStyleLst>
+        <a:ln w="6350" cap="flat" cmpd="sng" algn="ctr">
+          <a:solidFill>
+            <a:schemeClr val="phClr"/>
+          </a:solidFill>
+          <a:prstDash val="solid"/>
+        </a:ln>
+        <a:ln w="12700" cap="flat" cmpd="sng" algn="ctr">
+          <a:solidFill>
+            <a:schemeClr val="phClr"/>
+          </a:solidFill>
+          <a:prstDash val="solid"/>
+        </a:ln>
+        <a:ln w="19050" cap="flat" cmpd="sng" algn="ctr">
+          <a:solidFill>
+            <a:schemeClr val="phClr"/>
+          </a:solidFill>
+          <a:prstDash val="solid"/>
+        </a:ln>
+      </a:lnStyleLst>
+      <a:effectStyleLst>
+        <a:effectStyle>
+          <a:effectLst/>
+        </a:effectStyle>
+        <a:effectStyle>
+          <a:effectLst>
+            <a:softEdge rad="12700"/>
+          </a:effectLst>
+        </a:effectStyle>
+        <a:effectStyle>
+          <a:effectLst>
+            <a:outerShdw blurRad="50800" dist="19050" dir="5400000" algn="tl" rotWithShape="0">
+              <a:srgbClr val="000000">
+                <a:alpha val="60000"/>
+              </a:srgbClr>
+            </a:outerShdw>
+            <a:softEdge rad="12700"/>
+          </a:effectLst>
+        </a:effectStyle>
+      </a:effectStyleLst>
+      <a:bgFillStyleLst>
+        <a:solidFill>
+          <a:schemeClr val="phClr"/>
+        </a:solidFill>
+        <a:solidFill>
+          <a:schemeClr val="phClr">
+            <a:shade val="97000"/>
+            <a:satMod val="150000"/>
+          </a:schemeClr>
+        </a:solidFill>
+        <a:blipFill rotWithShape="1">
+          <a:blip xmlns:r="http://schemas.openxmlformats.org/officeDocument/2006/relationships" r:embed="rId1">
+            <a:duotone>
+              <a:schemeClr val="phClr">
+                <a:tint val="75000"/>
+                <a:shade val="58000"/>
+                <a:satMod val="120000"/>
+              </a:schemeClr>
+              <a:schemeClr val="phClr">
+                <a:tint val="50000"/>
+                <a:shade val="96000"/>
+              </a:schemeClr>
+            </a:duotone>
+          </a:blip>
+          <a:tile tx="0" ty="0" sx="100000" sy="100000" flip="none" algn="tl"/>
+        </a:blipFill>
+      </a:bgFillStyleLst>
+    </a:fmtScheme>
+  </a:themeElements>
+  <a:objectDefaults/>
+  <a:extraClrSchemeLst/>
+  <a:extLst>
+    <a:ext uri="{05A4C25C-085E-4340-85A3-A5531E510DB2}">
+      <thm15:themeFamily xmlns:thm15="http://schemas.microsoft.com/office/thememl/2012/main" name="Wood Type" id="{7ACABC62-BF99-48CF-A9DC-4DB89C7B13DC}" vid="{142A1326-48AB-42A9-8428-CB14AA30176D}"/>
+    </a:ext>
+  </a:extLst>
+</a:theme>
+</file>
+
+<file path=ppt/theme/theme3.xml><?xml version="1.0" encoding="utf-8"?>
 <a:theme xmlns:a="http://schemas.openxmlformats.org/drawingml/2006/main" name="Office Theme">
   <a:themeElements>
     <a:clrScheme name="Office">

--- a/docs/Ajibade_DevOps_Project.pptx
+++ b/docs/Ajibade_DevOps_Project.pptx
@@ -1805,8 +1805,36 @@
           <a:lstStyle/>
           <a:p>
             <a:r>
+              <a:rPr lang="en-US" b="0" dirty="0" smtClean="0"/>
+              <a:t>Azure</a:t>
+            </a:r>
+            <a:r>
               <a:rPr lang="en-US" dirty="0" smtClean="0"/>
-              <a:t>Azure Container Registry (ACR) and </a:t>
+              <a:t> </a:t>
+            </a:r>
+            <a:r>
+              <a:rPr lang="en-US" b="0" dirty="0" smtClean="0"/>
+              <a:t>Container</a:t>
+            </a:r>
+            <a:r>
+              <a:rPr lang="en-US" dirty="0" smtClean="0"/>
+              <a:t> Registry (ACR) and </a:t>
+            </a:r>
+            <a:r>
+              <a:rPr lang="en-US" b="1" dirty="0" err="1" smtClean="0"/>
+              <a:t>Docker</a:t>
+            </a:r>
+            <a:r>
+              <a:rPr lang="en-US" dirty="0" smtClean="0"/>
+              <a:t> </a:t>
+            </a:r>
+            <a:r>
+              <a:rPr lang="en-US" b="1" dirty="0" smtClean="0"/>
+              <a:t>Hub</a:t>
+            </a:r>
+            <a:r>
+              <a:rPr lang="en-US" dirty="0" smtClean="0"/>
+              <a:t> are both container registries used to store, manage, and distribute container images. The key difference is that </a:t>
             </a:r>
             <a:r>
               <a:rPr lang="en-US" dirty="0" err="1" smtClean="0"/>
@@ -1814,18 +1842,34 @@
             </a:r>
             <a:r>
               <a:rPr lang="en-US" dirty="0" smtClean="0"/>
-              <a:t> Hub are both container registries used to store, manage, and distribute container images. The key difference is that </a:t>
-            </a:r>
-            <a:r>
-              <a:rPr lang="en-US" dirty="0" err="1" smtClean="0"/>
+              <a:t> Hub is a public-facing registry and central library, while ACR is a private, fully managed service that integrates deeply with the Microsoft Azure ecosystem. </a:t>
+            </a:r>
+          </a:p>
+          <a:p>
+            <a:r>
+              <a:rPr lang="en-US" b="1" dirty="0" err="1" smtClean="0"/>
               <a:t>Docker</a:t>
             </a:r>
             <a:r>
               <a:rPr lang="en-US" dirty="0" smtClean="0"/>
-              <a:t> Hub is a public-facing registry and central library, while ACR is a private, fully managed service that integrates deeply with the Microsoft Azure ecosystem. </a:t>
-            </a:r>
-          </a:p>
-          <a:p>
+              <a:t> </a:t>
+            </a:r>
+            <a:r>
+              <a:rPr lang="en-US" b="1" dirty="0" smtClean="0"/>
+              <a:t>Hub</a:t>
+            </a:r>
+            <a:r>
+              <a:rPr lang="en-US" dirty="0" smtClean="0"/>
+              <a:t> acts as the central repository where </a:t>
+            </a:r>
+            <a:r>
+              <a:rPr lang="en-US" b="1" dirty="0" err="1" smtClean="0"/>
+              <a:t>Kubernetes</a:t>
+            </a:r>
+            <a:r>
+              <a:rPr lang="en-US" dirty="0" smtClean="0"/>
+              <a:t> pulls the container images needed to deploy and manage applications.</a:t>
+            </a:r>
             <a:endParaRPr lang="en-US" dirty="0" smtClean="0"/>
           </a:p>
         </p:txBody>
@@ -1912,6 +1956,336 @@
           <a:p>
             <a:r>
               <a:rPr lang="en-US" dirty="0" smtClean="0"/>
+              <a:t>How the Workflow Operates</a:t>
+            </a:r>
+          </a:p>
+          <a:p>
+            <a:pPr marL="0" indent="0">
+              <a:buFont typeface="Arial" panose="020B0604020202020204" pitchFamily="34" charset="0"/>
+              <a:buNone/>
+            </a:pPr>
+            <a:r>
+              <a:rPr lang="en-US" dirty="0" smtClean="0"/>
+              <a:t>The interaction between </a:t>
+            </a:r>
+            <a:r>
+              <a:rPr lang="en-US" dirty="0" err="1" smtClean="0"/>
+              <a:t>Docker</a:t>
+            </a:r>
+            <a:r>
+              <a:rPr lang="en-US" dirty="0" smtClean="0"/>
+              <a:t> Hub and </a:t>
+            </a:r>
+            <a:r>
+              <a:rPr lang="en-US" dirty="0" err="1" smtClean="0"/>
+              <a:t>Kubernetes</a:t>
+            </a:r>
+            <a:r>
+              <a:rPr lang="en-US" dirty="0" smtClean="0"/>
+              <a:t> is typically part of a larger, automated workflow: </a:t>
+            </a:r>
+          </a:p>
+          <a:p>
+            <a:pPr marL="171450" indent="-171450">
+              <a:buFont typeface="Arial" panose="020B0604020202020204" pitchFamily="34" charset="0"/>
+              <a:buChar char="•"/>
+            </a:pPr>
+            <a:r>
+              <a:rPr lang="en-US" b="1" dirty="0" smtClean="0"/>
+              <a:t>Image Creation: </a:t>
+            </a:r>
+            <a:r>
+              <a:rPr lang="en-US" dirty="0" smtClean="0"/>
+              <a:t>Developers use </a:t>
+            </a:r>
+            <a:r>
+              <a:rPr lang="en-US" dirty="0" err="1" smtClean="0"/>
+              <a:t>Docker</a:t>
+            </a:r>
+            <a:r>
+              <a:rPr lang="en-US" dirty="0" smtClean="0"/>
+              <a:t> to define application requirements in a </a:t>
+            </a:r>
+            <a:r>
+              <a:rPr lang="en-US" dirty="0" err="1" smtClean="0"/>
+              <a:t>Dockerfile</a:t>
+            </a:r>
+            <a:r>
+              <a:rPr lang="en-US" dirty="0" smtClean="0"/>
+              <a:t> and build an image locally.</a:t>
+            </a:r>
+          </a:p>
+          <a:p>
+            <a:pPr marL="171450" indent="-171450">
+              <a:buFont typeface="Arial" panose="020B0604020202020204" pitchFamily="34" charset="0"/>
+              <a:buChar char="•"/>
+            </a:pPr>
+            <a:r>
+              <a:rPr lang="en-US" b="1" dirty="0" smtClean="0"/>
+              <a:t>Image Storage (Push): </a:t>
+            </a:r>
+            <a:r>
+              <a:rPr lang="en-US" dirty="0" smtClean="0"/>
+              <a:t>The resulting </a:t>
+            </a:r>
+            <a:r>
+              <a:rPr lang="en-US" dirty="0" err="1" smtClean="0"/>
+              <a:t>Docker</a:t>
+            </a:r>
+            <a:r>
+              <a:rPr lang="en-US" dirty="0" smtClean="0"/>
+              <a:t> image, which bundles the application and all its dependencies, is pushed (uploaded) to a repository on </a:t>
+            </a:r>
+            <a:r>
+              <a:rPr lang="en-US" dirty="0" err="1" smtClean="0"/>
+              <a:t>Docker</a:t>
+            </a:r>
+            <a:r>
+              <a:rPr lang="en-US" dirty="0" smtClean="0"/>
+              <a:t> Hub. Repositories can be public or private.</a:t>
+            </a:r>
+          </a:p>
+          <a:p>
+            <a:pPr marL="171450" indent="-171450">
+              <a:buFont typeface="Arial" panose="020B0604020202020204" pitchFamily="34" charset="0"/>
+              <a:buChar char="•"/>
+            </a:pPr>
+            <a:r>
+              <a:rPr lang="en-US" b="1" dirty="0" smtClean="0"/>
+              <a:t>Deployment Definition: </a:t>
+            </a:r>
+            <a:r>
+              <a:rPr lang="en-US" dirty="0" smtClean="0"/>
+              <a:t>A </a:t>
+            </a:r>
+            <a:r>
+              <a:rPr lang="en-US" dirty="0" err="1" smtClean="0"/>
+              <a:t>Kubernetes</a:t>
+            </a:r>
+            <a:r>
+              <a:rPr lang="en-US" dirty="0" smtClean="0"/>
+              <a:t> manifest file (usually YAML format) is created. This file specifies which container image to use (e.g., </a:t>
+            </a:r>
+            <a:r>
+              <a:rPr lang="en-US" dirty="0" err="1" smtClean="0"/>
+              <a:t>myusername</a:t>
+            </a:r>
+            <a:r>
+              <a:rPr lang="en-US" dirty="0" smtClean="0"/>
+              <a:t>/</a:t>
+            </a:r>
+            <a:r>
+              <a:rPr lang="en-US" dirty="0" err="1" smtClean="0"/>
+              <a:t>my-app:latest</a:t>
+            </a:r>
+            <a:r>
+              <a:rPr lang="en-US" dirty="0" smtClean="0"/>
+              <a:t>) and other deployment parameters, such as the desired number of replicas, scaling rules, and networking information.</a:t>
+            </a:r>
+          </a:p>
+          <a:p>
+            <a:pPr marL="171450" indent="-171450">
+              <a:buFont typeface="Arial" panose="020B0604020202020204" pitchFamily="34" charset="0"/>
+              <a:buChar char="•"/>
+            </a:pPr>
+            <a:r>
+              <a:rPr lang="en-US" b="1" dirty="0" smtClean="0"/>
+              <a:t>Orchestration (Pull): </a:t>
+            </a:r>
+            <a:r>
+              <a:rPr lang="en-US" dirty="0" smtClean="0"/>
+              <a:t>When a user or system applies the </a:t>
+            </a:r>
+            <a:r>
+              <a:rPr lang="en-US" dirty="0" err="1" smtClean="0"/>
+              <a:t>Kubernetes</a:t>
+            </a:r>
+            <a:r>
+              <a:rPr lang="en-US" dirty="0" smtClean="0"/>
+              <a:t> manifest to a cluster using a command like </a:t>
+            </a:r>
+            <a:r>
+              <a:rPr lang="en-US" dirty="0" err="1" smtClean="0"/>
+              <a:t>kubectl</a:t>
+            </a:r>
+            <a:r>
+              <a:rPr lang="en-US" dirty="0" smtClean="0"/>
+              <a:t> apply -f </a:t>
+            </a:r>
+            <a:r>
+              <a:rPr lang="en-US" dirty="0" err="1" smtClean="0"/>
+              <a:t>filename.yaml</a:t>
+            </a:r>
+            <a:r>
+              <a:rPr lang="en-US" dirty="0" smtClean="0"/>
+              <a:t>, the </a:t>
+            </a:r>
+            <a:r>
+              <a:rPr lang="en-US" dirty="0" err="1" smtClean="0"/>
+              <a:t>Kubernetes</a:t>
+            </a:r>
+            <a:r>
+              <a:rPr lang="en-US" dirty="0" smtClean="0"/>
+              <a:t> control plane schedules the application's pods onto worker nodes. The nodes then automatically pull the specified image from </a:t>
+            </a:r>
+            <a:r>
+              <a:rPr lang="en-US" dirty="0" err="1" smtClean="0"/>
+              <a:t>Docker</a:t>
+            </a:r>
+            <a:r>
+              <a:rPr lang="en-US" dirty="0" smtClean="0"/>
+              <a:t> Hub (or another configured registry) to start the containers.</a:t>
+            </a:r>
+          </a:p>
+          <a:p>
+            <a:pPr marL="171450" indent="-171450">
+              <a:buFont typeface="Arial" panose="020B0604020202020204" pitchFamily="34" charset="0"/>
+              <a:buChar char="•"/>
+            </a:pPr>
+            <a:r>
+              <a:rPr lang="en-US" b="1" dirty="0" smtClean="0"/>
+              <a:t>Runtime Management: </a:t>
+            </a:r>
+            <a:r>
+              <a:rPr lang="en-US" dirty="0" smtClean="0"/>
+              <a:t>Once the images are pulled and containers are running, </a:t>
+            </a:r>
+            <a:r>
+              <a:rPr lang="en-US" dirty="0" err="1" smtClean="0"/>
+              <a:t>Kubernetes</a:t>
+            </a:r>
+            <a:r>
+              <a:rPr lang="en-US" dirty="0" smtClean="0"/>
+              <a:t> takes over management tasks such as:</a:t>
+            </a:r>
+          </a:p>
+          <a:p>
+            <a:pPr marL="628650" lvl="1" indent="-171450">
+              <a:buFont typeface="Arial" panose="020B0604020202020204" pitchFamily="34" charset="0"/>
+              <a:buChar char="•"/>
+            </a:pPr>
+            <a:r>
+              <a:rPr lang="en-US" b="1" dirty="0" smtClean="0"/>
+              <a:t>Scaling: </a:t>
+            </a:r>
+            <a:r>
+              <a:rPr lang="en-US" dirty="0" smtClean="0"/>
+              <a:t>Ensuring the correct number of container instances (pods) are running based on demand.</a:t>
+            </a:r>
+          </a:p>
+          <a:p>
+            <a:pPr marL="628650" lvl="1" indent="-171450">
+              <a:buFont typeface="Arial" panose="020B0604020202020204" pitchFamily="34" charset="0"/>
+              <a:buChar char="•"/>
+            </a:pPr>
+            <a:r>
+              <a:rPr lang="en-US" b="1" dirty="0" smtClean="0"/>
+              <a:t>Self-healing: </a:t>
+            </a:r>
+            <a:r>
+              <a:rPr lang="en-US" dirty="0" smtClean="0"/>
+              <a:t>Automatically restarting containers that fail or go down.</a:t>
+            </a:r>
+          </a:p>
+          <a:p>
+            <a:pPr marL="628650" lvl="1" indent="-171450">
+              <a:buFont typeface="Arial" panose="020B0604020202020204" pitchFamily="34" charset="0"/>
+              <a:buChar char="•"/>
+            </a:pPr>
+            <a:r>
+              <a:rPr lang="en-US" b="1" dirty="0" smtClean="0"/>
+              <a:t>Load Balancing: </a:t>
+            </a:r>
+            <a:r>
+              <a:rPr lang="en-US" dirty="0" smtClean="0"/>
+              <a:t>Distributing incoming traffic among healthy running containers. </a:t>
+            </a:r>
+            <a:endParaRPr lang="en-US" dirty="0"/>
+          </a:p>
+        </p:txBody>
+      </p:sp>
+      <p:sp>
+        <p:nvSpPr>
+          <p:cNvPr id="4" name="Slide Number Placeholder 3"/>
+          <p:cNvSpPr>
+            <a:spLocks noGrp="1"/>
+          </p:cNvSpPr>
+          <p:nvPr>
+            <p:ph type="sldNum" sz="quarter" idx="10"/>
+          </p:nvPr>
+        </p:nvSpPr>
+        <p:spPr/>
+        <p:txBody>
+          <a:bodyPr/>
+          <a:lstStyle/>
+          <a:p>
+            <a:fld id="{1E6958E2-2B4A-4C25-BF05-A265C473CB9D}" type="slidenum">
+              <a:rPr lang="en-US" smtClean="0"/>
+              <a:t>10</a:t>
+            </a:fld>
+            <a:endParaRPr lang="en-US"/>
+          </a:p>
+        </p:txBody>
+      </p:sp>
+    </p:spTree>
+    <p:extLst>
+      <p:ext uri="{BB962C8B-B14F-4D97-AF65-F5344CB8AC3E}">
+        <p14:creationId xmlns:p14="http://schemas.microsoft.com/office/powerpoint/2010/main" val="2324863891"/>
+      </p:ext>
+    </p:extLst>
+  </p:cSld>
+  <p:clrMapOvr>
+    <a:masterClrMapping/>
+  </p:clrMapOvr>
+</p:notes>
+</file>
+
+<file path=ppt/notesSlides/notesSlide6.xml><?xml version="1.0" encoding="utf-8"?>
+<p:notes xmlns:a="http://schemas.openxmlformats.org/drawingml/2006/main" xmlns:r="http://schemas.openxmlformats.org/officeDocument/2006/relationships" xmlns:p="http://schemas.openxmlformats.org/presentationml/2006/main">
+  <p:cSld>
+    <p:spTree>
+      <p:nvGrpSpPr>
+        <p:cNvPr id="1" name=""/>
+        <p:cNvGrpSpPr/>
+        <p:nvPr/>
+      </p:nvGrpSpPr>
+      <p:grpSpPr>
+        <a:xfrm>
+          <a:off x="0" y="0"/>
+          <a:ext cx="0" cy="0"/>
+          <a:chOff x="0" y="0"/>
+          <a:chExt cx="0" cy="0"/>
+        </a:xfrm>
+      </p:grpSpPr>
+      <p:sp>
+        <p:nvSpPr>
+          <p:cNvPr id="2" name="Slide Image Placeholder 1"/>
+          <p:cNvSpPr>
+            <a:spLocks noGrp="1" noRot="1" noChangeAspect="1"/>
+          </p:cNvSpPr>
+          <p:nvPr>
+            <p:ph type="sldImg"/>
+          </p:nvPr>
+        </p:nvSpPr>
+        <p:spPr/>
+      </p:sp>
+      <p:sp>
+        <p:nvSpPr>
+          <p:cNvPr id="3" name="Notes Placeholder 2"/>
+          <p:cNvSpPr>
+            <a:spLocks noGrp="1"/>
+          </p:cNvSpPr>
+          <p:nvPr>
+            <p:ph type="body" idx="1"/>
+          </p:nvPr>
+        </p:nvSpPr>
+        <p:spPr/>
+        <p:txBody>
+          <a:bodyPr/>
+          <a:lstStyle/>
+          <a:p>
+            <a:r>
+              <a:rPr lang="en-US" dirty="0" smtClean="0"/>
               <a:t>Argo CD is an open-source, declarative </a:t>
             </a:r>
             <a:r>
@@ -1972,6 +2346,97 @@
               </a:rPr>
               <a:t> repository as the single source of truth for the desired application state. </a:t>
             </a:r>
+            <a:endParaRPr lang="en-US" sz="1200" b="0" i="0" kern="1200" dirty="0" smtClean="0">
+              <a:solidFill>
+                <a:schemeClr val="tx1"/>
+              </a:solidFill>
+              <a:effectLst/>
+              <a:latin typeface="+mn-lt"/>
+              <a:ea typeface="+mn-ea"/>
+              <a:cs typeface="+mn-cs"/>
+            </a:endParaRPr>
+          </a:p>
+          <a:p>
+            <a:r>
+              <a:rPr lang="en-US" sz="1200" b="1" i="0" kern="1200" dirty="0" err="1" smtClean="0">
+                <a:solidFill>
+                  <a:schemeClr val="tx1"/>
+                </a:solidFill>
+                <a:effectLst/>
+                <a:latin typeface="+mn-lt"/>
+                <a:ea typeface="+mn-ea"/>
+                <a:cs typeface="+mn-cs"/>
+              </a:rPr>
+              <a:t>Kubernetes</a:t>
+            </a:r>
+            <a:r>
+              <a:rPr lang="en-US" sz="1200" b="0" i="0" kern="1200" dirty="0" smtClean="0">
+                <a:solidFill>
+                  <a:schemeClr val="tx1"/>
+                </a:solidFill>
+                <a:effectLst/>
+                <a:latin typeface="+mn-lt"/>
+                <a:ea typeface="+mn-ea"/>
+                <a:cs typeface="+mn-cs"/>
+              </a:rPr>
+              <a:t> itself is the orchestration system that automates the deployment, scaling, and management of those images as containers across a cluster. </a:t>
+            </a:r>
+            <a:r>
+              <a:rPr lang="en-US" dirty="0" smtClean="0"/>
+              <a:t>Once the images are pulled and containers are running, </a:t>
+            </a:r>
+            <a:r>
+              <a:rPr lang="en-US" dirty="0" err="1" smtClean="0"/>
+              <a:t>Kubernetes</a:t>
+            </a:r>
+            <a:r>
+              <a:rPr lang="en-US" dirty="0" smtClean="0"/>
+              <a:t> takes over management tasks such as:</a:t>
+            </a:r>
+          </a:p>
+          <a:p>
+            <a:pPr marL="628650" lvl="1" indent="-171450">
+              <a:buFont typeface="Arial" panose="020B0604020202020204" pitchFamily="34" charset="0"/>
+              <a:buChar char="•"/>
+            </a:pPr>
+            <a:r>
+              <a:rPr lang="en-US" b="1" dirty="0" smtClean="0"/>
+              <a:t>Scaling</a:t>
+            </a:r>
+            <a:r>
+              <a:rPr lang="en-US" dirty="0" smtClean="0"/>
+              <a:t>: Ensuring the correct number of container instances (pods) are running based on demand.</a:t>
+            </a:r>
+          </a:p>
+          <a:p>
+            <a:pPr marL="628650" lvl="1" indent="-171450">
+              <a:buFont typeface="Arial" panose="020B0604020202020204" pitchFamily="34" charset="0"/>
+              <a:buChar char="•"/>
+            </a:pPr>
+            <a:r>
+              <a:rPr lang="en-US" b="1" dirty="0" smtClean="0"/>
+              <a:t>Self-healing</a:t>
+            </a:r>
+            <a:r>
+              <a:rPr lang="en-US" dirty="0" smtClean="0"/>
+              <a:t>: Automatically restarting containers that fail or go down.</a:t>
+            </a:r>
+          </a:p>
+          <a:p>
+            <a:pPr marL="628650" lvl="1" indent="-171450">
+              <a:buFont typeface="Arial" panose="020B0604020202020204" pitchFamily="34" charset="0"/>
+              <a:buChar char="•"/>
+            </a:pPr>
+            <a:r>
+              <a:rPr lang="en-US" b="1" dirty="0" smtClean="0"/>
+              <a:t>Load Balancing</a:t>
+            </a:r>
+            <a:r>
+              <a:rPr lang="en-US" dirty="0" smtClean="0"/>
+              <a:t>: Distributing incoming traffic among healthy running containers. </a:t>
+            </a:r>
+          </a:p>
+          <a:p>
             <a:endParaRPr lang="en-US" dirty="0"/>
           </a:p>
         </p:txBody>
@@ -9534,7 +9999,37 @@
                   </a:schemeClr>
                 </a:solidFill>
               </a:rPr>
-              <a:t>AKS • Argo CD • Prometheus • </a:t>
+              <a:t>AKS • </a:t>
+            </a:r>
+            <a:r>
+              <a:rPr i="1" dirty="0" err="1" smtClean="0">
+                <a:solidFill>
+                  <a:schemeClr val="accent3">
+                    <a:lumMod val="75000"/>
+                  </a:schemeClr>
+                </a:solidFill>
+              </a:rPr>
+              <a:t>ArgoCD</a:t>
+            </a:r>
+            <a:r>
+              <a:rPr i="1" dirty="0" smtClean="0">
+                <a:solidFill>
+                  <a:schemeClr val="accent3">
+                    <a:lumMod val="75000"/>
+                  </a:schemeClr>
+                </a:solidFill>
+              </a:rPr>
+              <a:t> </a:t>
+            </a:r>
+            <a:r>
+              <a:rPr i="1" dirty="0" smtClean="0">
+                <a:solidFill>
+                  <a:schemeClr val="accent3">
+                    <a:lumMod val="75000"/>
+                  </a:schemeClr>
+                </a:solidFill>
+              </a:rPr>
+              <a:t>• Prometheus • </a:t>
             </a:r>
             <a:r>
               <a:rPr i="1" dirty="0" err="1" smtClean="0">

--- a/docs/Ajibade_DevOps_Project.pptx
+++ b/docs/Ajibade_DevOps_Project.pptx
@@ -1870,7 +1870,6 @@
               <a:rPr lang="en-US" dirty="0" smtClean="0"/>
               <a:t> pulls the container images needed to deploy and manage applications.</a:t>
             </a:r>
-            <a:endParaRPr lang="en-US" dirty="0" smtClean="0"/>
           </a:p>
         </p:txBody>
       </p:sp>
@@ -2346,15 +2345,6 @@
               </a:rPr>
               <a:t> repository as the single source of truth for the desired application state. </a:t>
             </a:r>
-            <a:endParaRPr lang="en-US" sz="1200" b="0" i="0" kern="1200" dirty="0" smtClean="0">
-              <a:solidFill>
-                <a:schemeClr val="tx1"/>
-              </a:solidFill>
-              <a:effectLst/>
-              <a:latin typeface="+mn-lt"/>
-              <a:ea typeface="+mn-ea"/>
-              <a:cs typeface="+mn-cs"/>
-            </a:endParaRPr>
           </a:p>
           <a:p>
             <a:r>
@@ -10019,17 +10009,7 @@
                   </a:schemeClr>
                 </a:solidFill>
               </a:rPr>
-              <a:t> </a:t>
-            </a:r>
-            <a:r>
-              <a:rPr i="1" dirty="0" smtClean="0">
-                <a:solidFill>
-                  <a:schemeClr val="accent3">
-                    <a:lumMod val="75000"/>
-                  </a:schemeClr>
-                </a:solidFill>
-              </a:rPr>
-              <a:t>• Prometheus • </a:t>
+              <a:t> • Prometheus • </a:t>
             </a:r>
             <a:r>
               <a:rPr i="1" dirty="0" err="1" smtClean="0">
@@ -10073,11 +10053,7 @@
             </a:pPr>
             <a:r>
               <a:rPr lang="en-US" dirty="0" smtClean="0"/>
-              <a:t> at</a:t>
-            </a:r>
-            <a:r>
-              <a:rPr lang="en-US" dirty="0" smtClean="0"/>
-              <a:t> </a:t>
+              <a:t> at </a:t>
             </a:r>
             <a:r>
               <a:rPr lang="en-US" b="1" dirty="0" smtClean="0"/>
@@ -10099,11 +10075,7 @@
             </a:r>
             <a:r>
               <a:rPr lang="en-US" sz="4800" b="1" dirty="0" smtClean="0"/>
-              <a:t>AJIBADE </a:t>
-            </a:r>
-            <a:r>
-              <a:rPr lang="en-US" sz="4800" b="1" dirty="0" smtClean="0"/>
-              <a:t>APATA</a:t>
+              <a:t>AJIBADE APATA</a:t>
             </a:r>
             <a:endParaRPr lang="en-US" sz="4800" b="1" dirty="0"/>
           </a:p>
@@ -10155,13 +10127,13 @@
   <p:clrMapOvr>
     <a:masterClrMapping/>
   </p:clrMapOvr>
-  <mc:AlternateContent xmlns:mc="http://schemas.openxmlformats.org/markup-compatibility/2006">
-    <mc:Choice xmlns:p14="http://schemas.microsoft.com/office/powerpoint/2010/main" Requires="p14">
+  <mc:AlternateContent xmlns:mc="http://schemas.openxmlformats.org/markup-compatibility/2006" xmlns:p14="http://schemas.microsoft.com/office/powerpoint/2010/main">
+    <mc:Choice Requires="p14">
       <p:transition spd="slow">
         <p14:reveal/>
       </p:transition>
     </mc:Choice>
-    <mc:Fallback>
+    <mc:Fallback xmlns="">
       <p:transition spd="slow">
         <p:fade/>
       </p:transition>

--- a/docs/Ajibade_DevOps_Project.pptx
+++ b/docs/Ajibade_DevOps_Project.pptx
@@ -9820,7 +9820,7 @@
               <a:t> Pipeline on Azure using </a:t>
             </a:r>
             <a:r>
-              <a:rPr b="1" dirty="0" err="1"/>
+              <a:rPr b="1" dirty="0" err="1" smtClean="0"/>
               <a:t>GitOps</a:t>
             </a:r>
             <a:endParaRPr b="1" dirty="0"/>
@@ -10075,7 +10075,11 @@
             </a:r>
             <a:r>
               <a:rPr lang="en-US" sz="4800" b="1" dirty="0" smtClean="0"/>
-              <a:t>AJIBADE APATA</a:t>
+              <a:t>AJIBADE </a:t>
+            </a:r>
+            <a:r>
+              <a:rPr lang="en-US" sz="4800" b="1" dirty="0" smtClean="0"/>
+              <a:t>APATA</a:t>
             </a:r>
             <a:endParaRPr lang="en-US" sz="4800" b="1" dirty="0"/>
           </a:p>
